--- a/pptx/Module19_Documentation_technique.pptx
+++ b/pptx/Module19_Documentation_technique.pptx
@@ -13,9 +13,10 @@
     <p:sldId id="261" r:id="rId7"/>
     <p:sldId id="262" r:id="rId8"/>
     <p:sldId id="263" r:id="rId9"/>
+    <p:sldId id="264" r:id="rId10"/>
   </p:sldIdLst>
   <p:notesMasterIdLst>
-    <p:notesMasterId r:id="rId10"/>
+    <p:notesMasterId r:id="rId11"/>
   </p:notesMasterIdLst>
   <p:sldSz cx="9144000" cy="5143500"/>
   <p:notesSz cx="5143500" cy="9144000"/>
@@ -597,7 +598,7 @@
           <a:p>
             <a:r>
               <a:rPr lang="en-US" dirty="0"/>
-              <a:t/>
+              <a:t>Insister sur la distinction technique vs utilisateur. Deux audiences, deux documents.</a:t>
             </a:r>
             <a:endParaRPr lang="en-US" dirty="0"/>
           </a:p>
@@ -685,7 +686,7 @@
           <a:p>
             <a:r>
               <a:rPr lang="en-US" dirty="0"/>
-              <a:t/>
+              <a:t>Commencer par le niveau 0 au tableau, puis décomposer un processus en niveau 1.</a:t>
             </a:r>
             <a:endParaRPr lang="en-US" dirty="0"/>
           </a:p>
@@ -773,7 +774,7 @@
           <a:p>
             <a:r>
               <a:rPr lang="en-US" dirty="0"/>
-              <a:t/>
+              <a:t>Faire dessiner les 4 symboles par les étudiants. Puis les assembler.</a:t>
             </a:r>
             <a:endParaRPr lang="en-US" dirty="0"/>
           </a:p>
@@ -861,7 +862,7 @@
           <a:p>
             <a:r>
               <a:rPr lang="en-US" dirty="0"/>
-              <a:t/>
+              <a:t>Le flowchart montre la LOGIQUE, le DFD montre les FLUX DE DONNÉES. Complémentaires.</a:t>
             </a:r>
             <a:endParaRPr lang="en-US" dirty="0"/>
           </a:p>
@@ -949,7 +950,7 @@
           <a:p>
             <a:r>
               <a:rPr lang="en-US" dirty="0"/>
-              <a:t/>
+              <a:t>Le dictionnaire technique est le document de référence pour la maintenance.</a:t>
             </a:r>
             <a:endParaRPr lang="en-US" dirty="0"/>
           </a:p>
@@ -1037,7 +1038,7 @@
           <a:p>
             <a:r>
               <a:rPr lang="en-US" dirty="0"/>
-              <a:t/>
+              <a:t>Les DFD et flowcharts sont requis pour M5 (doc complète).</a:t>
             </a:r>
             <a:endParaRPr lang="en-US" dirty="0"/>
           </a:p>
@@ -1149,6 +1150,94 @@
             <a:fld id="{F7021451-1387-4CA6-816F-3879F97B5CBC}" type="slidenum">
               <a:rPr lang="en-US"/>
               <a:t>8</a:t>
+            </a:fld>
+            <a:endParaRPr lang="en-US"/>
+          </a:p>
+        </p:txBody>
+      </p:sp>
+    </p:spTree>
+    <p:extLst>
+      <p:ext uri="{BB962C8B-B14F-4D97-AF65-F5344CB8AC3E}">
+        <p14:creationId xmlns:p14="http://schemas.microsoft.com/office/powerpoint/2010/main" val="1024086991"/>
+      </p:ext>
+    </p:extLst>
+  </p:cSld>
+  <p:clrMapOvr>
+    <a:masterClrMapping/>
+  </p:clrMapOvr>
+</p:notes>
+</file>
+
+<file path=ppt/notesSlides/notesSlide9.xml><?xml version="1.0" encoding="utf-8"?>
+<p:notes xmlns:a="http://schemas.openxmlformats.org/drawingml/2006/main" xmlns:r="http://schemas.openxmlformats.org/officeDocument/2006/relationships" xmlns:p="http://schemas.openxmlformats.org/presentationml/2006/main">
+  <p:cSld>
+    <p:spTree>
+      <p:nvGrpSpPr>
+        <p:cNvPr id="1" name=""/>
+        <p:cNvGrpSpPr/>
+        <p:nvPr/>
+      </p:nvGrpSpPr>
+      <p:grpSpPr>
+        <a:xfrm>
+          <a:off x="0" y="0"/>
+          <a:ext cx="0" cy="0"/>
+          <a:chOff x="0" y="0"/>
+          <a:chExt cx="0" cy="0"/>
+        </a:xfrm>
+      </p:grpSpPr>
+      <p:sp>
+        <p:nvSpPr>
+          <p:cNvPr id="2" name="Slide Image Placeholder 1"/>
+          <p:cNvSpPr>
+            <a:spLocks noGrp="1" noRot="1" noChangeAspect="1"/>
+          </p:cNvSpPr>
+          <p:nvPr>
+            <p:ph type="sldImg"/>
+          </p:nvPr>
+        </p:nvSpPr>
+        <p:spPr/>
+      </p:sp>
+      <p:sp>
+        <p:nvSpPr>
+          <p:cNvPr id="3" name="Notes Placeholder 2"/>
+          <p:cNvSpPr>
+            <a:spLocks noGrp="1"/>
+          </p:cNvSpPr>
+          <p:nvPr>
+            <p:ph type="body" idx="1"/>
+          </p:nvPr>
+        </p:nvSpPr>
+        <p:spPr/>
+        <p:txBody>
+          <a:bodyPr/>
+          <a:lstStyle/>
+          <a:p>
+            <a:r>
+              <a:rPr lang="en-US" dirty="0"/>
+              <a:t/>
+            </a:r>
+            <a:endParaRPr lang="en-US" dirty="0"/>
+          </a:p>
+        </p:txBody>
+      </p:sp>
+      <p:sp>
+        <p:nvSpPr>
+          <p:cNvPr id="4" name="Slide Number Placeholder 3"/>
+          <p:cNvSpPr>
+            <a:spLocks noGrp="1"/>
+          </p:cNvSpPr>
+          <p:nvPr>
+            <p:ph type="sldNum" sz="quarter" idx="10"/>
+          </p:nvPr>
+        </p:nvSpPr>
+        <p:spPr/>
+        <p:txBody>
+          <a:bodyPr/>
+          <a:lstStyle/>
+          <a:p>
+            <a:fld id="{F7021451-1387-4CA6-816F-3879F97B5CBC}" type="slidenum">
+              <a:rPr lang="en-US"/>
+              <a:t>9</a:t>
             </a:fld>
             <a:endParaRPr lang="en-US"/>
           </a:p>
@@ -1534,7 +1623,7 @@
         </p:blipFill>
         <p:spPr>
           <a:xfrm>
-            <a:off x="3931920" y="457200"/>
+            <a:off x="3931920" y="365760"/>
             <a:ext cx="1280160" cy="1280160"/>
           </a:xfrm>
           <a:prstGeom prst="rect">
@@ -1550,7 +1639,7 @@
         </p:nvSpPr>
         <p:spPr>
           <a:xfrm>
-            <a:off x="457200" y="1828800"/>
+            <a:off x="457200" y="1737360"/>
             <a:ext cx="8229600" cy="457200"/>
           </a:xfrm>
           <a:prstGeom prst="rect">
@@ -1589,8 +1678,8 @@
         </p:nvSpPr>
         <p:spPr>
           <a:xfrm>
-            <a:off x="457200" y="2286000"/>
-            <a:ext cx="8229600" cy="822960"/>
+            <a:off x="274320" y="2194560"/>
+            <a:ext cx="8595360" cy="822960"/>
           </a:xfrm>
           <a:prstGeom prst="rect">
             <a:avLst/>
@@ -1606,7 +1695,7 @@
               <a:buNone/>
             </a:pPr>
             <a:r>
-              <a:rPr lang="en-US" sz="3400" b="1" dirty="0">
+              <a:rPr lang="en-US" sz="3200" b="1" dirty="0">
                 <a:solidFill>
                   <a:srgbClr val="FFFFFF"/>
                 </a:solidFill>
@@ -1616,7 +1705,7 @@
               </a:rPr>
               <a:t>Documentation technique</a:t>
             </a:r>
-            <a:endParaRPr lang="en-US" sz="3400" dirty="0"/>
+            <a:endParaRPr lang="en-US" sz="3200" dirty="0"/>
           </a:p>
         </p:txBody>
       </p:sp>
@@ -1628,7 +1717,7 @@
         </p:nvSpPr>
         <p:spPr>
           <a:xfrm>
-            <a:off x="457200" y="3108960"/>
+            <a:off x="457200" y="3017520"/>
             <a:ext cx="8229600" cy="457200"/>
           </a:xfrm>
           <a:prstGeom prst="rect">
@@ -1645,7 +1734,7 @@
               <a:buNone/>
             </a:pPr>
             <a:r>
-              <a:rPr lang="en-US" sz="1600" dirty="0">
+              <a:rPr lang="en-US" sz="1500" dirty="0">
                 <a:solidFill>
                   <a:srgbClr val="CCCCCC"/>
                 </a:solidFill>
@@ -1653,9 +1742,9 @@
                 <a:ea typeface="Calibri" pitchFamily="34" charset="-122"/>
                 <a:cs typeface="Calibri" pitchFamily="34" charset="-120"/>
               </a:rPr>
-              <a:t>DFD niveaux 0-2, flowcharts, dictionnaire</a:t>
-            </a:r>
-            <a:endParaRPr lang="en-US" sz="1600" dirty="0"/>
+              <a:t>DFD niveaux 0-2 · Flowcharts · Dictionnaire</a:t>
+            </a:r>
+            <a:endParaRPr lang="en-US" sz="1500" dirty="0"/>
           </a:p>
         </p:txBody>
       </p:sp>
@@ -1686,54 +1775,15 @@
             <a:r>
               <a:rPr lang="en-US" sz="1100" dirty="0">
                 <a:solidFill>
-                  <a:srgbClr val="AAAACC"/>
+                  <a:srgbClr val="AA99CC"/>
                 </a:solidFill>
                 <a:latin typeface="Calibri" pitchFamily="34" charset="0"/>
                 <a:ea typeface="Calibri" pitchFamily="34" charset="-122"/>
                 <a:cs typeface="Calibri" pitchFamily="34" charset="-120"/>
               </a:rPr>
-              <a:t>Unit 4 — Database Design &amp; Development | SwissSound Studios</a:t>
+              <a:t>SwissSound Studios | BTEC: P5 M5 | LO4</a:t>
             </a:r>
             <a:endParaRPr lang="en-US" sz="1100" dirty="0"/>
-          </a:p>
-        </p:txBody>
-      </p:sp>
-      <p:sp>
-        <p:nvSpPr>
-          <p:cNvPr id="8" name="Text 5"/>
-          <p:cNvSpPr/>
-          <p:nvPr/>
-        </p:nvSpPr>
-        <p:spPr>
-          <a:xfrm>
-            <a:off x="457200" y="4434840"/>
-            <a:ext cx="8229600" cy="274320"/>
-          </a:xfrm>
-          <a:prstGeom prst="rect">
-            <a:avLst/>
-          </a:prstGeom>
-          <a:noFill/>
-          <a:ln/>
-        </p:spPr>
-        <p:txBody>
-          <a:bodyPr wrap="square" lIns="0" tIns="0" rIns="0" bIns="0" rtlCol="0" anchor="ctr"/>
-          <a:lstStyle/>
-          <a:p>
-            <a:pPr algn="ctr" indent="0" marL="0">
-              <a:buNone/>
-            </a:pPr>
-            <a:r>
-              <a:rPr lang="en-US" sz="1000" dirty="0">
-                <a:solidFill>
-                  <a:srgbClr val="8888AA"/>
-                </a:solidFill>
-                <a:latin typeface="Calibri" pitchFamily="34" charset="0"/>
-                <a:ea typeface="Calibri" pitchFamily="34" charset="-122"/>
-                <a:cs typeface="Calibri" pitchFamily="34" charset="-120"/>
-              </a:rPr>
-              <a:t>BTEC : P5 M5 | LO4</a:t>
-            </a:r>
-            <a:endParaRPr lang="en-US" sz="1000" dirty="0"/>
           </a:p>
         </p:txBody>
       </p:sp>
@@ -1778,7 +1828,7 @@
         <p:spPr>
           <a:xfrm>
             <a:off x="0" y="0"/>
-            <a:ext cx="9144000" cy="73152"/>
+            <a:ext cx="9144000" cy="54864"/>
           </a:xfrm>
           <a:prstGeom prst="rect">
             <a:avLst/>
@@ -1797,8 +1847,8 @@
         </p:nvSpPr>
         <p:spPr>
           <a:xfrm>
-            <a:off x="457200" y="228600"/>
-            <a:ext cx="8229600" cy="640080"/>
+            <a:off x="457200" y="182880"/>
+            <a:ext cx="8229600" cy="594360"/>
           </a:xfrm>
           <a:prstGeom prst="rect">
             <a:avLst/>
@@ -1814,7 +1864,7 @@
               <a:buNone/>
             </a:pPr>
             <a:r>
-              <a:rPr lang="en-US" sz="2600" b="1" dirty="0">
+              <a:rPr lang="en-US" sz="2400" b="1" dirty="0">
                 <a:solidFill>
                   <a:srgbClr val="4A0072"/>
                 </a:solidFill>
@@ -1824,7 +1874,7 @@
               </a:rPr>
               <a:t>Documentation technique : pour qui ?</a:t>
             </a:r>
-            <a:endParaRPr lang="en-US" sz="2600" dirty="0"/>
+            <a:endParaRPr lang="en-US" sz="2400" dirty="0"/>
           </a:p>
         </p:txBody>
       </p:sp>
@@ -1836,8 +1886,8 @@
         </p:nvSpPr>
         <p:spPr>
           <a:xfrm>
-            <a:off x="457200" y="1051560"/>
-            <a:ext cx="8229600" cy="640080"/>
+            <a:off x="457200" y="914400"/>
+            <a:ext cx="8229600" cy="521208"/>
           </a:xfrm>
           <a:prstGeom prst="rect">
             <a:avLst/>
@@ -1863,8 +1913,8 @@
         </p:nvSpPr>
         <p:spPr>
           <a:xfrm>
-            <a:off x="457200" y="1051560"/>
-            <a:ext cx="54864" cy="640080"/>
+            <a:off x="457200" y="914400"/>
+            <a:ext cx="45720" cy="521208"/>
           </a:xfrm>
           <a:prstGeom prst="rect">
             <a:avLst/>
@@ -1883,8 +1933,8 @@
         </p:nvSpPr>
         <p:spPr>
           <a:xfrm>
-            <a:off x="731520" y="1051560"/>
-            <a:ext cx="7772400" cy="640080"/>
+            <a:off x="685800" y="914400"/>
+            <a:ext cx="7818120" cy="521208"/>
           </a:xfrm>
           <a:prstGeom prst="rect">
             <a:avLst/>
@@ -1900,7 +1950,7 @@
               <a:buNone/>
             </a:pPr>
             <a:r>
-              <a:rPr lang="en-US" sz="1300" dirty="0">
+              <a:rPr lang="en-US" sz="1200" dirty="0">
                 <a:solidFill>
                   <a:srgbClr val="1A1A2E"/>
                 </a:solidFill>
@@ -1910,7 +1960,7 @@
               </a:rPr>
               <a:t>Audience : développeurs, DBA, équipe de maintenance</a:t>
             </a:r>
-            <a:endParaRPr lang="en-US" sz="1300" dirty="0"/>
+            <a:endParaRPr lang="en-US" sz="1200" dirty="0"/>
           </a:p>
         </p:txBody>
       </p:sp>
@@ -1922,8 +1972,8 @@
         </p:nvSpPr>
         <p:spPr>
           <a:xfrm>
-            <a:off x="457200" y="1783080"/>
-            <a:ext cx="8229600" cy="640080"/>
+            <a:off x="457200" y="1463040"/>
+            <a:ext cx="8229600" cy="521208"/>
           </a:xfrm>
           <a:prstGeom prst="rect">
             <a:avLst/>
@@ -1949,8 +1999,8 @@
         </p:nvSpPr>
         <p:spPr>
           <a:xfrm>
-            <a:off x="457200" y="1783080"/>
-            <a:ext cx="54864" cy="640080"/>
+            <a:off x="457200" y="1463040"/>
+            <a:ext cx="45720" cy="521208"/>
           </a:xfrm>
           <a:prstGeom prst="rect">
             <a:avLst/>
@@ -1969,8 +2019,8 @@
         </p:nvSpPr>
         <p:spPr>
           <a:xfrm>
-            <a:off x="731520" y="1783080"/>
-            <a:ext cx="7772400" cy="640080"/>
+            <a:off x="685800" y="1463040"/>
+            <a:ext cx="7818120" cy="521208"/>
           </a:xfrm>
           <a:prstGeom prst="rect">
             <a:avLst/>
@@ -1986,7 +2036,7 @@
               <a:buNone/>
             </a:pPr>
             <a:r>
-              <a:rPr lang="en-US" sz="1300" dirty="0">
+              <a:rPr lang="en-US" sz="1200" dirty="0">
                 <a:solidFill>
                   <a:srgbClr val="1A1A2E"/>
                 </a:solidFill>
@@ -1994,9 +2044,9 @@
                 <a:ea typeface="Calibri" pitchFamily="34" charset="-122"/>
                 <a:cs typeface="Calibri" pitchFamily="34" charset="-120"/>
               </a:rPr>
-              <a:t>Contenu : architecture, DFD, flowcharts, dictionnaire technique</a:t>
-            </a:r>
-            <a:endParaRPr lang="en-US" sz="1300" dirty="0"/>
+              <a:t>But : permettre à quelqu'un d'AUTRE de comprendre le système</a:t>
+            </a:r>
+            <a:endParaRPr lang="en-US" sz="1200" dirty="0"/>
           </a:p>
         </p:txBody>
       </p:sp>
@@ -2008,8 +2058,8 @@
         </p:nvSpPr>
         <p:spPr>
           <a:xfrm>
-            <a:off x="457200" y="2514600"/>
-            <a:ext cx="8229600" cy="640080"/>
+            <a:off x="457200" y="2011680"/>
+            <a:ext cx="8229600" cy="521208"/>
           </a:xfrm>
           <a:prstGeom prst="rect">
             <a:avLst/>
@@ -2035,8 +2085,8 @@
         </p:nvSpPr>
         <p:spPr>
           <a:xfrm>
-            <a:off x="457200" y="2514600"/>
-            <a:ext cx="54864" cy="640080"/>
+            <a:off x="457200" y="2011680"/>
+            <a:ext cx="45720" cy="521208"/>
           </a:xfrm>
           <a:prstGeom prst="rect">
             <a:avLst/>
@@ -2055,8 +2105,8 @@
         </p:nvSpPr>
         <p:spPr>
           <a:xfrm>
-            <a:off x="731520" y="2514600"/>
-            <a:ext cx="7772400" cy="640080"/>
+            <a:off x="685800" y="2011680"/>
+            <a:ext cx="7818120" cy="521208"/>
           </a:xfrm>
           <a:prstGeom prst="rect">
             <a:avLst/>
@@ -2072,7 +2122,7 @@
               <a:buNone/>
             </a:pPr>
             <a:r>
-              <a:rPr lang="en-US" sz="1300" dirty="0">
+              <a:rPr lang="en-US" sz="1200" dirty="0">
                 <a:solidFill>
                   <a:srgbClr val="1A1A2E"/>
                 </a:solidFill>
@@ -2080,9 +2130,9 @@
                 <a:ea typeface="Calibri" pitchFamily="34" charset="-122"/>
                 <a:cs typeface="Calibri" pitchFamily="34" charset="-120"/>
               </a:rPr>
-              <a:t>But : permettre à quelqu'un d'autre de comprendre et maintenir le système</a:t>
-            </a:r>
-            <a:endParaRPr lang="en-US" sz="1300" dirty="0"/>
+              <a:t>Contenu : DFD, flowcharts, dictionnaire technique, architecture</a:t>
+            </a:r>
+            <a:endParaRPr lang="en-US" sz="1200" dirty="0"/>
           </a:p>
         </p:txBody>
       </p:sp>
@@ -2094,8 +2144,8 @@
         </p:nvSpPr>
         <p:spPr>
           <a:xfrm>
-            <a:off x="457200" y="3246120"/>
-            <a:ext cx="8229600" cy="640080"/>
+            <a:off x="457200" y="2560320"/>
+            <a:ext cx="8229600" cy="521208"/>
           </a:xfrm>
           <a:prstGeom prst="rect">
             <a:avLst/>
@@ -2121,8 +2171,8 @@
         </p:nvSpPr>
         <p:spPr>
           <a:xfrm>
-            <a:off x="457200" y="3246120"/>
-            <a:ext cx="54864" cy="640080"/>
+            <a:off x="457200" y="2560320"/>
+            <a:ext cx="45720" cy="521208"/>
           </a:xfrm>
           <a:prstGeom prst="rect">
             <a:avLst/>
@@ -2141,8 +2191,8 @@
         </p:nvSpPr>
         <p:spPr>
           <a:xfrm>
-            <a:off x="731520" y="3246120"/>
-            <a:ext cx="7772400" cy="640080"/>
+            <a:off x="685800" y="2560320"/>
+            <a:ext cx="7818120" cy="521208"/>
           </a:xfrm>
           <a:prstGeom prst="rect">
             <a:avLst/>
@@ -2158,93 +2208,7 @@
               <a:buNone/>
             </a:pPr>
             <a:r>
-              <a:rPr lang="en-US" sz="1300" dirty="0">
-                <a:solidFill>
-                  <a:srgbClr val="1A1A2E"/>
-                </a:solidFill>
-                <a:latin typeface="Calibri" pitchFamily="34" charset="0"/>
-                <a:ea typeface="Calibri" pitchFamily="34" charset="-122"/>
-                <a:cs typeface="Calibri" pitchFamily="34" charset="-120"/>
-              </a:rPr>
-              <a:t>Différent de la doc utilisateur (Module 20)</a:t>
-            </a:r>
-            <a:endParaRPr lang="en-US" sz="1300" dirty="0"/>
-          </a:p>
-        </p:txBody>
-      </p:sp>
-      <p:sp>
-        <p:nvSpPr>
-          <p:cNvPr id="16" name="Shape 14"/>
-          <p:cNvSpPr/>
-          <p:nvPr/>
-        </p:nvSpPr>
-        <p:spPr>
-          <a:xfrm>
-            <a:off x="457200" y="3977640"/>
-            <a:ext cx="8229600" cy="640080"/>
-          </a:xfrm>
-          <a:prstGeom prst="rect">
-            <a:avLst/>
-          </a:prstGeom>
-          <a:solidFill>
-            <a:srgbClr val="FFFFFF"/>
-          </a:solidFill>
-          <a:ln/>
-          <a:effectLst>
-            <a:outerShdw sx="100000" sy="100000" kx="0" ky="0" algn="bl" rotWithShape="0" blurRad="50800" dist="25400" dir="8100000">
-              <a:srgbClr val="000000">
-                <a:alpha val="12000"/>
-              </a:srgbClr>
-            </a:outerShdw>
-          </a:effectLst>
-        </p:spPr>
-      </p:sp>
-      <p:sp>
-        <p:nvSpPr>
-          <p:cNvPr id="17" name="Shape 15"/>
-          <p:cNvSpPr/>
-          <p:nvPr/>
-        </p:nvSpPr>
-        <p:spPr>
-          <a:xfrm>
-            <a:off x="457200" y="3977640"/>
-            <a:ext cx="54864" cy="640080"/>
-          </a:xfrm>
-          <a:prstGeom prst="rect">
-            <a:avLst/>
-          </a:prstGeom>
-          <a:solidFill>
-            <a:srgbClr val="6A1B9A"/>
-          </a:solidFill>
-          <a:ln/>
-        </p:spPr>
-      </p:sp>
-      <p:sp>
-        <p:nvSpPr>
-          <p:cNvPr id="18" name="Text 16"/>
-          <p:cNvSpPr/>
-          <p:nvPr/>
-        </p:nvSpPr>
-        <p:spPr>
-          <a:xfrm>
-            <a:off x="731520" y="3977640"/>
-            <a:ext cx="7772400" cy="640080"/>
-          </a:xfrm>
-          <a:prstGeom prst="rect">
-            <a:avLst/>
-          </a:prstGeom>
-          <a:noFill/>
-          <a:ln/>
-        </p:spPr>
-        <p:txBody>
-          <a:bodyPr wrap="square" lIns="0" tIns="0" rIns="0" bIns="0" rtlCol="0" anchor="ctr"/>
-          <a:lstStyle/>
-          <a:p>
-            <a:pPr indent="0" marL="0">
-              <a:buNone/>
-            </a:pPr>
-            <a:r>
-              <a:rPr lang="en-US" sz="1300" dirty="0">
+              <a:rPr lang="en-US" sz="1200" dirty="0">
                 <a:solidFill>
                   <a:srgbClr val="1A1A2E"/>
                 </a:solidFill>
@@ -2254,20 +2218,67 @@
               </a:rPr>
               <a:t>Format : document DOCX ou PDF structuré</a:t>
             </a:r>
-            <a:endParaRPr lang="en-US" sz="1300" dirty="0"/>
-          </a:p>
-        </p:txBody>
-      </p:sp>
-      <p:sp>
-        <p:nvSpPr>
-          <p:cNvPr id="19" name="Text 17"/>
-          <p:cNvSpPr/>
-          <p:nvPr/>
-        </p:nvSpPr>
-        <p:spPr>
-          <a:xfrm>
-            <a:off x="8229600" y="4754880"/>
-            <a:ext cx="731520" cy="274320"/>
+            <a:endParaRPr lang="en-US" sz="1200" dirty="0"/>
+          </a:p>
+        </p:txBody>
+      </p:sp>
+      <p:sp>
+        <p:nvSpPr>
+          <p:cNvPr id="16" name="Shape 14"/>
+          <p:cNvSpPr/>
+          <p:nvPr/>
+        </p:nvSpPr>
+        <p:spPr>
+          <a:xfrm>
+            <a:off x="457200" y="3108960"/>
+            <a:ext cx="8229600" cy="521208"/>
+          </a:xfrm>
+          <a:prstGeom prst="rect">
+            <a:avLst/>
+          </a:prstGeom>
+          <a:solidFill>
+            <a:srgbClr val="FFFFFF"/>
+          </a:solidFill>
+          <a:ln/>
+          <a:effectLst>
+            <a:outerShdw sx="100000" sy="100000" kx="0" ky="0" algn="bl" rotWithShape="0" blurRad="50800" dist="25400" dir="8100000">
+              <a:srgbClr val="000000">
+                <a:alpha val="12000"/>
+              </a:srgbClr>
+            </a:outerShdw>
+          </a:effectLst>
+        </p:spPr>
+      </p:sp>
+      <p:sp>
+        <p:nvSpPr>
+          <p:cNvPr id="17" name="Shape 15"/>
+          <p:cNvSpPr/>
+          <p:nvPr/>
+        </p:nvSpPr>
+        <p:spPr>
+          <a:xfrm>
+            <a:off x="457200" y="3108960"/>
+            <a:ext cx="45720" cy="521208"/>
+          </a:xfrm>
+          <a:prstGeom prst="rect">
+            <a:avLst/>
+          </a:prstGeom>
+          <a:solidFill>
+            <a:srgbClr val="6A1B9A"/>
+          </a:solidFill>
+          <a:ln/>
+        </p:spPr>
+      </p:sp>
+      <p:sp>
+        <p:nvSpPr>
+          <p:cNvPr id="18" name="Text 16"/>
+          <p:cNvSpPr/>
+          <p:nvPr/>
+        </p:nvSpPr>
+        <p:spPr>
+          <a:xfrm>
+            <a:off x="685800" y="3108960"/>
+            <a:ext cx="7818120" cy="521208"/>
           </a:xfrm>
           <a:prstGeom prst="rect">
             <a:avLst/>
@@ -2279,21 +2290,193 @@
           <a:bodyPr wrap="square" lIns="0" tIns="0" rIns="0" bIns="0" rtlCol="0" anchor="ctr"/>
           <a:lstStyle/>
           <a:p>
-            <a:pPr algn="r" indent="0" marL="0">
+            <a:pPr indent="0" marL="0">
               <a:buNone/>
             </a:pPr>
             <a:r>
-              <a:rPr lang="en-US" sz="900" dirty="0">
+              <a:rPr lang="en-US" sz="1200" dirty="0">
                 <a:solidFill>
-                  <a:srgbClr val="AAAAAA"/>
+                  <a:srgbClr val="1A1A2E"/>
                 </a:solidFill>
                 <a:latin typeface="Calibri" pitchFamily="34" charset="0"/>
                 <a:ea typeface="Calibri" pitchFamily="34" charset="-122"/>
                 <a:cs typeface="Calibri" pitchFamily="34" charset="-120"/>
               </a:rPr>
-              <a:t>2/7</a:t>
-            </a:r>
-            <a:endParaRPr lang="en-US" sz="900" dirty="0"/>
+              <a:t>≠ Documentation UTILISATEUR (Module 20) qui est pour les utilisateurs finaux</a:t>
+            </a:r>
+            <a:endParaRPr lang="en-US" sz="1200" dirty="0"/>
+          </a:p>
+        </p:txBody>
+      </p:sp>
+      <p:sp>
+        <p:nvSpPr>
+          <p:cNvPr id="19" name="Shape 17"/>
+          <p:cNvSpPr/>
+          <p:nvPr/>
+        </p:nvSpPr>
+        <p:spPr>
+          <a:xfrm>
+            <a:off x="457200" y="3657600"/>
+            <a:ext cx="8229600" cy="521208"/>
+          </a:xfrm>
+          <a:prstGeom prst="rect">
+            <a:avLst/>
+          </a:prstGeom>
+          <a:solidFill>
+            <a:srgbClr val="F3E5F5"/>
+          </a:solidFill>
+          <a:ln/>
+          <a:effectLst>
+            <a:outerShdw sx="100000" sy="100000" kx="0" ky="0" algn="bl" rotWithShape="0" blurRad="50800" dist="25400" dir="8100000">
+              <a:srgbClr val="000000">
+                <a:alpha val="12000"/>
+              </a:srgbClr>
+            </a:outerShdw>
+          </a:effectLst>
+        </p:spPr>
+      </p:sp>
+      <p:sp>
+        <p:nvSpPr>
+          <p:cNvPr id="20" name="Shape 18"/>
+          <p:cNvSpPr/>
+          <p:nvPr/>
+        </p:nvSpPr>
+        <p:spPr>
+          <a:xfrm>
+            <a:off x="457200" y="3657600"/>
+            <a:ext cx="45720" cy="521208"/>
+          </a:xfrm>
+          <a:prstGeom prst="rect">
+            <a:avLst/>
+          </a:prstGeom>
+          <a:solidFill>
+            <a:srgbClr val="6A1B9A"/>
+          </a:solidFill>
+          <a:ln/>
+        </p:spPr>
+      </p:sp>
+      <p:sp>
+        <p:nvSpPr>
+          <p:cNvPr id="21" name="Text 19"/>
+          <p:cNvSpPr/>
+          <p:nvPr/>
+        </p:nvSpPr>
+        <p:spPr>
+          <a:xfrm>
+            <a:off x="685800" y="3657600"/>
+            <a:ext cx="7818120" cy="521208"/>
+          </a:xfrm>
+          <a:prstGeom prst="rect">
+            <a:avLst/>
+          </a:prstGeom>
+          <a:noFill/>
+          <a:ln/>
+        </p:spPr>
+        <p:txBody>
+          <a:bodyPr wrap="square" lIns="0" tIns="0" rIns="0" bIns="0" rtlCol="0" anchor="ctr"/>
+          <a:lstStyle/>
+          <a:p>
+            <a:pPr indent="0" marL="0">
+              <a:buNone/>
+            </a:pPr>
+            <a:r>
+              <a:rPr lang="en-US" sz="1200" dirty="0">
+                <a:solidFill>
+                  <a:srgbClr val="1A1A2E"/>
+                </a:solidFill>
+                <a:latin typeface="Calibri" pitchFamily="34" charset="0"/>
+                <a:ea typeface="Calibri" pitchFamily="34" charset="-122"/>
+                <a:cs typeface="Calibri" pitchFamily="34" charset="-120"/>
+              </a:rPr>
+              <a:t>La doc technique répond à : 'Comment le système FONCTIONNE ?'</a:t>
+            </a:r>
+            <a:endParaRPr lang="en-US" sz="1200" dirty="0"/>
+          </a:p>
+        </p:txBody>
+      </p:sp>
+      <p:sp>
+        <p:nvSpPr>
+          <p:cNvPr id="22" name="Shape 20"/>
+          <p:cNvSpPr/>
+          <p:nvPr/>
+        </p:nvSpPr>
+        <p:spPr>
+          <a:xfrm>
+            <a:off x="457200" y="4206240"/>
+            <a:ext cx="8229600" cy="521208"/>
+          </a:xfrm>
+          <a:prstGeom prst="rect">
+            <a:avLst/>
+          </a:prstGeom>
+          <a:solidFill>
+            <a:srgbClr val="FFFFFF"/>
+          </a:solidFill>
+          <a:ln/>
+          <a:effectLst>
+            <a:outerShdw sx="100000" sy="100000" kx="0" ky="0" algn="bl" rotWithShape="0" blurRad="50800" dist="25400" dir="8100000">
+              <a:srgbClr val="000000">
+                <a:alpha val="12000"/>
+              </a:srgbClr>
+            </a:outerShdw>
+          </a:effectLst>
+        </p:spPr>
+      </p:sp>
+      <p:sp>
+        <p:nvSpPr>
+          <p:cNvPr id="23" name="Shape 21"/>
+          <p:cNvSpPr/>
+          <p:nvPr/>
+        </p:nvSpPr>
+        <p:spPr>
+          <a:xfrm>
+            <a:off x="457200" y="4206240"/>
+            <a:ext cx="45720" cy="521208"/>
+          </a:xfrm>
+          <a:prstGeom prst="rect">
+            <a:avLst/>
+          </a:prstGeom>
+          <a:solidFill>
+            <a:srgbClr val="6A1B9A"/>
+          </a:solidFill>
+          <a:ln/>
+        </p:spPr>
+      </p:sp>
+      <p:sp>
+        <p:nvSpPr>
+          <p:cNvPr id="24" name="Text 22"/>
+          <p:cNvSpPr/>
+          <p:nvPr/>
+        </p:nvSpPr>
+        <p:spPr>
+          <a:xfrm>
+            <a:off x="685800" y="4206240"/>
+            <a:ext cx="7818120" cy="521208"/>
+          </a:xfrm>
+          <a:prstGeom prst="rect">
+            <a:avLst/>
+          </a:prstGeom>
+          <a:noFill/>
+          <a:ln/>
+        </p:spPr>
+        <p:txBody>
+          <a:bodyPr wrap="square" lIns="0" tIns="0" rIns="0" bIns="0" rtlCol="0" anchor="ctr"/>
+          <a:lstStyle/>
+          <a:p>
+            <a:pPr indent="0" marL="0">
+              <a:buNone/>
+            </a:pPr>
+            <a:r>
+              <a:rPr lang="en-US" sz="1200" dirty="0">
+                <a:solidFill>
+                  <a:srgbClr val="1A1A2E"/>
+                </a:solidFill>
+                <a:latin typeface="Calibri" pitchFamily="34" charset="0"/>
+                <a:ea typeface="Calibri" pitchFamily="34" charset="-122"/>
+                <a:cs typeface="Calibri" pitchFamily="34" charset="-120"/>
+              </a:rPr>
+              <a:t>La doc utilisateur répond à : 'Comment UTILISER le système ?'</a:t>
+            </a:r>
+            <a:endParaRPr lang="en-US" sz="1200" dirty="0"/>
           </a:p>
         </p:txBody>
       </p:sp>
@@ -2338,7 +2521,7 @@
         <p:spPr>
           <a:xfrm>
             <a:off x="0" y="0"/>
-            <a:ext cx="9144000" cy="73152"/>
+            <a:ext cx="9144000" cy="54864"/>
           </a:xfrm>
           <a:prstGeom prst="rect">
             <a:avLst/>
@@ -2357,8 +2540,8 @@
         </p:nvSpPr>
         <p:spPr>
           <a:xfrm>
-            <a:off x="457200" y="228600"/>
-            <a:ext cx="8229600" cy="640080"/>
+            <a:off x="457200" y="182880"/>
+            <a:ext cx="8229600" cy="594360"/>
           </a:xfrm>
           <a:prstGeom prst="rect">
             <a:avLst/>
@@ -2374,7 +2557,7 @@
               <a:buNone/>
             </a:pPr>
             <a:r>
-              <a:rPr lang="en-US" sz="2600" b="1" dirty="0">
+              <a:rPr lang="en-US" sz="2400" b="1" dirty="0">
                 <a:solidFill>
                   <a:srgbClr val="4A0072"/>
                 </a:solidFill>
@@ -2384,7 +2567,7 @@
               </a:rPr>
               <a:t>DFD : Data Flow Diagram</a:t>
             </a:r>
-            <a:endParaRPr lang="en-US" sz="2600" dirty="0"/>
+            <a:endParaRPr lang="en-US" sz="2400" dirty="0"/>
           </a:p>
         </p:txBody>
       </p:sp>
@@ -2396,8 +2579,8 @@
         </p:nvSpPr>
         <p:spPr>
           <a:xfrm>
-            <a:off x="457200" y="1051560"/>
-            <a:ext cx="8229600" cy="640080"/>
+            <a:off x="457200" y="914400"/>
+            <a:ext cx="8229600" cy="521208"/>
           </a:xfrm>
           <a:prstGeom prst="rect">
             <a:avLst/>
@@ -2423,8 +2606,8 @@
         </p:nvSpPr>
         <p:spPr>
           <a:xfrm>
-            <a:off x="457200" y="1051560"/>
-            <a:ext cx="54864" cy="640080"/>
+            <a:off x="457200" y="914400"/>
+            <a:ext cx="45720" cy="521208"/>
           </a:xfrm>
           <a:prstGeom prst="rect">
             <a:avLst/>
@@ -2443,8 +2626,8 @@
         </p:nvSpPr>
         <p:spPr>
           <a:xfrm>
-            <a:off x="731520" y="1051560"/>
-            <a:ext cx="7772400" cy="640080"/>
+            <a:off x="685800" y="914400"/>
+            <a:ext cx="7818120" cy="521208"/>
           </a:xfrm>
           <a:prstGeom prst="rect">
             <a:avLst/>
@@ -2460,7 +2643,7 @@
               <a:buNone/>
             </a:pPr>
             <a:r>
-              <a:rPr lang="en-US" sz="1300" dirty="0">
+              <a:rPr lang="en-US" sz="1200" dirty="0">
                 <a:solidFill>
                   <a:srgbClr val="1A1A2E"/>
                 </a:solidFill>
@@ -2468,9 +2651,9 @@
                 <a:ea typeface="Calibri" pitchFamily="34" charset="-122"/>
                 <a:cs typeface="Calibri" pitchFamily="34" charset="-120"/>
               </a:rPr>
-              <a:t>Niveau 0 (contexte) : le système entier = 1 processus</a:t>
-            </a:r>
-            <a:endParaRPr lang="en-US" sz="1300" dirty="0"/>
+              <a:t>Diagramme qui montre les FLUX DE DONNÉES dans le système</a:t>
+            </a:r>
+            <a:endParaRPr lang="en-US" sz="1200" dirty="0"/>
           </a:p>
         </p:txBody>
       </p:sp>
@@ -2482,8 +2665,8 @@
         </p:nvSpPr>
         <p:spPr>
           <a:xfrm>
-            <a:off x="457200" y="1783080"/>
-            <a:ext cx="8229600" cy="640080"/>
+            <a:off x="457200" y="1463040"/>
+            <a:ext cx="8229600" cy="521208"/>
           </a:xfrm>
           <a:prstGeom prst="rect">
             <a:avLst/>
@@ -2509,8 +2692,8 @@
         </p:nvSpPr>
         <p:spPr>
           <a:xfrm>
-            <a:off x="457200" y="1783080"/>
-            <a:ext cx="54864" cy="640080"/>
+            <a:off x="457200" y="1463040"/>
+            <a:ext cx="45720" cy="521208"/>
           </a:xfrm>
           <a:prstGeom prst="rect">
             <a:avLst/>
@@ -2529,8 +2712,8 @@
         </p:nvSpPr>
         <p:spPr>
           <a:xfrm>
-            <a:off x="731520" y="1783080"/>
-            <a:ext cx="7772400" cy="640080"/>
+            <a:off x="685800" y="1463040"/>
+            <a:ext cx="7818120" cy="521208"/>
           </a:xfrm>
           <a:prstGeom prst="rect">
             <a:avLst/>
@@ -2546,7 +2729,93 @@
               <a:buNone/>
             </a:pPr>
             <a:r>
-              <a:rPr lang="en-US" sz="1300" dirty="0">
+              <a:rPr lang="en-US" sz="1200" dirty="0">
+                <a:solidFill>
+                  <a:srgbClr val="1A1A2E"/>
+                </a:solidFill>
+                <a:latin typeface="Calibri" pitchFamily="34" charset="0"/>
+                <a:ea typeface="Calibri" pitchFamily="34" charset="-122"/>
+                <a:cs typeface="Calibri" pitchFamily="34" charset="-120"/>
+              </a:rPr>
+              <a:t>Niveau 0 (contexte) : le système entier = 1 seul processus</a:t>
+            </a:r>
+            <a:endParaRPr lang="en-US" sz="1200" dirty="0"/>
+          </a:p>
+        </p:txBody>
+      </p:sp>
+      <p:sp>
+        <p:nvSpPr>
+          <p:cNvPr id="10" name="Shape 8"/>
+          <p:cNvSpPr/>
+          <p:nvPr/>
+        </p:nvSpPr>
+        <p:spPr>
+          <a:xfrm>
+            <a:off x="457200" y="2011680"/>
+            <a:ext cx="8229600" cy="521208"/>
+          </a:xfrm>
+          <a:prstGeom prst="rect">
+            <a:avLst/>
+          </a:prstGeom>
+          <a:solidFill>
+            <a:srgbClr val="FFFFFF"/>
+          </a:solidFill>
+          <a:ln/>
+          <a:effectLst>
+            <a:outerShdw sx="100000" sy="100000" kx="0" ky="0" algn="bl" rotWithShape="0" blurRad="50800" dist="25400" dir="8100000">
+              <a:srgbClr val="000000">
+                <a:alpha val="12000"/>
+              </a:srgbClr>
+            </a:outerShdw>
+          </a:effectLst>
+        </p:spPr>
+      </p:sp>
+      <p:sp>
+        <p:nvSpPr>
+          <p:cNvPr id="11" name="Shape 9"/>
+          <p:cNvSpPr/>
+          <p:nvPr/>
+        </p:nvSpPr>
+        <p:spPr>
+          <a:xfrm>
+            <a:off x="457200" y="2011680"/>
+            <a:ext cx="45720" cy="521208"/>
+          </a:xfrm>
+          <a:prstGeom prst="rect">
+            <a:avLst/>
+          </a:prstGeom>
+          <a:solidFill>
+            <a:srgbClr val="6A1B9A"/>
+          </a:solidFill>
+          <a:ln/>
+        </p:spPr>
+      </p:sp>
+      <p:sp>
+        <p:nvSpPr>
+          <p:cNvPr id="12" name="Text 10"/>
+          <p:cNvSpPr/>
+          <p:nvPr/>
+        </p:nvSpPr>
+        <p:spPr>
+          <a:xfrm>
+            <a:off x="685800" y="2011680"/>
+            <a:ext cx="7818120" cy="521208"/>
+          </a:xfrm>
+          <a:prstGeom prst="rect">
+            <a:avLst/>
+          </a:prstGeom>
+          <a:noFill/>
+          <a:ln/>
+        </p:spPr>
+        <p:txBody>
+          <a:bodyPr wrap="square" lIns="0" tIns="0" rIns="0" bIns="0" rtlCol="0" anchor="ctr"/>
+          <a:lstStyle/>
+          <a:p>
+            <a:pPr indent="0" marL="0">
+              <a:buNone/>
+            </a:pPr>
+            <a:r>
+              <a:rPr lang="en-US" sz="1200" dirty="0">
                 <a:solidFill>
                   <a:srgbClr val="1A1A2E"/>
                 </a:solidFill>
@@ -2556,26 +2825,26 @@
               </a:rPr>
               <a:t>Entités externes : Artiste, Comptable, Admin, Ingénieur</a:t>
             </a:r>
-            <a:endParaRPr lang="en-US" sz="1300" dirty="0"/>
-          </a:p>
-        </p:txBody>
-      </p:sp>
-      <p:sp>
-        <p:nvSpPr>
-          <p:cNvPr id="10" name="Shape 8"/>
-          <p:cNvSpPr/>
-          <p:nvPr/>
-        </p:nvSpPr>
-        <p:spPr>
-          <a:xfrm>
-            <a:off x="457200" y="2514600"/>
-            <a:ext cx="8229600" cy="640080"/>
-          </a:xfrm>
-          <a:prstGeom prst="rect">
-            <a:avLst/>
-          </a:prstGeom>
-          <a:solidFill>
-            <a:srgbClr val="FFFFFF"/>
+            <a:endParaRPr lang="en-US" sz="1200" dirty="0"/>
+          </a:p>
+        </p:txBody>
+      </p:sp>
+      <p:sp>
+        <p:nvSpPr>
+          <p:cNvPr id="13" name="Shape 11"/>
+          <p:cNvSpPr/>
+          <p:nvPr/>
+        </p:nvSpPr>
+        <p:spPr>
+          <a:xfrm>
+            <a:off x="457200" y="2560320"/>
+            <a:ext cx="8229600" cy="521208"/>
+          </a:xfrm>
+          <a:prstGeom prst="rect">
+            <a:avLst/>
+          </a:prstGeom>
+          <a:solidFill>
+            <a:srgbClr val="F3E5F5"/>
           </a:solidFill>
           <a:ln/>
           <a:effectLst>
@@ -2589,14 +2858,14 @@
       </p:sp>
       <p:sp>
         <p:nvSpPr>
-          <p:cNvPr id="11" name="Shape 9"/>
-          <p:cNvSpPr/>
-          <p:nvPr/>
-        </p:nvSpPr>
-        <p:spPr>
-          <a:xfrm>
-            <a:off x="457200" y="2514600"/>
-            <a:ext cx="54864" cy="640080"/>
+          <p:cNvPr id="14" name="Shape 12"/>
+          <p:cNvSpPr/>
+          <p:nvPr/>
+        </p:nvSpPr>
+        <p:spPr>
+          <a:xfrm>
+            <a:off x="457200" y="2560320"/>
+            <a:ext cx="45720" cy="521208"/>
           </a:xfrm>
           <a:prstGeom prst="rect">
             <a:avLst/>
@@ -2609,14 +2878,14 @@
       </p:sp>
       <p:sp>
         <p:nvSpPr>
-          <p:cNvPr id="12" name="Text 10"/>
-          <p:cNvSpPr/>
-          <p:nvPr/>
-        </p:nvSpPr>
-        <p:spPr>
-          <a:xfrm>
-            <a:off x="731520" y="2514600"/>
-            <a:ext cx="7772400" cy="640080"/>
+          <p:cNvPr id="15" name="Text 13"/>
+          <p:cNvSpPr/>
+          <p:nvPr/>
+        </p:nvSpPr>
+        <p:spPr>
+          <a:xfrm>
+            <a:off x="685800" y="2560320"/>
+            <a:ext cx="7818120" cy="521208"/>
           </a:xfrm>
           <a:prstGeom prst="rect">
             <a:avLst/>
@@ -2632,7 +2901,7 @@
               <a:buNone/>
             </a:pPr>
             <a:r>
-              <a:rPr lang="en-US" sz="1300" dirty="0">
+              <a:rPr lang="en-US" sz="1200" dirty="0">
                 <a:solidFill>
                   <a:srgbClr val="1A1A2E"/>
                 </a:solidFill>
@@ -2640,28 +2909,28 @@
                 <a:ea typeface="Calibri" pitchFamily="34" charset="-122"/>
                 <a:cs typeface="Calibri" pitchFamily="34" charset="-120"/>
               </a:rPr>
-              <a:t>Niveau 1 : décomposition en sous-processus</a:t>
-            </a:r>
-            <a:endParaRPr lang="en-US" sz="1300" dirty="0"/>
-          </a:p>
-        </p:txBody>
-      </p:sp>
-      <p:sp>
-        <p:nvSpPr>
-          <p:cNvPr id="13" name="Shape 11"/>
-          <p:cNvSpPr/>
-          <p:nvPr/>
-        </p:nvSpPr>
-        <p:spPr>
-          <a:xfrm>
-            <a:off x="457200" y="3246120"/>
-            <a:ext cx="8229600" cy="640080"/>
-          </a:xfrm>
-          <a:prstGeom prst="rect">
-            <a:avLst/>
-          </a:prstGeom>
-          <a:solidFill>
-            <a:srgbClr val="F3E5F5"/>
+              <a:t>Niveau 1 : décomposition en sous-processus (gérer artistes, planifier sessions, facturer)</a:t>
+            </a:r>
+            <a:endParaRPr lang="en-US" sz="1200" dirty="0"/>
+          </a:p>
+        </p:txBody>
+      </p:sp>
+      <p:sp>
+        <p:nvSpPr>
+          <p:cNvPr id="16" name="Shape 14"/>
+          <p:cNvSpPr/>
+          <p:nvPr/>
+        </p:nvSpPr>
+        <p:spPr>
+          <a:xfrm>
+            <a:off x="457200" y="3108960"/>
+            <a:ext cx="8229600" cy="521208"/>
+          </a:xfrm>
+          <a:prstGeom prst="rect">
+            <a:avLst/>
+          </a:prstGeom>
+          <a:solidFill>
+            <a:srgbClr val="FFFFFF"/>
           </a:solidFill>
           <a:ln/>
           <a:effectLst>
@@ -2675,14 +2944,14 @@
       </p:sp>
       <p:sp>
         <p:nvSpPr>
-          <p:cNvPr id="14" name="Shape 12"/>
-          <p:cNvSpPr/>
-          <p:nvPr/>
-        </p:nvSpPr>
-        <p:spPr>
-          <a:xfrm>
-            <a:off x="457200" y="3246120"/>
-            <a:ext cx="54864" cy="640080"/>
+          <p:cNvPr id="17" name="Shape 15"/>
+          <p:cNvSpPr/>
+          <p:nvPr/>
+        </p:nvSpPr>
+        <p:spPr>
+          <a:xfrm>
+            <a:off x="457200" y="3108960"/>
+            <a:ext cx="45720" cy="521208"/>
           </a:xfrm>
           <a:prstGeom prst="rect">
             <a:avLst/>
@@ -2695,14 +2964,14 @@
       </p:sp>
       <p:sp>
         <p:nvSpPr>
-          <p:cNvPr id="15" name="Text 13"/>
-          <p:cNvSpPr/>
-          <p:nvPr/>
-        </p:nvSpPr>
-        <p:spPr>
-          <a:xfrm>
-            <a:off x="731520" y="3246120"/>
-            <a:ext cx="7772400" cy="640080"/>
+          <p:cNvPr id="18" name="Text 16"/>
+          <p:cNvSpPr/>
+          <p:nvPr/>
+        </p:nvSpPr>
+        <p:spPr>
+          <a:xfrm>
+            <a:off x="685800" y="3108960"/>
+            <a:ext cx="7818120" cy="521208"/>
           </a:xfrm>
           <a:prstGeom prst="rect">
             <a:avLst/>
@@ -2718,7 +2987,7 @@
               <a:buNone/>
             </a:pPr>
             <a:r>
-              <a:rPr lang="en-US" sz="1300" dirty="0">
+              <a:rPr lang="en-US" sz="1200" dirty="0">
                 <a:solidFill>
                   <a:srgbClr val="1A1A2E"/>
                 </a:solidFill>
@@ -2726,28 +2995,28 @@
                 <a:ea typeface="Calibri" pitchFamily="34" charset="-122"/>
                 <a:cs typeface="Calibri" pitchFamily="34" charset="-120"/>
               </a:rPr>
-              <a:t>Processus : Gérer artistes, Planifier sessions, Facturer</a:t>
-            </a:r>
-            <a:endParaRPr lang="en-US" sz="1300" dirty="0"/>
-          </a:p>
-        </p:txBody>
-      </p:sp>
-      <p:sp>
-        <p:nvSpPr>
-          <p:cNvPr id="16" name="Shape 14"/>
-          <p:cNvSpPr/>
-          <p:nvPr/>
-        </p:nvSpPr>
-        <p:spPr>
-          <a:xfrm>
-            <a:off x="457200" y="3977640"/>
-            <a:ext cx="8229600" cy="640080"/>
-          </a:xfrm>
-          <a:prstGeom prst="rect">
-            <a:avLst/>
-          </a:prstGeom>
-          <a:solidFill>
-            <a:srgbClr val="FFFFFF"/>
+              <a:t>Niveau 2 : détail d'UN processus du niveau 1</a:t>
+            </a:r>
+            <a:endParaRPr lang="en-US" sz="1200" dirty="0"/>
+          </a:p>
+        </p:txBody>
+      </p:sp>
+      <p:sp>
+        <p:nvSpPr>
+          <p:cNvPr id="19" name="Shape 17"/>
+          <p:cNvSpPr/>
+          <p:nvPr/>
+        </p:nvSpPr>
+        <p:spPr>
+          <a:xfrm>
+            <a:off x="457200" y="3657600"/>
+            <a:ext cx="8229600" cy="521208"/>
+          </a:xfrm>
+          <a:prstGeom prst="rect">
+            <a:avLst/>
+          </a:prstGeom>
+          <a:solidFill>
+            <a:srgbClr val="F3E5F5"/>
           </a:solidFill>
           <a:ln/>
           <a:effectLst>
@@ -2761,14 +3030,14 @@
       </p:sp>
       <p:sp>
         <p:nvSpPr>
-          <p:cNvPr id="17" name="Shape 15"/>
-          <p:cNvSpPr/>
-          <p:nvPr/>
-        </p:nvSpPr>
-        <p:spPr>
-          <a:xfrm>
-            <a:off x="457200" y="3977640"/>
-            <a:ext cx="54864" cy="640080"/>
+          <p:cNvPr id="20" name="Shape 18"/>
+          <p:cNvSpPr/>
+          <p:nvPr/>
+        </p:nvSpPr>
+        <p:spPr>
+          <a:xfrm>
+            <a:off x="457200" y="3657600"/>
+            <a:ext cx="45720" cy="521208"/>
           </a:xfrm>
           <a:prstGeom prst="rect">
             <a:avLst/>
@@ -2781,14 +3050,14 @@
       </p:sp>
       <p:sp>
         <p:nvSpPr>
-          <p:cNvPr id="18" name="Text 16"/>
-          <p:cNvSpPr/>
-          <p:nvPr/>
-        </p:nvSpPr>
-        <p:spPr>
-          <a:xfrm>
-            <a:off x="731520" y="3977640"/>
-            <a:ext cx="7772400" cy="640080"/>
+          <p:cNvPr id="21" name="Text 19"/>
+          <p:cNvSpPr/>
+          <p:nvPr/>
+        </p:nvSpPr>
+        <p:spPr>
+          <a:xfrm>
+            <a:off x="685800" y="3657600"/>
+            <a:ext cx="7818120" cy="521208"/>
           </a:xfrm>
           <a:prstGeom prst="rect">
             <a:avLst/>
@@ -2804,7 +3073,7 @@
               <a:buNone/>
             </a:pPr>
             <a:r>
-              <a:rPr lang="en-US" sz="1300" dirty="0">
+              <a:rPr lang="en-US" sz="1200" dirty="0">
                 <a:solidFill>
                   <a:srgbClr val="1A1A2E"/>
                 </a:solidFill>
@@ -2812,22 +3081,69 @@
                 <a:ea typeface="Calibri" pitchFamily="34" charset="-122"/>
                 <a:cs typeface="Calibri" pitchFamily="34" charset="-120"/>
               </a:rPr>
-              <a:t>Niveau 2 : détail d'un processus du niveau 1</a:t>
-            </a:r>
-            <a:endParaRPr lang="en-US" sz="1300" dirty="0"/>
-          </a:p>
-        </p:txBody>
-      </p:sp>
-      <p:sp>
-        <p:nvSpPr>
-          <p:cNvPr id="19" name="Text 17"/>
-          <p:cNvSpPr/>
-          <p:nvPr/>
-        </p:nvSpPr>
-        <p:spPr>
-          <a:xfrm>
-            <a:off x="8229600" y="4754880"/>
-            <a:ext cx="731520" cy="274320"/>
+              <a:t>Chaque niveau 'zoome' dans un processus pour plus de détails</a:t>
+            </a:r>
+            <a:endParaRPr lang="en-US" sz="1200" dirty="0"/>
+          </a:p>
+        </p:txBody>
+      </p:sp>
+      <p:sp>
+        <p:nvSpPr>
+          <p:cNvPr id="22" name="Shape 20"/>
+          <p:cNvSpPr/>
+          <p:nvPr/>
+        </p:nvSpPr>
+        <p:spPr>
+          <a:xfrm>
+            <a:off x="457200" y="4206240"/>
+            <a:ext cx="8229600" cy="521208"/>
+          </a:xfrm>
+          <a:prstGeom prst="rect">
+            <a:avLst/>
+          </a:prstGeom>
+          <a:solidFill>
+            <a:srgbClr val="FFFFFF"/>
+          </a:solidFill>
+          <a:ln/>
+          <a:effectLst>
+            <a:outerShdw sx="100000" sy="100000" kx="0" ky="0" algn="bl" rotWithShape="0" blurRad="50800" dist="25400" dir="8100000">
+              <a:srgbClr val="000000">
+                <a:alpha val="12000"/>
+              </a:srgbClr>
+            </a:outerShdw>
+          </a:effectLst>
+        </p:spPr>
+      </p:sp>
+      <p:sp>
+        <p:nvSpPr>
+          <p:cNvPr id="23" name="Shape 21"/>
+          <p:cNvSpPr/>
+          <p:nvPr/>
+        </p:nvSpPr>
+        <p:spPr>
+          <a:xfrm>
+            <a:off x="457200" y="4206240"/>
+            <a:ext cx="45720" cy="521208"/>
+          </a:xfrm>
+          <a:prstGeom prst="rect">
+            <a:avLst/>
+          </a:prstGeom>
+          <a:solidFill>
+            <a:srgbClr val="6A1B9A"/>
+          </a:solidFill>
+          <a:ln/>
+        </p:spPr>
+      </p:sp>
+      <p:sp>
+        <p:nvSpPr>
+          <p:cNvPr id="24" name="Text 22"/>
+          <p:cNvSpPr/>
+          <p:nvPr/>
+        </p:nvSpPr>
+        <p:spPr>
+          <a:xfrm>
+            <a:off x="685800" y="4206240"/>
+            <a:ext cx="7818120" cy="521208"/>
           </a:xfrm>
           <a:prstGeom prst="rect">
             <a:avLst/>
@@ -2839,21 +3155,21 @@
           <a:bodyPr wrap="square" lIns="0" tIns="0" rIns="0" bIns="0" rtlCol="0" anchor="ctr"/>
           <a:lstStyle/>
           <a:p>
-            <a:pPr algn="r" indent="0" marL="0">
+            <a:pPr indent="0" marL="0">
               <a:buNone/>
             </a:pPr>
             <a:r>
-              <a:rPr lang="en-US" sz="900" dirty="0">
+              <a:rPr lang="en-US" sz="1200" dirty="0">
                 <a:solidFill>
-                  <a:srgbClr val="AAAAAA"/>
+                  <a:srgbClr val="1A1A2E"/>
                 </a:solidFill>
                 <a:latin typeface="Calibri" pitchFamily="34" charset="0"/>
                 <a:ea typeface="Calibri" pitchFamily="34" charset="-122"/>
                 <a:cs typeface="Calibri" pitchFamily="34" charset="-120"/>
               </a:rPr>
-              <a:t>3/7</a:t>
-            </a:r>
-            <a:endParaRPr lang="en-US" sz="900" dirty="0"/>
+              <a:t>Outils : Draw.io (modèle DFD disponible)</a:t>
+            </a:r>
+            <a:endParaRPr lang="en-US" sz="1200" dirty="0"/>
           </a:p>
         </p:txBody>
       </p:sp>
@@ -2898,7 +3214,7 @@
         <p:spPr>
           <a:xfrm>
             <a:off x="0" y="0"/>
-            <a:ext cx="9144000" cy="73152"/>
+            <a:ext cx="9144000" cy="54864"/>
           </a:xfrm>
           <a:prstGeom prst="rect">
             <a:avLst/>
@@ -2917,8 +3233,8 @@
         </p:nvSpPr>
         <p:spPr>
           <a:xfrm>
-            <a:off x="457200" y="228600"/>
-            <a:ext cx="8229600" cy="640080"/>
+            <a:off x="457200" y="182880"/>
+            <a:ext cx="8229600" cy="594360"/>
           </a:xfrm>
           <a:prstGeom prst="rect">
             <a:avLst/>
@@ -2934,7 +3250,7 @@
               <a:buNone/>
             </a:pPr>
             <a:r>
-              <a:rPr lang="en-US" sz="2600" b="1" dirty="0">
+              <a:rPr lang="en-US" sz="2400" b="1" dirty="0">
                 <a:solidFill>
                   <a:srgbClr val="4A0072"/>
                 </a:solidFill>
@@ -2944,7 +3260,7 @@
               </a:rPr>
               <a:t>Symboles DFD</a:t>
             </a:r>
-            <a:endParaRPr lang="en-US" sz="2600" dirty="0"/>
+            <a:endParaRPr lang="en-US" sz="2400" dirty="0"/>
           </a:p>
         </p:txBody>
       </p:sp>
@@ -2956,8 +3272,8 @@
         </p:nvSpPr>
         <p:spPr>
           <a:xfrm>
-            <a:off x="457200" y="1051560"/>
-            <a:ext cx="8229600" cy="640080"/>
+            <a:off x="457200" y="914400"/>
+            <a:ext cx="8229600" cy="521208"/>
           </a:xfrm>
           <a:prstGeom prst="rect">
             <a:avLst/>
@@ -2983,8 +3299,8 @@
         </p:nvSpPr>
         <p:spPr>
           <a:xfrm>
-            <a:off x="457200" y="1051560"/>
-            <a:ext cx="54864" cy="640080"/>
+            <a:off x="457200" y="914400"/>
+            <a:ext cx="45720" cy="521208"/>
           </a:xfrm>
           <a:prstGeom prst="rect">
             <a:avLst/>
@@ -3003,8 +3319,8 @@
         </p:nvSpPr>
         <p:spPr>
           <a:xfrm>
-            <a:off x="731520" y="1051560"/>
-            <a:ext cx="7772400" cy="640080"/>
+            <a:off x="685800" y="914400"/>
+            <a:ext cx="7818120" cy="521208"/>
           </a:xfrm>
           <a:prstGeom prst="rect">
             <a:avLst/>
@@ -3020,7 +3336,7 @@
               <a:buNone/>
             </a:pPr>
             <a:r>
-              <a:rPr lang="en-US" sz="1300" dirty="0">
+              <a:rPr lang="en-US" sz="1200" dirty="0">
                 <a:solidFill>
                   <a:srgbClr val="1A1A2E"/>
                 </a:solidFill>
@@ -3028,9 +3344,9 @@
                 <a:ea typeface="Calibri" pitchFamily="34" charset="-122"/>
                 <a:cs typeface="Calibri" pitchFamily="34" charset="-120"/>
               </a:rPr>
-              <a:t>⬭ Rectangle arrondi/cercle : PROCESSUS</a:t>
-            </a:r>
-            <a:endParaRPr lang="en-US" sz="1300" dirty="0"/>
+              <a:t>⬭ Rectangle arrondi (ou cercle) : PROCESSUS — une action/transformation</a:t>
+            </a:r>
+            <a:endParaRPr lang="en-US" sz="1200" dirty="0"/>
           </a:p>
         </p:txBody>
       </p:sp>
@@ -3042,8 +3358,8 @@
         </p:nvSpPr>
         <p:spPr>
           <a:xfrm>
-            <a:off x="457200" y="1783080"/>
-            <a:ext cx="8229600" cy="640080"/>
+            <a:off x="457200" y="1463040"/>
+            <a:ext cx="8229600" cy="521208"/>
           </a:xfrm>
           <a:prstGeom prst="rect">
             <a:avLst/>
@@ -3069,8 +3385,8 @@
         </p:nvSpPr>
         <p:spPr>
           <a:xfrm>
-            <a:off x="457200" y="1783080"/>
-            <a:ext cx="54864" cy="640080"/>
+            <a:off x="457200" y="1463040"/>
+            <a:ext cx="45720" cy="521208"/>
           </a:xfrm>
           <a:prstGeom prst="rect">
             <a:avLst/>
@@ -3089,8 +3405,8 @@
         </p:nvSpPr>
         <p:spPr>
           <a:xfrm>
-            <a:off x="731520" y="1783080"/>
-            <a:ext cx="7772400" cy="640080"/>
+            <a:off x="685800" y="1463040"/>
+            <a:ext cx="7818120" cy="521208"/>
           </a:xfrm>
           <a:prstGeom prst="rect">
             <a:avLst/>
@@ -3106,7 +3422,7 @@
               <a:buNone/>
             </a:pPr>
             <a:r>
-              <a:rPr lang="en-US" sz="1300" dirty="0">
+              <a:rPr lang="en-US" sz="1200" dirty="0">
                 <a:solidFill>
                   <a:srgbClr val="1A1A2E"/>
                 </a:solidFill>
@@ -3114,9 +3430,9 @@
                 <a:ea typeface="Calibri" pitchFamily="34" charset="-122"/>
                 <a:cs typeface="Calibri" pitchFamily="34" charset="-120"/>
               </a:rPr>
-              <a:t>▭ Rectangle ouvert : STOCKAGE de données (table)</a:t>
-            </a:r>
-            <a:endParaRPr lang="en-US" sz="1300" dirty="0"/>
+              <a:t>▭ Rectangle ouvert (2 côtés) : STOCKAGE de données — table BDD</a:t>
+            </a:r>
+            <a:endParaRPr lang="en-US" sz="1200" dirty="0"/>
           </a:p>
         </p:txBody>
       </p:sp>
@@ -3128,8 +3444,8 @@
         </p:nvSpPr>
         <p:spPr>
           <a:xfrm>
-            <a:off x="457200" y="2514600"/>
-            <a:ext cx="8229600" cy="640080"/>
+            <a:off x="457200" y="2011680"/>
+            <a:ext cx="8229600" cy="521208"/>
           </a:xfrm>
           <a:prstGeom prst="rect">
             <a:avLst/>
@@ -3155,8 +3471,8 @@
         </p:nvSpPr>
         <p:spPr>
           <a:xfrm>
-            <a:off x="457200" y="2514600"/>
-            <a:ext cx="54864" cy="640080"/>
+            <a:off x="457200" y="2011680"/>
+            <a:ext cx="45720" cy="521208"/>
           </a:xfrm>
           <a:prstGeom prst="rect">
             <a:avLst/>
@@ -3175,8 +3491,8 @@
         </p:nvSpPr>
         <p:spPr>
           <a:xfrm>
-            <a:off x="731520" y="2514600"/>
-            <a:ext cx="7772400" cy="640080"/>
+            <a:off x="685800" y="2011680"/>
+            <a:ext cx="7818120" cy="521208"/>
           </a:xfrm>
           <a:prstGeom prst="rect">
             <a:avLst/>
@@ -3192,7 +3508,7 @@
               <a:buNone/>
             </a:pPr>
             <a:r>
-              <a:rPr lang="en-US" sz="1300" dirty="0">
+              <a:rPr lang="en-US" sz="1200" dirty="0">
                 <a:solidFill>
                   <a:srgbClr val="1A1A2E"/>
                 </a:solidFill>
@@ -3200,9 +3516,9 @@
                 <a:ea typeface="Calibri" pitchFamily="34" charset="-122"/>
                 <a:cs typeface="Calibri" pitchFamily="34" charset="-120"/>
               </a:rPr>
-              <a:t>▬ Rectangle fermé : ENTITÉ EXTERNE</a:t>
-            </a:r>
-            <a:endParaRPr lang="en-US" sz="1300" dirty="0"/>
+              <a:t>▬ Rectangle fermé : ENTITÉ EXTERNE — personne/système externe</a:t>
+            </a:r>
+            <a:endParaRPr lang="en-US" sz="1200" dirty="0"/>
           </a:p>
         </p:txBody>
       </p:sp>
@@ -3214,8 +3530,8 @@
         </p:nvSpPr>
         <p:spPr>
           <a:xfrm>
-            <a:off x="457200" y="3246120"/>
-            <a:ext cx="8229600" cy="640080"/>
+            <a:off x="457200" y="2560320"/>
+            <a:ext cx="8229600" cy="521208"/>
           </a:xfrm>
           <a:prstGeom prst="rect">
             <a:avLst/>
@@ -3241,8 +3557,8 @@
         </p:nvSpPr>
         <p:spPr>
           <a:xfrm>
-            <a:off x="457200" y="3246120"/>
-            <a:ext cx="54864" cy="640080"/>
+            <a:off x="457200" y="2560320"/>
+            <a:ext cx="45720" cy="521208"/>
           </a:xfrm>
           <a:prstGeom prst="rect">
             <a:avLst/>
@@ -3261,8 +3577,8 @@
         </p:nvSpPr>
         <p:spPr>
           <a:xfrm>
-            <a:off x="731520" y="3246120"/>
-            <a:ext cx="7772400" cy="640080"/>
+            <a:off x="685800" y="2560320"/>
+            <a:ext cx="7818120" cy="521208"/>
           </a:xfrm>
           <a:prstGeom prst="rect">
             <a:avLst/>
@@ -3278,17 +3594,17 @@
               <a:buNone/>
             </a:pPr>
             <a:r>
-              <a:rPr lang="en-US" sz="1100" dirty="0">
+              <a:rPr lang="en-US" sz="1200" dirty="0">
                 <a:solidFill>
-                  <a:srgbClr val="4A0072"/>
+                  <a:srgbClr val="1A1A2E"/>
                 </a:solidFill>
-                <a:latin typeface="JetBrains Mono" pitchFamily="34" charset="0"/>
-                <a:ea typeface="JetBrains Mono" pitchFamily="34" charset="-122"/>
-                <a:cs typeface="JetBrains Mono" pitchFamily="34" charset="-120"/>
+                <a:latin typeface="Calibri" pitchFamily="34" charset="0"/>
+                <a:ea typeface="Calibri" pitchFamily="34" charset="-122"/>
+                <a:cs typeface="Calibri" pitchFamily="34" charset="-120"/>
               </a:rPr>
-              <a:t>→ Flèche : FLUX de données</a:t>
-            </a:r>
-            <a:endParaRPr lang="en-US" sz="1100" dirty="0"/>
+              <a:t>→ Flèche : FLUX de données — transfert d'information</a:t>
+            </a:r>
+            <a:endParaRPr lang="en-US" sz="1200" dirty="0"/>
           </a:p>
         </p:txBody>
       </p:sp>
@@ -3300,8 +3616,8 @@
         </p:nvSpPr>
         <p:spPr>
           <a:xfrm>
-            <a:off x="457200" y="3977640"/>
-            <a:ext cx="8229600" cy="640080"/>
+            <a:off x="457200" y="3108960"/>
+            <a:ext cx="8229600" cy="521208"/>
           </a:xfrm>
           <a:prstGeom prst="rect">
             <a:avLst/>
@@ -3327,8 +3643,8 @@
         </p:nvSpPr>
         <p:spPr>
           <a:xfrm>
-            <a:off x="457200" y="3977640"/>
-            <a:ext cx="54864" cy="640080"/>
+            <a:off x="457200" y="3108960"/>
+            <a:ext cx="45720" cy="521208"/>
           </a:xfrm>
           <a:prstGeom prst="rect">
             <a:avLst/>
@@ -3347,8 +3663,8 @@
         </p:nvSpPr>
         <p:spPr>
           <a:xfrm>
-            <a:off x="731520" y="3977640"/>
-            <a:ext cx="7772400" cy="640080"/>
+            <a:off x="685800" y="3108960"/>
+            <a:ext cx="7818120" cy="521208"/>
           </a:xfrm>
           <a:prstGeom prst="rect">
             <a:avLst/>
@@ -3364,7 +3680,7 @@
               <a:buNone/>
             </a:pPr>
             <a:r>
-              <a:rPr lang="en-US" sz="1300" dirty="0">
+              <a:rPr lang="en-US" sz="1200" dirty="0">
                 <a:solidFill>
                   <a:srgbClr val="1A1A2E"/>
                 </a:solidFill>
@@ -3372,22 +3688,69 @@
                 <a:ea typeface="Calibri" pitchFamily="34" charset="-122"/>
                 <a:cs typeface="Calibri" pitchFamily="34" charset="-120"/>
               </a:rPr>
-              <a:t>Outils : Draw.io (modèle DFD disponible)</a:t>
-            </a:r>
-            <a:endParaRPr lang="en-US" sz="1300" dirty="0"/>
-          </a:p>
-        </p:txBody>
-      </p:sp>
-      <p:sp>
-        <p:nvSpPr>
-          <p:cNvPr id="19" name="Text 17"/>
-          <p:cNvSpPr/>
-          <p:nvPr/>
-        </p:nvSpPr>
-        <p:spPr>
-          <a:xfrm>
-            <a:off x="8229600" y="4754880"/>
-            <a:ext cx="731520" cy="274320"/>
+              <a:t>Le PROCESSUS transforme les données entrantes en données sortantes</a:t>
+            </a:r>
+            <a:endParaRPr lang="en-US" sz="1200" dirty="0"/>
+          </a:p>
+        </p:txBody>
+      </p:sp>
+      <p:sp>
+        <p:nvSpPr>
+          <p:cNvPr id="19" name="Shape 17"/>
+          <p:cNvSpPr/>
+          <p:nvPr/>
+        </p:nvSpPr>
+        <p:spPr>
+          <a:xfrm>
+            <a:off x="457200" y="3657600"/>
+            <a:ext cx="8229600" cy="521208"/>
+          </a:xfrm>
+          <a:prstGeom prst="rect">
+            <a:avLst/>
+          </a:prstGeom>
+          <a:solidFill>
+            <a:srgbClr val="F3E5F5"/>
+          </a:solidFill>
+          <a:ln/>
+          <a:effectLst>
+            <a:outerShdw sx="100000" sy="100000" kx="0" ky="0" algn="bl" rotWithShape="0" blurRad="50800" dist="25400" dir="8100000">
+              <a:srgbClr val="000000">
+                <a:alpha val="12000"/>
+              </a:srgbClr>
+            </a:outerShdw>
+          </a:effectLst>
+        </p:spPr>
+      </p:sp>
+      <p:sp>
+        <p:nvSpPr>
+          <p:cNvPr id="20" name="Shape 18"/>
+          <p:cNvSpPr/>
+          <p:nvPr/>
+        </p:nvSpPr>
+        <p:spPr>
+          <a:xfrm>
+            <a:off x="457200" y="3657600"/>
+            <a:ext cx="45720" cy="521208"/>
+          </a:xfrm>
+          <a:prstGeom prst="rect">
+            <a:avLst/>
+          </a:prstGeom>
+          <a:solidFill>
+            <a:srgbClr val="6A1B9A"/>
+          </a:solidFill>
+          <a:ln/>
+        </p:spPr>
+      </p:sp>
+      <p:sp>
+        <p:nvSpPr>
+          <p:cNvPr id="21" name="Text 19"/>
+          <p:cNvSpPr/>
+          <p:nvPr/>
+        </p:nvSpPr>
+        <p:spPr>
+          <a:xfrm>
+            <a:off x="685800" y="3657600"/>
+            <a:ext cx="7818120" cy="521208"/>
           </a:xfrm>
           <a:prstGeom prst="rect">
             <a:avLst/>
@@ -3399,21 +3762,107 @@
           <a:bodyPr wrap="square" lIns="0" tIns="0" rIns="0" bIns="0" rtlCol="0" anchor="ctr"/>
           <a:lstStyle/>
           <a:p>
-            <a:pPr algn="r" indent="0" marL="0">
+            <a:pPr indent="0" marL="0">
               <a:buNone/>
             </a:pPr>
             <a:r>
-              <a:rPr lang="en-US" sz="900" dirty="0">
+              <a:rPr lang="en-US" sz="1200" dirty="0">
                 <a:solidFill>
-                  <a:srgbClr val="AAAAAA"/>
+                  <a:srgbClr val="1A1A2E"/>
                 </a:solidFill>
                 <a:latin typeface="Calibri" pitchFamily="34" charset="0"/>
                 <a:ea typeface="Calibri" pitchFamily="34" charset="-122"/>
                 <a:cs typeface="Calibri" pitchFamily="34" charset="-120"/>
               </a:rPr>
-              <a:t>4/7</a:t>
-            </a:r>
-            <a:endParaRPr lang="en-US" sz="900" dirty="0"/>
+              <a:t>Le STOCKAGE conserve les données entre les processus</a:t>
+            </a:r>
+            <a:endParaRPr lang="en-US" sz="1200" dirty="0"/>
+          </a:p>
+        </p:txBody>
+      </p:sp>
+      <p:sp>
+        <p:nvSpPr>
+          <p:cNvPr id="22" name="Shape 20"/>
+          <p:cNvSpPr/>
+          <p:nvPr/>
+        </p:nvSpPr>
+        <p:spPr>
+          <a:xfrm>
+            <a:off x="457200" y="4206240"/>
+            <a:ext cx="8229600" cy="521208"/>
+          </a:xfrm>
+          <a:prstGeom prst="rect">
+            <a:avLst/>
+          </a:prstGeom>
+          <a:solidFill>
+            <a:srgbClr val="FFFFFF"/>
+          </a:solidFill>
+          <a:ln/>
+          <a:effectLst>
+            <a:outerShdw sx="100000" sy="100000" kx="0" ky="0" algn="bl" rotWithShape="0" blurRad="50800" dist="25400" dir="8100000">
+              <a:srgbClr val="000000">
+                <a:alpha val="12000"/>
+              </a:srgbClr>
+            </a:outerShdw>
+          </a:effectLst>
+        </p:spPr>
+      </p:sp>
+      <p:sp>
+        <p:nvSpPr>
+          <p:cNvPr id="23" name="Shape 21"/>
+          <p:cNvSpPr/>
+          <p:nvPr/>
+        </p:nvSpPr>
+        <p:spPr>
+          <a:xfrm>
+            <a:off x="457200" y="4206240"/>
+            <a:ext cx="45720" cy="521208"/>
+          </a:xfrm>
+          <a:prstGeom prst="rect">
+            <a:avLst/>
+          </a:prstGeom>
+          <a:solidFill>
+            <a:srgbClr val="6A1B9A"/>
+          </a:solidFill>
+          <a:ln/>
+        </p:spPr>
+      </p:sp>
+      <p:sp>
+        <p:nvSpPr>
+          <p:cNvPr id="24" name="Text 22"/>
+          <p:cNvSpPr/>
+          <p:nvPr/>
+        </p:nvSpPr>
+        <p:spPr>
+          <a:xfrm>
+            <a:off x="685800" y="4206240"/>
+            <a:ext cx="7818120" cy="521208"/>
+          </a:xfrm>
+          <a:prstGeom prst="rect">
+            <a:avLst/>
+          </a:prstGeom>
+          <a:noFill/>
+          <a:ln/>
+        </p:spPr>
+        <p:txBody>
+          <a:bodyPr wrap="square" lIns="0" tIns="0" rIns="0" bIns="0" rtlCol="0" anchor="ctr"/>
+          <a:lstStyle/>
+          <a:p>
+            <a:pPr indent="0" marL="0">
+              <a:buNone/>
+            </a:pPr>
+            <a:r>
+              <a:rPr lang="en-US" sz="1200" dirty="0">
+                <a:solidFill>
+                  <a:srgbClr val="1A1A2E"/>
+                </a:solidFill>
+                <a:latin typeface="Calibri" pitchFamily="34" charset="0"/>
+                <a:ea typeface="Calibri" pitchFamily="34" charset="-122"/>
+                <a:cs typeface="Calibri" pitchFamily="34" charset="-120"/>
+              </a:rPr>
+              <a:t>L'ENTITÉ EXTERNE est source ou destinataire des données</a:t>
+            </a:r>
+            <a:endParaRPr lang="en-US" sz="1200" dirty="0"/>
           </a:p>
         </p:txBody>
       </p:sp>
@@ -3458,7 +3907,7 @@
         <p:spPr>
           <a:xfrm>
             <a:off x="0" y="0"/>
-            <a:ext cx="9144000" cy="73152"/>
+            <a:ext cx="9144000" cy="54864"/>
           </a:xfrm>
           <a:prstGeom prst="rect">
             <a:avLst/>
@@ -3477,8 +3926,8 @@
         </p:nvSpPr>
         <p:spPr>
           <a:xfrm>
-            <a:off x="457200" y="228600"/>
-            <a:ext cx="8229600" cy="640080"/>
+            <a:off x="457200" y="182880"/>
+            <a:ext cx="8229600" cy="594360"/>
           </a:xfrm>
           <a:prstGeom prst="rect">
             <a:avLst/>
@@ -3494,7 +3943,7 @@
               <a:buNone/>
             </a:pPr>
             <a:r>
-              <a:rPr lang="en-US" sz="2600" b="1" dirty="0">
+              <a:rPr lang="en-US" sz="2400" b="1" dirty="0">
                 <a:solidFill>
                   <a:srgbClr val="4A0072"/>
                 </a:solidFill>
@@ -3502,9 +3951,9 @@
                 <a:ea typeface="Trebuchet MS" pitchFamily="34" charset="-122"/>
                 <a:cs typeface="Trebuchet MS" pitchFamily="34" charset="-120"/>
               </a:rPr>
-              <a:t>Flowcharts</a:t>
-            </a:r>
-            <a:endParaRPr lang="en-US" sz="2600" dirty="0"/>
+              <a:t>Flowcharts : logique des processus</a:t>
+            </a:r>
+            <a:endParaRPr lang="en-US" sz="2400" dirty="0"/>
           </a:p>
         </p:txBody>
       </p:sp>
@@ -3516,8 +3965,8 @@
         </p:nvSpPr>
         <p:spPr>
           <a:xfrm>
-            <a:off x="457200" y="1051560"/>
-            <a:ext cx="8229600" cy="579120"/>
+            <a:off x="457200" y="914400"/>
+            <a:ext cx="8229600" cy="521208"/>
           </a:xfrm>
           <a:prstGeom prst="rect">
             <a:avLst/>
@@ -3543,8 +3992,8 @@
         </p:nvSpPr>
         <p:spPr>
           <a:xfrm>
-            <a:off x="457200" y="1051560"/>
-            <a:ext cx="54864" cy="579120"/>
+            <a:off x="457200" y="914400"/>
+            <a:ext cx="45720" cy="521208"/>
           </a:xfrm>
           <a:prstGeom prst="rect">
             <a:avLst/>
@@ -3563,8 +4012,8 @@
         </p:nvSpPr>
         <p:spPr>
           <a:xfrm>
-            <a:off x="731520" y="1051560"/>
-            <a:ext cx="7772400" cy="579120"/>
+            <a:off x="685800" y="914400"/>
+            <a:ext cx="7818120" cy="521208"/>
           </a:xfrm>
           <a:prstGeom prst="rect">
             <a:avLst/>
@@ -3580,7 +4029,7 @@
               <a:buNone/>
             </a:pPr>
             <a:r>
-              <a:rPr lang="en-US" sz="1300" dirty="0">
+              <a:rPr lang="en-US" sz="1200" dirty="0">
                 <a:solidFill>
                   <a:srgbClr val="1A1A2E"/>
                 </a:solidFill>
@@ -3588,9 +4037,9 @@
                 <a:ea typeface="Calibri" pitchFamily="34" charset="-122"/>
                 <a:cs typeface="Calibri" pitchFamily="34" charset="-120"/>
               </a:rPr>
-              <a:t>⬭ Ovale : Début / Fin</a:t>
-            </a:r>
-            <a:endParaRPr lang="en-US" sz="1300" dirty="0"/>
+              <a:t>⬭ Ovale : Début / Fin du processus</a:t>
+            </a:r>
+            <a:endParaRPr lang="en-US" sz="1200" dirty="0"/>
           </a:p>
         </p:txBody>
       </p:sp>
@@ -3602,8 +4051,8 @@
         </p:nvSpPr>
         <p:spPr>
           <a:xfrm>
-            <a:off x="457200" y="1661160"/>
-            <a:ext cx="8229600" cy="579120"/>
+            <a:off x="457200" y="1463040"/>
+            <a:ext cx="8229600" cy="521208"/>
           </a:xfrm>
           <a:prstGeom prst="rect">
             <a:avLst/>
@@ -3629,8 +4078,8 @@
         </p:nvSpPr>
         <p:spPr>
           <a:xfrm>
-            <a:off x="457200" y="1661160"/>
-            <a:ext cx="54864" cy="579120"/>
+            <a:off x="457200" y="1463040"/>
+            <a:ext cx="45720" cy="521208"/>
           </a:xfrm>
           <a:prstGeom prst="rect">
             <a:avLst/>
@@ -3649,8 +4098,8 @@
         </p:nvSpPr>
         <p:spPr>
           <a:xfrm>
-            <a:off x="731520" y="1661160"/>
-            <a:ext cx="7772400" cy="579120"/>
+            <a:off x="685800" y="1463040"/>
+            <a:ext cx="7818120" cy="521208"/>
           </a:xfrm>
           <a:prstGeom prst="rect">
             <a:avLst/>
@@ -3666,7 +4115,7 @@
               <a:buNone/>
             </a:pPr>
             <a:r>
-              <a:rPr lang="en-US" sz="1300" dirty="0">
+              <a:rPr lang="en-US" sz="1200" dirty="0">
                 <a:solidFill>
                   <a:srgbClr val="1A1A2E"/>
                 </a:solidFill>
@@ -3674,9 +4123,9 @@
                 <a:ea typeface="Calibri" pitchFamily="34" charset="-122"/>
                 <a:cs typeface="Calibri" pitchFamily="34" charset="-120"/>
               </a:rPr>
-              <a:t>▭ Rectangle : Processus / Action</a:t>
-            </a:r>
-            <a:endParaRPr lang="en-US" sz="1300" dirty="0"/>
+              <a:t>▭ Rectangle : Action / Processus (ex: 'Vérifier disponibilité salle')</a:t>
+            </a:r>
+            <a:endParaRPr lang="en-US" sz="1200" dirty="0"/>
           </a:p>
         </p:txBody>
       </p:sp>
@@ -3688,8 +4137,8 @@
         </p:nvSpPr>
         <p:spPr>
           <a:xfrm>
-            <a:off x="457200" y="2270760"/>
-            <a:ext cx="8229600" cy="579120"/>
+            <a:off x="457200" y="2011680"/>
+            <a:ext cx="8229600" cy="521208"/>
           </a:xfrm>
           <a:prstGeom prst="rect">
             <a:avLst/>
@@ -3715,8 +4164,8 @@
         </p:nvSpPr>
         <p:spPr>
           <a:xfrm>
-            <a:off x="457200" y="2270760"/>
-            <a:ext cx="54864" cy="579120"/>
+            <a:off x="457200" y="2011680"/>
+            <a:ext cx="45720" cy="521208"/>
           </a:xfrm>
           <a:prstGeom prst="rect">
             <a:avLst/>
@@ -3735,8 +4184,8 @@
         </p:nvSpPr>
         <p:spPr>
           <a:xfrm>
-            <a:off x="731520" y="2270760"/>
-            <a:ext cx="7772400" cy="579120"/>
+            <a:off x="685800" y="2011680"/>
+            <a:ext cx="7818120" cy="521208"/>
           </a:xfrm>
           <a:prstGeom prst="rect">
             <a:avLst/>
@@ -3752,7 +4201,7 @@
               <a:buNone/>
             </a:pPr>
             <a:r>
-              <a:rPr lang="en-US" sz="1300" dirty="0">
+              <a:rPr lang="en-US" sz="1200" dirty="0">
                 <a:solidFill>
                   <a:srgbClr val="1A1A2E"/>
                 </a:solidFill>
@@ -3760,9 +4209,9 @@
                 <a:ea typeface="Calibri" pitchFamily="34" charset="-122"/>
                 <a:cs typeface="Calibri" pitchFamily="34" charset="-120"/>
               </a:rPr>
-              <a:t>◇ Losange : Décision (oui/non)</a:t>
-            </a:r>
-            <a:endParaRPr lang="en-US" sz="1300" dirty="0"/>
+              <a:t>◇ Losange : Décision (oui/non, vrai/faux)</a:t>
+            </a:r>
+            <a:endParaRPr lang="en-US" sz="1200" dirty="0"/>
           </a:p>
         </p:txBody>
       </p:sp>
@@ -3774,8 +4223,8 @@
         </p:nvSpPr>
         <p:spPr>
           <a:xfrm>
-            <a:off x="457200" y="2880360"/>
-            <a:ext cx="8229600" cy="579120"/>
+            <a:off x="457200" y="2560320"/>
+            <a:ext cx="8229600" cy="521208"/>
           </a:xfrm>
           <a:prstGeom prst="rect">
             <a:avLst/>
@@ -3801,8 +4250,8 @@
         </p:nvSpPr>
         <p:spPr>
           <a:xfrm>
-            <a:off x="457200" y="2880360"/>
-            <a:ext cx="54864" cy="579120"/>
+            <a:off x="457200" y="2560320"/>
+            <a:ext cx="45720" cy="521208"/>
           </a:xfrm>
           <a:prstGeom prst="rect">
             <a:avLst/>
@@ -3821,8 +4270,8 @@
         </p:nvSpPr>
         <p:spPr>
           <a:xfrm>
-            <a:off x="731520" y="2880360"/>
-            <a:ext cx="7772400" cy="579120"/>
+            <a:off x="685800" y="2560320"/>
+            <a:ext cx="7818120" cy="521208"/>
           </a:xfrm>
           <a:prstGeom prst="rect">
             <a:avLst/>
@@ -3838,7 +4287,7 @@
               <a:buNone/>
             </a:pPr>
             <a:r>
-              <a:rPr lang="en-US" sz="1300" dirty="0">
+              <a:rPr lang="en-US" sz="1200" dirty="0">
                 <a:solidFill>
                   <a:srgbClr val="1A1A2E"/>
                 </a:solidFill>
@@ -3846,9 +4295,9 @@
                 <a:ea typeface="Calibri" pitchFamily="34" charset="-122"/>
                 <a:cs typeface="Calibri" pitchFamily="34" charset="-120"/>
               </a:rPr>
-              <a:t>▱ Parallélogramme : Entrée / Sortie</a:t>
-            </a:r>
-            <a:endParaRPr lang="en-US" sz="1300" dirty="0"/>
+              <a:t>▱ Parallélogramme : Entrée / Sortie (ex: 'Afficher confirmation')</a:t>
+            </a:r>
+            <a:endParaRPr lang="en-US" sz="1200" dirty="0"/>
           </a:p>
         </p:txBody>
       </p:sp>
@@ -3860,8 +4309,8 @@
         </p:nvSpPr>
         <p:spPr>
           <a:xfrm>
-            <a:off x="457200" y="3489960"/>
-            <a:ext cx="8229600" cy="579120"/>
+            <a:off x="457200" y="3108960"/>
+            <a:ext cx="8229600" cy="521208"/>
           </a:xfrm>
           <a:prstGeom prst="rect">
             <a:avLst/>
@@ -3887,8 +4336,8 @@
         </p:nvSpPr>
         <p:spPr>
           <a:xfrm>
-            <a:off x="457200" y="3489960"/>
-            <a:ext cx="54864" cy="579120"/>
+            <a:off x="457200" y="3108960"/>
+            <a:ext cx="45720" cy="521208"/>
           </a:xfrm>
           <a:prstGeom prst="rect">
             <a:avLst/>
@@ -3907,8 +4356,8 @@
         </p:nvSpPr>
         <p:spPr>
           <a:xfrm>
-            <a:off x="731520" y="3489960"/>
-            <a:ext cx="7772400" cy="579120"/>
+            <a:off x="685800" y="3108960"/>
+            <a:ext cx="7818120" cy="521208"/>
           </a:xfrm>
           <a:prstGeom prst="rect">
             <a:avLst/>
@@ -3924,7 +4373,93 @@
               <a:buNone/>
             </a:pPr>
             <a:r>
-              <a:rPr lang="en-US" sz="1300" dirty="0">
+              <a:rPr lang="en-US" sz="1200" dirty="0">
+                <a:solidFill>
+                  <a:srgbClr val="1A1A2E"/>
+                </a:solidFill>
+                <a:latin typeface="Calibri" pitchFamily="34" charset="0"/>
+                <a:ea typeface="Calibri" pitchFamily="34" charset="-122"/>
+                <a:cs typeface="Calibri" pitchFamily="34" charset="-120"/>
+              </a:rPr>
+              <a:t>Flèches : direction du flux logique</a:t>
+            </a:r>
+            <a:endParaRPr lang="en-US" sz="1200" dirty="0"/>
+          </a:p>
+        </p:txBody>
+      </p:sp>
+      <p:sp>
+        <p:nvSpPr>
+          <p:cNvPr id="19" name="Shape 17"/>
+          <p:cNvSpPr/>
+          <p:nvPr/>
+        </p:nvSpPr>
+        <p:spPr>
+          <a:xfrm>
+            <a:off x="457200" y="3657600"/>
+            <a:ext cx="8229600" cy="521208"/>
+          </a:xfrm>
+          <a:prstGeom prst="rect">
+            <a:avLst/>
+          </a:prstGeom>
+          <a:solidFill>
+            <a:srgbClr val="F3E5F5"/>
+          </a:solidFill>
+          <a:ln/>
+          <a:effectLst>
+            <a:outerShdw sx="100000" sy="100000" kx="0" ky="0" algn="bl" rotWithShape="0" blurRad="50800" dist="25400" dir="8100000">
+              <a:srgbClr val="000000">
+                <a:alpha val="12000"/>
+              </a:srgbClr>
+            </a:outerShdw>
+          </a:effectLst>
+        </p:spPr>
+      </p:sp>
+      <p:sp>
+        <p:nvSpPr>
+          <p:cNvPr id="20" name="Shape 18"/>
+          <p:cNvSpPr/>
+          <p:nvPr/>
+        </p:nvSpPr>
+        <p:spPr>
+          <a:xfrm>
+            <a:off x="457200" y="3657600"/>
+            <a:ext cx="45720" cy="521208"/>
+          </a:xfrm>
+          <a:prstGeom prst="rect">
+            <a:avLst/>
+          </a:prstGeom>
+          <a:solidFill>
+            <a:srgbClr val="6A1B9A"/>
+          </a:solidFill>
+          <a:ln/>
+        </p:spPr>
+      </p:sp>
+      <p:sp>
+        <p:nvSpPr>
+          <p:cNvPr id="21" name="Text 19"/>
+          <p:cNvSpPr/>
+          <p:nvPr/>
+        </p:nvSpPr>
+        <p:spPr>
+          <a:xfrm>
+            <a:off x="685800" y="3657600"/>
+            <a:ext cx="7818120" cy="521208"/>
+          </a:xfrm>
+          <a:prstGeom prst="rect">
+            <a:avLst/>
+          </a:prstGeom>
+          <a:noFill/>
+          <a:ln/>
+        </p:spPr>
+        <p:txBody>
+          <a:bodyPr wrap="square" lIns="0" tIns="0" rIns="0" bIns="0" rtlCol="0" anchor="ctr"/>
+          <a:lstStyle/>
+          <a:p>
+            <a:pPr indent="0" marL="0">
+              <a:buNone/>
+            </a:pPr>
+            <a:r>
+              <a:rPr lang="en-US" sz="1200" dirty="0">
                 <a:solidFill>
                   <a:srgbClr val="1A1A2E"/>
                 </a:solidFill>
@@ -3934,26 +4469,26 @@
               </a:rPr>
               <a:t>Exemple : flowchart 'Réserver une session'</a:t>
             </a:r>
-            <a:endParaRPr lang="en-US" sz="1300" dirty="0"/>
-          </a:p>
-        </p:txBody>
-      </p:sp>
-      <p:sp>
-        <p:nvSpPr>
-          <p:cNvPr id="19" name="Shape 17"/>
-          <p:cNvSpPr/>
-          <p:nvPr/>
-        </p:nvSpPr>
-        <p:spPr>
-          <a:xfrm>
-            <a:off x="457200" y="4099560"/>
-            <a:ext cx="8229600" cy="579120"/>
-          </a:xfrm>
-          <a:prstGeom prst="rect">
-            <a:avLst/>
-          </a:prstGeom>
-          <a:solidFill>
-            <a:srgbClr val="F3E5F5"/>
+            <a:endParaRPr lang="en-US" sz="1200" dirty="0"/>
+          </a:p>
+        </p:txBody>
+      </p:sp>
+      <p:sp>
+        <p:nvSpPr>
+          <p:cNvPr id="22" name="Shape 20"/>
+          <p:cNvSpPr/>
+          <p:nvPr/>
+        </p:nvSpPr>
+        <p:spPr>
+          <a:xfrm>
+            <a:off x="457200" y="4206240"/>
+            <a:ext cx="8229600" cy="521208"/>
+          </a:xfrm>
+          <a:prstGeom prst="rect">
+            <a:avLst/>
+          </a:prstGeom>
+          <a:solidFill>
+            <a:srgbClr val="FFFFFF"/>
           </a:solidFill>
           <a:ln/>
           <a:effectLst>
@@ -3967,14 +4502,14 @@
       </p:sp>
       <p:sp>
         <p:nvSpPr>
-          <p:cNvPr id="20" name="Shape 18"/>
-          <p:cNvSpPr/>
-          <p:nvPr/>
-        </p:nvSpPr>
-        <p:spPr>
-          <a:xfrm>
-            <a:off x="457200" y="4099560"/>
-            <a:ext cx="54864" cy="579120"/>
+          <p:cNvPr id="23" name="Shape 21"/>
+          <p:cNvSpPr/>
+          <p:nvPr/>
+        </p:nvSpPr>
+        <p:spPr>
+          <a:xfrm>
+            <a:off x="457200" y="4206240"/>
+            <a:ext cx="45720" cy="521208"/>
           </a:xfrm>
           <a:prstGeom prst="rect">
             <a:avLst/>
@@ -3987,14 +4522,14 @@
       </p:sp>
       <p:sp>
         <p:nvSpPr>
-          <p:cNvPr id="21" name="Text 19"/>
-          <p:cNvSpPr/>
-          <p:nvPr/>
-        </p:nvSpPr>
-        <p:spPr>
-          <a:xfrm>
-            <a:off x="731520" y="4099560"/>
-            <a:ext cx="7772400" cy="579120"/>
+          <p:cNvPr id="24" name="Text 22"/>
+          <p:cNvSpPr/>
+          <p:nvPr/>
+        </p:nvSpPr>
+        <p:spPr>
+          <a:xfrm>
+            <a:off x="685800" y="4206240"/>
+            <a:ext cx="7818120" cy="521208"/>
           </a:xfrm>
           <a:prstGeom prst="rect">
             <a:avLst/>
@@ -4010,7 +4545,7 @@
               <a:buNone/>
             </a:pPr>
             <a:r>
-              <a:rPr lang="en-US" sz="1300" dirty="0">
+              <a:rPr lang="en-US" sz="1200" dirty="0">
                 <a:solidFill>
                   <a:srgbClr val="1A1A2E"/>
                 </a:solidFill>
@@ -4018,48 +4553,9 @@
                 <a:ea typeface="Calibri" pitchFamily="34" charset="-122"/>
                 <a:cs typeface="Calibri" pitchFamily="34" charset="-120"/>
               </a:rPr>
-              <a:t>Inclure les conditions d'erreur (salle indisponible, FK invalide)</a:t>
-            </a:r>
-            <a:endParaRPr lang="en-US" sz="1300" dirty="0"/>
-          </a:p>
-        </p:txBody>
-      </p:sp>
-      <p:sp>
-        <p:nvSpPr>
-          <p:cNvPr id="22" name="Text 20"/>
-          <p:cNvSpPr/>
-          <p:nvPr/>
-        </p:nvSpPr>
-        <p:spPr>
-          <a:xfrm>
-            <a:off x="8229600" y="4754880"/>
-            <a:ext cx="731520" cy="274320"/>
-          </a:xfrm>
-          <a:prstGeom prst="rect">
-            <a:avLst/>
-          </a:prstGeom>
-          <a:noFill/>
-          <a:ln/>
-        </p:spPr>
-        <p:txBody>
-          <a:bodyPr wrap="square" lIns="0" tIns="0" rIns="0" bIns="0" rtlCol="0" anchor="ctr"/>
-          <a:lstStyle/>
-          <a:p>
-            <a:pPr algn="r" indent="0" marL="0">
-              <a:buNone/>
-            </a:pPr>
-            <a:r>
-              <a:rPr lang="en-US" sz="900" dirty="0">
-                <a:solidFill>
-                  <a:srgbClr val="AAAAAA"/>
-                </a:solidFill>
-                <a:latin typeface="Calibri" pitchFamily="34" charset="0"/>
-                <a:ea typeface="Calibri" pitchFamily="34" charset="-122"/>
-                <a:cs typeface="Calibri" pitchFamily="34" charset="-120"/>
-              </a:rPr>
-              <a:t>5/7</a:t>
-            </a:r>
-            <a:endParaRPr lang="en-US" sz="900" dirty="0"/>
+              <a:t>Inclure les cas d'erreur : salle indisponible, ingénieur occupé</a:t>
+            </a:r>
+            <a:endParaRPr lang="en-US" sz="1200" dirty="0"/>
           </a:p>
         </p:txBody>
       </p:sp>
@@ -4104,7 +4600,7 @@
         <p:spPr>
           <a:xfrm>
             <a:off x="0" y="0"/>
-            <a:ext cx="9144000" cy="73152"/>
+            <a:ext cx="9144000" cy="54864"/>
           </a:xfrm>
           <a:prstGeom prst="rect">
             <a:avLst/>
@@ -4123,8 +4619,8 @@
         </p:nvSpPr>
         <p:spPr>
           <a:xfrm>
-            <a:off x="457200" y="228600"/>
-            <a:ext cx="8229600" cy="640080"/>
+            <a:off x="457200" y="182880"/>
+            <a:ext cx="8229600" cy="594360"/>
           </a:xfrm>
           <a:prstGeom prst="rect">
             <a:avLst/>
@@ -4140,7 +4636,7 @@
               <a:buNone/>
             </a:pPr>
             <a:r>
-              <a:rPr lang="en-US" sz="2600" b="1" dirty="0">
+              <a:rPr lang="en-US" sz="2400" b="1" dirty="0">
                 <a:solidFill>
                   <a:srgbClr val="4A0072"/>
                 </a:solidFill>
@@ -4150,7 +4646,7 @@
               </a:rPr>
               <a:t>Dictionnaire de données technique</a:t>
             </a:r>
-            <a:endParaRPr lang="en-US" sz="2600" dirty="0"/>
+            <a:endParaRPr lang="en-US" sz="2400" dirty="0"/>
           </a:p>
         </p:txBody>
       </p:sp>
@@ -4162,8 +4658,8 @@
         </p:nvSpPr>
         <p:spPr>
           <a:xfrm>
-            <a:off x="457200" y="1051560"/>
-            <a:ext cx="8229600" cy="640080"/>
+            <a:off x="457200" y="914400"/>
+            <a:ext cx="8229600" cy="521208"/>
           </a:xfrm>
           <a:prstGeom prst="rect">
             <a:avLst/>
@@ -4189,8 +4685,8 @@
         </p:nvSpPr>
         <p:spPr>
           <a:xfrm>
-            <a:off x="457200" y="1051560"/>
-            <a:ext cx="54864" cy="640080"/>
+            <a:off x="457200" y="914400"/>
+            <a:ext cx="45720" cy="521208"/>
           </a:xfrm>
           <a:prstGeom prst="rect">
             <a:avLst/>
@@ -4209,8 +4705,8 @@
         </p:nvSpPr>
         <p:spPr>
           <a:xfrm>
-            <a:off x="731520" y="1051560"/>
-            <a:ext cx="7772400" cy="640080"/>
+            <a:off x="685800" y="914400"/>
+            <a:ext cx="7818120" cy="521208"/>
           </a:xfrm>
           <a:prstGeom prst="rect">
             <a:avLst/>
@@ -4226,7 +4722,7 @@
               <a:buNone/>
             </a:pPr>
             <a:r>
-              <a:rPr lang="en-US" sz="1300" dirty="0">
+              <a:rPr lang="en-US" sz="1200" dirty="0">
                 <a:solidFill>
                   <a:srgbClr val="1A1A2E"/>
                 </a:solidFill>
@@ -4236,7 +4732,7 @@
               </a:rPr>
               <a:t>≠ DD de conception (Module 3) : ici c'est le doc FINAL</a:t>
             </a:r>
-            <a:endParaRPr lang="en-US" sz="1300" dirty="0"/>
+            <a:endParaRPr lang="en-US" sz="1200" dirty="0"/>
           </a:p>
         </p:txBody>
       </p:sp>
@@ -4248,8 +4744,8 @@
         </p:nvSpPr>
         <p:spPr>
           <a:xfrm>
-            <a:off x="457200" y="1783080"/>
-            <a:ext cx="8229600" cy="640080"/>
+            <a:off x="457200" y="1463040"/>
+            <a:ext cx="8229600" cy="521208"/>
           </a:xfrm>
           <a:prstGeom prst="rect">
             <a:avLst/>
@@ -4275,8 +4771,8 @@
         </p:nvSpPr>
         <p:spPr>
           <a:xfrm>
-            <a:off x="457200" y="1783080"/>
-            <a:ext cx="54864" cy="640080"/>
+            <a:off x="457200" y="1463040"/>
+            <a:ext cx="45720" cy="521208"/>
           </a:xfrm>
           <a:prstGeom prst="rect">
             <a:avLst/>
@@ -4295,8 +4791,8 @@
         </p:nvSpPr>
         <p:spPr>
           <a:xfrm>
-            <a:off x="731520" y="1783080"/>
-            <a:ext cx="7772400" cy="640080"/>
+            <a:off x="685800" y="1463040"/>
+            <a:ext cx="7818120" cy="521208"/>
           </a:xfrm>
           <a:prstGeom prst="rect">
             <a:avLst/>
@@ -4312,7 +4808,7 @@
               <a:buNone/>
             </a:pPr>
             <a:r>
-              <a:rPr lang="en-US" sz="1300" dirty="0">
+              <a:rPr lang="en-US" sz="1200" dirty="0">
                 <a:solidFill>
                   <a:srgbClr val="1A1A2E"/>
                 </a:solidFill>
@@ -4320,9 +4816,9 @@
                 <a:ea typeface="Calibri" pitchFamily="34" charset="-122"/>
                 <a:cs typeface="Calibri" pitchFamily="34" charset="-120"/>
               </a:rPr>
-              <a:t>Pour chaque table : nom, description, nb colonnes</a:t>
-            </a:r>
-            <a:endParaRPr lang="en-US" sz="1300" dirty="0"/>
+              <a:t>Pour chaque table : nom, description, nombre de colonnes</a:t>
+            </a:r>
+            <a:endParaRPr lang="en-US" sz="1200" dirty="0"/>
           </a:p>
         </p:txBody>
       </p:sp>
@@ -4334,8 +4830,8 @@
         </p:nvSpPr>
         <p:spPr>
           <a:xfrm>
-            <a:off x="457200" y="2514600"/>
-            <a:ext cx="8229600" cy="640080"/>
+            <a:off x="457200" y="2011680"/>
+            <a:ext cx="8229600" cy="521208"/>
           </a:xfrm>
           <a:prstGeom prst="rect">
             <a:avLst/>
@@ -4361,8 +4857,8 @@
         </p:nvSpPr>
         <p:spPr>
           <a:xfrm>
-            <a:off x="457200" y="2514600"/>
-            <a:ext cx="54864" cy="640080"/>
+            <a:off x="457200" y="2011680"/>
+            <a:ext cx="45720" cy="521208"/>
           </a:xfrm>
           <a:prstGeom prst="rect">
             <a:avLst/>
@@ -4381,8 +4877,8 @@
         </p:nvSpPr>
         <p:spPr>
           <a:xfrm>
-            <a:off x="731520" y="2514600"/>
-            <a:ext cx="7772400" cy="640080"/>
+            <a:off x="685800" y="2011680"/>
+            <a:ext cx="7818120" cy="521208"/>
           </a:xfrm>
           <a:prstGeom prst="rect">
             <a:avLst/>
@@ -4398,7 +4894,7 @@
               <a:buNone/>
             </a:pPr>
             <a:r>
-              <a:rPr lang="en-US" sz="1300" dirty="0">
+              <a:rPr lang="en-US" sz="1200" dirty="0">
                 <a:solidFill>
                   <a:srgbClr val="1A1A2E"/>
                 </a:solidFill>
@@ -4406,9 +4902,9 @@
                 <a:ea typeface="Calibri" pitchFamily="34" charset="-122"/>
                 <a:cs typeface="Calibri" pitchFamily="34" charset="-120"/>
               </a:rPr>
-              <a:t>Pour chaque colonne : nom, type MySQL, contraintes, description</a:t>
-            </a:r>
-            <a:endParaRPr lang="en-US" sz="1300" dirty="0"/>
+              <a:t>Pour chaque colonne : nom, type MySQL EXACT, contraintes, description</a:t>
+            </a:r>
+            <a:endParaRPr lang="en-US" sz="1200" dirty="0"/>
           </a:p>
         </p:txBody>
       </p:sp>
@@ -4420,8 +4916,8 @@
         </p:nvSpPr>
         <p:spPr>
           <a:xfrm>
-            <a:off x="457200" y="3246120"/>
-            <a:ext cx="8229600" cy="640080"/>
+            <a:off x="457200" y="2560320"/>
+            <a:ext cx="8229600" cy="521208"/>
           </a:xfrm>
           <a:prstGeom prst="rect">
             <a:avLst/>
@@ -4447,8 +4943,8 @@
         </p:nvSpPr>
         <p:spPr>
           <a:xfrm>
-            <a:off x="457200" y="3246120"/>
-            <a:ext cx="54864" cy="640080"/>
+            <a:off x="457200" y="2560320"/>
+            <a:ext cx="45720" cy="521208"/>
           </a:xfrm>
           <a:prstGeom prst="rect">
             <a:avLst/>
@@ -4467,8 +4963,8 @@
         </p:nvSpPr>
         <p:spPr>
           <a:xfrm>
-            <a:off x="731520" y="3246120"/>
-            <a:ext cx="7772400" cy="640080"/>
+            <a:off x="685800" y="2560320"/>
+            <a:ext cx="7818120" cy="521208"/>
           </a:xfrm>
           <a:prstGeom prst="rect">
             <a:avLst/>
@@ -4484,7 +4980,7 @@
               <a:buNone/>
             </a:pPr>
             <a:r>
-              <a:rPr lang="en-US" sz="1300" dirty="0">
+              <a:rPr lang="en-US" sz="1200" dirty="0">
                 <a:solidFill>
                   <a:srgbClr val="1A1A2E"/>
                 </a:solidFill>
@@ -4492,9 +4988,9 @@
                 <a:ea typeface="Calibri" pitchFamily="34" charset="-122"/>
                 <a:cs typeface="Calibri" pitchFamily="34" charset="-120"/>
               </a:rPr>
-              <a:t>Inclure les FK avec table référencée</a:t>
-            </a:r>
-            <a:endParaRPr lang="en-US" sz="1300" dirty="0"/>
+              <a:t>Inclure les FK avec la table référencée + comportement (CASCADE/RESTRICT)</a:t>
+            </a:r>
+            <a:endParaRPr lang="en-US" sz="1200" dirty="0"/>
           </a:p>
         </p:txBody>
       </p:sp>
@@ -4506,8 +5002,8 @@
         </p:nvSpPr>
         <p:spPr>
           <a:xfrm>
-            <a:off x="457200" y="3977640"/>
-            <a:ext cx="8229600" cy="640080"/>
+            <a:off x="457200" y="3108960"/>
+            <a:ext cx="8229600" cy="521208"/>
           </a:xfrm>
           <a:prstGeom prst="rect">
             <a:avLst/>
@@ -4533,8 +5029,8 @@
         </p:nvSpPr>
         <p:spPr>
           <a:xfrm>
-            <a:off x="457200" y="3977640"/>
-            <a:ext cx="54864" cy="640080"/>
+            <a:off x="457200" y="3108960"/>
+            <a:ext cx="45720" cy="521208"/>
           </a:xfrm>
           <a:prstGeom prst="rect">
             <a:avLst/>
@@ -4553,8 +5049,8 @@
         </p:nvSpPr>
         <p:spPr>
           <a:xfrm>
-            <a:off x="731520" y="3977640"/>
-            <a:ext cx="7772400" cy="640080"/>
+            <a:off x="685800" y="3108960"/>
+            <a:ext cx="7818120" cy="521208"/>
           </a:xfrm>
           <a:prstGeom prst="rect">
             <a:avLst/>
@@ -4570,56 +5066,189 @@
               <a:buNone/>
             </a:pPr>
             <a:r>
-              <a:rPr lang="en-US" sz="1100" dirty="0">
+              <a:rPr lang="en-US" sz="1200" dirty="0">
                 <a:solidFill>
-                  <a:srgbClr val="4A0072"/>
-                </a:solidFill>
-                <a:latin typeface="JetBrains Mono" pitchFamily="34" charset="0"/>
-                <a:ea typeface="JetBrains Mono" pitchFamily="34" charset="-122"/>
-                <a:cs typeface="JetBrains Mono" pitchFamily="34" charset="-120"/>
-              </a:rPr>
-              <a:t>Généré avec SHOW CREATE TABLE + documentation manuelle</a:t>
-            </a:r>
-            <a:endParaRPr lang="en-US" sz="1100" dirty="0"/>
-          </a:p>
-        </p:txBody>
-      </p:sp>
-      <p:sp>
-        <p:nvSpPr>
-          <p:cNvPr id="19" name="Text 17"/>
-          <p:cNvSpPr/>
-          <p:nvPr/>
-        </p:nvSpPr>
-        <p:spPr>
-          <a:xfrm>
-            <a:off x="8229600" y="4754880"/>
-            <a:ext cx="731520" cy="274320"/>
-          </a:xfrm>
-          <a:prstGeom prst="rect">
-            <a:avLst/>
-          </a:prstGeom>
-          <a:noFill/>
-          <a:ln/>
-        </p:spPr>
-        <p:txBody>
-          <a:bodyPr wrap="square" lIns="0" tIns="0" rIns="0" bIns="0" rtlCol="0" anchor="ctr"/>
-          <a:lstStyle/>
-          <a:p>
-            <a:pPr algn="r" indent="0" marL="0">
-              <a:buNone/>
-            </a:pPr>
-            <a:r>
-              <a:rPr lang="en-US" sz="900" dirty="0">
-                <a:solidFill>
-                  <a:srgbClr val="AAAAAA"/>
+                  <a:srgbClr val="1A1A2E"/>
                 </a:solidFill>
                 <a:latin typeface="Calibri" pitchFamily="34" charset="0"/>
                 <a:ea typeface="Calibri" pitchFamily="34" charset="-122"/>
                 <a:cs typeface="Calibri" pitchFamily="34" charset="-120"/>
               </a:rPr>
-              <a:t>6/7</a:t>
-            </a:r>
-            <a:endParaRPr lang="en-US" sz="900" dirty="0"/>
+              <a:t>Générer automatiquement : SHOW CREATE TABLE → copier-coller + annoter</a:t>
+            </a:r>
+            <a:endParaRPr lang="en-US" sz="1200" dirty="0"/>
+          </a:p>
+        </p:txBody>
+      </p:sp>
+      <p:sp>
+        <p:nvSpPr>
+          <p:cNvPr id="19" name="Shape 17"/>
+          <p:cNvSpPr/>
+          <p:nvPr/>
+        </p:nvSpPr>
+        <p:spPr>
+          <a:xfrm>
+            <a:off x="457200" y="3657600"/>
+            <a:ext cx="8229600" cy="521208"/>
+          </a:xfrm>
+          <a:prstGeom prst="rect">
+            <a:avLst/>
+          </a:prstGeom>
+          <a:solidFill>
+            <a:srgbClr val="F3E5F5"/>
+          </a:solidFill>
+          <a:ln/>
+          <a:effectLst>
+            <a:outerShdw sx="100000" sy="100000" kx="0" ky="0" algn="bl" rotWithShape="0" blurRad="50800" dist="25400" dir="8100000">
+              <a:srgbClr val="000000">
+                <a:alpha val="12000"/>
+              </a:srgbClr>
+            </a:outerShdw>
+          </a:effectLst>
+        </p:spPr>
+      </p:sp>
+      <p:sp>
+        <p:nvSpPr>
+          <p:cNvPr id="20" name="Shape 18"/>
+          <p:cNvSpPr/>
+          <p:nvPr/>
+        </p:nvSpPr>
+        <p:spPr>
+          <a:xfrm>
+            <a:off x="457200" y="3657600"/>
+            <a:ext cx="45720" cy="521208"/>
+          </a:xfrm>
+          <a:prstGeom prst="rect">
+            <a:avLst/>
+          </a:prstGeom>
+          <a:solidFill>
+            <a:srgbClr val="6A1B9A"/>
+          </a:solidFill>
+          <a:ln/>
+        </p:spPr>
+      </p:sp>
+      <p:sp>
+        <p:nvSpPr>
+          <p:cNvPr id="21" name="Text 19"/>
+          <p:cNvSpPr/>
+          <p:nvPr/>
+        </p:nvSpPr>
+        <p:spPr>
+          <a:xfrm>
+            <a:off x="685800" y="3657600"/>
+            <a:ext cx="7818120" cy="521208"/>
+          </a:xfrm>
+          <a:prstGeom prst="rect">
+            <a:avLst/>
+          </a:prstGeom>
+          <a:noFill/>
+          <a:ln/>
+        </p:spPr>
+        <p:txBody>
+          <a:bodyPr wrap="square" lIns="0" tIns="0" rIns="0" bIns="0" rtlCol="0" anchor="ctr"/>
+          <a:lstStyle/>
+          <a:p>
+            <a:pPr indent="0" marL="0">
+              <a:buNone/>
+            </a:pPr>
+            <a:r>
+              <a:rPr lang="en-US" sz="1200" dirty="0">
+                <a:solidFill>
+                  <a:srgbClr val="1A1A2E"/>
+                </a:solidFill>
+                <a:latin typeface="Calibri" pitchFamily="34" charset="0"/>
+                <a:ea typeface="Calibri" pitchFamily="34" charset="-122"/>
+                <a:cs typeface="Calibri" pitchFamily="34" charset="-120"/>
+              </a:rPr>
+              <a:t>Ajouter les index avec justification</a:t>
+            </a:r>
+            <a:endParaRPr lang="en-US" sz="1200" dirty="0"/>
+          </a:p>
+        </p:txBody>
+      </p:sp>
+      <p:sp>
+        <p:nvSpPr>
+          <p:cNvPr id="22" name="Shape 20"/>
+          <p:cNvSpPr/>
+          <p:nvPr/>
+        </p:nvSpPr>
+        <p:spPr>
+          <a:xfrm>
+            <a:off x="457200" y="4206240"/>
+            <a:ext cx="8229600" cy="521208"/>
+          </a:xfrm>
+          <a:prstGeom prst="rect">
+            <a:avLst/>
+          </a:prstGeom>
+          <a:solidFill>
+            <a:srgbClr val="FFFFFF"/>
+          </a:solidFill>
+          <a:ln/>
+          <a:effectLst>
+            <a:outerShdw sx="100000" sy="100000" kx="0" ky="0" algn="bl" rotWithShape="0" blurRad="50800" dist="25400" dir="8100000">
+              <a:srgbClr val="000000">
+                <a:alpha val="12000"/>
+              </a:srgbClr>
+            </a:outerShdw>
+          </a:effectLst>
+        </p:spPr>
+      </p:sp>
+      <p:sp>
+        <p:nvSpPr>
+          <p:cNvPr id="23" name="Shape 21"/>
+          <p:cNvSpPr/>
+          <p:nvPr/>
+        </p:nvSpPr>
+        <p:spPr>
+          <a:xfrm>
+            <a:off x="457200" y="4206240"/>
+            <a:ext cx="45720" cy="521208"/>
+          </a:xfrm>
+          <a:prstGeom prst="rect">
+            <a:avLst/>
+          </a:prstGeom>
+          <a:solidFill>
+            <a:srgbClr val="6A1B9A"/>
+          </a:solidFill>
+          <a:ln/>
+        </p:spPr>
+      </p:sp>
+      <p:sp>
+        <p:nvSpPr>
+          <p:cNvPr id="24" name="Text 22"/>
+          <p:cNvSpPr/>
+          <p:nvPr/>
+        </p:nvSpPr>
+        <p:spPr>
+          <a:xfrm>
+            <a:off x="685800" y="4206240"/>
+            <a:ext cx="7818120" cy="521208"/>
+          </a:xfrm>
+          <a:prstGeom prst="rect">
+            <a:avLst/>
+          </a:prstGeom>
+          <a:noFill/>
+          <a:ln/>
+        </p:spPr>
+        <p:txBody>
+          <a:bodyPr wrap="square" lIns="0" tIns="0" rIns="0" bIns="0" rtlCol="0" anchor="ctr"/>
+          <a:lstStyle/>
+          <a:p>
+            <a:pPr indent="0" marL="0">
+              <a:buNone/>
+            </a:pPr>
+            <a:r>
+              <a:rPr lang="en-US" sz="1200" dirty="0">
+                <a:solidFill>
+                  <a:srgbClr val="1A1A2E"/>
+                </a:solidFill>
+                <a:latin typeface="Calibri" pitchFamily="34" charset="0"/>
+                <a:ea typeface="Calibri" pitchFamily="34" charset="-122"/>
+                <a:cs typeface="Calibri" pitchFamily="34" charset="-120"/>
+              </a:rPr>
+              <a:t>Ce dictionnaire technique accompagne les DFD et flowcharts</a:t>
+            </a:r>
+            <a:endParaRPr lang="en-US" sz="1200" dirty="0"/>
           </a:p>
         </p:txBody>
       </p:sp>
@@ -4634,6 +5263,613 @@
 <file path=ppt/slides/slide7.xml><?xml version="1.0" encoding="utf-8"?>
 <p:sld xmlns:a="http://schemas.openxmlformats.org/drawingml/2006/main" xmlns:r="http://schemas.openxmlformats.org/officeDocument/2006/relationships" xmlns:p="http://schemas.openxmlformats.org/presentationml/2006/main">
   <p:cSld name="Slide 7">
+    <p:bg>
+      <p:bgPr>
+        <a:solidFill>
+          <a:srgbClr val="F5F7FA"/>
+        </a:solidFill>
+      </p:bgPr>
+    </p:bg>
+    <p:spTree>
+      <p:nvGrpSpPr>
+        <p:cNvPr id="1" name=""/>
+        <p:cNvGrpSpPr/>
+        <p:nvPr/>
+      </p:nvGrpSpPr>
+      <p:grpSpPr>
+        <a:xfrm>
+          <a:off x="0" y="0"/>
+          <a:ext cx="0" cy="0"/>
+          <a:chOff x="0" y="0"/>
+          <a:chExt cx="0" cy="0"/>
+        </a:xfrm>
+      </p:grpSpPr>
+      <p:sp>
+        <p:nvSpPr>
+          <p:cNvPr id="2" name="Shape 0"/>
+          <p:cNvSpPr/>
+          <p:nvPr/>
+        </p:nvSpPr>
+        <p:spPr>
+          <a:xfrm>
+            <a:off x="0" y="0"/>
+            <a:ext cx="9144000" cy="54864"/>
+          </a:xfrm>
+          <a:prstGeom prst="rect">
+            <a:avLst/>
+          </a:prstGeom>
+          <a:solidFill>
+            <a:srgbClr val="6A1B9A"/>
+          </a:solidFill>
+          <a:ln/>
+        </p:spPr>
+      </p:sp>
+      <p:sp>
+        <p:nvSpPr>
+          <p:cNvPr id="3" name="Text 1"/>
+          <p:cNvSpPr/>
+          <p:nvPr/>
+        </p:nvSpPr>
+        <p:spPr>
+          <a:xfrm>
+            <a:off x="457200" y="182880"/>
+            <a:ext cx="8229600" cy="594360"/>
+          </a:xfrm>
+          <a:prstGeom prst="rect">
+            <a:avLst/>
+          </a:prstGeom>
+          <a:noFill/>
+          <a:ln/>
+        </p:spPr>
+        <p:txBody>
+          <a:bodyPr wrap="square" lIns="0" tIns="0" rIns="0" bIns="0" rtlCol="0" anchor="ctr"/>
+          <a:lstStyle/>
+          <a:p>
+            <a:pPr indent="0" marL="0">
+              <a:buNone/>
+            </a:pPr>
+            <a:r>
+              <a:rPr lang="en-US" sz="2400" b="1" dirty="0">
+                <a:solidFill>
+                  <a:srgbClr val="4A0072"/>
+                </a:solidFill>
+                <a:latin typeface="Trebuchet MS" pitchFamily="34" charset="0"/>
+                <a:ea typeface="Trebuchet MS" pitchFamily="34" charset="-122"/>
+                <a:cs typeface="Trebuchet MS" pitchFamily="34" charset="-120"/>
+              </a:rPr>
+              <a:t>Exercice Module 19</a:t>
+            </a:r>
+            <a:endParaRPr lang="en-US" sz="2400" dirty="0"/>
+          </a:p>
+        </p:txBody>
+      </p:sp>
+      <p:sp>
+        <p:nvSpPr>
+          <p:cNvPr id="4" name="Shape 2"/>
+          <p:cNvSpPr/>
+          <p:nvPr/>
+        </p:nvSpPr>
+        <p:spPr>
+          <a:xfrm>
+            <a:off x="457200" y="914400"/>
+            <a:ext cx="8229600" cy="521208"/>
+          </a:xfrm>
+          <a:prstGeom prst="rect">
+            <a:avLst/>
+          </a:prstGeom>
+          <a:solidFill>
+            <a:srgbClr val="FFFFFF"/>
+          </a:solidFill>
+          <a:ln/>
+          <a:effectLst>
+            <a:outerShdw sx="100000" sy="100000" kx="0" ky="0" algn="bl" rotWithShape="0" blurRad="50800" dist="25400" dir="8100000">
+              <a:srgbClr val="000000">
+                <a:alpha val="12000"/>
+              </a:srgbClr>
+            </a:outerShdw>
+          </a:effectLst>
+        </p:spPr>
+      </p:sp>
+      <p:sp>
+        <p:nvSpPr>
+          <p:cNvPr id="5" name="Shape 3"/>
+          <p:cNvSpPr/>
+          <p:nvPr/>
+        </p:nvSpPr>
+        <p:spPr>
+          <a:xfrm>
+            <a:off x="457200" y="914400"/>
+            <a:ext cx="45720" cy="521208"/>
+          </a:xfrm>
+          <a:prstGeom prst="rect">
+            <a:avLst/>
+          </a:prstGeom>
+          <a:solidFill>
+            <a:srgbClr val="6A1B9A"/>
+          </a:solidFill>
+          <a:ln/>
+        </p:spPr>
+      </p:sp>
+      <p:sp>
+        <p:nvSpPr>
+          <p:cNvPr id="6" name="Text 4"/>
+          <p:cNvSpPr/>
+          <p:nvPr/>
+        </p:nvSpPr>
+        <p:spPr>
+          <a:xfrm>
+            <a:off x="685800" y="914400"/>
+            <a:ext cx="7818120" cy="521208"/>
+          </a:xfrm>
+          <a:prstGeom prst="rect">
+            <a:avLst/>
+          </a:prstGeom>
+          <a:noFill/>
+          <a:ln/>
+        </p:spPr>
+        <p:txBody>
+          <a:bodyPr wrap="square" lIns="0" tIns="0" rIns="0" bIns="0" rtlCol="0" anchor="ctr"/>
+          <a:lstStyle/>
+          <a:p>
+            <a:pPr indent="0" marL="0">
+              <a:buNone/>
+            </a:pPr>
+            <a:r>
+              <a:rPr lang="en-US" sz="1200" dirty="0">
+                <a:solidFill>
+                  <a:srgbClr val="1A1A2E"/>
+                </a:solidFill>
+                <a:latin typeface="Calibri" pitchFamily="34" charset="0"/>
+                <a:ea typeface="Calibri" pitchFamily="34" charset="-122"/>
+                <a:cs typeface="Calibri" pitchFamily="34" charset="-120"/>
+              </a:rPr>
+              <a:t>Créer le DFD niveau 0 de SwissSound (Draw.io)</a:t>
+            </a:r>
+            <a:endParaRPr lang="en-US" sz="1200" dirty="0"/>
+          </a:p>
+        </p:txBody>
+      </p:sp>
+      <p:sp>
+        <p:nvSpPr>
+          <p:cNvPr id="7" name="Shape 5"/>
+          <p:cNvSpPr/>
+          <p:nvPr/>
+        </p:nvSpPr>
+        <p:spPr>
+          <a:xfrm>
+            <a:off x="457200" y="1463040"/>
+            <a:ext cx="8229600" cy="521208"/>
+          </a:xfrm>
+          <a:prstGeom prst="rect">
+            <a:avLst/>
+          </a:prstGeom>
+          <a:solidFill>
+            <a:srgbClr val="F3E5F5"/>
+          </a:solidFill>
+          <a:ln/>
+          <a:effectLst>
+            <a:outerShdw sx="100000" sy="100000" kx="0" ky="0" algn="bl" rotWithShape="0" blurRad="50800" dist="25400" dir="8100000">
+              <a:srgbClr val="000000">
+                <a:alpha val="12000"/>
+              </a:srgbClr>
+            </a:outerShdw>
+          </a:effectLst>
+        </p:spPr>
+      </p:sp>
+      <p:sp>
+        <p:nvSpPr>
+          <p:cNvPr id="8" name="Shape 6"/>
+          <p:cNvSpPr/>
+          <p:nvPr/>
+        </p:nvSpPr>
+        <p:spPr>
+          <a:xfrm>
+            <a:off x="457200" y="1463040"/>
+            <a:ext cx="45720" cy="521208"/>
+          </a:xfrm>
+          <a:prstGeom prst="rect">
+            <a:avLst/>
+          </a:prstGeom>
+          <a:solidFill>
+            <a:srgbClr val="6A1B9A"/>
+          </a:solidFill>
+          <a:ln/>
+        </p:spPr>
+      </p:sp>
+      <p:sp>
+        <p:nvSpPr>
+          <p:cNvPr id="9" name="Text 7"/>
+          <p:cNvSpPr/>
+          <p:nvPr/>
+        </p:nvSpPr>
+        <p:spPr>
+          <a:xfrm>
+            <a:off x="685800" y="1463040"/>
+            <a:ext cx="7818120" cy="521208"/>
+          </a:xfrm>
+          <a:prstGeom prst="rect">
+            <a:avLst/>
+          </a:prstGeom>
+          <a:noFill/>
+          <a:ln/>
+        </p:spPr>
+        <p:txBody>
+          <a:bodyPr wrap="square" lIns="0" tIns="0" rIns="0" bIns="0" rtlCol="0" anchor="ctr"/>
+          <a:lstStyle/>
+          <a:p>
+            <a:pPr indent="0" marL="0">
+              <a:buNone/>
+            </a:pPr>
+            <a:r>
+              <a:rPr lang="en-US" sz="1200" dirty="0">
+                <a:solidFill>
+                  <a:srgbClr val="1A1A2E"/>
+                </a:solidFill>
+                <a:latin typeface="Calibri" pitchFamily="34" charset="0"/>
+                <a:ea typeface="Calibri" pitchFamily="34" charset="-122"/>
+                <a:cs typeface="Calibri" pitchFamily="34" charset="-120"/>
+              </a:rPr>
+              <a:t>Créer le DFD niveau 1 (4-5 sous-processus)</a:t>
+            </a:r>
+            <a:endParaRPr lang="en-US" sz="1200" dirty="0"/>
+          </a:p>
+        </p:txBody>
+      </p:sp>
+      <p:sp>
+        <p:nvSpPr>
+          <p:cNvPr id="10" name="Shape 8"/>
+          <p:cNvSpPr/>
+          <p:nvPr/>
+        </p:nvSpPr>
+        <p:spPr>
+          <a:xfrm>
+            <a:off x="457200" y="2011680"/>
+            <a:ext cx="8229600" cy="521208"/>
+          </a:xfrm>
+          <a:prstGeom prst="rect">
+            <a:avLst/>
+          </a:prstGeom>
+          <a:solidFill>
+            <a:srgbClr val="FFFFFF"/>
+          </a:solidFill>
+          <a:ln/>
+          <a:effectLst>
+            <a:outerShdw sx="100000" sy="100000" kx="0" ky="0" algn="bl" rotWithShape="0" blurRad="50800" dist="25400" dir="8100000">
+              <a:srgbClr val="000000">
+                <a:alpha val="12000"/>
+              </a:srgbClr>
+            </a:outerShdw>
+          </a:effectLst>
+        </p:spPr>
+      </p:sp>
+      <p:sp>
+        <p:nvSpPr>
+          <p:cNvPr id="11" name="Shape 9"/>
+          <p:cNvSpPr/>
+          <p:nvPr/>
+        </p:nvSpPr>
+        <p:spPr>
+          <a:xfrm>
+            <a:off x="457200" y="2011680"/>
+            <a:ext cx="45720" cy="521208"/>
+          </a:xfrm>
+          <a:prstGeom prst="rect">
+            <a:avLst/>
+          </a:prstGeom>
+          <a:solidFill>
+            <a:srgbClr val="6A1B9A"/>
+          </a:solidFill>
+          <a:ln/>
+        </p:spPr>
+      </p:sp>
+      <p:sp>
+        <p:nvSpPr>
+          <p:cNvPr id="12" name="Text 10"/>
+          <p:cNvSpPr/>
+          <p:nvPr/>
+        </p:nvSpPr>
+        <p:spPr>
+          <a:xfrm>
+            <a:off x="685800" y="2011680"/>
+            <a:ext cx="7818120" cy="521208"/>
+          </a:xfrm>
+          <a:prstGeom prst="rect">
+            <a:avLst/>
+          </a:prstGeom>
+          <a:noFill/>
+          <a:ln/>
+        </p:spPr>
+        <p:txBody>
+          <a:bodyPr wrap="square" lIns="0" tIns="0" rIns="0" bIns="0" rtlCol="0" anchor="ctr"/>
+          <a:lstStyle/>
+          <a:p>
+            <a:pPr indent="0" marL="0">
+              <a:buNone/>
+            </a:pPr>
+            <a:r>
+              <a:rPr lang="en-US" sz="1200" dirty="0">
+                <a:solidFill>
+                  <a:srgbClr val="1A1A2E"/>
+                </a:solidFill>
+                <a:latin typeface="Calibri" pitchFamily="34" charset="0"/>
+                <a:ea typeface="Calibri" pitchFamily="34" charset="-122"/>
+                <a:cs typeface="Calibri" pitchFamily="34" charset="-120"/>
+              </a:rPr>
+              <a:t>Créer le DFD niveau 2 pour le processus 'Facturation'</a:t>
+            </a:r>
+            <a:endParaRPr lang="en-US" sz="1200" dirty="0"/>
+          </a:p>
+        </p:txBody>
+      </p:sp>
+      <p:sp>
+        <p:nvSpPr>
+          <p:cNvPr id="13" name="Shape 11"/>
+          <p:cNvSpPr/>
+          <p:nvPr/>
+        </p:nvSpPr>
+        <p:spPr>
+          <a:xfrm>
+            <a:off x="457200" y="2560320"/>
+            <a:ext cx="8229600" cy="521208"/>
+          </a:xfrm>
+          <a:prstGeom prst="rect">
+            <a:avLst/>
+          </a:prstGeom>
+          <a:solidFill>
+            <a:srgbClr val="F3E5F5"/>
+          </a:solidFill>
+          <a:ln/>
+          <a:effectLst>
+            <a:outerShdw sx="100000" sy="100000" kx="0" ky="0" algn="bl" rotWithShape="0" blurRad="50800" dist="25400" dir="8100000">
+              <a:srgbClr val="000000">
+                <a:alpha val="12000"/>
+              </a:srgbClr>
+            </a:outerShdw>
+          </a:effectLst>
+        </p:spPr>
+      </p:sp>
+      <p:sp>
+        <p:nvSpPr>
+          <p:cNvPr id="14" name="Shape 12"/>
+          <p:cNvSpPr/>
+          <p:nvPr/>
+        </p:nvSpPr>
+        <p:spPr>
+          <a:xfrm>
+            <a:off x="457200" y="2560320"/>
+            <a:ext cx="45720" cy="521208"/>
+          </a:xfrm>
+          <a:prstGeom prst="rect">
+            <a:avLst/>
+          </a:prstGeom>
+          <a:solidFill>
+            <a:srgbClr val="6A1B9A"/>
+          </a:solidFill>
+          <a:ln/>
+        </p:spPr>
+      </p:sp>
+      <p:sp>
+        <p:nvSpPr>
+          <p:cNvPr id="15" name="Text 13"/>
+          <p:cNvSpPr/>
+          <p:nvPr/>
+        </p:nvSpPr>
+        <p:spPr>
+          <a:xfrm>
+            <a:off x="685800" y="2560320"/>
+            <a:ext cx="7818120" cy="521208"/>
+          </a:xfrm>
+          <a:prstGeom prst="rect">
+            <a:avLst/>
+          </a:prstGeom>
+          <a:noFill/>
+          <a:ln/>
+        </p:spPr>
+        <p:txBody>
+          <a:bodyPr wrap="square" lIns="0" tIns="0" rIns="0" bIns="0" rtlCol="0" anchor="ctr"/>
+          <a:lstStyle/>
+          <a:p>
+            <a:pPr indent="0" marL="0">
+              <a:buNone/>
+            </a:pPr>
+            <a:r>
+              <a:rPr lang="en-US" sz="1200" dirty="0">
+                <a:solidFill>
+                  <a:srgbClr val="1A1A2E"/>
+                </a:solidFill>
+                <a:latin typeface="Calibri" pitchFamily="34" charset="0"/>
+                <a:ea typeface="Calibri" pitchFamily="34" charset="-122"/>
+                <a:cs typeface="Calibri" pitchFamily="34" charset="-120"/>
+              </a:rPr>
+              <a:t>Créer le flowchart 'Réserver une session' avec cas d'erreur</a:t>
+            </a:r>
+            <a:endParaRPr lang="en-US" sz="1200" dirty="0"/>
+          </a:p>
+        </p:txBody>
+      </p:sp>
+      <p:sp>
+        <p:nvSpPr>
+          <p:cNvPr id="16" name="Shape 14"/>
+          <p:cNvSpPr/>
+          <p:nvPr/>
+        </p:nvSpPr>
+        <p:spPr>
+          <a:xfrm>
+            <a:off x="457200" y="3108960"/>
+            <a:ext cx="8229600" cy="521208"/>
+          </a:xfrm>
+          <a:prstGeom prst="rect">
+            <a:avLst/>
+          </a:prstGeom>
+          <a:solidFill>
+            <a:srgbClr val="FFFFFF"/>
+          </a:solidFill>
+          <a:ln/>
+          <a:effectLst>
+            <a:outerShdw sx="100000" sy="100000" kx="0" ky="0" algn="bl" rotWithShape="0" blurRad="50800" dist="25400" dir="8100000">
+              <a:srgbClr val="000000">
+                <a:alpha val="12000"/>
+              </a:srgbClr>
+            </a:outerShdw>
+          </a:effectLst>
+        </p:spPr>
+      </p:sp>
+      <p:sp>
+        <p:nvSpPr>
+          <p:cNvPr id="17" name="Shape 15"/>
+          <p:cNvSpPr/>
+          <p:nvPr/>
+        </p:nvSpPr>
+        <p:spPr>
+          <a:xfrm>
+            <a:off x="457200" y="3108960"/>
+            <a:ext cx="45720" cy="521208"/>
+          </a:xfrm>
+          <a:prstGeom prst="rect">
+            <a:avLst/>
+          </a:prstGeom>
+          <a:solidFill>
+            <a:srgbClr val="6A1B9A"/>
+          </a:solidFill>
+          <a:ln/>
+        </p:spPr>
+      </p:sp>
+      <p:sp>
+        <p:nvSpPr>
+          <p:cNvPr id="18" name="Text 16"/>
+          <p:cNvSpPr/>
+          <p:nvPr/>
+        </p:nvSpPr>
+        <p:spPr>
+          <a:xfrm>
+            <a:off x="685800" y="3108960"/>
+            <a:ext cx="7818120" cy="521208"/>
+          </a:xfrm>
+          <a:prstGeom prst="rect">
+            <a:avLst/>
+          </a:prstGeom>
+          <a:noFill/>
+          <a:ln/>
+        </p:spPr>
+        <p:txBody>
+          <a:bodyPr wrap="square" lIns="0" tIns="0" rIns="0" bIns="0" rtlCol="0" anchor="ctr"/>
+          <a:lstStyle/>
+          <a:p>
+            <a:pPr indent="0" marL="0">
+              <a:buNone/>
+            </a:pPr>
+            <a:r>
+              <a:rPr lang="en-US" sz="1200" dirty="0">
+                <a:solidFill>
+                  <a:srgbClr val="1A1A2E"/>
+                </a:solidFill>
+                <a:latin typeface="Calibri" pitchFamily="34" charset="0"/>
+                <a:ea typeface="Calibri" pitchFamily="34" charset="-122"/>
+                <a:cs typeface="Calibri" pitchFamily="34" charset="-120"/>
+              </a:rPr>
+              <a:t>Rédiger le dictionnaire technique des 9 tables</a:t>
+            </a:r>
+            <a:endParaRPr lang="en-US" sz="1200" dirty="0"/>
+          </a:p>
+        </p:txBody>
+      </p:sp>
+      <p:sp>
+        <p:nvSpPr>
+          <p:cNvPr id="19" name="Shape 17"/>
+          <p:cNvSpPr/>
+          <p:nvPr/>
+        </p:nvSpPr>
+        <p:spPr>
+          <a:xfrm>
+            <a:off x="457200" y="3657600"/>
+            <a:ext cx="8229600" cy="521208"/>
+          </a:xfrm>
+          <a:prstGeom prst="rect">
+            <a:avLst/>
+          </a:prstGeom>
+          <a:solidFill>
+            <a:srgbClr val="F3E5F5"/>
+          </a:solidFill>
+          <a:ln/>
+          <a:effectLst>
+            <a:outerShdw sx="100000" sy="100000" kx="0" ky="0" algn="bl" rotWithShape="0" blurRad="50800" dist="25400" dir="8100000">
+              <a:srgbClr val="000000">
+                <a:alpha val="12000"/>
+              </a:srgbClr>
+            </a:outerShdw>
+          </a:effectLst>
+        </p:spPr>
+      </p:sp>
+      <p:sp>
+        <p:nvSpPr>
+          <p:cNvPr id="20" name="Shape 18"/>
+          <p:cNvSpPr/>
+          <p:nvPr/>
+        </p:nvSpPr>
+        <p:spPr>
+          <a:xfrm>
+            <a:off x="457200" y="3657600"/>
+            <a:ext cx="45720" cy="521208"/>
+          </a:xfrm>
+          <a:prstGeom prst="rect">
+            <a:avLst/>
+          </a:prstGeom>
+          <a:solidFill>
+            <a:srgbClr val="6A1B9A"/>
+          </a:solidFill>
+          <a:ln/>
+        </p:spPr>
+      </p:sp>
+      <p:sp>
+        <p:nvSpPr>
+          <p:cNvPr id="21" name="Text 19"/>
+          <p:cNvSpPr/>
+          <p:nvPr/>
+        </p:nvSpPr>
+        <p:spPr>
+          <a:xfrm>
+            <a:off x="685800" y="3657600"/>
+            <a:ext cx="7818120" cy="521208"/>
+          </a:xfrm>
+          <a:prstGeom prst="rect">
+            <a:avLst/>
+          </a:prstGeom>
+          <a:noFill/>
+          <a:ln/>
+        </p:spPr>
+        <p:txBody>
+          <a:bodyPr wrap="square" lIns="0" tIns="0" rIns="0" bIns="0" rtlCol="0" anchor="ctr"/>
+          <a:lstStyle/>
+          <a:p>
+            <a:pPr indent="0" marL="0">
+              <a:buNone/>
+            </a:pPr>
+            <a:r>
+              <a:rPr lang="en-US" sz="1200" dirty="0">
+                <a:solidFill>
+                  <a:srgbClr val="1A1A2E"/>
+                </a:solidFill>
+                <a:latin typeface="Calibri" pitchFamily="34" charset="0"/>
+                <a:ea typeface="Calibri" pitchFamily="34" charset="-122"/>
+                <a:cs typeface="Calibri" pitchFamily="34" charset="-120"/>
+              </a:rPr>
+              <a:t>DÉFI : documenter l'architecture technique (serveur, clients, réseau, backup)</a:t>
+            </a:r>
+            <a:endParaRPr lang="en-US" sz="1200" dirty="0"/>
+          </a:p>
+        </p:txBody>
+      </p:sp>
+    </p:spTree>
+  </p:cSld>
+  <p:clrMapOvr>
+    <a:masterClrMapping/>
+  </p:clrMapOvr>
+</p:sld>
+</file>
+
+<file path=ppt/slides/slide8.xml><?xml version="1.0" encoding="utf-8"?>
+<p:sld xmlns:a="http://schemas.openxmlformats.org/drawingml/2006/main" xmlns:r="http://schemas.openxmlformats.org/officeDocument/2006/relationships" xmlns:p="http://schemas.openxmlformats.org/presentationml/2006/main">
+  <p:cSld name="Slide 8">
     <p:bg>
       <p:bgPr>
         <a:solidFill>
@@ -4655,39 +5891,51 @@
           <a:chExt cx="0" cy="0"/>
         </a:xfrm>
       </p:grpSpPr>
-      <p:pic>
-        <p:nvPicPr>
-          <p:cNvPr id="2" name="Image 0" descr="preencoded.png">    </p:cNvPr>
-          <p:cNvPicPr>
-            <a:picLocks noChangeAspect="1"/>
-          </p:cNvPicPr>
-          <p:nvPr/>
-        </p:nvPicPr>
-        <p:blipFill>
-          <a:blip r:embed="rId1"/>
-          <a:stretch>
-            <a:fillRect/>
-          </a:stretch>
-        </p:blipFill>
-        <p:spPr>
-          <a:xfrm>
-            <a:off x="4023360" y="457200"/>
-            <a:ext cx="1097280" cy="1097280"/>
-          </a:xfrm>
-          <a:prstGeom prst="rect">
-            <a:avLst/>
-          </a:prstGeom>
-        </p:spPr>
-      </p:pic>
-      <p:sp>
-        <p:nvSpPr>
-          <p:cNvPr id="3" name="Text 0"/>
-          <p:cNvSpPr/>
-          <p:nvPr/>
-        </p:nvSpPr>
-        <p:spPr>
-          <a:xfrm>
-            <a:off x="457200" y="1737360"/>
+      <p:sp>
+        <p:nvSpPr>
+          <p:cNvPr id="2" name="Text 0"/>
+          <p:cNvSpPr/>
+          <p:nvPr/>
+        </p:nvSpPr>
+        <p:spPr>
+          <a:xfrm>
+            <a:off x="3840480" y="457200"/>
+            <a:ext cx="1463040" cy="1097280"/>
+          </a:xfrm>
+          <a:prstGeom prst="rect">
+            <a:avLst/>
+          </a:prstGeom>
+          <a:noFill/>
+          <a:ln/>
+        </p:spPr>
+        <p:txBody>
+          <a:bodyPr wrap="square" lIns="0" tIns="0" rIns="0" bIns="0" rtlCol="0" anchor="ctr"/>
+          <a:lstStyle/>
+          <a:p>
+            <a:pPr algn="ctr" indent="0" marL="0">
+              <a:buNone/>
+            </a:pPr>
+            <a:r>
+              <a:rPr lang="en-US" sz="6000" dirty="0">
+                <a:solidFill>
+                  <a:srgbClr val="000000"/>
+                </a:solidFill>
+              </a:rPr>
+              <a:t>🎮</a:t>
+            </a:r>
+            <a:endParaRPr lang="en-US" sz="6000" dirty="0"/>
+          </a:p>
+        </p:txBody>
+      </p:sp>
+      <p:sp>
+        <p:nvSpPr>
+          <p:cNvPr id="3" name="Text 1"/>
+          <p:cNvSpPr/>
+          <p:nvPr/>
+        </p:nvSpPr>
+        <p:spPr>
+          <a:xfrm>
+            <a:off x="457200" y="1645920"/>
             <a:ext cx="8229600" cy="548640"/>
           </a:xfrm>
           <a:prstGeom prst="rect">
@@ -4712,7 +5960,7 @@
                 <a:ea typeface="Trebuchet MS" pitchFamily="34" charset="-122"/>
                 <a:cs typeface="Trebuchet MS" pitchFamily="34" charset="-120"/>
               </a:rPr>
-              <a:t>🎮 Mini-jeu : Module 19</a:t>
+              <a:t>Mini-jeu : Le Cartographe</a:t>
             </a:r>
             <a:endParaRPr lang="en-US" sz="2600" dirty="0"/>
           </a:p>
@@ -4720,14 +5968,14 @@
       </p:sp>
       <p:sp>
         <p:nvSpPr>
-          <p:cNvPr id="4" name="Text 1"/>
-          <p:cNvSpPr/>
-          <p:nvPr/>
-        </p:nvSpPr>
-        <p:spPr>
-          <a:xfrm>
-            <a:off x="914400" y="2377440"/>
-            <a:ext cx="7315200" cy="457200"/>
+          <p:cNvPr id="4" name="Text 2"/>
+          <p:cNvSpPr/>
+          <p:nvPr/>
+        </p:nvSpPr>
+        <p:spPr>
+          <a:xfrm>
+            <a:off x="1371600" y="2286000"/>
+            <a:ext cx="6400800" cy="731520"/>
           </a:xfrm>
           <a:prstGeom prst="rect">
             <a:avLst/>
@@ -4751,7 +5999,7 @@
                 <a:ea typeface="Calibri" pitchFamily="34" charset="-122"/>
                 <a:cs typeface="Calibri" pitchFamily="34" charset="-120"/>
               </a:rPr>
-              <a:t>Quiz interactif + Score + Correction automatique</a:t>
+              <a:t>Placez les bons symboles DFD au bon endroit !</a:t>
             </a:r>
             <a:endParaRPr lang="en-US" sz="1400" dirty="0"/>
           </a:p>
@@ -4759,13 +6007,13 @@
       </p:sp>
       <p:sp>
         <p:nvSpPr>
-          <p:cNvPr id="5" name="Shape 2"/>
-          <p:cNvSpPr/>
-          <p:nvPr/>
-        </p:nvSpPr>
-        <p:spPr>
-          <a:xfrm>
-            <a:off x="2286000" y="3200400"/>
+          <p:cNvPr id="5" name="Shape 3"/>
+          <p:cNvSpPr/>
+          <p:nvPr/>
+        </p:nvSpPr>
+        <p:spPr>
+          <a:xfrm>
+            <a:off x="2286000" y="3291840"/>
             <a:ext cx="4572000" cy="548640"/>
           </a:xfrm>
           <a:prstGeom prst="rect">
@@ -4779,13 +6027,13 @@
       </p:sp>
       <p:sp>
         <p:nvSpPr>
-          <p:cNvPr id="6" name="Text 3"/>
-          <p:cNvSpPr/>
-          <p:nvPr/>
-        </p:nvSpPr>
-        <p:spPr>
-          <a:xfrm>
-            <a:off x="2286000" y="3200400"/>
+          <p:cNvPr id="6" name="Text 4"/>
+          <p:cNvSpPr/>
+          <p:nvPr/>
+        </p:nvSpPr>
+        <p:spPr>
+          <a:xfrm>
+            <a:off x="2286000" y="3291840"/>
             <a:ext cx="4572000" cy="548640"/>
           </a:xfrm>
           <a:prstGeom prst="rect">
@@ -4810,7 +6058,7 @@
                 <a:ea typeface="Trebuchet MS" pitchFamily="34" charset="-122"/>
                 <a:cs typeface="Trebuchet MS" pitchFamily="34" charset="-120"/>
               </a:rPr>
-              <a:t>▶  Lancer le jeu sur Vercel</a:t>
+              <a:t>▶  Lancer le jeu</a:t>
             </a:r>
             <a:endParaRPr lang="en-US" sz="1800" dirty="0"/>
           </a:p>
@@ -4824,9 +6072,9 @@
 </p:sld>
 </file>
 
-<file path=ppt/slides/slide8.xml><?xml version="1.0" encoding="utf-8"?>
+<file path=ppt/slides/slide9.xml><?xml version="1.0" encoding="utf-8"?>
 <p:sld xmlns:a="http://schemas.openxmlformats.org/drawingml/2006/main" xmlns:r="http://schemas.openxmlformats.org/officeDocument/2006/relationships" xmlns:p="http://schemas.openxmlformats.org/presentationml/2006/main">
-  <p:cSld name="Slide 8">
+  <p:cSld name="Slide 9">
     <p:bg>
       <p:bgPr>
         <a:solidFill>
@@ -4856,8 +6104,8 @@
         </p:nvSpPr>
         <p:spPr>
           <a:xfrm>
-            <a:off x="457200" y="228600"/>
-            <a:ext cx="8229600" cy="457200"/>
+            <a:off x="457200" y="137160"/>
+            <a:ext cx="5486400" cy="411480"/>
           </a:xfrm>
           <a:prstGeom prst="rect">
             <a:avLst/>
@@ -4873,7 +6121,7 @@
               <a:buNone/>
             </a:pPr>
             <a:r>
-              <a:rPr lang="en-US" sz="2000" b="1" dirty="0">
+              <a:rPr lang="en-US" sz="1800" b="1" dirty="0">
                 <a:solidFill>
                   <a:srgbClr val="4A0072"/>
                 </a:solidFill>
@@ -4881,9 +6129,9 @@
                 <a:ea typeface="Trebuchet MS" pitchFamily="34" charset="-122"/>
                 <a:cs typeface="Trebuchet MS" pitchFamily="34" charset="-120"/>
               </a:rPr>
-              <a:t>📋 Mémo Module 19 — Documentation technique</a:t>
-            </a:r>
-            <a:endParaRPr lang="en-US" sz="2000" dirty="0"/>
+              <a:t>📋 Mémo Module 19</a:t>
+            </a:r>
+            <a:endParaRPr lang="en-US" sz="1800" dirty="0"/>
           </a:p>
         </p:txBody>
       </p:sp>
@@ -4895,8 +6143,8 @@
         </p:nvSpPr>
         <p:spPr>
           <a:xfrm>
-            <a:off x="457200" y="731520"/>
-            <a:ext cx="8229600" cy="320040"/>
+            <a:off x="457200" y="548640"/>
+            <a:ext cx="8229600" cy="274320"/>
           </a:xfrm>
           <a:prstGeom prst="rect">
             <a:avLst/>
@@ -4915,8 +6163,8 @@
         </p:nvSpPr>
         <p:spPr>
           <a:xfrm>
-            <a:off x="640080" y="731520"/>
-            <a:ext cx="7772400" cy="320040"/>
+            <a:off x="640080" y="548640"/>
+            <a:ext cx="7772400" cy="274320"/>
           </a:xfrm>
           <a:prstGeom prst="rect">
             <a:avLst/>
@@ -4932,7 +6180,7 @@
               <a:buNone/>
             </a:pPr>
             <a:r>
-              <a:rPr lang="en-US" sz="1000" b="1" dirty="0">
+              <a:rPr lang="en-US" sz="900" b="1" dirty="0">
                 <a:solidFill>
                   <a:srgbClr val="E65100"/>
                 </a:solidFill>
@@ -4940,9 +6188,9 @@
                 <a:ea typeface="Calibri" pitchFamily="34" charset="-122"/>
                 <a:cs typeface="Calibri" pitchFamily="34" charset="-120"/>
               </a:rPr>
-              <a:t>🔒 Ce mémo se débloque quand toutes les phases du module sont terminées !</a:t>
-            </a:r>
-            <a:endParaRPr lang="en-US" sz="1000" dirty="0"/>
+              <a:t>🔒 Déblocable après complétion</a:t>
+            </a:r>
+            <a:endParaRPr lang="en-US" sz="900" dirty="0"/>
           </a:p>
         </p:txBody>
       </p:sp>
@@ -4954,8 +6202,8 @@
         </p:nvSpPr>
         <p:spPr>
           <a:xfrm>
-            <a:off x="457200" y="1188720"/>
-            <a:ext cx="8229600" cy="713232"/>
+            <a:off x="457200" y="960120"/>
+            <a:ext cx="2286000" cy="475488"/>
           </a:xfrm>
           <a:prstGeom prst="rect">
             <a:avLst/>
@@ -4974,8 +6222,8 @@
         </p:nvSpPr>
         <p:spPr>
           <a:xfrm>
-            <a:off x="640080" y="1188720"/>
-            <a:ext cx="2560320" cy="713232"/>
+            <a:off x="548640" y="960120"/>
+            <a:ext cx="2103120" cy="475488"/>
           </a:xfrm>
           <a:prstGeom prst="rect">
             <a:avLst/>
@@ -4991,7 +6239,7 @@
               <a:buNone/>
             </a:pPr>
             <a:r>
-              <a:rPr lang="en-US" sz="1000" b="1" dirty="0">
+              <a:rPr lang="en-US" sz="900" b="1" dirty="0">
                 <a:solidFill>
                   <a:srgbClr val="4A0072"/>
                 </a:solidFill>
@@ -4999,22 +6247,42 @@
                 <a:ea typeface="Trebuchet MS" pitchFamily="34" charset="-122"/>
                 <a:cs typeface="Trebuchet MS" pitchFamily="34" charset="-120"/>
               </a:rPr>
-              <a:t>Documentation technique : pour qui ?</a:t>
-            </a:r>
-            <a:endParaRPr lang="en-US" sz="1000" dirty="0"/>
-          </a:p>
-        </p:txBody>
-      </p:sp>
-      <p:sp>
-        <p:nvSpPr>
-          <p:cNvPr id="7" name="Text 5"/>
-          <p:cNvSpPr/>
-          <p:nvPr/>
-        </p:nvSpPr>
-        <p:spPr>
-          <a:xfrm>
-            <a:off x="3291840" y="1188720"/>
-            <a:ext cx="5212080" cy="713232"/>
+              <a:t>DFD</a:t>
+            </a:r>
+            <a:endParaRPr lang="en-US" sz="900" dirty="0"/>
+          </a:p>
+        </p:txBody>
+      </p:sp>
+      <p:sp>
+        <p:nvSpPr>
+          <p:cNvPr id="7" name="Shape 5"/>
+          <p:cNvSpPr/>
+          <p:nvPr/>
+        </p:nvSpPr>
+        <p:spPr>
+          <a:xfrm>
+            <a:off x="2743200" y="960120"/>
+            <a:ext cx="5943600" cy="475488"/>
+          </a:xfrm>
+          <a:prstGeom prst="rect">
+            <a:avLst/>
+          </a:prstGeom>
+          <a:solidFill>
+            <a:srgbClr val="F3E5F5"/>
+          </a:solidFill>
+          <a:ln/>
+        </p:spPr>
+      </p:sp>
+      <p:sp>
+        <p:nvSpPr>
+          <p:cNvPr id="8" name="Text 6"/>
+          <p:cNvSpPr/>
+          <p:nvPr/>
+        </p:nvSpPr>
+        <p:spPr>
+          <a:xfrm>
+            <a:off x="2834640" y="960120"/>
+            <a:ext cx="5760720" cy="475488"/>
           </a:xfrm>
           <a:prstGeom prst="rect">
             <a:avLst/>
@@ -5038,7 +6306,7 @@
                 <a:ea typeface="Calibri" pitchFamily="34" charset="-122"/>
                 <a:cs typeface="Calibri" pitchFamily="34" charset="-120"/>
               </a:rPr>
-              <a:t>Audience : développeurs, DBA, équipe de maintenance | Contenu : architecture, DFD, flowcharts, dictionnaire technique | ...</a:t>
+              <a:t>Montre les flux de DONNÉES (pas la logique)</a:t>
             </a:r>
             <a:endParaRPr lang="en-US" sz="900" dirty="0"/>
           </a:p>
@@ -5046,34 +6314,34 @@
       </p:sp>
       <p:sp>
         <p:nvSpPr>
-          <p:cNvPr id="8" name="Shape 6"/>
-          <p:cNvSpPr/>
-          <p:nvPr/>
-        </p:nvSpPr>
-        <p:spPr>
-          <a:xfrm>
-            <a:off x="457200" y="1965960"/>
-            <a:ext cx="8229600" cy="713232"/>
-          </a:xfrm>
-          <a:prstGeom prst="rect">
-            <a:avLst/>
-          </a:prstGeom>
-          <a:solidFill>
-            <a:srgbClr val="FFFFFF"/>
-          </a:solidFill>
-          <a:ln/>
-        </p:spPr>
-      </p:sp>
-      <p:sp>
-        <p:nvSpPr>
-          <p:cNvPr id="9" name="Text 7"/>
-          <p:cNvSpPr/>
-          <p:nvPr/>
-        </p:nvSpPr>
-        <p:spPr>
-          <a:xfrm>
-            <a:off x="640080" y="1965960"/>
-            <a:ext cx="2560320" cy="713232"/>
+          <p:cNvPr id="9" name="Shape 7"/>
+          <p:cNvSpPr/>
+          <p:nvPr/>
+        </p:nvSpPr>
+        <p:spPr>
+          <a:xfrm>
+            <a:off x="457200" y="1463040"/>
+            <a:ext cx="2286000" cy="475488"/>
+          </a:xfrm>
+          <a:prstGeom prst="rect">
+            <a:avLst/>
+          </a:prstGeom>
+          <a:solidFill>
+            <a:srgbClr val="F0F0F0"/>
+          </a:solidFill>
+          <a:ln/>
+        </p:spPr>
+      </p:sp>
+      <p:sp>
+        <p:nvSpPr>
+          <p:cNvPr id="10" name="Text 8"/>
+          <p:cNvSpPr/>
+          <p:nvPr/>
+        </p:nvSpPr>
+        <p:spPr>
+          <a:xfrm>
+            <a:off x="548640" y="1463040"/>
+            <a:ext cx="2103120" cy="475488"/>
           </a:xfrm>
           <a:prstGeom prst="rect">
             <a:avLst/>
@@ -5089,7 +6357,7 @@
               <a:buNone/>
             </a:pPr>
             <a:r>
-              <a:rPr lang="en-US" sz="1000" b="1" dirty="0">
+              <a:rPr lang="en-US" sz="900" b="1" dirty="0">
                 <a:solidFill>
                   <a:srgbClr val="4A0072"/>
                 </a:solidFill>
@@ -5097,22 +6365,42 @@
                 <a:ea typeface="Trebuchet MS" pitchFamily="34" charset="-122"/>
                 <a:cs typeface="Trebuchet MS" pitchFamily="34" charset="-120"/>
               </a:rPr>
-              <a:t>DFD : Data Flow Diagram</a:t>
-            </a:r>
-            <a:endParaRPr lang="en-US" sz="1000" dirty="0"/>
-          </a:p>
-        </p:txBody>
-      </p:sp>
-      <p:sp>
-        <p:nvSpPr>
-          <p:cNvPr id="10" name="Text 8"/>
-          <p:cNvSpPr/>
-          <p:nvPr/>
-        </p:nvSpPr>
-        <p:spPr>
-          <a:xfrm>
-            <a:off x="3291840" y="1965960"/>
-            <a:ext cx="5212080" cy="713232"/>
+              <a:t>Niveau 0</a:t>
+            </a:r>
+            <a:endParaRPr lang="en-US" sz="900" dirty="0"/>
+          </a:p>
+        </p:txBody>
+      </p:sp>
+      <p:sp>
+        <p:nvSpPr>
+          <p:cNvPr id="11" name="Shape 9"/>
+          <p:cNvSpPr/>
+          <p:nvPr/>
+        </p:nvSpPr>
+        <p:spPr>
+          <a:xfrm>
+            <a:off x="2743200" y="1463040"/>
+            <a:ext cx="5943600" cy="475488"/>
+          </a:xfrm>
+          <a:prstGeom prst="rect">
+            <a:avLst/>
+          </a:prstGeom>
+          <a:solidFill>
+            <a:srgbClr val="F0F0F0"/>
+          </a:solidFill>
+          <a:ln/>
+        </p:spPr>
+      </p:sp>
+      <p:sp>
+        <p:nvSpPr>
+          <p:cNvPr id="12" name="Text 10"/>
+          <p:cNvSpPr/>
+          <p:nvPr/>
+        </p:nvSpPr>
+        <p:spPr>
+          <a:xfrm>
+            <a:off x="2834640" y="1463040"/>
+            <a:ext cx="5760720" cy="475488"/>
           </a:xfrm>
           <a:prstGeom prst="rect">
             <a:avLst/>
@@ -5136,7 +6424,7 @@
                 <a:ea typeface="Calibri" pitchFamily="34" charset="-122"/>
                 <a:cs typeface="Calibri" pitchFamily="34" charset="-120"/>
               </a:rPr>
-              <a:t>Niveau 0 (contexte) : le système entier = 1 processus | Entités externes : Artiste, Comptable, Admin, Ingénieur | Niveau...</a:t>
+              <a:t>Contexte : système = 1 processus, entités externes autour</a:t>
             </a:r>
             <a:endParaRPr lang="en-US" sz="900" dirty="0"/>
           </a:p>
@@ -5144,14 +6432,14 @@
       </p:sp>
       <p:sp>
         <p:nvSpPr>
-          <p:cNvPr id="11" name="Shape 9"/>
-          <p:cNvSpPr/>
-          <p:nvPr/>
-        </p:nvSpPr>
-        <p:spPr>
-          <a:xfrm>
-            <a:off x="457200" y="2743200"/>
-            <a:ext cx="8229600" cy="713232"/>
+          <p:cNvPr id="13" name="Shape 11"/>
+          <p:cNvSpPr/>
+          <p:nvPr/>
+        </p:nvSpPr>
+        <p:spPr>
+          <a:xfrm>
+            <a:off x="457200" y="1965960"/>
+            <a:ext cx="2286000" cy="475488"/>
           </a:xfrm>
           <a:prstGeom prst="rect">
             <a:avLst/>
@@ -5164,14 +6452,14 @@
       </p:sp>
       <p:sp>
         <p:nvSpPr>
-          <p:cNvPr id="12" name="Text 10"/>
-          <p:cNvSpPr/>
-          <p:nvPr/>
-        </p:nvSpPr>
-        <p:spPr>
-          <a:xfrm>
-            <a:off x="640080" y="2743200"/>
-            <a:ext cx="2560320" cy="713232"/>
+          <p:cNvPr id="14" name="Text 12"/>
+          <p:cNvSpPr/>
+          <p:nvPr/>
+        </p:nvSpPr>
+        <p:spPr>
+          <a:xfrm>
+            <a:off x="548640" y="1965960"/>
+            <a:ext cx="2103120" cy="475488"/>
           </a:xfrm>
           <a:prstGeom prst="rect">
             <a:avLst/>
@@ -5187,7 +6475,361 @@
               <a:buNone/>
             </a:pPr>
             <a:r>
-              <a:rPr lang="en-US" sz="1000" b="1" dirty="0">
+              <a:rPr lang="en-US" sz="900" b="1" dirty="0">
+                <a:solidFill>
+                  <a:srgbClr val="4A0072"/>
+                </a:solidFill>
+                <a:latin typeface="Trebuchet MS" pitchFamily="34" charset="0"/>
+                <a:ea typeface="Trebuchet MS" pitchFamily="34" charset="-122"/>
+                <a:cs typeface="Trebuchet MS" pitchFamily="34" charset="-120"/>
+              </a:rPr>
+              <a:t>Niveau 1</a:t>
+            </a:r>
+            <a:endParaRPr lang="en-US" sz="900" dirty="0"/>
+          </a:p>
+        </p:txBody>
+      </p:sp>
+      <p:sp>
+        <p:nvSpPr>
+          <p:cNvPr id="15" name="Shape 13"/>
+          <p:cNvSpPr/>
+          <p:nvPr/>
+        </p:nvSpPr>
+        <p:spPr>
+          <a:xfrm>
+            <a:off x="2743200" y="1965960"/>
+            <a:ext cx="5943600" cy="475488"/>
+          </a:xfrm>
+          <a:prstGeom prst="rect">
+            <a:avLst/>
+          </a:prstGeom>
+          <a:solidFill>
+            <a:srgbClr val="F3E5F5"/>
+          </a:solidFill>
+          <a:ln/>
+        </p:spPr>
+      </p:sp>
+      <p:sp>
+        <p:nvSpPr>
+          <p:cNvPr id="16" name="Text 14"/>
+          <p:cNvSpPr/>
+          <p:nvPr/>
+        </p:nvSpPr>
+        <p:spPr>
+          <a:xfrm>
+            <a:off x="2834640" y="1965960"/>
+            <a:ext cx="5760720" cy="475488"/>
+          </a:xfrm>
+          <a:prstGeom prst="rect">
+            <a:avLst/>
+          </a:prstGeom>
+          <a:noFill/>
+          <a:ln/>
+        </p:spPr>
+        <p:txBody>
+          <a:bodyPr wrap="square" lIns="0" tIns="0" rIns="0" bIns="0" rtlCol="0" anchor="ctr"/>
+          <a:lstStyle/>
+          <a:p>
+            <a:pPr indent="0" marL="0">
+              <a:buNone/>
+            </a:pPr>
+            <a:r>
+              <a:rPr lang="en-US" sz="900" dirty="0">
+                <a:solidFill>
+                  <a:srgbClr val="333333"/>
+                </a:solidFill>
+                <a:latin typeface="Calibri" pitchFamily="34" charset="0"/>
+                <a:ea typeface="Calibri" pitchFamily="34" charset="-122"/>
+                <a:cs typeface="Calibri" pitchFamily="34" charset="-120"/>
+              </a:rPr>
+              <a:t>Décomposition en sous-processus</a:t>
+            </a:r>
+            <a:endParaRPr lang="en-US" sz="900" dirty="0"/>
+          </a:p>
+        </p:txBody>
+      </p:sp>
+      <p:sp>
+        <p:nvSpPr>
+          <p:cNvPr id="17" name="Shape 15"/>
+          <p:cNvSpPr/>
+          <p:nvPr/>
+        </p:nvSpPr>
+        <p:spPr>
+          <a:xfrm>
+            <a:off x="457200" y="2468880"/>
+            <a:ext cx="2286000" cy="475488"/>
+          </a:xfrm>
+          <a:prstGeom prst="rect">
+            <a:avLst/>
+          </a:prstGeom>
+          <a:solidFill>
+            <a:srgbClr val="F0F0F0"/>
+          </a:solidFill>
+          <a:ln/>
+        </p:spPr>
+      </p:sp>
+      <p:sp>
+        <p:nvSpPr>
+          <p:cNvPr id="18" name="Text 16"/>
+          <p:cNvSpPr/>
+          <p:nvPr/>
+        </p:nvSpPr>
+        <p:spPr>
+          <a:xfrm>
+            <a:off x="548640" y="2468880"/>
+            <a:ext cx="2103120" cy="475488"/>
+          </a:xfrm>
+          <a:prstGeom prst="rect">
+            <a:avLst/>
+          </a:prstGeom>
+          <a:noFill/>
+          <a:ln/>
+        </p:spPr>
+        <p:txBody>
+          <a:bodyPr wrap="square" lIns="0" tIns="0" rIns="0" bIns="0" rtlCol="0" anchor="ctr"/>
+          <a:lstStyle/>
+          <a:p>
+            <a:pPr indent="0" marL="0">
+              <a:buNone/>
+            </a:pPr>
+            <a:r>
+              <a:rPr lang="en-US" sz="900" b="1" dirty="0">
+                <a:solidFill>
+                  <a:srgbClr val="4A0072"/>
+                </a:solidFill>
+                <a:latin typeface="Trebuchet MS" pitchFamily="34" charset="0"/>
+                <a:ea typeface="Trebuchet MS" pitchFamily="34" charset="-122"/>
+                <a:cs typeface="Trebuchet MS" pitchFamily="34" charset="-120"/>
+              </a:rPr>
+              <a:t>Niveau 2</a:t>
+            </a:r>
+            <a:endParaRPr lang="en-US" sz="900" dirty="0"/>
+          </a:p>
+        </p:txBody>
+      </p:sp>
+      <p:sp>
+        <p:nvSpPr>
+          <p:cNvPr id="19" name="Shape 17"/>
+          <p:cNvSpPr/>
+          <p:nvPr/>
+        </p:nvSpPr>
+        <p:spPr>
+          <a:xfrm>
+            <a:off x="2743200" y="2468880"/>
+            <a:ext cx="5943600" cy="475488"/>
+          </a:xfrm>
+          <a:prstGeom prst="rect">
+            <a:avLst/>
+          </a:prstGeom>
+          <a:solidFill>
+            <a:srgbClr val="F0F0F0"/>
+          </a:solidFill>
+          <a:ln/>
+        </p:spPr>
+      </p:sp>
+      <p:sp>
+        <p:nvSpPr>
+          <p:cNvPr id="20" name="Text 18"/>
+          <p:cNvSpPr/>
+          <p:nvPr/>
+        </p:nvSpPr>
+        <p:spPr>
+          <a:xfrm>
+            <a:off x="2834640" y="2468880"/>
+            <a:ext cx="5760720" cy="475488"/>
+          </a:xfrm>
+          <a:prstGeom prst="rect">
+            <a:avLst/>
+          </a:prstGeom>
+          <a:noFill/>
+          <a:ln/>
+        </p:spPr>
+        <p:txBody>
+          <a:bodyPr wrap="square" lIns="0" tIns="0" rIns="0" bIns="0" rtlCol="0" anchor="ctr"/>
+          <a:lstStyle/>
+          <a:p>
+            <a:pPr indent="0" marL="0">
+              <a:buNone/>
+            </a:pPr>
+            <a:r>
+              <a:rPr lang="en-US" sz="900" dirty="0">
+                <a:solidFill>
+                  <a:srgbClr val="333333"/>
+                </a:solidFill>
+                <a:latin typeface="Calibri" pitchFamily="34" charset="0"/>
+                <a:ea typeface="Calibri" pitchFamily="34" charset="-122"/>
+                <a:cs typeface="Calibri" pitchFamily="34" charset="-120"/>
+              </a:rPr>
+              <a:t>Détail d'un processus du niveau 1</a:t>
+            </a:r>
+            <a:endParaRPr lang="en-US" sz="900" dirty="0"/>
+          </a:p>
+        </p:txBody>
+      </p:sp>
+      <p:sp>
+        <p:nvSpPr>
+          <p:cNvPr id="21" name="Shape 19"/>
+          <p:cNvSpPr/>
+          <p:nvPr/>
+        </p:nvSpPr>
+        <p:spPr>
+          <a:xfrm>
+            <a:off x="457200" y="2971800"/>
+            <a:ext cx="2286000" cy="475488"/>
+          </a:xfrm>
+          <a:prstGeom prst="rect">
+            <a:avLst/>
+          </a:prstGeom>
+          <a:solidFill>
+            <a:srgbClr val="F3E5F5"/>
+          </a:solidFill>
+          <a:ln/>
+        </p:spPr>
+      </p:sp>
+      <p:sp>
+        <p:nvSpPr>
+          <p:cNvPr id="22" name="Text 20"/>
+          <p:cNvSpPr/>
+          <p:nvPr/>
+        </p:nvSpPr>
+        <p:spPr>
+          <a:xfrm>
+            <a:off x="548640" y="2971800"/>
+            <a:ext cx="2103120" cy="475488"/>
+          </a:xfrm>
+          <a:prstGeom prst="rect">
+            <a:avLst/>
+          </a:prstGeom>
+          <a:noFill/>
+          <a:ln/>
+        </p:spPr>
+        <p:txBody>
+          <a:bodyPr wrap="square" lIns="0" tIns="0" rIns="0" bIns="0" rtlCol="0" anchor="ctr"/>
+          <a:lstStyle/>
+          <a:p>
+            <a:pPr indent="0" marL="0">
+              <a:buNone/>
+            </a:pPr>
+            <a:r>
+              <a:rPr lang="en-US" sz="900" b="1" dirty="0">
+                <a:solidFill>
+                  <a:srgbClr val="4A0072"/>
+                </a:solidFill>
+                <a:latin typeface="Trebuchet MS" pitchFamily="34" charset="0"/>
+                <a:ea typeface="Trebuchet MS" pitchFamily="34" charset="-122"/>
+                <a:cs typeface="Trebuchet MS" pitchFamily="34" charset="-120"/>
+              </a:rPr>
+              <a:t>Flowchart</a:t>
+            </a:r>
+            <a:endParaRPr lang="en-US" sz="900" dirty="0"/>
+          </a:p>
+        </p:txBody>
+      </p:sp>
+      <p:sp>
+        <p:nvSpPr>
+          <p:cNvPr id="23" name="Shape 21"/>
+          <p:cNvSpPr/>
+          <p:nvPr/>
+        </p:nvSpPr>
+        <p:spPr>
+          <a:xfrm>
+            <a:off x="2743200" y="2971800"/>
+            <a:ext cx="5943600" cy="475488"/>
+          </a:xfrm>
+          <a:prstGeom prst="rect">
+            <a:avLst/>
+          </a:prstGeom>
+          <a:solidFill>
+            <a:srgbClr val="F3E5F5"/>
+          </a:solidFill>
+          <a:ln/>
+        </p:spPr>
+      </p:sp>
+      <p:sp>
+        <p:nvSpPr>
+          <p:cNvPr id="24" name="Text 22"/>
+          <p:cNvSpPr/>
+          <p:nvPr/>
+        </p:nvSpPr>
+        <p:spPr>
+          <a:xfrm>
+            <a:off x="2834640" y="2971800"/>
+            <a:ext cx="5760720" cy="475488"/>
+          </a:xfrm>
+          <a:prstGeom prst="rect">
+            <a:avLst/>
+          </a:prstGeom>
+          <a:noFill/>
+          <a:ln/>
+        </p:spPr>
+        <p:txBody>
+          <a:bodyPr wrap="square" lIns="0" tIns="0" rIns="0" bIns="0" rtlCol="0" anchor="ctr"/>
+          <a:lstStyle/>
+          <a:p>
+            <a:pPr indent="0" marL="0">
+              <a:buNone/>
+            </a:pPr>
+            <a:r>
+              <a:rPr lang="en-US" sz="900" dirty="0">
+                <a:solidFill>
+                  <a:srgbClr val="333333"/>
+                </a:solidFill>
+                <a:latin typeface="Calibri" pitchFamily="34" charset="0"/>
+                <a:ea typeface="Calibri" pitchFamily="34" charset="-122"/>
+                <a:cs typeface="Calibri" pitchFamily="34" charset="-120"/>
+              </a:rPr>
+              <a:t>Montre la LOGIQUE : actions + décisions + flux</a:t>
+            </a:r>
+            <a:endParaRPr lang="en-US" sz="900" dirty="0"/>
+          </a:p>
+        </p:txBody>
+      </p:sp>
+      <p:sp>
+        <p:nvSpPr>
+          <p:cNvPr id="25" name="Shape 23"/>
+          <p:cNvSpPr/>
+          <p:nvPr/>
+        </p:nvSpPr>
+        <p:spPr>
+          <a:xfrm>
+            <a:off x="457200" y="3474720"/>
+            <a:ext cx="2286000" cy="475488"/>
+          </a:xfrm>
+          <a:prstGeom prst="rect">
+            <a:avLst/>
+          </a:prstGeom>
+          <a:solidFill>
+            <a:srgbClr val="F0F0F0"/>
+          </a:solidFill>
+          <a:ln/>
+        </p:spPr>
+      </p:sp>
+      <p:sp>
+        <p:nvSpPr>
+          <p:cNvPr id="26" name="Text 24"/>
+          <p:cNvSpPr/>
+          <p:nvPr/>
+        </p:nvSpPr>
+        <p:spPr>
+          <a:xfrm>
+            <a:off x="548640" y="3474720"/>
+            <a:ext cx="2103120" cy="475488"/>
+          </a:xfrm>
+          <a:prstGeom prst="rect">
+            <a:avLst/>
+          </a:prstGeom>
+          <a:noFill/>
+          <a:ln/>
+        </p:spPr>
+        <p:txBody>
+          <a:bodyPr wrap="square" lIns="0" tIns="0" rIns="0" bIns="0" rtlCol="0" anchor="ctr"/>
+          <a:lstStyle/>
+          <a:p>
+            <a:pPr indent="0" marL="0">
+              <a:buNone/>
+            </a:pPr>
+            <a:r>
+              <a:rPr lang="en-US" sz="900" b="1" dirty="0">
                 <a:solidFill>
                   <a:srgbClr val="4A0072"/>
                 </a:solidFill>
@@ -5197,20 +6839,40 @@
               </a:rPr>
               <a:t>Symboles DFD</a:t>
             </a:r>
-            <a:endParaRPr lang="en-US" sz="1000" dirty="0"/>
-          </a:p>
-        </p:txBody>
-      </p:sp>
-      <p:sp>
-        <p:nvSpPr>
-          <p:cNvPr id="13" name="Text 11"/>
-          <p:cNvSpPr/>
-          <p:nvPr/>
-        </p:nvSpPr>
-        <p:spPr>
-          <a:xfrm>
-            <a:off x="3291840" y="2743200"/>
-            <a:ext cx="5212080" cy="713232"/>
+            <a:endParaRPr lang="en-US" sz="900" dirty="0"/>
+          </a:p>
+        </p:txBody>
+      </p:sp>
+      <p:sp>
+        <p:nvSpPr>
+          <p:cNvPr id="27" name="Shape 25"/>
+          <p:cNvSpPr/>
+          <p:nvPr/>
+        </p:nvSpPr>
+        <p:spPr>
+          <a:xfrm>
+            <a:off x="2743200" y="3474720"/>
+            <a:ext cx="5943600" cy="475488"/>
+          </a:xfrm>
+          <a:prstGeom prst="rect">
+            <a:avLst/>
+          </a:prstGeom>
+          <a:solidFill>
+            <a:srgbClr val="F0F0F0"/>
+          </a:solidFill>
+          <a:ln/>
+        </p:spPr>
+      </p:sp>
+      <p:sp>
+        <p:nvSpPr>
+          <p:cNvPr id="28" name="Text 26"/>
+          <p:cNvSpPr/>
+          <p:nvPr/>
+        </p:nvSpPr>
+        <p:spPr>
+          <a:xfrm>
+            <a:off x="2834640" y="3474720"/>
+            <a:ext cx="5760720" cy="475488"/>
           </a:xfrm>
           <a:prstGeom prst="rect">
             <a:avLst/>
@@ -5234,7 +6896,7 @@
                 <a:ea typeface="Calibri" pitchFamily="34" charset="-122"/>
                 <a:cs typeface="Calibri" pitchFamily="34" charset="-120"/>
               </a:rPr>
-              <a:t>⬭ Rectangle arrondi/cercle : PROCESSUS | ▭ Rectangle ouvert : STOCKAGE de données (table) | ▬ Rectangle fermé : ENTITÉ E...</a:t>
+              <a:t>Cercle=processus, rectangle ouvert=stockage, fermé=externe, flèche=flux</a:t>
             </a:r>
             <a:endParaRPr lang="en-US" sz="900" dirty="0"/>
           </a:p>
@@ -5242,34 +6904,34 @@
       </p:sp>
       <p:sp>
         <p:nvSpPr>
-          <p:cNvPr id="14" name="Shape 12"/>
-          <p:cNvSpPr/>
-          <p:nvPr/>
-        </p:nvSpPr>
-        <p:spPr>
-          <a:xfrm>
-            <a:off x="457200" y="3520440"/>
-            <a:ext cx="8229600" cy="713232"/>
-          </a:xfrm>
-          <a:prstGeom prst="rect">
-            <a:avLst/>
-          </a:prstGeom>
-          <a:solidFill>
-            <a:srgbClr val="FFFFFF"/>
-          </a:solidFill>
-          <a:ln/>
-        </p:spPr>
-      </p:sp>
-      <p:sp>
-        <p:nvSpPr>
-          <p:cNvPr id="15" name="Text 13"/>
-          <p:cNvSpPr/>
-          <p:nvPr/>
-        </p:nvSpPr>
-        <p:spPr>
-          <a:xfrm>
-            <a:off x="640080" y="3520440"/>
-            <a:ext cx="2560320" cy="713232"/>
+          <p:cNvPr id="29" name="Shape 27"/>
+          <p:cNvSpPr/>
+          <p:nvPr/>
+        </p:nvSpPr>
+        <p:spPr>
+          <a:xfrm>
+            <a:off x="457200" y="3977640"/>
+            <a:ext cx="2286000" cy="475488"/>
+          </a:xfrm>
+          <a:prstGeom prst="rect">
+            <a:avLst/>
+          </a:prstGeom>
+          <a:solidFill>
+            <a:srgbClr val="F3E5F5"/>
+          </a:solidFill>
+          <a:ln/>
+        </p:spPr>
+      </p:sp>
+      <p:sp>
+        <p:nvSpPr>
+          <p:cNvPr id="30" name="Text 28"/>
+          <p:cNvSpPr/>
+          <p:nvPr/>
+        </p:nvSpPr>
+        <p:spPr>
+          <a:xfrm>
+            <a:off x="548640" y="3977640"/>
+            <a:ext cx="2103120" cy="475488"/>
           </a:xfrm>
           <a:prstGeom prst="rect">
             <a:avLst/>
@@ -5285,7 +6947,7 @@
               <a:buNone/>
             </a:pPr>
             <a:r>
-              <a:rPr lang="en-US" sz="1000" b="1" dirty="0">
+              <a:rPr lang="en-US" sz="900" b="1" dirty="0">
                 <a:solidFill>
                   <a:srgbClr val="4A0072"/>
                 </a:solidFill>
@@ -5293,22 +6955,42 @@
                 <a:ea typeface="Trebuchet MS" pitchFamily="34" charset="-122"/>
                 <a:cs typeface="Trebuchet MS" pitchFamily="34" charset="-120"/>
               </a:rPr>
-              <a:t>Flowcharts</a:t>
-            </a:r>
-            <a:endParaRPr lang="en-US" sz="1000" dirty="0"/>
-          </a:p>
-        </p:txBody>
-      </p:sp>
-      <p:sp>
-        <p:nvSpPr>
-          <p:cNvPr id="16" name="Text 14"/>
-          <p:cNvSpPr/>
-          <p:nvPr/>
-        </p:nvSpPr>
-        <p:spPr>
-          <a:xfrm>
-            <a:off x="3291840" y="3520440"/>
-            <a:ext cx="5212080" cy="713232"/>
+              <a:t>Dict. technique</a:t>
+            </a:r>
+            <a:endParaRPr lang="en-US" sz="900" dirty="0"/>
+          </a:p>
+        </p:txBody>
+      </p:sp>
+      <p:sp>
+        <p:nvSpPr>
+          <p:cNvPr id="31" name="Shape 29"/>
+          <p:cNvSpPr/>
+          <p:nvPr/>
+        </p:nvSpPr>
+        <p:spPr>
+          <a:xfrm>
+            <a:off x="2743200" y="3977640"/>
+            <a:ext cx="5943600" cy="475488"/>
+          </a:xfrm>
+          <a:prstGeom prst="rect">
+            <a:avLst/>
+          </a:prstGeom>
+          <a:solidFill>
+            <a:srgbClr val="F3E5F5"/>
+          </a:solidFill>
+          <a:ln/>
+        </p:spPr>
+      </p:sp>
+      <p:sp>
+        <p:nvSpPr>
+          <p:cNvPr id="32" name="Text 30"/>
+          <p:cNvSpPr/>
+          <p:nvPr/>
+        </p:nvSpPr>
+        <p:spPr>
+          <a:xfrm>
+            <a:off x="2834640" y="3977640"/>
+            <a:ext cx="5760720" cy="475488"/>
           </a:xfrm>
           <a:prstGeom prst="rect">
             <a:avLst/>
@@ -5332,105 +7014,7 @@
                 <a:ea typeface="Calibri" pitchFamily="34" charset="-122"/>
                 <a:cs typeface="Calibri" pitchFamily="34" charset="-120"/>
               </a:rPr>
-              <a:t>⬭ Ovale : Début / Fin | ▭ Rectangle : Processus / Action | ◇ Losange : Décision (oui/non)</a:t>
-            </a:r>
-            <a:endParaRPr lang="en-US" sz="900" dirty="0"/>
-          </a:p>
-        </p:txBody>
-      </p:sp>
-      <p:sp>
-        <p:nvSpPr>
-          <p:cNvPr id="17" name="Shape 15"/>
-          <p:cNvSpPr/>
-          <p:nvPr/>
-        </p:nvSpPr>
-        <p:spPr>
-          <a:xfrm>
-            <a:off x="457200" y="4297680"/>
-            <a:ext cx="8229600" cy="713232"/>
-          </a:xfrm>
-          <a:prstGeom prst="rect">
-            <a:avLst/>
-          </a:prstGeom>
-          <a:solidFill>
-            <a:srgbClr val="F3E5F5"/>
-          </a:solidFill>
-          <a:ln/>
-        </p:spPr>
-      </p:sp>
-      <p:sp>
-        <p:nvSpPr>
-          <p:cNvPr id="18" name="Text 16"/>
-          <p:cNvSpPr/>
-          <p:nvPr/>
-        </p:nvSpPr>
-        <p:spPr>
-          <a:xfrm>
-            <a:off x="640080" y="4297680"/>
-            <a:ext cx="2560320" cy="713232"/>
-          </a:xfrm>
-          <a:prstGeom prst="rect">
-            <a:avLst/>
-          </a:prstGeom>
-          <a:noFill/>
-          <a:ln/>
-        </p:spPr>
-        <p:txBody>
-          <a:bodyPr wrap="square" lIns="0" tIns="0" rIns="0" bIns="0" rtlCol="0" anchor="ctr"/>
-          <a:lstStyle/>
-          <a:p>
-            <a:pPr indent="0" marL="0">
-              <a:buNone/>
-            </a:pPr>
-            <a:r>
-              <a:rPr lang="en-US" sz="1000" b="1" dirty="0">
-                <a:solidFill>
-                  <a:srgbClr val="4A0072"/>
-                </a:solidFill>
-                <a:latin typeface="Trebuchet MS" pitchFamily="34" charset="0"/>
-                <a:ea typeface="Trebuchet MS" pitchFamily="34" charset="-122"/>
-                <a:cs typeface="Trebuchet MS" pitchFamily="34" charset="-120"/>
-              </a:rPr>
-              <a:t>Dictionnaire de données technique</a:t>
-            </a:r>
-            <a:endParaRPr lang="en-US" sz="1000" dirty="0"/>
-          </a:p>
-        </p:txBody>
-      </p:sp>
-      <p:sp>
-        <p:nvSpPr>
-          <p:cNvPr id="19" name="Text 17"/>
-          <p:cNvSpPr/>
-          <p:nvPr/>
-        </p:nvSpPr>
-        <p:spPr>
-          <a:xfrm>
-            <a:off x="3291840" y="4297680"/>
-            <a:ext cx="5212080" cy="713232"/>
-          </a:xfrm>
-          <a:prstGeom prst="rect">
-            <a:avLst/>
-          </a:prstGeom>
-          <a:noFill/>
-          <a:ln/>
-        </p:spPr>
-        <p:txBody>
-          <a:bodyPr wrap="square" lIns="0" tIns="0" rIns="0" bIns="0" rtlCol="0" anchor="ctr"/>
-          <a:lstStyle/>
-          <a:p>
-            <a:pPr indent="0" marL="0">
-              <a:buNone/>
-            </a:pPr>
-            <a:r>
-              <a:rPr lang="en-US" sz="900" dirty="0">
-                <a:solidFill>
-                  <a:srgbClr val="333333"/>
-                </a:solidFill>
-                <a:latin typeface="Calibri" pitchFamily="34" charset="0"/>
-                <a:ea typeface="Calibri" pitchFamily="34" charset="-122"/>
-                <a:cs typeface="Calibri" pitchFamily="34" charset="-120"/>
-              </a:rPr>
-              <a:t>≠ DD de conception (Module 3) : ici c'est le doc FINAL | Pour chaque table : nom, description, nb colonnes | Pour chaque...</a:t>
+              <a:t>Table par table : colonne, type, contraintes, FK, description</a:t>
             </a:r>
             <a:endParaRPr lang="en-US" sz="900" dirty="0"/>
           </a:p>

--- a/pptx/Module19_Documentation_technique.pptx
+++ b/pptx/Module19_Documentation_technique.pptx
@@ -14,9 +14,11 @@
     <p:sldId id="262" r:id="rId8"/>
     <p:sldId id="263" r:id="rId9"/>
     <p:sldId id="264" r:id="rId10"/>
+    <p:sldId id="265" r:id="rId11"/>
+    <p:sldId id="266" r:id="rId12"/>
   </p:sldIdLst>
   <p:notesMasterIdLst>
-    <p:notesMasterId r:id="rId11"/>
+    <p:notesMasterId r:id="rId13"/>
   </p:notesMasterIdLst>
   <p:sldSz cx="9144000" cy="5143500"/>
   <p:notesSz cx="5143500" cy="9144000"/>
@@ -552,6 +554,182 @@
 </p:notes>
 </file>
 
+<file path=ppt/notesSlides/notesSlide10.xml><?xml version="1.0" encoding="utf-8"?>
+<p:notes xmlns:a="http://schemas.openxmlformats.org/drawingml/2006/main" xmlns:r="http://schemas.openxmlformats.org/officeDocument/2006/relationships" xmlns:p="http://schemas.openxmlformats.org/presentationml/2006/main">
+  <p:cSld>
+    <p:spTree>
+      <p:nvGrpSpPr>
+        <p:cNvPr id="1" name=""/>
+        <p:cNvGrpSpPr/>
+        <p:nvPr/>
+      </p:nvGrpSpPr>
+      <p:grpSpPr>
+        <a:xfrm>
+          <a:off x="0" y="0"/>
+          <a:ext cx="0" cy="0"/>
+          <a:chOff x="0" y="0"/>
+          <a:chExt cx="0" cy="0"/>
+        </a:xfrm>
+      </p:grpSpPr>
+      <p:sp>
+        <p:nvSpPr>
+          <p:cNvPr id="2" name="Slide Image Placeholder 1"/>
+          <p:cNvSpPr>
+            <a:spLocks noGrp="1" noRot="1" noChangeAspect="1"/>
+          </p:cNvSpPr>
+          <p:nvPr>
+            <p:ph type="sldImg"/>
+          </p:nvPr>
+        </p:nvSpPr>
+        <p:spPr/>
+      </p:sp>
+      <p:sp>
+        <p:nvSpPr>
+          <p:cNvPr id="3" name="Notes Placeholder 2"/>
+          <p:cNvSpPr>
+            <a:spLocks noGrp="1"/>
+          </p:cNvSpPr>
+          <p:nvPr>
+            <p:ph type="body" idx="1"/>
+          </p:nvPr>
+        </p:nvSpPr>
+        <p:spPr/>
+        <p:txBody>
+          <a:bodyPr/>
+          <a:lstStyle/>
+          <a:p>
+            <a:r>
+              <a:rPr lang="en-US" dirty="0"/>
+              <a:t/>
+            </a:r>
+            <a:endParaRPr lang="en-US" dirty="0"/>
+          </a:p>
+        </p:txBody>
+      </p:sp>
+      <p:sp>
+        <p:nvSpPr>
+          <p:cNvPr id="4" name="Slide Number Placeholder 3"/>
+          <p:cNvSpPr>
+            <a:spLocks noGrp="1"/>
+          </p:cNvSpPr>
+          <p:nvPr>
+            <p:ph type="sldNum" sz="quarter" idx="10"/>
+          </p:nvPr>
+        </p:nvSpPr>
+        <p:spPr/>
+        <p:txBody>
+          <a:bodyPr/>
+          <a:lstStyle/>
+          <a:p>
+            <a:fld id="{F7021451-1387-4CA6-816F-3879F97B5CBC}" type="slidenum">
+              <a:rPr lang="en-US"/>
+              <a:t>10</a:t>
+            </a:fld>
+            <a:endParaRPr lang="en-US"/>
+          </a:p>
+        </p:txBody>
+      </p:sp>
+    </p:spTree>
+    <p:extLst>
+      <p:ext uri="{BB962C8B-B14F-4D97-AF65-F5344CB8AC3E}">
+        <p14:creationId xmlns:p14="http://schemas.microsoft.com/office/powerpoint/2010/main" val="1024086991"/>
+      </p:ext>
+    </p:extLst>
+  </p:cSld>
+  <p:clrMapOvr>
+    <a:masterClrMapping/>
+  </p:clrMapOvr>
+</p:notes>
+</file>
+
+<file path=ppt/notesSlides/notesSlide11.xml><?xml version="1.0" encoding="utf-8"?>
+<p:notes xmlns:a="http://schemas.openxmlformats.org/drawingml/2006/main" xmlns:r="http://schemas.openxmlformats.org/officeDocument/2006/relationships" xmlns:p="http://schemas.openxmlformats.org/presentationml/2006/main">
+  <p:cSld>
+    <p:spTree>
+      <p:nvGrpSpPr>
+        <p:cNvPr id="1" name=""/>
+        <p:cNvGrpSpPr/>
+        <p:nvPr/>
+      </p:nvGrpSpPr>
+      <p:grpSpPr>
+        <a:xfrm>
+          <a:off x="0" y="0"/>
+          <a:ext cx="0" cy="0"/>
+          <a:chOff x="0" y="0"/>
+          <a:chExt cx="0" cy="0"/>
+        </a:xfrm>
+      </p:grpSpPr>
+      <p:sp>
+        <p:nvSpPr>
+          <p:cNvPr id="2" name="Slide Image Placeholder 1"/>
+          <p:cNvSpPr>
+            <a:spLocks noGrp="1" noRot="1" noChangeAspect="1"/>
+          </p:cNvSpPr>
+          <p:nvPr>
+            <p:ph type="sldImg"/>
+          </p:nvPr>
+        </p:nvSpPr>
+        <p:spPr/>
+      </p:sp>
+      <p:sp>
+        <p:nvSpPr>
+          <p:cNvPr id="3" name="Notes Placeholder 2"/>
+          <p:cNvSpPr>
+            <a:spLocks noGrp="1"/>
+          </p:cNvSpPr>
+          <p:nvPr>
+            <p:ph type="body" idx="1"/>
+          </p:nvPr>
+        </p:nvSpPr>
+        <p:spPr/>
+        <p:txBody>
+          <a:bodyPr/>
+          <a:lstStyle/>
+          <a:p>
+            <a:r>
+              <a:rPr lang="en-US" dirty="0"/>
+              <a:t/>
+            </a:r>
+            <a:endParaRPr lang="en-US" dirty="0"/>
+          </a:p>
+        </p:txBody>
+      </p:sp>
+      <p:sp>
+        <p:nvSpPr>
+          <p:cNvPr id="4" name="Slide Number Placeholder 3"/>
+          <p:cNvSpPr>
+            <a:spLocks noGrp="1"/>
+          </p:cNvSpPr>
+          <p:nvPr>
+            <p:ph type="sldNum" sz="quarter" idx="10"/>
+          </p:nvPr>
+        </p:nvSpPr>
+        <p:spPr/>
+        <p:txBody>
+          <a:bodyPr/>
+          <a:lstStyle/>
+          <a:p>
+            <a:fld id="{F7021451-1387-4CA6-816F-3879F97B5CBC}" type="slidenum">
+              <a:rPr lang="en-US"/>
+              <a:t>11</a:t>
+            </a:fld>
+            <a:endParaRPr lang="en-US"/>
+          </a:p>
+        </p:txBody>
+      </p:sp>
+    </p:spTree>
+    <p:extLst>
+      <p:ext uri="{BB962C8B-B14F-4D97-AF65-F5344CB8AC3E}">
+        <p14:creationId xmlns:p14="http://schemas.microsoft.com/office/powerpoint/2010/main" val="1024086991"/>
+      </p:ext>
+    </p:extLst>
+  </p:cSld>
+  <p:clrMapOvr>
+    <a:masterClrMapping/>
+  </p:clrMapOvr>
+</p:notes>
+</file>
+
 <file path=ppt/notesSlides/notesSlide2.xml><?xml version="1.0" encoding="utf-8"?>
 <p:notes xmlns:a="http://schemas.openxmlformats.org/drawingml/2006/main" xmlns:r="http://schemas.openxmlformats.org/officeDocument/2006/relationships" xmlns:p="http://schemas.openxmlformats.org/presentationml/2006/main">
   <p:cSld>
@@ -686,7 +864,7 @@
           <a:p>
             <a:r>
               <a:rPr lang="en-US" dirty="0"/>
-              <a:t>Commencer par le niveau 0 au tableau, puis décomposer un processus en niveau 1.</a:t>
+              <a:t>Commencer par le niveau 0 au tableau, puis decomposer un processus en niveau 1.</a:t>
             </a:r>
             <a:endParaRPr lang="en-US" dirty="0"/>
           </a:p>
@@ -774,7 +952,7 @@
           <a:p>
             <a:r>
               <a:rPr lang="en-US" dirty="0"/>
-              <a:t>Faire dessiner les 4 symboles par les étudiants. Puis les assembler.</a:t>
+              <a:t>Faire dessiner les 4 symboles par les etudiants. Puis les assembler pour SwissSound.</a:t>
             </a:r>
             <a:endParaRPr lang="en-US" dirty="0"/>
           </a:p>
@@ -862,7 +1040,7 @@
           <a:p>
             <a:r>
               <a:rPr lang="en-US" dirty="0"/>
-              <a:t>Le flowchart montre la LOGIQUE, le DFD montre les FLUX DE DONNÉES. Complémentaires.</a:t>
+              <a:t>Le flowchart montre la LOGIQUE, le DFD montre les FLUX DE DONNEES. Complementaires.</a:t>
             </a:r>
             <a:endParaRPr lang="en-US" dirty="0"/>
           </a:p>
@@ -950,7 +1128,7 @@
           <a:p>
             <a:r>
               <a:rPr lang="en-US" dirty="0"/>
-              <a:t>Le dictionnaire technique est le document de référence pour la maintenance.</a:t>
+              <a:t>Issu du document Lo4_pptx. Le diagramme de cas d'utilisation est un outil UML pour visualiser les fonctionnalites avant de coder. Utile pour le cahier des charges.</a:t>
             </a:r>
             <a:endParaRPr lang="en-US" dirty="0"/>
           </a:p>
@@ -1038,7 +1216,7 @@
           <a:p>
             <a:r>
               <a:rPr lang="en-US" dirty="0"/>
-              <a:t>Les DFD et flowcharts sont requis pour M5 (doc complète).</a:t>
+              <a:t>Dessiner ce diagramme en live avec les etudiants. Chaque acteur a un bonhomme batonnet, chaque cas un ovale, le tout dans un rectangle 'SwissSound'.</a:t>
             </a:r>
             <a:endParaRPr lang="en-US" dirty="0"/>
           </a:p>
@@ -1126,7 +1304,7 @@
           <a:p>
             <a:r>
               <a:rPr lang="en-US" dirty="0"/>
-              <a:t/>
+              <a:t>Le dictionnaire technique est le document de reference pour la maintenance.</a:t>
             </a:r>
             <a:endParaRPr lang="en-US" dirty="0"/>
           </a:p>
@@ -1214,7 +1392,7 @@
           <a:p>
             <a:r>
               <a:rPr lang="en-US" dirty="0"/>
-              <a:t/>
+              <a:t>Les DFD, flowcharts et cas d'utilisation sont requis pour M5.</a:t>
             </a:r>
             <a:endParaRPr lang="en-US" dirty="0"/>
           </a:p>
@@ -1695,7 +1873,7 @@
               <a:buNone/>
             </a:pPr>
             <a:r>
-              <a:rPr lang="en-US" sz="3200" b="1" dirty="0">
+              <a:rPr lang="en-US" sz="3000" b="1" dirty="0">
                 <a:solidFill>
                   <a:srgbClr val="FFFFFF"/>
                 </a:solidFill>
@@ -1705,7 +1883,7 @@
               </a:rPr>
               <a:t>Documentation technique</a:t>
             </a:r>
-            <a:endParaRPr lang="en-US" sz="3200" dirty="0"/>
+            <a:endParaRPr lang="en-US" sz="3000" dirty="0"/>
           </a:p>
         </p:txBody>
       </p:sp>
@@ -1734,7 +1912,7 @@
               <a:buNone/>
             </a:pPr>
             <a:r>
-              <a:rPr lang="en-US" sz="1500" dirty="0">
+              <a:rPr lang="en-US" sz="1400" dirty="0">
                 <a:solidFill>
                   <a:srgbClr val="CCCCCC"/>
                 </a:solidFill>
@@ -1742,9 +1920,9 @@
                 <a:ea typeface="Calibri" pitchFamily="34" charset="-122"/>
                 <a:cs typeface="Calibri" pitchFamily="34" charset="-120"/>
               </a:rPr>
-              <a:t>DFD niveaux 0-2 · Flowcharts · Dictionnaire</a:t>
-            </a:r>
-            <a:endParaRPr lang="en-US" sz="1500" dirty="0"/>
+              <a:t>DFD · Flowcharts · Cas d'utilisation UML · Dictionnaire</a:t>
+            </a:r>
+            <a:endParaRPr lang="en-US" sz="1400" dirty="0"/>
           </a:p>
         </p:txBody>
       </p:sp>
@@ -1784,6 +1962,1013 @@
               <a:t>SwissSound Studios | BTEC: P5 M5 | LO4</a:t>
             </a:r>
             <a:endParaRPr lang="en-US" sz="1100" dirty="0"/>
+          </a:p>
+        </p:txBody>
+      </p:sp>
+    </p:spTree>
+  </p:cSld>
+  <p:clrMapOvr>
+    <a:masterClrMapping/>
+  </p:clrMapOvr>
+</p:sld>
+</file>
+
+<file path=ppt/slides/slide10.xml><?xml version="1.0" encoding="utf-8"?>
+<p:sld xmlns:a="http://schemas.openxmlformats.org/drawingml/2006/main" xmlns:r="http://schemas.openxmlformats.org/officeDocument/2006/relationships" xmlns:p="http://schemas.openxmlformats.org/presentationml/2006/main">
+  <p:cSld name="Slide 10">
+    <p:bg>
+      <p:bgPr>
+        <a:solidFill>
+          <a:srgbClr val="4A0072"/>
+        </a:solidFill>
+      </p:bgPr>
+    </p:bg>
+    <p:spTree>
+      <p:nvGrpSpPr>
+        <p:cNvPr id="1" name=""/>
+        <p:cNvGrpSpPr/>
+        <p:nvPr/>
+      </p:nvGrpSpPr>
+      <p:grpSpPr>
+        <a:xfrm>
+          <a:off x="0" y="0"/>
+          <a:ext cx="0" cy="0"/>
+          <a:chOff x="0" y="0"/>
+          <a:chExt cx="0" cy="0"/>
+        </a:xfrm>
+      </p:grpSpPr>
+      <p:sp>
+        <p:nvSpPr>
+          <p:cNvPr id="2" name="Text 0"/>
+          <p:cNvSpPr/>
+          <p:nvPr/>
+        </p:nvSpPr>
+        <p:spPr>
+          <a:xfrm>
+            <a:off x="457200" y="1828800"/>
+            <a:ext cx="8229600" cy="548640"/>
+          </a:xfrm>
+          <a:prstGeom prst="rect">
+            <a:avLst/>
+          </a:prstGeom>
+          <a:noFill/>
+          <a:ln/>
+        </p:spPr>
+        <p:txBody>
+          <a:bodyPr wrap="square" lIns="0" tIns="0" rIns="0" bIns="0" rtlCol="0" anchor="ctr"/>
+          <a:lstStyle/>
+          <a:p>
+            <a:pPr algn="ctr" indent="0" marL="0">
+              <a:buNone/>
+            </a:pPr>
+            <a:r>
+              <a:rPr lang="en-US" sz="2400" b="1" dirty="0">
+                <a:solidFill>
+                  <a:srgbClr val="FFFFFF"/>
+                </a:solidFill>
+                <a:latin typeface="Trebuchet MS" pitchFamily="34" charset="0"/>
+                <a:ea typeface="Trebuchet MS" pitchFamily="34" charset="-122"/>
+                <a:cs typeface="Trebuchet MS" pitchFamily="34" charset="-120"/>
+              </a:rPr>
+              <a:t>Mini-jeu : Le Cartographe</a:t>
+            </a:r>
+            <a:endParaRPr lang="en-US" sz="2400" dirty="0"/>
+          </a:p>
+        </p:txBody>
+      </p:sp>
+      <p:sp>
+        <p:nvSpPr>
+          <p:cNvPr id="3" name="Text 1"/>
+          <p:cNvSpPr/>
+          <p:nvPr/>
+        </p:nvSpPr>
+        <p:spPr>
+          <a:xfrm>
+            <a:off x="1371600" y="2468880"/>
+            <a:ext cx="6400800" cy="457200"/>
+          </a:xfrm>
+          <a:prstGeom prst="rect">
+            <a:avLst/>
+          </a:prstGeom>
+          <a:noFill/>
+          <a:ln/>
+        </p:spPr>
+        <p:txBody>
+          <a:bodyPr wrap="square" lIns="0" tIns="0" rIns="0" bIns="0" rtlCol="0" anchor="ctr"/>
+          <a:lstStyle/>
+          <a:p>
+            <a:pPr algn="ctr" indent="0" marL="0">
+              <a:buNone/>
+            </a:pPr>
+            <a:r>
+              <a:rPr lang="en-US" sz="1300" dirty="0">
+                <a:solidFill>
+                  <a:srgbClr val="CCCCCC"/>
+                </a:solidFill>
+                <a:latin typeface="Calibri" pitchFamily="34" charset="0"/>
+                <a:ea typeface="Calibri" pitchFamily="34" charset="-122"/>
+                <a:cs typeface="Calibri" pitchFamily="34" charset="-120"/>
+              </a:rPr>
+              <a:t>Placez les bons symboles DFD et UML au bon endroit</a:t>
+            </a:r>
+            <a:endParaRPr lang="en-US" sz="1300" dirty="0"/>
+          </a:p>
+        </p:txBody>
+      </p:sp>
+    </p:spTree>
+  </p:cSld>
+  <p:clrMapOvr>
+    <a:masterClrMapping/>
+  </p:clrMapOvr>
+</p:sld>
+</file>
+
+<file path=ppt/slides/slide11.xml><?xml version="1.0" encoding="utf-8"?>
+<p:sld xmlns:a="http://schemas.openxmlformats.org/drawingml/2006/main" xmlns:r="http://schemas.openxmlformats.org/officeDocument/2006/relationships" xmlns:p="http://schemas.openxmlformats.org/presentationml/2006/main">
+  <p:cSld name="Slide 11">
+    <p:bg>
+      <p:bgPr>
+        <a:solidFill>
+          <a:srgbClr val="F5F7FA"/>
+        </a:solidFill>
+      </p:bgPr>
+    </p:bg>
+    <p:spTree>
+      <p:nvGrpSpPr>
+        <p:cNvPr id="1" name=""/>
+        <p:cNvGrpSpPr/>
+        <p:nvPr/>
+      </p:nvGrpSpPr>
+      <p:grpSpPr>
+        <a:xfrm>
+          <a:off x="0" y="0"/>
+          <a:ext cx="0" cy="0"/>
+          <a:chOff x="0" y="0"/>
+          <a:chExt cx="0" cy="0"/>
+        </a:xfrm>
+      </p:grpSpPr>
+      <p:sp>
+        <p:nvSpPr>
+          <p:cNvPr id="2" name="Text 0"/>
+          <p:cNvSpPr/>
+          <p:nvPr/>
+        </p:nvSpPr>
+        <p:spPr>
+          <a:xfrm>
+            <a:off x="457200" y="137160"/>
+            <a:ext cx="5486400" cy="365760"/>
+          </a:xfrm>
+          <a:prstGeom prst="rect">
+            <a:avLst/>
+          </a:prstGeom>
+          <a:noFill/>
+          <a:ln/>
+        </p:spPr>
+        <p:txBody>
+          <a:bodyPr wrap="square" lIns="0" tIns="0" rIns="0" bIns="0" rtlCol="0" anchor="ctr"/>
+          <a:lstStyle/>
+          <a:p>
+            <a:pPr indent="0" marL="0">
+              <a:buNone/>
+            </a:pPr>
+            <a:r>
+              <a:rPr lang="en-US" sz="1600" b="1" dirty="0">
+                <a:solidFill>
+                  <a:srgbClr val="4A0072"/>
+                </a:solidFill>
+                <a:latin typeface="Trebuchet MS" pitchFamily="34" charset="0"/>
+                <a:ea typeface="Trebuchet MS" pitchFamily="34" charset="-122"/>
+                <a:cs typeface="Trebuchet MS" pitchFamily="34" charset="-120"/>
+              </a:rPr>
+              <a:t>Memo Module 19</a:t>
+            </a:r>
+            <a:endParaRPr lang="en-US" sz="1600" dirty="0"/>
+          </a:p>
+        </p:txBody>
+      </p:sp>
+      <p:sp>
+        <p:nvSpPr>
+          <p:cNvPr id="3" name="Shape 1"/>
+          <p:cNvSpPr/>
+          <p:nvPr/>
+        </p:nvSpPr>
+        <p:spPr>
+          <a:xfrm>
+            <a:off x="457200" y="640080"/>
+            <a:ext cx="2286000" cy="429768"/>
+          </a:xfrm>
+          <a:prstGeom prst="rect">
+            <a:avLst/>
+          </a:prstGeom>
+          <a:solidFill>
+            <a:srgbClr val="F3E5F5"/>
+          </a:solidFill>
+          <a:ln/>
+        </p:spPr>
+      </p:sp>
+      <p:sp>
+        <p:nvSpPr>
+          <p:cNvPr id="4" name="Text 2"/>
+          <p:cNvSpPr/>
+          <p:nvPr/>
+        </p:nvSpPr>
+        <p:spPr>
+          <a:xfrm>
+            <a:off x="548640" y="640080"/>
+            <a:ext cx="2103120" cy="429768"/>
+          </a:xfrm>
+          <a:prstGeom prst="rect">
+            <a:avLst/>
+          </a:prstGeom>
+          <a:noFill/>
+          <a:ln/>
+        </p:spPr>
+        <p:txBody>
+          <a:bodyPr wrap="square" lIns="0" tIns="0" rIns="0" bIns="0" rtlCol="0" anchor="ctr"/>
+          <a:lstStyle/>
+          <a:p>
+            <a:pPr indent="0" marL="0">
+              <a:buNone/>
+            </a:pPr>
+            <a:r>
+              <a:rPr lang="en-US" sz="900" b="1" dirty="0">
+                <a:solidFill>
+                  <a:srgbClr val="4A0072"/>
+                </a:solidFill>
+                <a:latin typeface="Trebuchet MS" pitchFamily="34" charset="0"/>
+                <a:ea typeface="Trebuchet MS" pitchFamily="34" charset="-122"/>
+                <a:cs typeface="Trebuchet MS" pitchFamily="34" charset="-120"/>
+              </a:rPr>
+              <a:t>DFD</a:t>
+            </a:r>
+            <a:endParaRPr lang="en-US" sz="900" dirty="0"/>
+          </a:p>
+        </p:txBody>
+      </p:sp>
+      <p:sp>
+        <p:nvSpPr>
+          <p:cNvPr id="5" name="Shape 3"/>
+          <p:cNvSpPr/>
+          <p:nvPr/>
+        </p:nvSpPr>
+        <p:spPr>
+          <a:xfrm>
+            <a:off x="2743200" y="640080"/>
+            <a:ext cx="5943600" cy="429768"/>
+          </a:xfrm>
+          <a:prstGeom prst="rect">
+            <a:avLst/>
+          </a:prstGeom>
+          <a:solidFill>
+            <a:srgbClr val="F3E5F5"/>
+          </a:solidFill>
+          <a:ln/>
+        </p:spPr>
+      </p:sp>
+      <p:sp>
+        <p:nvSpPr>
+          <p:cNvPr id="6" name="Text 4"/>
+          <p:cNvSpPr/>
+          <p:nvPr/>
+        </p:nvSpPr>
+        <p:spPr>
+          <a:xfrm>
+            <a:off x="2834640" y="640080"/>
+            <a:ext cx="5760720" cy="429768"/>
+          </a:xfrm>
+          <a:prstGeom prst="rect">
+            <a:avLst/>
+          </a:prstGeom>
+          <a:noFill/>
+          <a:ln/>
+        </p:spPr>
+        <p:txBody>
+          <a:bodyPr wrap="square" lIns="0" tIns="0" rIns="0" bIns="0" rtlCol="0" anchor="ctr"/>
+          <a:lstStyle/>
+          <a:p>
+            <a:pPr indent="0" marL="0">
+              <a:buNone/>
+            </a:pPr>
+            <a:r>
+              <a:rPr lang="en-US" sz="900" dirty="0">
+                <a:solidFill>
+                  <a:srgbClr val="333333"/>
+                </a:solidFill>
+                <a:latin typeface="Calibri" pitchFamily="34" charset="0"/>
+                <a:ea typeface="Calibri" pitchFamily="34" charset="-122"/>
+                <a:cs typeface="Calibri" pitchFamily="34" charset="-120"/>
+              </a:rPr>
+              <a:t>Flux de donnees entre processus</a:t>
+            </a:r>
+            <a:endParaRPr lang="en-US" sz="900" dirty="0"/>
+          </a:p>
+        </p:txBody>
+      </p:sp>
+      <p:sp>
+        <p:nvSpPr>
+          <p:cNvPr id="7" name="Shape 5"/>
+          <p:cNvSpPr/>
+          <p:nvPr/>
+        </p:nvSpPr>
+        <p:spPr>
+          <a:xfrm>
+            <a:off x="457200" y="1097280"/>
+            <a:ext cx="2286000" cy="429768"/>
+          </a:xfrm>
+          <a:prstGeom prst="rect">
+            <a:avLst/>
+          </a:prstGeom>
+          <a:solidFill>
+            <a:srgbClr val="F0F0F0"/>
+          </a:solidFill>
+          <a:ln/>
+        </p:spPr>
+      </p:sp>
+      <p:sp>
+        <p:nvSpPr>
+          <p:cNvPr id="8" name="Text 6"/>
+          <p:cNvSpPr/>
+          <p:nvPr/>
+        </p:nvSpPr>
+        <p:spPr>
+          <a:xfrm>
+            <a:off x="548640" y="1097280"/>
+            <a:ext cx="2103120" cy="429768"/>
+          </a:xfrm>
+          <a:prstGeom prst="rect">
+            <a:avLst/>
+          </a:prstGeom>
+          <a:noFill/>
+          <a:ln/>
+        </p:spPr>
+        <p:txBody>
+          <a:bodyPr wrap="square" lIns="0" tIns="0" rIns="0" bIns="0" rtlCol="0" anchor="ctr"/>
+          <a:lstStyle/>
+          <a:p>
+            <a:pPr indent="0" marL="0">
+              <a:buNone/>
+            </a:pPr>
+            <a:r>
+              <a:rPr lang="en-US" sz="900" b="1" dirty="0">
+                <a:solidFill>
+                  <a:srgbClr val="4A0072"/>
+                </a:solidFill>
+                <a:latin typeface="Trebuchet MS" pitchFamily="34" charset="0"/>
+                <a:ea typeface="Trebuchet MS" pitchFamily="34" charset="-122"/>
+                <a:cs typeface="Trebuchet MS" pitchFamily="34" charset="-120"/>
+              </a:rPr>
+              <a:t>Niveau 0</a:t>
+            </a:r>
+            <a:endParaRPr lang="en-US" sz="900" dirty="0"/>
+          </a:p>
+        </p:txBody>
+      </p:sp>
+      <p:sp>
+        <p:nvSpPr>
+          <p:cNvPr id="9" name="Shape 7"/>
+          <p:cNvSpPr/>
+          <p:nvPr/>
+        </p:nvSpPr>
+        <p:spPr>
+          <a:xfrm>
+            <a:off x="2743200" y="1097280"/>
+            <a:ext cx="5943600" cy="429768"/>
+          </a:xfrm>
+          <a:prstGeom prst="rect">
+            <a:avLst/>
+          </a:prstGeom>
+          <a:solidFill>
+            <a:srgbClr val="F0F0F0"/>
+          </a:solidFill>
+          <a:ln/>
+        </p:spPr>
+      </p:sp>
+      <p:sp>
+        <p:nvSpPr>
+          <p:cNvPr id="10" name="Text 8"/>
+          <p:cNvSpPr/>
+          <p:nvPr/>
+        </p:nvSpPr>
+        <p:spPr>
+          <a:xfrm>
+            <a:off x="2834640" y="1097280"/>
+            <a:ext cx="5760720" cy="429768"/>
+          </a:xfrm>
+          <a:prstGeom prst="rect">
+            <a:avLst/>
+          </a:prstGeom>
+          <a:noFill/>
+          <a:ln/>
+        </p:spPr>
+        <p:txBody>
+          <a:bodyPr wrap="square" lIns="0" tIns="0" rIns="0" bIns="0" rtlCol="0" anchor="ctr"/>
+          <a:lstStyle/>
+          <a:p>
+            <a:pPr indent="0" marL="0">
+              <a:buNone/>
+            </a:pPr>
+            <a:r>
+              <a:rPr lang="en-US" sz="900" dirty="0">
+                <a:solidFill>
+                  <a:srgbClr val="333333"/>
+                </a:solidFill>
+                <a:latin typeface="Calibri" pitchFamily="34" charset="0"/>
+                <a:ea typeface="Calibri" pitchFamily="34" charset="-122"/>
+                <a:cs typeface="Calibri" pitchFamily="34" charset="-120"/>
+              </a:rPr>
+              <a:t>Contexte : 1 processus, entites externes</a:t>
+            </a:r>
+            <a:endParaRPr lang="en-US" sz="900" dirty="0"/>
+          </a:p>
+        </p:txBody>
+      </p:sp>
+      <p:sp>
+        <p:nvSpPr>
+          <p:cNvPr id="11" name="Shape 9"/>
+          <p:cNvSpPr/>
+          <p:nvPr/>
+        </p:nvSpPr>
+        <p:spPr>
+          <a:xfrm>
+            <a:off x="457200" y="1554480"/>
+            <a:ext cx="2286000" cy="429768"/>
+          </a:xfrm>
+          <a:prstGeom prst="rect">
+            <a:avLst/>
+          </a:prstGeom>
+          <a:solidFill>
+            <a:srgbClr val="F3E5F5"/>
+          </a:solidFill>
+          <a:ln/>
+        </p:spPr>
+      </p:sp>
+      <p:sp>
+        <p:nvSpPr>
+          <p:cNvPr id="12" name="Text 10"/>
+          <p:cNvSpPr/>
+          <p:nvPr/>
+        </p:nvSpPr>
+        <p:spPr>
+          <a:xfrm>
+            <a:off x="548640" y="1554480"/>
+            <a:ext cx="2103120" cy="429768"/>
+          </a:xfrm>
+          <a:prstGeom prst="rect">
+            <a:avLst/>
+          </a:prstGeom>
+          <a:noFill/>
+          <a:ln/>
+        </p:spPr>
+        <p:txBody>
+          <a:bodyPr wrap="square" lIns="0" tIns="0" rIns="0" bIns="0" rtlCol="0" anchor="ctr"/>
+          <a:lstStyle/>
+          <a:p>
+            <a:pPr indent="0" marL="0">
+              <a:buNone/>
+            </a:pPr>
+            <a:r>
+              <a:rPr lang="en-US" sz="900" b="1" dirty="0">
+                <a:solidFill>
+                  <a:srgbClr val="4A0072"/>
+                </a:solidFill>
+                <a:latin typeface="Trebuchet MS" pitchFamily="34" charset="0"/>
+                <a:ea typeface="Trebuchet MS" pitchFamily="34" charset="-122"/>
+                <a:cs typeface="Trebuchet MS" pitchFamily="34" charset="-120"/>
+              </a:rPr>
+              <a:t>Flowchart</a:t>
+            </a:r>
+            <a:endParaRPr lang="en-US" sz="900" dirty="0"/>
+          </a:p>
+        </p:txBody>
+      </p:sp>
+      <p:sp>
+        <p:nvSpPr>
+          <p:cNvPr id="13" name="Shape 11"/>
+          <p:cNvSpPr/>
+          <p:nvPr/>
+        </p:nvSpPr>
+        <p:spPr>
+          <a:xfrm>
+            <a:off x="2743200" y="1554480"/>
+            <a:ext cx="5943600" cy="429768"/>
+          </a:xfrm>
+          <a:prstGeom prst="rect">
+            <a:avLst/>
+          </a:prstGeom>
+          <a:solidFill>
+            <a:srgbClr val="F3E5F5"/>
+          </a:solidFill>
+          <a:ln/>
+        </p:spPr>
+      </p:sp>
+      <p:sp>
+        <p:nvSpPr>
+          <p:cNvPr id="14" name="Text 12"/>
+          <p:cNvSpPr/>
+          <p:nvPr/>
+        </p:nvSpPr>
+        <p:spPr>
+          <a:xfrm>
+            <a:off x="2834640" y="1554480"/>
+            <a:ext cx="5760720" cy="429768"/>
+          </a:xfrm>
+          <a:prstGeom prst="rect">
+            <a:avLst/>
+          </a:prstGeom>
+          <a:noFill/>
+          <a:ln/>
+        </p:spPr>
+        <p:txBody>
+          <a:bodyPr wrap="square" lIns="0" tIns="0" rIns="0" bIns="0" rtlCol="0" anchor="ctr"/>
+          <a:lstStyle/>
+          <a:p>
+            <a:pPr indent="0" marL="0">
+              <a:buNone/>
+            </a:pPr>
+            <a:r>
+              <a:rPr lang="en-US" sz="900" dirty="0">
+                <a:solidFill>
+                  <a:srgbClr val="333333"/>
+                </a:solidFill>
+                <a:latin typeface="Calibri" pitchFamily="34" charset="0"/>
+                <a:ea typeface="Calibri" pitchFamily="34" charset="-122"/>
+                <a:cs typeface="Calibri" pitchFamily="34" charset="-120"/>
+              </a:rPr>
+              <a:t>Logique : actions + decisions</a:t>
+            </a:r>
+            <a:endParaRPr lang="en-US" sz="900" dirty="0"/>
+          </a:p>
+        </p:txBody>
+      </p:sp>
+      <p:sp>
+        <p:nvSpPr>
+          <p:cNvPr id="15" name="Shape 13"/>
+          <p:cNvSpPr/>
+          <p:nvPr/>
+        </p:nvSpPr>
+        <p:spPr>
+          <a:xfrm>
+            <a:off x="457200" y="2011680"/>
+            <a:ext cx="2286000" cy="429768"/>
+          </a:xfrm>
+          <a:prstGeom prst="rect">
+            <a:avLst/>
+          </a:prstGeom>
+          <a:solidFill>
+            <a:srgbClr val="F0F0F0"/>
+          </a:solidFill>
+          <a:ln/>
+        </p:spPr>
+      </p:sp>
+      <p:sp>
+        <p:nvSpPr>
+          <p:cNvPr id="16" name="Text 14"/>
+          <p:cNvSpPr/>
+          <p:nvPr/>
+        </p:nvSpPr>
+        <p:spPr>
+          <a:xfrm>
+            <a:off x="548640" y="2011680"/>
+            <a:ext cx="2103120" cy="429768"/>
+          </a:xfrm>
+          <a:prstGeom prst="rect">
+            <a:avLst/>
+          </a:prstGeom>
+          <a:noFill/>
+          <a:ln/>
+        </p:spPr>
+        <p:txBody>
+          <a:bodyPr wrap="square" lIns="0" tIns="0" rIns="0" bIns="0" rtlCol="0" anchor="ctr"/>
+          <a:lstStyle/>
+          <a:p>
+            <a:pPr indent="0" marL="0">
+              <a:buNone/>
+            </a:pPr>
+            <a:r>
+              <a:rPr lang="en-US" sz="900" b="1" dirty="0">
+                <a:solidFill>
+                  <a:srgbClr val="4A0072"/>
+                </a:solidFill>
+                <a:latin typeface="Trebuchet MS" pitchFamily="34" charset="0"/>
+                <a:ea typeface="Trebuchet MS" pitchFamily="34" charset="-122"/>
+                <a:cs typeface="Trebuchet MS" pitchFamily="34" charset="-120"/>
+              </a:rPr>
+              <a:t>Cas d'utilisation</a:t>
+            </a:r>
+            <a:endParaRPr lang="en-US" sz="900" dirty="0"/>
+          </a:p>
+        </p:txBody>
+      </p:sp>
+      <p:sp>
+        <p:nvSpPr>
+          <p:cNvPr id="17" name="Shape 15"/>
+          <p:cNvSpPr/>
+          <p:nvPr/>
+        </p:nvSpPr>
+        <p:spPr>
+          <a:xfrm>
+            <a:off x="2743200" y="2011680"/>
+            <a:ext cx="5943600" cy="429768"/>
+          </a:xfrm>
+          <a:prstGeom prst="rect">
+            <a:avLst/>
+          </a:prstGeom>
+          <a:solidFill>
+            <a:srgbClr val="F0F0F0"/>
+          </a:solidFill>
+          <a:ln/>
+        </p:spPr>
+      </p:sp>
+      <p:sp>
+        <p:nvSpPr>
+          <p:cNvPr id="18" name="Text 16"/>
+          <p:cNvSpPr/>
+          <p:nvPr/>
+        </p:nvSpPr>
+        <p:spPr>
+          <a:xfrm>
+            <a:off x="2834640" y="2011680"/>
+            <a:ext cx="5760720" cy="429768"/>
+          </a:xfrm>
+          <a:prstGeom prst="rect">
+            <a:avLst/>
+          </a:prstGeom>
+          <a:noFill/>
+          <a:ln/>
+        </p:spPr>
+        <p:txBody>
+          <a:bodyPr wrap="square" lIns="0" tIns="0" rIns="0" bIns="0" rtlCol="0" anchor="ctr"/>
+          <a:lstStyle/>
+          <a:p>
+            <a:pPr indent="0" marL="0">
+              <a:buNone/>
+            </a:pPr>
+            <a:r>
+              <a:rPr lang="en-US" sz="900" dirty="0">
+                <a:solidFill>
+                  <a:srgbClr val="333333"/>
+                </a:solidFill>
+                <a:latin typeface="Calibri" pitchFamily="34" charset="0"/>
+                <a:ea typeface="Calibri" pitchFamily="34" charset="-122"/>
+                <a:cs typeface="Calibri" pitchFamily="34" charset="-120"/>
+              </a:rPr>
+              <a:t>UML : acteurs + fonctionnalites du systeme</a:t>
+            </a:r>
+            <a:endParaRPr lang="en-US" sz="900" dirty="0"/>
+          </a:p>
+        </p:txBody>
+      </p:sp>
+      <p:sp>
+        <p:nvSpPr>
+          <p:cNvPr id="19" name="Shape 17"/>
+          <p:cNvSpPr/>
+          <p:nvPr/>
+        </p:nvSpPr>
+        <p:spPr>
+          <a:xfrm>
+            <a:off x="457200" y="2468880"/>
+            <a:ext cx="2286000" cy="429768"/>
+          </a:xfrm>
+          <a:prstGeom prst="rect">
+            <a:avLst/>
+          </a:prstGeom>
+          <a:solidFill>
+            <a:srgbClr val="F3E5F5"/>
+          </a:solidFill>
+          <a:ln/>
+        </p:spPr>
+      </p:sp>
+      <p:sp>
+        <p:nvSpPr>
+          <p:cNvPr id="20" name="Text 18"/>
+          <p:cNvSpPr/>
+          <p:nvPr/>
+        </p:nvSpPr>
+        <p:spPr>
+          <a:xfrm>
+            <a:off x="548640" y="2468880"/>
+            <a:ext cx="2103120" cy="429768"/>
+          </a:xfrm>
+          <a:prstGeom prst="rect">
+            <a:avLst/>
+          </a:prstGeom>
+          <a:noFill/>
+          <a:ln/>
+        </p:spPr>
+        <p:txBody>
+          <a:bodyPr wrap="square" lIns="0" tIns="0" rIns="0" bIns="0" rtlCol="0" anchor="ctr"/>
+          <a:lstStyle/>
+          <a:p>
+            <a:pPr indent="0" marL="0">
+              <a:buNone/>
+            </a:pPr>
+            <a:r>
+              <a:rPr lang="en-US" sz="900" b="1" dirty="0">
+                <a:solidFill>
+                  <a:srgbClr val="4A0072"/>
+                </a:solidFill>
+                <a:latin typeface="Trebuchet MS" pitchFamily="34" charset="0"/>
+                <a:ea typeface="Trebuchet MS" pitchFamily="34" charset="-122"/>
+                <a:cs typeface="Trebuchet MS" pitchFamily="34" charset="-120"/>
+              </a:rPr>
+              <a:t>Include</a:t>
+            </a:r>
+            <a:endParaRPr lang="en-US" sz="900" dirty="0"/>
+          </a:p>
+        </p:txBody>
+      </p:sp>
+      <p:sp>
+        <p:nvSpPr>
+          <p:cNvPr id="21" name="Shape 19"/>
+          <p:cNvSpPr/>
+          <p:nvPr/>
+        </p:nvSpPr>
+        <p:spPr>
+          <a:xfrm>
+            <a:off x="2743200" y="2468880"/>
+            <a:ext cx="5943600" cy="429768"/>
+          </a:xfrm>
+          <a:prstGeom prst="rect">
+            <a:avLst/>
+          </a:prstGeom>
+          <a:solidFill>
+            <a:srgbClr val="F3E5F5"/>
+          </a:solidFill>
+          <a:ln/>
+        </p:spPr>
+      </p:sp>
+      <p:sp>
+        <p:nvSpPr>
+          <p:cNvPr id="22" name="Text 20"/>
+          <p:cNvSpPr/>
+          <p:nvPr/>
+        </p:nvSpPr>
+        <p:spPr>
+          <a:xfrm>
+            <a:off x="2834640" y="2468880"/>
+            <a:ext cx="5760720" cy="429768"/>
+          </a:xfrm>
+          <a:prstGeom prst="rect">
+            <a:avLst/>
+          </a:prstGeom>
+          <a:noFill/>
+          <a:ln/>
+        </p:spPr>
+        <p:txBody>
+          <a:bodyPr wrap="square" lIns="0" tIns="0" rIns="0" bIns="0" rtlCol="0" anchor="ctr"/>
+          <a:lstStyle/>
+          <a:p>
+            <a:pPr indent="0" marL="0">
+              <a:buNone/>
+            </a:pPr>
+            <a:r>
+              <a:rPr lang="en-US" sz="900" dirty="0">
+                <a:solidFill>
+                  <a:srgbClr val="333333"/>
+                </a:solidFill>
+                <a:latin typeface="Calibri" pitchFamily="34" charset="0"/>
+                <a:ea typeface="Calibri" pitchFamily="34" charset="-122"/>
+                <a:cs typeface="Calibri" pitchFamily="34" charset="-120"/>
+              </a:rPr>
+              <a:t>Un cas necessite un autre</a:t>
+            </a:r>
+            <a:endParaRPr lang="en-US" sz="900" dirty="0"/>
+          </a:p>
+        </p:txBody>
+      </p:sp>
+      <p:sp>
+        <p:nvSpPr>
+          <p:cNvPr id="23" name="Shape 21"/>
+          <p:cNvSpPr/>
+          <p:nvPr/>
+        </p:nvSpPr>
+        <p:spPr>
+          <a:xfrm>
+            <a:off x="457200" y="2926080"/>
+            <a:ext cx="2286000" cy="429768"/>
+          </a:xfrm>
+          <a:prstGeom prst="rect">
+            <a:avLst/>
+          </a:prstGeom>
+          <a:solidFill>
+            <a:srgbClr val="F0F0F0"/>
+          </a:solidFill>
+          <a:ln/>
+        </p:spPr>
+      </p:sp>
+      <p:sp>
+        <p:nvSpPr>
+          <p:cNvPr id="24" name="Text 22"/>
+          <p:cNvSpPr/>
+          <p:nvPr/>
+        </p:nvSpPr>
+        <p:spPr>
+          <a:xfrm>
+            <a:off x="548640" y="2926080"/>
+            <a:ext cx="2103120" cy="429768"/>
+          </a:xfrm>
+          <a:prstGeom prst="rect">
+            <a:avLst/>
+          </a:prstGeom>
+          <a:noFill/>
+          <a:ln/>
+        </p:spPr>
+        <p:txBody>
+          <a:bodyPr wrap="square" lIns="0" tIns="0" rIns="0" bIns="0" rtlCol="0" anchor="ctr"/>
+          <a:lstStyle/>
+          <a:p>
+            <a:pPr indent="0" marL="0">
+              <a:buNone/>
+            </a:pPr>
+            <a:r>
+              <a:rPr lang="en-US" sz="900" b="1" dirty="0">
+                <a:solidFill>
+                  <a:srgbClr val="4A0072"/>
+                </a:solidFill>
+                <a:latin typeface="Trebuchet MS" pitchFamily="34" charset="0"/>
+                <a:ea typeface="Trebuchet MS" pitchFamily="34" charset="-122"/>
+                <a:cs typeface="Trebuchet MS" pitchFamily="34" charset="-120"/>
+              </a:rPr>
+              <a:t>Extend</a:t>
+            </a:r>
+            <a:endParaRPr lang="en-US" sz="900" dirty="0"/>
+          </a:p>
+        </p:txBody>
+      </p:sp>
+      <p:sp>
+        <p:nvSpPr>
+          <p:cNvPr id="25" name="Shape 23"/>
+          <p:cNvSpPr/>
+          <p:nvPr/>
+        </p:nvSpPr>
+        <p:spPr>
+          <a:xfrm>
+            <a:off x="2743200" y="2926080"/>
+            <a:ext cx="5943600" cy="429768"/>
+          </a:xfrm>
+          <a:prstGeom prst="rect">
+            <a:avLst/>
+          </a:prstGeom>
+          <a:solidFill>
+            <a:srgbClr val="F0F0F0"/>
+          </a:solidFill>
+          <a:ln/>
+        </p:spPr>
+      </p:sp>
+      <p:sp>
+        <p:nvSpPr>
+          <p:cNvPr id="26" name="Text 24"/>
+          <p:cNvSpPr/>
+          <p:nvPr/>
+        </p:nvSpPr>
+        <p:spPr>
+          <a:xfrm>
+            <a:off x="2834640" y="2926080"/>
+            <a:ext cx="5760720" cy="429768"/>
+          </a:xfrm>
+          <a:prstGeom prst="rect">
+            <a:avLst/>
+          </a:prstGeom>
+          <a:noFill/>
+          <a:ln/>
+        </p:spPr>
+        <p:txBody>
+          <a:bodyPr wrap="square" lIns="0" tIns="0" rIns="0" bIns="0" rtlCol="0" anchor="ctr"/>
+          <a:lstStyle/>
+          <a:p>
+            <a:pPr indent="0" marL="0">
+              <a:buNone/>
+            </a:pPr>
+            <a:r>
+              <a:rPr lang="en-US" sz="900" dirty="0">
+                <a:solidFill>
+                  <a:srgbClr val="333333"/>
+                </a:solidFill>
+                <a:latin typeface="Calibri" pitchFamily="34" charset="0"/>
+                <a:ea typeface="Calibri" pitchFamily="34" charset="-122"/>
+                <a:cs typeface="Calibri" pitchFamily="34" charset="-120"/>
+              </a:rPr>
+              <a:t>Un cas est optionnel</a:t>
+            </a:r>
+            <a:endParaRPr lang="en-US" sz="900" dirty="0"/>
+          </a:p>
+        </p:txBody>
+      </p:sp>
+      <p:sp>
+        <p:nvSpPr>
+          <p:cNvPr id="27" name="Shape 25"/>
+          <p:cNvSpPr/>
+          <p:nvPr/>
+        </p:nvSpPr>
+        <p:spPr>
+          <a:xfrm>
+            <a:off x="457200" y="3383280"/>
+            <a:ext cx="2286000" cy="429768"/>
+          </a:xfrm>
+          <a:prstGeom prst="rect">
+            <a:avLst/>
+          </a:prstGeom>
+          <a:solidFill>
+            <a:srgbClr val="F3E5F5"/>
+          </a:solidFill>
+          <a:ln/>
+        </p:spPr>
+      </p:sp>
+      <p:sp>
+        <p:nvSpPr>
+          <p:cNvPr id="28" name="Text 26"/>
+          <p:cNvSpPr/>
+          <p:nvPr/>
+        </p:nvSpPr>
+        <p:spPr>
+          <a:xfrm>
+            <a:off x="548640" y="3383280"/>
+            <a:ext cx="2103120" cy="429768"/>
+          </a:xfrm>
+          <a:prstGeom prst="rect">
+            <a:avLst/>
+          </a:prstGeom>
+          <a:noFill/>
+          <a:ln/>
+        </p:spPr>
+        <p:txBody>
+          <a:bodyPr wrap="square" lIns="0" tIns="0" rIns="0" bIns="0" rtlCol="0" anchor="ctr"/>
+          <a:lstStyle/>
+          <a:p>
+            <a:pPr indent="0" marL="0">
+              <a:buNone/>
+            </a:pPr>
+            <a:r>
+              <a:rPr lang="en-US" sz="900" b="1" dirty="0">
+                <a:solidFill>
+                  <a:srgbClr val="4A0072"/>
+                </a:solidFill>
+                <a:latin typeface="Trebuchet MS" pitchFamily="34" charset="0"/>
+                <a:ea typeface="Trebuchet MS" pitchFamily="34" charset="-122"/>
+                <a:cs typeface="Trebuchet MS" pitchFamily="34" charset="-120"/>
+              </a:rPr>
+              <a:t>Dict. technique</a:t>
+            </a:r>
+            <a:endParaRPr lang="en-US" sz="900" dirty="0"/>
+          </a:p>
+        </p:txBody>
+      </p:sp>
+      <p:sp>
+        <p:nvSpPr>
+          <p:cNvPr id="29" name="Shape 27"/>
+          <p:cNvSpPr/>
+          <p:nvPr/>
+        </p:nvSpPr>
+        <p:spPr>
+          <a:xfrm>
+            <a:off x="2743200" y="3383280"/>
+            <a:ext cx="5943600" cy="429768"/>
+          </a:xfrm>
+          <a:prstGeom prst="rect">
+            <a:avLst/>
+          </a:prstGeom>
+          <a:solidFill>
+            <a:srgbClr val="F3E5F5"/>
+          </a:solidFill>
+          <a:ln/>
+        </p:spPr>
+      </p:sp>
+      <p:sp>
+        <p:nvSpPr>
+          <p:cNvPr id="30" name="Text 28"/>
+          <p:cNvSpPr/>
+          <p:nvPr/>
+        </p:nvSpPr>
+        <p:spPr>
+          <a:xfrm>
+            <a:off x="2834640" y="3383280"/>
+            <a:ext cx="5760720" cy="429768"/>
+          </a:xfrm>
+          <a:prstGeom prst="rect">
+            <a:avLst/>
+          </a:prstGeom>
+          <a:noFill/>
+          <a:ln/>
+        </p:spPr>
+        <p:txBody>
+          <a:bodyPr wrap="square" lIns="0" tIns="0" rIns="0" bIns="0" rtlCol="0" anchor="ctr"/>
+          <a:lstStyle/>
+          <a:p>
+            <a:pPr indent="0" marL="0">
+              <a:buNone/>
+            </a:pPr>
+            <a:r>
+              <a:rPr lang="en-US" sz="900" dirty="0">
+                <a:solidFill>
+                  <a:srgbClr val="333333"/>
+                </a:solidFill>
+                <a:latin typeface="Calibri" pitchFamily="34" charset="0"/>
+                <a:ea typeface="Calibri" pitchFamily="34" charset="-122"/>
+                <a:cs typeface="Calibri" pitchFamily="34" charset="-120"/>
+              </a:rPr>
+              <a:t>Table par table : type, contraintes, FK</a:t>
+            </a:r>
+            <a:endParaRPr lang="en-US" sz="900" dirty="0"/>
           </a:p>
         </p:txBody>
       </p:sp>
@@ -1848,7 +3033,7 @@
         <p:spPr>
           <a:xfrm>
             <a:off x="457200" y="182880"/>
-            <a:ext cx="8229600" cy="594360"/>
+            <a:ext cx="8229600" cy="548640"/>
           </a:xfrm>
           <a:prstGeom prst="rect">
             <a:avLst/>
@@ -1864,7 +3049,7 @@
               <a:buNone/>
             </a:pPr>
             <a:r>
-              <a:rPr lang="en-US" sz="2400" b="1" dirty="0">
+              <a:rPr lang="en-US" sz="2200" b="1" dirty="0">
                 <a:solidFill>
                   <a:srgbClr val="4A0072"/>
                 </a:solidFill>
@@ -1874,7 +3059,7 @@
               </a:rPr>
               <a:t>Documentation technique : pour qui ?</a:t>
             </a:r>
-            <a:endParaRPr lang="en-US" sz="2400" dirty="0"/>
+            <a:endParaRPr lang="en-US" sz="2200" dirty="0"/>
           </a:p>
         </p:txBody>
       </p:sp>
@@ -1886,8 +3071,8 @@
         </p:nvSpPr>
         <p:spPr>
           <a:xfrm>
-            <a:off x="457200" y="914400"/>
-            <a:ext cx="8229600" cy="521208"/>
+            <a:off x="457200" y="868680"/>
+            <a:ext cx="8229600" cy="475488"/>
           </a:xfrm>
           <a:prstGeom prst="rect">
             <a:avLst/>
@@ -1896,13 +3081,6 @@
             <a:srgbClr val="FFFFFF"/>
           </a:solidFill>
           <a:ln/>
-          <a:effectLst>
-            <a:outerShdw sx="100000" sy="100000" kx="0" ky="0" algn="bl" rotWithShape="0" blurRad="50800" dist="25400" dir="8100000">
-              <a:srgbClr val="000000">
-                <a:alpha val="12000"/>
-              </a:srgbClr>
-            </a:outerShdw>
-          </a:effectLst>
         </p:spPr>
       </p:sp>
       <p:sp>
@@ -1913,8 +3091,8 @@
         </p:nvSpPr>
         <p:spPr>
           <a:xfrm>
-            <a:off x="457200" y="914400"/>
-            <a:ext cx="45720" cy="521208"/>
+            <a:off x="457200" y="868680"/>
+            <a:ext cx="45720" cy="475488"/>
           </a:xfrm>
           <a:prstGeom prst="rect">
             <a:avLst/>
@@ -1933,8 +3111,8 @@
         </p:nvSpPr>
         <p:spPr>
           <a:xfrm>
-            <a:off x="685800" y="914400"/>
-            <a:ext cx="7818120" cy="521208"/>
+            <a:off x="640080" y="868680"/>
+            <a:ext cx="7863840" cy="475488"/>
           </a:xfrm>
           <a:prstGeom prst="rect">
             <a:avLst/>
@@ -1950,7 +3128,7 @@
               <a:buNone/>
             </a:pPr>
             <a:r>
-              <a:rPr lang="en-US" sz="1200" dirty="0">
+              <a:rPr lang="en-US" sz="1100" dirty="0">
                 <a:solidFill>
                   <a:srgbClr val="1A1A2E"/>
                 </a:solidFill>
@@ -1958,9 +3136,9 @@
                 <a:ea typeface="Calibri" pitchFamily="34" charset="-122"/>
                 <a:cs typeface="Calibri" pitchFamily="34" charset="-120"/>
               </a:rPr>
-              <a:t>Audience : développeurs, DBA, équipe de maintenance</a:t>
-            </a:r>
-            <a:endParaRPr lang="en-US" sz="1200" dirty="0"/>
+              <a:t>Audience : developpeurs, DBA, equipe de maintenance</a:t>
+            </a:r>
+            <a:endParaRPr lang="en-US" sz="1100" dirty="0"/>
           </a:p>
         </p:txBody>
       </p:sp>
@@ -1972,8 +3150,8 @@
         </p:nvSpPr>
         <p:spPr>
           <a:xfrm>
-            <a:off x="457200" y="1463040"/>
-            <a:ext cx="8229600" cy="521208"/>
+            <a:off x="457200" y="1371600"/>
+            <a:ext cx="8229600" cy="475488"/>
           </a:xfrm>
           <a:prstGeom prst="rect">
             <a:avLst/>
@@ -1982,13 +3160,6 @@
             <a:srgbClr val="F3E5F5"/>
           </a:solidFill>
           <a:ln/>
-          <a:effectLst>
-            <a:outerShdw sx="100000" sy="100000" kx="0" ky="0" algn="bl" rotWithShape="0" blurRad="50800" dist="25400" dir="8100000">
-              <a:srgbClr val="000000">
-                <a:alpha val="12000"/>
-              </a:srgbClr>
-            </a:outerShdw>
-          </a:effectLst>
         </p:spPr>
       </p:sp>
       <p:sp>
@@ -1999,8 +3170,8 @@
         </p:nvSpPr>
         <p:spPr>
           <a:xfrm>
-            <a:off x="457200" y="1463040"/>
-            <a:ext cx="45720" cy="521208"/>
+            <a:off x="457200" y="1371600"/>
+            <a:ext cx="45720" cy="475488"/>
           </a:xfrm>
           <a:prstGeom prst="rect">
             <a:avLst/>
@@ -2019,8 +3190,8 @@
         </p:nvSpPr>
         <p:spPr>
           <a:xfrm>
-            <a:off x="685800" y="1463040"/>
-            <a:ext cx="7818120" cy="521208"/>
+            <a:off x="640080" y="1371600"/>
+            <a:ext cx="7863840" cy="475488"/>
           </a:xfrm>
           <a:prstGeom prst="rect">
             <a:avLst/>
@@ -2036,7 +3207,7 @@
               <a:buNone/>
             </a:pPr>
             <a:r>
-              <a:rPr lang="en-US" sz="1200" dirty="0">
+              <a:rPr lang="en-US" sz="1100" dirty="0">
                 <a:solidFill>
                   <a:srgbClr val="1A1A2E"/>
                 </a:solidFill>
@@ -2044,9 +3215,9 @@
                 <a:ea typeface="Calibri" pitchFamily="34" charset="-122"/>
                 <a:cs typeface="Calibri" pitchFamily="34" charset="-120"/>
               </a:rPr>
-              <a:t>But : permettre à quelqu'un d'AUTRE de comprendre le système</a:t>
-            </a:r>
-            <a:endParaRPr lang="en-US" sz="1200" dirty="0"/>
+              <a:t>But : permettre a quelqu'un d'AUTRE de comprendre le systeme</a:t>
+            </a:r>
+            <a:endParaRPr lang="en-US" sz="1100" dirty="0"/>
           </a:p>
         </p:txBody>
       </p:sp>
@@ -2058,8 +3229,8 @@
         </p:nvSpPr>
         <p:spPr>
           <a:xfrm>
-            <a:off x="457200" y="2011680"/>
-            <a:ext cx="8229600" cy="521208"/>
+            <a:off x="457200" y="1874520"/>
+            <a:ext cx="8229600" cy="475488"/>
           </a:xfrm>
           <a:prstGeom prst="rect">
             <a:avLst/>
@@ -2068,13 +3239,6 @@
             <a:srgbClr val="FFFFFF"/>
           </a:solidFill>
           <a:ln/>
-          <a:effectLst>
-            <a:outerShdw sx="100000" sy="100000" kx="0" ky="0" algn="bl" rotWithShape="0" blurRad="50800" dist="25400" dir="8100000">
-              <a:srgbClr val="000000">
-                <a:alpha val="12000"/>
-              </a:srgbClr>
-            </a:outerShdw>
-          </a:effectLst>
         </p:spPr>
       </p:sp>
       <p:sp>
@@ -2085,8 +3249,8 @@
         </p:nvSpPr>
         <p:spPr>
           <a:xfrm>
-            <a:off x="457200" y="2011680"/>
-            <a:ext cx="45720" cy="521208"/>
+            <a:off x="457200" y="1874520"/>
+            <a:ext cx="45720" cy="475488"/>
           </a:xfrm>
           <a:prstGeom prst="rect">
             <a:avLst/>
@@ -2105,8 +3269,8 @@
         </p:nvSpPr>
         <p:spPr>
           <a:xfrm>
-            <a:off x="685800" y="2011680"/>
-            <a:ext cx="7818120" cy="521208"/>
+            <a:off x="640080" y="1874520"/>
+            <a:ext cx="7863840" cy="475488"/>
           </a:xfrm>
           <a:prstGeom prst="rect">
             <a:avLst/>
@@ -2122,7 +3286,7 @@
               <a:buNone/>
             </a:pPr>
             <a:r>
-              <a:rPr lang="en-US" sz="1200" dirty="0">
+              <a:rPr lang="en-US" sz="1100" dirty="0">
                 <a:solidFill>
                   <a:srgbClr val="1A1A2E"/>
                 </a:solidFill>
@@ -2130,9 +3294,9 @@
                 <a:ea typeface="Calibri" pitchFamily="34" charset="-122"/>
                 <a:cs typeface="Calibri" pitchFamily="34" charset="-120"/>
               </a:rPr>
-              <a:t>Contenu : DFD, flowcharts, dictionnaire technique, architecture</a:t>
-            </a:r>
-            <a:endParaRPr lang="en-US" sz="1200" dirty="0"/>
+              <a:t>Contenu : DFD, flowcharts, cas d'utilisation UML, dictionnaire technique</a:t>
+            </a:r>
+            <a:endParaRPr lang="en-US" sz="1100" dirty="0"/>
           </a:p>
         </p:txBody>
       </p:sp>
@@ -2144,8 +3308,8 @@
         </p:nvSpPr>
         <p:spPr>
           <a:xfrm>
-            <a:off x="457200" y="2560320"/>
-            <a:ext cx="8229600" cy="521208"/>
+            <a:off x="457200" y="2377440"/>
+            <a:ext cx="8229600" cy="475488"/>
           </a:xfrm>
           <a:prstGeom prst="rect">
             <a:avLst/>
@@ -2154,13 +3318,6 @@
             <a:srgbClr val="F3E5F5"/>
           </a:solidFill>
           <a:ln/>
-          <a:effectLst>
-            <a:outerShdw sx="100000" sy="100000" kx="0" ky="0" algn="bl" rotWithShape="0" blurRad="50800" dist="25400" dir="8100000">
-              <a:srgbClr val="000000">
-                <a:alpha val="12000"/>
-              </a:srgbClr>
-            </a:outerShdw>
-          </a:effectLst>
         </p:spPr>
       </p:sp>
       <p:sp>
@@ -2171,8 +3328,8 @@
         </p:nvSpPr>
         <p:spPr>
           <a:xfrm>
-            <a:off x="457200" y="2560320"/>
-            <a:ext cx="45720" cy="521208"/>
+            <a:off x="457200" y="2377440"/>
+            <a:ext cx="45720" cy="475488"/>
           </a:xfrm>
           <a:prstGeom prst="rect">
             <a:avLst/>
@@ -2191,8 +3348,8 @@
         </p:nvSpPr>
         <p:spPr>
           <a:xfrm>
-            <a:off x="685800" y="2560320"/>
-            <a:ext cx="7818120" cy="521208"/>
+            <a:off x="640080" y="2377440"/>
+            <a:ext cx="7863840" cy="475488"/>
           </a:xfrm>
           <a:prstGeom prst="rect">
             <a:avLst/>
@@ -2208,7 +3365,7 @@
               <a:buNone/>
             </a:pPr>
             <a:r>
-              <a:rPr lang="en-US" sz="1200" dirty="0">
+              <a:rPr lang="en-US" sz="1100" dirty="0">
                 <a:solidFill>
                   <a:srgbClr val="1A1A2E"/>
                 </a:solidFill>
@@ -2216,9 +3373,9 @@
                 <a:ea typeface="Calibri" pitchFamily="34" charset="-122"/>
                 <a:cs typeface="Calibri" pitchFamily="34" charset="-120"/>
               </a:rPr>
-              <a:t>Format : document DOCX ou PDF structuré</a:t>
-            </a:r>
-            <a:endParaRPr lang="en-US" sz="1200" dirty="0"/>
+              <a:t>Format : document DOCX ou PDF structure</a:t>
+            </a:r>
+            <a:endParaRPr lang="en-US" sz="1100" dirty="0"/>
           </a:p>
         </p:txBody>
       </p:sp>
@@ -2230,8 +3387,8 @@
         </p:nvSpPr>
         <p:spPr>
           <a:xfrm>
-            <a:off x="457200" y="3108960"/>
-            <a:ext cx="8229600" cy="521208"/>
+            <a:off x="457200" y="2880360"/>
+            <a:ext cx="8229600" cy="475488"/>
           </a:xfrm>
           <a:prstGeom prst="rect">
             <a:avLst/>
@@ -2240,13 +3397,6 @@
             <a:srgbClr val="FFFFFF"/>
           </a:solidFill>
           <a:ln/>
-          <a:effectLst>
-            <a:outerShdw sx="100000" sy="100000" kx="0" ky="0" algn="bl" rotWithShape="0" blurRad="50800" dist="25400" dir="8100000">
-              <a:srgbClr val="000000">
-                <a:alpha val="12000"/>
-              </a:srgbClr>
-            </a:outerShdw>
-          </a:effectLst>
         </p:spPr>
       </p:sp>
       <p:sp>
@@ -2257,8 +3407,8 @@
         </p:nvSpPr>
         <p:spPr>
           <a:xfrm>
-            <a:off x="457200" y="3108960"/>
-            <a:ext cx="45720" cy="521208"/>
+            <a:off x="457200" y="2880360"/>
+            <a:ext cx="45720" cy="475488"/>
           </a:xfrm>
           <a:prstGeom prst="rect">
             <a:avLst/>
@@ -2277,8 +3427,8 @@
         </p:nvSpPr>
         <p:spPr>
           <a:xfrm>
-            <a:off x="685800" y="3108960"/>
-            <a:ext cx="7818120" cy="521208"/>
+            <a:off x="640080" y="2880360"/>
+            <a:ext cx="7863840" cy="475488"/>
           </a:xfrm>
           <a:prstGeom prst="rect">
             <a:avLst/>
@@ -2294,7 +3444,7 @@
               <a:buNone/>
             </a:pPr>
             <a:r>
-              <a:rPr lang="en-US" sz="1200" dirty="0">
+              <a:rPr lang="en-US" sz="1100" dirty="0">
                 <a:solidFill>
                   <a:srgbClr val="1A1A2E"/>
                 </a:solidFill>
@@ -2302,9 +3452,9 @@
                 <a:ea typeface="Calibri" pitchFamily="34" charset="-122"/>
                 <a:cs typeface="Calibri" pitchFamily="34" charset="-120"/>
               </a:rPr>
-              <a:t>≠ Documentation UTILISATEUR (Module 20) qui est pour les utilisateurs finaux</a:t>
-            </a:r>
-            <a:endParaRPr lang="en-US" sz="1200" dirty="0"/>
+              <a:t>≠ Documentation UTILISATEUR (Module 20) = pour les utilisateurs finaux</a:t>
+            </a:r>
+            <a:endParaRPr lang="en-US" sz="1100" dirty="0"/>
           </a:p>
         </p:txBody>
       </p:sp>
@@ -2316,8 +3466,8 @@
         </p:nvSpPr>
         <p:spPr>
           <a:xfrm>
-            <a:off x="457200" y="3657600"/>
-            <a:ext cx="8229600" cy="521208"/>
+            <a:off x="457200" y="3383280"/>
+            <a:ext cx="8229600" cy="475488"/>
           </a:xfrm>
           <a:prstGeom prst="rect">
             <a:avLst/>
@@ -2326,13 +3476,6 @@
             <a:srgbClr val="F3E5F5"/>
           </a:solidFill>
           <a:ln/>
-          <a:effectLst>
-            <a:outerShdw sx="100000" sy="100000" kx="0" ky="0" algn="bl" rotWithShape="0" blurRad="50800" dist="25400" dir="8100000">
-              <a:srgbClr val="000000">
-                <a:alpha val="12000"/>
-              </a:srgbClr>
-            </a:outerShdw>
-          </a:effectLst>
         </p:spPr>
       </p:sp>
       <p:sp>
@@ -2343,8 +3486,8 @@
         </p:nvSpPr>
         <p:spPr>
           <a:xfrm>
-            <a:off x="457200" y="3657600"/>
-            <a:ext cx="45720" cy="521208"/>
+            <a:off x="457200" y="3383280"/>
+            <a:ext cx="45720" cy="475488"/>
           </a:xfrm>
           <a:prstGeom prst="rect">
             <a:avLst/>
@@ -2363,8 +3506,8 @@
         </p:nvSpPr>
         <p:spPr>
           <a:xfrm>
-            <a:off x="685800" y="3657600"/>
-            <a:ext cx="7818120" cy="521208"/>
+            <a:off x="640080" y="3383280"/>
+            <a:ext cx="7863840" cy="475488"/>
           </a:xfrm>
           <a:prstGeom prst="rect">
             <a:avLst/>
@@ -2380,7 +3523,7 @@
               <a:buNone/>
             </a:pPr>
             <a:r>
-              <a:rPr lang="en-US" sz="1200" dirty="0">
+              <a:rPr lang="en-US" sz="1100" dirty="0">
                 <a:solidFill>
                   <a:srgbClr val="1A1A2E"/>
                 </a:solidFill>
@@ -2388,9 +3531,9 @@
                 <a:ea typeface="Calibri" pitchFamily="34" charset="-122"/>
                 <a:cs typeface="Calibri" pitchFamily="34" charset="-120"/>
               </a:rPr>
-              <a:t>La doc technique répond à : 'Comment le système FONCTIONNE ?'</a:t>
-            </a:r>
-            <a:endParaRPr lang="en-US" sz="1200" dirty="0"/>
+              <a:t>La doc technique repond a : 'Comment le systeme FONCTIONNE ?'</a:t>
+            </a:r>
+            <a:endParaRPr lang="en-US" sz="1100" dirty="0"/>
           </a:p>
         </p:txBody>
       </p:sp>
@@ -2402,8 +3545,8 @@
         </p:nvSpPr>
         <p:spPr>
           <a:xfrm>
-            <a:off x="457200" y="4206240"/>
-            <a:ext cx="8229600" cy="521208"/>
+            <a:off x="457200" y="3886200"/>
+            <a:ext cx="8229600" cy="475488"/>
           </a:xfrm>
           <a:prstGeom prst="rect">
             <a:avLst/>
@@ -2412,13 +3555,6 @@
             <a:srgbClr val="FFFFFF"/>
           </a:solidFill>
           <a:ln/>
-          <a:effectLst>
-            <a:outerShdw sx="100000" sy="100000" kx="0" ky="0" algn="bl" rotWithShape="0" blurRad="50800" dist="25400" dir="8100000">
-              <a:srgbClr val="000000">
-                <a:alpha val="12000"/>
-              </a:srgbClr>
-            </a:outerShdw>
-          </a:effectLst>
         </p:spPr>
       </p:sp>
       <p:sp>
@@ -2429,8 +3565,8 @@
         </p:nvSpPr>
         <p:spPr>
           <a:xfrm>
-            <a:off x="457200" y="4206240"/>
-            <a:ext cx="45720" cy="521208"/>
+            <a:off x="457200" y="3886200"/>
+            <a:ext cx="45720" cy="475488"/>
           </a:xfrm>
           <a:prstGeom prst="rect">
             <a:avLst/>
@@ -2449,8 +3585,8 @@
         </p:nvSpPr>
         <p:spPr>
           <a:xfrm>
-            <a:off x="685800" y="4206240"/>
-            <a:ext cx="7818120" cy="521208"/>
+            <a:off x="640080" y="3886200"/>
+            <a:ext cx="7863840" cy="475488"/>
           </a:xfrm>
           <a:prstGeom prst="rect">
             <a:avLst/>
@@ -2466,7 +3602,7 @@
               <a:buNone/>
             </a:pPr>
             <a:r>
-              <a:rPr lang="en-US" sz="1200" dirty="0">
+              <a:rPr lang="en-US" sz="1100" dirty="0">
                 <a:solidFill>
                   <a:srgbClr val="1A1A2E"/>
                 </a:solidFill>
@@ -2474,9 +3610,9 @@
                 <a:ea typeface="Calibri" pitchFamily="34" charset="-122"/>
                 <a:cs typeface="Calibri" pitchFamily="34" charset="-120"/>
               </a:rPr>
-              <a:t>La doc utilisateur répond à : 'Comment UTILISER le système ?'</a:t>
-            </a:r>
-            <a:endParaRPr lang="en-US" sz="1200" dirty="0"/>
+              <a:t>La doc utilisateur repond a : 'Comment UTILISER le systeme ?'</a:t>
+            </a:r>
+            <a:endParaRPr lang="en-US" sz="1100" dirty="0"/>
           </a:p>
         </p:txBody>
       </p:sp>
@@ -2541,7 +3677,7 @@
         <p:spPr>
           <a:xfrm>
             <a:off x="457200" y="182880"/>
-            <a:ext cx="8229600" cy="594360"/>
+            <a:ext cx="8229600" cy="548640"/>
           </a:xfrm>
           <a:prstGeom prst="rect">
             <a:avLst/>
@@ -2557,7 +3693,7 @@
               <a:buNone/>
             </a:pPr>
             <a:r>
-              <a:rPr lang="en-US" sz="2400" b="1" dirty="0">
+              <a:rPr lang="en-US" sz="2200" b="1" dirty="0">
                 <a:solidFill>
                   <a:srgbClr val="4A0072"/>
                 </a:solidFill>
@@ -2567,7 +3703,7 @@
               </a:rPr>
               <a:t>DFD : Data Flow Diagram</a:t>
             </a:r>
-            <a:endParaRPr lang="en-US" sz="2400" dirty="0"/>
+            <a:endParaRPr lang="en-US" sz="2200" dirty="0"/>
           </a:p>
         </p:txBody>
       </p:sp>
@@ -2579,8 +3715,8 @@
         </p:nvSpPr>
         <p:spPr>
           <a:xfrm>
-            <a:off x="457200" y="914400"/>
-            <a:ext cx="8229600" cy="521208"/>
+            <a:off x="457200" y="868680"/>
+            <a:ext cx="8229600" cy="475488"/>
           </a:xfrm>
           <a:prstGeom prst="rect">
             <a:avLst/>
@@ -2589,13 +3725,6 @@
             <a:srgbClr val="FFFFFF"/>
           </a:solidFill>
           <a:ln/>
-          <a:effectLst>
-            <a:outerShdw sx="100000" sy="100000" kx="0" ky="0" algn="bl" rotWithShape="0" blurRad="50800" dist="25400" dir="8100000">
-              <a:srgbClr val="000000">
-                <a:alpha val="12000"/>
-              </a:srgbClr>
-            </a:outerShdw>
-          </a:effectLst>
         </p:spPr>
       </p:sp>
       <p:sp>
@@ -2606,8 +3735,8 @@
         </p:nvSpPr>
         <p:spPr>
           <a:xfrm>
-            <a:off x="457200" y="914400"/>
-            <a:ext cx="45720" cy="521208"/>
+            <a:off x="457200" y="868680"/>
+            <a:ext cx="45720" cy="475488"/>
           </a:xfrm>
           <a:prstGeom prst="rect">
             <a:avLst/>
@@ -2626,8 +3755,8 @@
         </p:nvSpPr>
         <p:spPr>
           <a:xfrm>
-            <a:off x="685800" y="914400"/>
-            <a:ext cx="7818120" cy="521208"/>
+            <a:off x="640080" y="868680"/>
+            <a:ext cx="7863840" cy="475488"/>
           </a:xfrm>
           <a:prstGeom prst="rect">
             <a:avLst/>
@@ -2643,7 +3772,7 @@
               <a:buNone/>
             </a:pPr>
             <a:r>
-              <a:rPr lang="en-US" sz="1200" dirty="0">
+              <a:rPr lang="en-US" sz="1100" dirty="0">
                 <a:solidFill>
                   <a:srgbClr val="1A1A2E"/>
                 </a:solidFill>
@@ -2651,9 +3780,9 @@
                 <a:ea typeface="Calibri" pitchFamily="34" charset="-122"/>
                 <a:cs typeface="Calibri" pitchFamily="34" charset="-120"/>
               </a:rPr>
-              <a:t>Diagramme qui montre les FLUX DE DONNÉES dans le système</a:t>
-            </a:r>
-            <a:endParaRPr lang="en-US" sz="1200" dirty="0"/>
+              <a:t>Diagramme qui montre les FLUX DE DONNEES dans le systeme</a:t>
+            </a:r>
+            <a:endParaRPr lang="en-US" sz="1100" dirty="0"/>
           </a:p>
         </p:txBody>
       </p:sp>
@@ -2665,8 +3794,8 @@
         </p:nvSpPr>
         <p:spPr>
           <a:xfrm>
-            <a:off x="457200" y="1463040"/>
-            <a:ext cx="8229600" cy="521208"/>
+            <a:off x="457200" y="1371600"/>
+            <a:ext cx="8229600" cy="475488"/>
           </a:xfrm>
           <a:prstGeom prst="rect">
             <a:avLst/>
@@ -2675,13 +3804,6 @@
             <a:srgbClr val="F3E5F5"/>
           </a:solidFill>
           <a:ln/>
-          <a:effectLst>
-            <a:outerShdw sx="100000" sy="100000" kx="0" ky="0" algn="bl" rotWithShape="0" blurRad="50800" dist="25400" dir="8100000">
-              <a:srgbClr val="000000">
-                <a:alpha val="12000"/>
-              </a:srgbClr>
-            </a:outerShdw>
-          </a:effectLst>
         </p:spPr>
       </p:sp>
       <p:sp>
@@ -2692,8 +3814,8 @@
         </p:nvSpPr>
         <p:spPr>
           <a:xfrm>
-            <a:off x="457200" y="1463040"/>
-            <a:ext cx="45720" cy="521208"/>
+            <a:off x="457200" y="1371600"/>
+            <a:ext cx="45720" cy="475488"/>
           </a:xfrm>
           <a:prstGeom prst="rect">
             <a:avLst/>
@@ -2712,8 +3834,8 @@
         </p:nvSpPr>
         <p:spPr>
           <a:xfrm>
-            <a:off x="685800" y="1463040"/>
-            <a:ext cx="7818120" cy="521208"/>
+            <a:off x="640080" y="1371600"/>
+            <a:ext cx="7863840" cy="475488"/>
           </a:xfrm>
           <a:prstGeom prst="rect">
             <a:avLst/>
@@ -2729,7 +3851,7 @@
               <a:buNone/>
             </a:pPr>
             <a:r>
-              <a:rPr lang="en-US" sz="1200" dirty="0">
+              <a:rPr lang="en-US" sz="1100" dirty="0">
                 <a:solidFill>
                   <a:srgbClr val="1A1A2E"/>
                 </a:solidFill>
@@ -2737,9 +3859,9 @@
                 <a:ea typeface="Calibri" pitchFamily="34" charset="-122"/>
                 <a:cs typeface="Calibri" pitchFamily="34" charset="-120"/>
               </a:rPr>
-              <a:t>Niveau 0 (contexte) : le système entier = 1 seul processus</a:t>
-            </a:r>
-            <a:endParaRPr lang="en-US" sz="1200" dirty="0"/>
+              <a:t>Niveau 0 (contexte) : le systeme entier = 1 seul processus</a:t>
+            </a:r>
+            <a:endParaRPr lang="en-US" sz="1100" dirty="0"/>
           </a:p>
         </p:txBody>
       </p:sp>
@@ -2751,8 +3873,8 @@
         </p:nvSpPr>
         <p:spPr>
           <a:xfrm>
-            <a:off x="457200" y="2011680"/>
-            <a:ext cx="8229600" cy="521208"/>
+            <a:off x="457200" y="1874520"/>
+            <a:ext cx="8229600" cy="475488"/>
           </a:xfrm>
           <a:prstGeom prst="rect">
             <a:avLst/>
@@ -2761,13 +3883,6 @@
             <a:srgbClr val="FFFFFF"/>
           </a:solidFill>
           <a:ln/>
-          <a:effectLst>
-            <a:outerShdw sx="100000" sy="100000" kx="0" ky="0" algn="bl" rotWithShape="0" blurRad="50800" dist="25400" dir="8100000">
-              <a:srgbClr val="000000">
-                <a:alpha val="12000"/>
-              </a:srgbClr>
-            </a:outerShdw>
-          </a:effectLst>
         </p:spPr>
       </p:sp>
       <p:sp>
@@ -2778,8 +3893,8 @@
         </p:nvSpPr>
         <p:spPr>
           <a:xfrm>
-            <a:off x="457200" y="2011680"/>
-            <a:ext cx="45720" cy="521208"/>
+            <a:off x="457200" y="1874520"/>
+            <a:ext cx="45720" cy="475488"/>
           </a:xfrm>
           <a:prstGeom prst="rect">
             <a:avLst/>
@@ -2798,8 +3913,8 @@
         </p:nvSpPr>
         <p:spPr>
           <a:xfrm>
-            <a:off x="685800" y="2011680"/>
-            <a:ext cx="7818120" cy="521208"/>
+            <a:off x="640080" y="1874520"/>
+            <a:ext cx="7863840" cy="475488"/>
           </a:xfrm>
           <a:prstGeom prst="rect">
             <a:avLst/>
@@ -2815,7 +3930,7 @@
               <a:buNone/>
             </a:pPr>
             <a:r>
-              <a:rPr lang="en-US" sz="1200" dirty="0">
+              <a:rPr lang="en-US" sz="1100" dirty="0">
                 <a:solidFill>
                   <a:srgbClr val="1A1A2E"/>
                 </a:solidFill>
@@ -2823,9 +3938,9 @@
                 <a:ea typeface="Calibri" pitchFamily="34" charset="-122"/>
                 <a:cs typeface="Calibri" pitchFamily="34" charset="-120"/>
               </a:rPr>
-              <a:t>Entités externes : Artiste, Comptable, Admin, Ingénieur</a:t>
-            </a:r>
-            <a:endParaRPr lang="en-US" sz="1200" dirty="0"/>
+              <a:t>Entites externes : Artiste, Comptable, Admin, Ingenieur</a:t>
+            </a:r>
+            <a:endParaRPr lang="en-US" sz="1100" dirty="0"/>
           </a:p>
         </p:txBody>
       </p:sp>
@@ -2837,8 +3952,8 @@
         </p:nvSpPr>
         <p:spPr>
           <a:xfrm>
-            <a:off x="457200" y="2560320"/>
-            <a:ext cx="8229600" cy="521208"/>
+            <a:off x="457200" y="2377440"/>
+            <a:ext cx="8229600" cy="475488"/>
           </a:xfrm>
           <a:prstGeom prst="rect">
             <a:avLst/>
@@ -2847,13 +3962,6 @@
             <a:srgbClr val="F3E5F5"/>
           </a:solidFill>
           <a:ln/>
-          <a:effectLst>
-            <a:outerShdw sx="100000" sy="100000" kx="0" ky="0" algn="bl" rotWithShape="0" blurRad="50800" dist="25400" dir="8100000">
-              <a:srgbClr val="000000">
-                <a:alpha val="12000"/>
-              </a:srgbClr>
-            </a:outerShdw>
-          </a:effectLst>
         </p:spPr>
       </p:sp>
       <p:sp>
@@ -2864,8 +3972,8 @@
         </p:nvSpPr>
         <p:spPr>
           <a:xfrm>
-            <a:off x="457200" y="2560320"/>
-            <a:ext cx="45720" cy="521208"/>
+            <a:off x="457200" y="2377440"/>
+            <a:ext cx="45720" cy="475488"/>
           </a:xfrm>
           <a:prstGeom prst="rect">
             <a:avLst/>
@@ -2884,8 +3992,8 @@
         </p:nvSpPr>
         <p:spPr>
           <a:xfrm>
-            <a:off x="685800" y="2560320"/>
-            <a:ext cx="7818120" cy="521208"/>
+            <a:off x="640080" y="2377440"/>
+            <a:ext cx="7863840" cy="475488"/>
           </a:xfrm>
           <a:prstGeom prst="rect">
             <a:avLst/>
@@ -2901,7 +4009,7 @@
               <a:buNone/>
             </a:pPr>
             <a:r>
-              <a:rPr lang="en-US" sz="1200" dirty="0">
+              <a:rPr lang="en-US" sz="1100" dirty="0">
                 <a:solidFill>
                   <a:srgbClr val="1A1A2E"/>
                 </a:solidFill>
@@ -2909,9 +4017,9 @@
                 <a:ea typeface="Calibri" pitchFamily="34" charset="-122"/>
                 <a:cs typeface="Calibri" pitchFamily="34" charset="-120"/>
               </a:rPr>
-              <a:t>Niveau 1 : décomposition en sous-processus (gérer artistes, planifier sessions, facturer)</a:t>
-            </a:r>
-            <a:endParaRPr lang="en-US" sz="1200" dirty="0"/>
+              <a:t>Niveau 1 : decomposition en sous-processus</a:t>
+            </a:r>
+            <a:endParaRPr lang="en-US" sz="1100" dirty="0"/>
           </a:p>
         </p:txBody>
       </p:sp>
@@ -2923,8 +4031,8 @@
         </p:nvSpPr>
         <p:spPr>
           <a:xfrm>
-            <a:off x="457200" y="3108960"/>
-            <a:ext cx="8229600" cy="521208"/>
+            <a:off x="457200" y="2880360"/>
+            <a:ext cx="8229600" cy="475488"/>
           </a:xfrm>
           <a:prstGeom prst="rect">
             <a:avLst/>
@@ -2933,13 +4041,6 @@
             <a:srgbClr val="FFFFFF"/>
           </a:solidFill>
           <a:ln/>
-          <a:effectLst>
-            <a:outerShdw sx="100000" sy="100000" kx="0" ky="0" algn="bl" rotWithShape="0" blurRad="50800" dist="25400" dir="8100000">
-              <a:srgbClr val="000000">
-                <a:alpha val="12000"/>
-              </a:srgbClr>
-            </a:outerShdw>
-          </a:effectLst>
         </p:spPr>
       </p:sp>
       <p:sp>
@@ -2950,8 +4051,8 @@
         </p:nvSpPr>
         <p:spPr>
           <a:xfrm>
-            <a:off x="457200" y="3108960"/>
-            <a:ext cx="45720" cy="521208"/>
+            <a:off x="457200" y="2880360"/>
+            <a:ext cx="45720" cy="475488"/>
           </a:xfrm>
           <a:prstGeom prst="rect">
             <a:avLst/>
@@ -2970,8 +4071,8 @@
         </p:nvSpPr>
         <p:spPr>
           <a:xfrm>
-            <a:off x="685800" y="3108960"/>
-            <a:ext cx="7818120" cy="521208"/>
+            <a:off x="640080" y="2880360"/>
+            <a:ext cx="7863840" cy="475488"/>
           </a:xfrm>
           <a:prstGeom prst="rect">
             <a:avLst/>
@@ -2987,7 +4088,7 @@
               <a:buNone/>
             </a:pPr>
             <a:r>
-              <a:rPr lang="en-US" sz="1200" dirty="0">
+              <a:rPr lang="en-US" sz="1100" dirty="0">
                 <a:solidFill>
                   <a:srgbClr val="1A1A2E"/>
                 </a:solidFill>
@@ -2995,9 +4096,9 @@
                 <a:ea typeface="Calibri" pitchFamily="34" charset="-122"/>
                 <a:cs typeface="Calibri" pitchFamily="34" charset="-120"/>
               </a:rPr>
-              <a:t>Niveau 2 : détail d'UN processus du niveau 1</a:t>
-            </a:r>
-            <a:endParaRPr lang="en-US" sz="1200" dirty="0"/>
+              <a:t>Niveau 2 : detail d'UN processus du niveau 1</a:t>
+            </a:r>
+            <a:endParaRPr lang="en-US" sz="1100" dirty="0"/>
           </a:p>
         </p:txBody>
       </p:sp>
@@ -3009,8 +4110,8 @@
         </p:nvSpPr>
         <p:spPr>
           <a:xfrm>
-            <a:off x="457200" y="3657600"/>
-            <a:ext cx="8229600" cy="521208"/>
+            <a:off x="457200" y="3383280"/>
+            <a:ext cx="8229600" cy="475488"/>
           </a:xfrm>
           <a:prstGeom prst="rect">
             <a:avLst/>
@@ -3019,13 +4120,6 @@
             <a:srgbClr val="F3E5F5"/>
           </a:solidFill>
           <a:ln/>
-          <a:effectLst>
-            <a:outerShdw sx="100000" sy="100000" kx="0" ky="0" algn="bl" rotWithShape="0" blurRad="50800" dist="25400" dir="8100000">
-              <a:srgbClr val="000000">
-                <a:alpha val="12000"/>
-              </a:srgbClr>
-            </a:outerShdw>
-          </a:effectLst>
         </p:spPr>
       </p:sp>
       <p:sp>
@@ -3036,8 +4130,8 @@
         </p:nvSpPr>
         <p:spPr>
           <a:xfrm>
-            <a:off x="457200" y="3657600"/>
-            <a:ext cx="45720" cy="521208"/>
+            <a:off x="457200" y="3383280"/>
+            <a:ext cx="45720" cy="475488"/>
           </a:xfrm>
           <a:prstGeom prst="rect">
             <a:avLst/>
@@ -3056,8 +4150,8 @@
         </p:nvSpPr>
         <p:spPr>
           <a:xfrm>
-            <a:off x="685800" y="3657600"/>
-            <a:ext cx="7818120" cy="521208"/>
+            <a:off x="640080" y="3383280"/>
+            <a:ext cx="7863840" cy="475488"/>
           </a:xfrm>
           <a:prstGeom prst="rect">
             <a:avLst/>
@@ -3073,7 +4167,7 @@
               <a:buNone/>
             </a:pPr>
             <a:r>
-              <a:rPr lang="en-US" sz="1200" dirty="0">
+              <a:rPr lang="en-US" sz="1100" dirty="0">
                 <a:solidFill>
                   <a:srgbClr val="1A1A2E"/>
                 </a:solidFill>
@@ -3081,9 +4175,9 @@
                 <a:ea typeface="Calibri" pitchFamily="34" charset="-122"/>
                 <a:cs typeface="Calibri" pitchFamily="34" charset="-120"/>
               </a:rPr>
-              <a:t>Chaque niveau 'zoome' dans un processus pour plus de détails</a:t>
-            </a:r>
-            <a:endParaRPr lang="en-US" sz="1200" dirty="0"/>
+              <a:t>Symboles : cercle=processus, rectangle ouvert=stockage, ferme=externe, fleche=flux</a:t>
+            </a:r>
+            <a:endParaRPr lang="en-US" sz="1100" dirty="0"/>
           </a:p>
         </p:txBody>
       </p:sp>
@@ -3095,8 +4189,8 @@
         </p:nvSpPr>
         <p:spPr>
           <a:xfrm>
-            <a:off x="457200" y="4206240"/>
-            <a:ext cx="8229600" cy="521208"/>
+            <a:off x="457200" y="3886200"/>
+            <a:ext cx="8229600" cy="475488"/>
           </a:xfrm>
           <a:prstGeom prst="rect">
             <a:avLst/>
@@ -3105,13 +4199,6 @@
             <a:srgbClr val="FFFFFF"/>
           </a:solidFill>
           <a:ln/>
-          <a:effectLst>
-            <a:outerShdw sx="100000" sy="100000" kx="0" ky="0" algn="bl" rotWithShape="0" blurRad="50800" dist="25400" dir="8100000">
-              <a:srgbClr val="000000">
-                <a:alpha val="12000"/>
-              </a:srgbClr>
-            </a:outerShdw>
-          </a:effectLst>
         </p:spPr>
       </p:sp>
       <p:sp>
@@ -3122,8 +4209,8 @@
         </p:nvSpPr>
         <p:spPr>
           <a:xfrm>
-            <a:off x="457200" y="4206240"/>
-            <a:ext cx="45720" cy="521208"/>
+            <a:off x="457200" y="3886200"/>
+            <a:ext cx="45720" cy="475488"/>
           </a:xfrm>
           <a:prstGeom prst="rect">
             <a:avLst/>
@@ -3142,8 +4229,8 @@
         </p:nvSpPr>
         <p:spPr>
           <a:xfrm>
-            <a:off x="685800" y="4206240"/>
-            <a:ext cx="7818120" cy="521208"/>
+            <a:off x="640080" y="3886200"/>
+            <a:ext cx="7863840" cy="475488"/>
           </a:xfrm>
           <a:prstGeom prst="rect">
             <a:avLst/>
@@ -3159,7 +4246,7 @@
               <a:buNone/>
             </a:pPr>
             <a:r>
-              <a:rPr lang="en-US" sz="1200" dirty="0">
+              <a:rPr lang="en-US" sz="1100" dirty="0">
                 <a:solidFill>
                   <a:srgbClr val="1A1A2E"/>
                 </a:solidFill>
@@ -3167,9 +4254,9 @@
                 <a:ea typeface="Calibri" pitchFamily="34" charset="-122"/>
                 <a:cs typeface="Calibri" pitchFamily="34" charset="-120"/>
               </a:rPr>
-              <a:t>Outils : Draw.io (modèle DFD disponible)</a:t>
-            </a:r>
-            <a:endParaRPr lang="en-US" sz="1200" dirty="0"/>
+              <a:t>Outils : Draw.io (modele DFD disponible)</a:t>
+            </a:r>
+            <a:endParaRPr lang="en-US" sz="1100" dirty="0"/>
           </a:p>
         </p:txBody>
       </p:sp>
@@ -3234,7 +4321,7 @@
         <p:spPr>
           <a:xfrm>
             <a:off x="457200" y="182880"/>
-            <a:ext cx="8229600" cy="594360"/>
+            <a:ext cx="8229600" cy="548640"/>
           </a:xfrm>
           <a:prstGeom prst="rect">
             <a:avLst/>
@@ -3250,7 +4337,7 @@
               <a:buNone/>
             </a:pPr>
             <a:r>
-              <a:rPr lang="en-US" sz="2400" b="1" dirty="0">
+              <a:rPr lang="en-US" sz="2200" b="1" dirty="0">
                 <a:solidFill>
                   <a:srgbClr val="4A0072"/>
                 </a:solidFill>
@@ -3258,9 +4345,9 @@
                 <a:ea typeface="Trebuchet MS" pitchFamily="34" charset="-122"/>
                 <a:cs typeface="Trebuchet MS" pitchFamily="34" charset="-120"/>
               </a:rPr>
-              <a:t>Symboles DFD</a:t>
-            </a:r>
-            <a:endParaRPr lang="en-US" sz="2400" dirty="0"/>
+              <a:t>Symboles DFD — a connaitre</a:t>
+            </a:r>
+            <a:endParaRPr lang="en-US" sz="2200" dirty="0"/>
           </a:p>
         </p:txBody>
       </p:sp>
@@ -3272,8 +4359,8 @@
         </p:nvSpPr>
         <p:spPr>
           <a:xfrm>
-            <a:off x="457200" y="914400"/>
-            <a:ext cx="8229600" cy="521208"/>
+            <a:off x="457200" y="868680"/>
+            <a:ext cx="8229600" cy="475488"/>
           </a:xfrm>
           <a:prstGeom prst="rect">
             <a:avLst/>
@@ -3282,13 +4369,6 @@
             <a:srgbClr val="FFFFFF"/>
           </a:solidFill>
           <a:ln/>
-          <a:effectLst>
-            <a:outerShdw sx="100000" sy="100000" kx="0" ky="0" algn="bl" rotWithShape="0" blurRad="50800" dist="25400" dir="8100000">
-              <a:srgbClr val="000000">
-                <a:alpha val="12000"/>
-              </a:srgbClr>
-            </a:outerShdw>
-          </a:effectLst>
         </p:spPr>
       </p:sp>
       <p:sp>
@@ -3299,8 +4379,8 @@
         </p:nvSpPr>
         <p:spPr>
           <a:xfrm>
-            <a:off x="457200" y="914400"/>
-            <a:ext cx="45720" cy="521208"/>
+            <a:off x="457200" y="868680"/>
+            <a:ext cx="45720" cy="475488"/>
           </a:xfrm>
           <a:prstGeom prst="rect">
             <a:avLst/>
@@ -3319,8 +4399,8 @@
         </p:nvSpPr>
         <p:spPr>
           <a:xfrm>
-            <a:off x="685800" y="914400"/>
-            <a:ext cx="7818120" cy="521208"/>
+            <a:off x="640080" y="868680"/>
+            <a:ext cx="7863840" cy="475488"/>
           </a:xfrm>
           <a:prstGeom prst="rect">
             <a:avLst/>
@@ -3336,7 +4416,7 @@
               <a:buNone/>
             </a:pPr>
             <a:r>
-              <a:rPr lang="en-US" sz="1200" dirty="0">
+              <a:rPr lang="en-US" sz="1100" dirty="0">
                 <a:solidFill>
                   <a:srgbClr val="1A1A2E"/>
                 </a:solidFill>
@@ -3344,9 +4424,9 @@
                 <a:ea typeface="Calibri" pitchFamily="34" charset="-122"/>
                 <a:cs typeface="Calibri" pitchFamily="34" charset="-120"/>
               </a:rPr>
-              <a:t>⬭ Rectangle arrondi (ou cercle) : PROCESSUS — une action/transformation</a:t>
-            </a:r>
-            <a:endParaRPr lang="en-US" sz="1200" dirty="0"/>
+              <a:t>Cercle (ou rectangle arrondi) : PROCESSUS — transformation de donnees</a:t>
+            </a:r>
+            <a:endParaRPr lang="en-US" sz="1100" dirty="0"/>
           </a:p>
         </p:txBody>
       </p:sp>
@@ -3358,8 +4438,8 @@
         </p:nvSpPr>
         <p:spPr>
           <a:xfrm>
-            <a:off x="457200" y="1463040"/>
-            <a:ext cx="8229600" cy="521208"/>
+            <a:off x="457200" y="1371600"/>
+            <a:ext cx="8229600" cy="475488"/>
           </a:xfrm>
           <a:prstGeom prst="rect">
             <a:avLst/>
@@ -3368,13 +4448,6 @@
             <a:srgbClr val="F3E5F5"/>
           </a:solidFill>
           <a:ln/>
-          <a:effectLst>
-            <a:outerShdw sx="100000" sy="100000" kx="0" ky="0" algn="bl" rotWithShape="0" blurRad="50800" dist="25400" dir="8100000">
-              <a:srgbClr val="000000">
-                <a:alpha val="12000"/>
-              </a:srgbClr>
-            </a:outerShdw>
-          </a:effectLst>
         </p:spPr>
       </p:sp>
       <p:sp>
@@ -3385,8 +4458,8 @@
         </p:nvSpPr>
         <p:spPr>
           <a:xfrm>
-            <a:off x="457200" y="1463040"/>
-            <a:ext cx="45720" cy="521208"/>
+            <a:off x="457200" y="1371600"/>
+            <a:ext cx="45720" cy="475488"/>
           </a:xfrm>
           <a:prstGeom prst="rect">
             <a:avLst/>
@@ -3405,8 +4478,8 @@
         </p:nvSpPr>
         <p:spPr>
           <a:xfrm>
-            <a:off x="685800" y="1463040"/>
-            <a:ext cx="7818120" cy="521208"/>
+            <a:off x="640080" y="1371600"/>
+            <a:ext cx="7863840" cy="475488"/>
           </a:xfrm>
           <a:prstGeom prst="rect">
             <a:avLst/>
@@ -3422,7 +4495,7 @@
               <a:buNone/>
             </a:pPr>
             <a:r>
-              <a:rPr lang="en-US" sz="1200" dirty="0">
+              <a:rPr lang="en-US" sz="1100" dirty="0">
                 <a:solidFill>
                   <a:srgbClr val="1A1A2E"/>
                 </a:solidFill>
@@ -3430,9 +4503,9 @@
                 <a:ea typeface="Calibri" pitchFamily="34" charset="-122"/>
                 <a:cs typeface="Calibri" pitchFamily="34" charset="-120"/>
               </a:rPr>
-              <a:t>▭ Rectangle ouvert (2 côtés) : STOCKAGE de données — table BDD</a:t>
-            </a:r>
-            <a:endParaRPr lang="en-US" sz="1200" dirty="0"/>
+              <a:t>Rectangle ouvert (2 cotes) : STOCKAGE de donnees — table BDD</a:t>
+            </a:r>
+            <a:endParaRPr lang="en-US" sz="1100" dirty="0"/>
           </a:p>
         </p:txBody>
       </p:sp>
@@ -3444,8 +4517,8 @@
         </p:nvSpPr>
         <p:spPr>
           <a:xfrm>
-            <a:off x="457200" y="2011680"/>
-            <a:ext cx="8229600" cy="521208"/>
+            <a:off x="457200" y="1874520"/>
+            <a:ext cx="8229600" cy="475488"/>
           </a:xfrm>
           <a:prstGeom prst="rect">
             <a:avLst/>
@@ -3454,13 +4527,6 @@
             <a:srgbClr val="FFFFFF"/>
           </a:solidFill>
           <a:ln/>
-          <a:effectLst>
-            <a:outerShdw sx="100000" sy="100000" kx="0" ky="0" algn="bl" rotWithShape="0" blurRad="50800" dist="25400" dir="8100000">
-              <a:srgbClr val="000000">
-                <a:alpha val="12000"/>
-              </a:srgbClr>
-            </a:outerShdw>
-          </a:effectLst>
         </p:spPr>
       </p:sp>
       <p:sp>
@@ -3471,8 +4537,8 @@
         </p:nvSpPr>
         <p:spPr>
           <a:xfrm>
-            <a:off x="457200" y="2011680"/>
-            <a:ext cx="45720" cy="521208"/>
+            <a:off x="457200" y="1874520"/>
+            <a:ext cx="45720" cy="475488"/>
           </a:xfrm>
           <a:prstGeom prst="rect">
             <a:avLst/>
@@ -3491,8 +4557,8 @@
         </p:nvSpPr>
         <p:spPr>
           <a:xfrm>
-            <a:off x="685800" y="2011680"/>
-            <a:ext cx="7818120" cy="521208"/>
+            <a:off x="640080" y="1874520"/>
+            <a:ext cx="7863840" cy="475488"/>
           </a:xfrm>
           <a:prstGeom prst="rect">
             <a:avLst/>
@@ -3508,7 +4574,7 @@
               <a:buNone/>
             </a:pPr>
             <a:r>
-              <a:rPr lang="en-US" sz="1200" dirty="0">
+              <a:rPr lang="en-US" sz="1100" dirty="0">
                 <a:solidFill>
                   <a:srgbClr val="1A1A2E"/>
                 </a:solidFill>
@@ -3516,9 +4582,9 @@
                 <a:ea typeface="Calibri" pitchFamily="34" charset="-122"/>
                 <a:cs typeface="Calibri" pitchFamily="34" charset="-120"/>
               </a:rPr>
-              <a:t>▬ Rectangle fermé : ENTITÉ EXTERNE — personne/système externe</a:t>
-            </a:r>
-            <a:endParaRPr lang="en-US" sz="1200" dirty="0"/>
+              <a:t>Rectangle ferme : ENTITE EXTERNE — personne/systeme hors du systeme</a:t>
+            </a:r>
+            <a:endParaRPr lang="en-US" sz="1100" dirty="0"/>
           </a:p>
         </p:txBody>
       </p:sp>
@@ -3530,8 +4596,8 @@
         </p:nvSpPr>
         <p:spPr>
           <a:xfrm>
-            <a:off x="457200" y="2560320"/>
-            <a:ext cx="8229600" cy="521208"/>
+            <a:off x="457200" y="2377440"/>
+            <a:ext cx="8229600" cy="475488"/>
           </a:xfrm>
           <a:prstGeom prst="rect">
             <a:avLst/>
@@ -3540,13 +4606,6 @@
             <a:srgbClr val="F3E5F5"/>
           </a:solidFill>
           <a:ln/>
-          <a:effectLst>
-            <a:outerShdw sx="100000" sy="100000" kx="0" ky="0" algn="bl" rotWithShape="0" blurRad="50800" dist="25400" dir="8100000">
-              <a:srgbClr val="000000">
-                <a:alpha val="12000"/>
-              </a:srgbClr>
-            </a:outerShdw>
-          </a:effectLst>
         </p:spPr>
       </p:sp>
       <p:sp>
@@ -3557,8 +4616,8 @@
         </p:nvSpPr>
         <p:spPr>
           <a:xfrm>
-            <a:off x="457200" y="2560320"/>
-            <a:ext cx="45720" cy="521208"/>
+            <a:off x="457200" y="2377440"/>
+            <a:ext cx="45720" cy="475488"/>
           </a:xfrm>
           <a:prstGeom prst="rect">
             <a:avLst/>
@@ -3577,8 +4636,8 @@
         </p:nvSpPr>
         <p:spPr>
           <a:xfrm>
-            <a:off x="685800" y="2560320"/>
-            <a:ext cx="7818120" cy="521208"/>
+            <a:off x="640080" y="2377440"/>
+            <a:ext cx="7863840" cy="475488"/>
           </a:xfrm>
           <a:prstGeom prst="rect">
             <a:avLst/>
@@ -3594,7 +4653,7 @@
               <a:buNone/>
             </a:pPr>
             <a:r>
-              <a:rPr lang="en-US" sz="1200" dirty="0">
+              <a:rPr lang="en-US" sz="1100" dirty="0">
                 <a:solidFill>
                   <a:srgbClr val="1A1A2E"/>
                 </a:solidFill>
@@ -3602,9 +4661,9 @@
                 <a:ea typeface="Calibri" pitchFamily="34" charset="-122"/>
                 <a:cs typeface="Calibri" pitchFamily="34" charset="-120"/>
               </a:rPr>
-              <a:t>→ Flèche : FLUX de données — transfert d'information</a:t>
-            </a:r>
-            <a:endParaRPr lang="en-US" sz="1200" dirty="0"/>
+              <a:t>Fleche : FLUX de donnees — direction du transfert</a:t>
+            </a:r>
+            <a:endParaRPr lang="en-US" sz="1100" dirty="0"/>
           </a:p>
         </p:txBody>
       </p:sp>
@@ -3616,8 +4675,8 @@
         </p:nvSpPr>
         <p:spPr>
           <a:xfrm>
-            <a:off x="457200" y="3108960"/>
-            <a:ext cx="8229600" cy="521208"/>
+            <a:off x="457200" y="2880360"/>
+            <a:ext cx="8229600" cy="475488"/>
           </a:xfrm>
           <a:prstGeom prst="rect">
             <a:avLst/>
@@ -3626,13 +4685,6 @@
             <a:srgbClr val="FFFFFF"/>
           </a:solidFill>
           <a:ln/>
-          <a:effectLst>
-            <a:outerShdw sx="100000" sy="100000" kx="0" ky="0" algn="bl" rotWithShape="0" blurRad="50800" dist="25400" dir="8100000">
-              <a:srgbClr val="000000">
-                <a:alpha val="12000"/>
-              </a:srgbClr>
-            </a:outerShdw>
-          </a:effectLst>
         </p:spPr>
       </p:sp>
       <p:sp>
@@ -3643,8 +4695,8 @@
         </p:nvSpPr>
         <p:spPr>
           <a:xfrm>
-            <a:off x="457200" y="3108960"/>
-            <a:ext cx="45720" cy="521208"/>
+            <a:off x="457200" y="2880360"/>
+            <a:ext cx="45720" cy="475488"/>
           </a:xfrm>
           <a:prstGeom prst="rect">
             <a:avLst/>
@@ -3663,8 +4715,8 @@
         </p:nvSpPr>
         <p:spPr>
           <a:xfrm>
-            <a:off x="685800" y="3108960"/>
-            <a:ext cx="7818120" cy="521208"/>
+            <a:off x="640080" y="2880360"/>
+            <a:ext cx="7863840" cy="475488"/>
           </a:xfrm>
           <a:prstGeom prst="rect">
             <a:avLst/>
@@ -3680,7 +4732,7 @@
               <a:buNone/>
             </a:pPr>
             <a:r>
-              <a:rPr lang="en-US" sz="1200" dirty="0">
+              <a:rPr lang="en-US" sz="1100" dirty="0">
                 <a:solidFill>
                   <a:srgbClr val="1A1A2E"/>
                 </a:solidFill>
@@ -3688,9 +4740,9 @@
                 <a:ea typeface="Calibri" pitchFamily="34" charset="-122"/>
                 <a:cs typeface="Calibri" pitchFamily="34" charset="-120"/>
               </a:rPr>
-              <a:t>Le PROCESSUS transforme les données entrantes en données sortantes</a:t>
-            </a:r>
-            <a:endParaRPr lang="en-US" sz="1200" dirty="0"/>
+              <a:t>Le processus transforme les donnees entrantes en sortantes</a:t>
+            </a:r>
+            <a:endParaRPr lang="en-US" sz="1100" dirty="0"/>
           </a:p>
         </p:txBody>
       </p:sp>
@@ -3702,8 +4754,8 @@
         </p:nvSpPr>
         <p:spPr>
           <a:xfrm>
-            <a:off x="457200" y="3657600"/>
-            <a:ext cx="8229600" cy="521208"/>
+            <a:off x="457200" y="3383280"/>
+            <a:ext cx="8229600" cy="475488"/>
           </a:xfrm>
           <a:prstGeom prst="rect">
             <a:avLst/>
@@ -3712,13 +4764,6 @@
             <a:srgbClr val="F3E5F5"/>
           </a:solidFill>
           <a:ln/>
-          <a:effectLst>
-            <a:outerShdw sx="100000" sy="100000" kx="0" ky="0" algn="bl" rotWithShape="0" blurRad="50800" dist="25400" dir="8100000">
-              <a:srgbClr val="000000">
-                <a:alpha val="12000"/>
-              </a:srgbClr>
-            </a:outerShdw>
-          </a:effectLst>
         </p:spPr>
       </p:sp>
       <p:sp>
@@ -3729,8 +4774,8 @@
         </p:nvSpPr>
         <p:spPr>
           <a:xfrm>
-            <a:off x="457200" y="3657600"/>
-            <a:ext cx="45720" cy="521208"/>
+            <a:off x="457200" y="3383280"/>
+            <a:ext cx="45720" cy="475488"/>
           </a:xfrm>
           <a:prstGeom prst="rect">
             <a:avLst/>
@@ -3749,8 +4794,8 @@
         </p:nvSpPr>
         <p:spPr>
           <a:xfrm>
-            <a:off x="685800" y="3657600"/>
-            <a:ext cx="7818120" cy="521208"/>
+            <a:off x="640080" y="3383280"/>
+            <a:ext cx="7863840" cy="475488"/>
           </a:xfrm>
           <a:prstGeom prst="rect">
             <a:avLst/>
@@ -3766,7 +4811,7 @@
               <a:buNone/>
             </a:pPr>
             <a:r>
-              <a:rPr lang="en-US" sz="1200" dirty="0">
+              <a:rPr lang="en-US" sz="1100" dirty="0">
                 <a:solidFill>
                   <a:srgbClr val="1A1A2E"/>
                 </a:solidFill>
@@ -3774,9 +4819,9 @@
                 <a:ea typeface="Calibri" pitchFamily="34" charset="-122"/>
                 <a:cs typeface="Calibri" pitchFamily="34" charset="-120"/>
               </a:rPr>
-              <a:t>Le STOCKAGE conserve les données entre les processus</a:t>
-            </a:r>
-            <a:endParaRPr lang="en-US" sz="1200" dirty="0"/>
+              <a:t>Le stockage conserve les donnees entre les processus</a:t>
+            </a:r>
+            <a:endParaRPr lang="en-US" sz="1100" dirty="0"/>
           </a:p>
         </p:txBody>
       </p:sp>
@@ -3788,8 +4833,8 @@
         </p:nvSpPr>
         <p:spPr>
           <a:xfrm>
-            <a:off x="457200" y="4206240"/>
-            <a:ext cx="8229600" cy="521208"/>
+            <a:off x="457200" y="3886200"/>
+            <a:ext cx="8229600" cy="475488"/>
           </a:xfrm>
           <a:prstGeom prst="rect">
             <a:avLst/>
@@ -3798,13 +4843,6 @@
             <a:srgbClr val="FFFFFF"/>
           </a:solidFill>
           <a:ln/>
-          <a:effectLst>
-            <a:outerShdw sx="100000" sy="100000" kx="0" ky="0" algn="bl" rotWithShape="0" blurRad="50800" dist="25400" dir="8100000">
-              <a:srgbClr val="000000">
-                <a:alpha val="12000"/>
-              </a:srgbClr>
-            </a:outerShdw>
-          </a:effectLst>
         </p:spPr>
       </p:sp>
       <p:sp>
@@ -3815,8 +4853,8 @@
         </p:nvSpPr>
         <p:spPr>
           <a:xfrm>
-            <a:off x="457200" y="4206240"/>
-            <a:ext cx="45720" cy="521208"/>
+            <a:off x="457200" y="3886200"/>
+            <a:ext cx="45720" cy="475488"/>
           </a:xfrm>
           <a:prstGeom prst="rect">
             <a:avLst/>
@@ -3835,8 +4873,8 @@
         </p:nvSpPr>
         <p:spPr>
           <a:xfrm>
-            <a:off x="685800" y="4206240"/>
-            <a:ext cx="7818120" cy="521208"/>
+            <a:off x="640080" y="3886200"/>
+            <a:ext cx="7863840" cy="475488"/>
           </a:xfrm>
           <a:prstGeom prst="rect">
             <a:avLst/>
@@ -3852,7 +4890,7 @@
               <a:buNone/>
             </a:pPr>
             <a:r>
-              <a:rPr lang="en-US" sz="1200" dirty="0">
+              <a:rPr lang="en-US" sz="1100" dirty="0">
                 <a:solidFill>
                   <a:srgbClr val="1A1A2E"/>
                 </a:solidFill>
@@ -3860,9 +4898,9 @@
                 <a:ea typeface="Calibri" pitchFamily="34" charset="-122"/>
                 <a:cs typeface="Calibri" pitchFamily="34" charset="-120"/>
               </a:rPr>
-              <a:t>L'ENTITÉ EXTERNE est source ou destinataire des données</a:t>
-            </a:r>
-            <a:endParaRPr lang="en-US" sz="1200" dirty="0"/>
+              <a:t>L'entite externe est source ou destinataire des donnees</a:t>
+            </a:r>
+            <a:endParaRPr lang="en-US" sz="1100" dirty="0"/>
           </a:p>
         </p:txBody>
       </p:sp>
@@ -3927,7 +4965,7 @@
         <p:spPr>
           <a:xfrm>
             <a:off x="457200" y="182880"/>
-            <a:ext cx="8229600" cy="594360"/>
+            <a:ext cx="8229600" cy="548640"/>
           </a:xfrm>
           <a:prstGeom prst="rect">
             <a:avLst/>
@@ -3943,7 +4981,7 @@
               <a:buNone/>
             </a:pPr>
             <a:r>
-              <a:rPr lang="en-US" sz="2400" b="1" dirty="0">
+              <a:rPr lang="en-US" sz="2200" b="1" dirty="0">
                 <a:solidFill>
                   <a:srgbClr val="4A0072"/>
                 </a:solidFill>
@@ -3951,9 +4989,9 @@
                 <a:ea typeface="Trebuchet MS" pitchFamily="34" charset="-122"/>
                 <a:cs typeface="Trebuchet MS" pitchFamily="34" charset="-120"/>
               </a:rPr>
-              <a:t>Flowcharts : logique des processus</a:t>
-            </a:r>
-            <a:endParaRPr lang="en-US" sz="2400" dirty="0"/>
+              <a:t>Flowcharts (Organigrammes)</a:t>
+            </a:r>
+            <a:endParaRPr lang="en-US" sz="2200" dirty="0"/>
           </a:p>
         </p:txBody>
       </p:sp>
@@ -3965,8 +5003,8 @@
         </p:nvSpPr>
         <p:spPr>
           <a:xfrm>
-            <a:off x="457200" y="914400"/>
-            <a:ext cx="8229600" cy="521208"/>
+            <a:off x="457200" y="868680"/>
+            <a:ext cx="8229600" cy="475488"/>
           </a:xfrm>
           <a:prstGeom prst="rect">
             <a:avLst/>
@@ -3975,13 +5013,6 @@
             <a:srgbClr val="FFFFFF"/>
           </a:solidFill>
           <a:ln/>
-          <a:effectLst>
-            <a:outerShdw sx="100000" sy="100000" kx="0" ky="0" algn="bl" rotWithShape="0" blurRad="50800" dist="25400" dir="8100000">
-              <a:srgbClr val="000000">
-                <a:alpha val="12000"/>
-              </a:srgbClr>
-            </a:outerShdw>
-          </a:effectLst>
         </p:spPr>
       </p:sp>
       <p:sp>
@@ -3992,8 +5023,8 @@
         </p:nvSpPr>
         <p:spPr>
           <a:xfrm>
-            <a:off x="457200" y="914400"/>
-            <a:ext cx="45720" cy="521208"/>
+            <a:off x="457200" y="868680"/>
+            <a:ext cx="45720" cy="475488"/>
           </a:xfrm>
           <a:prstGeom prst="rect">
             <a:avLst/>
@@ -4012,8 +5043,8 @@
         </p:nvSpPr>
         <p:spPr>
           <a:xfrm>
-            <a:off x="685800" y="914400"/>
-            <a:ext cx="7818120" cy="521208"/>
+            <a:off x="640080" y="868680"/>
+            <a:ext cx="7863840" cy="475488"/>
           </a:xfrm>
           <a:prstGeom prst="rect">
             <a:avLst/>
@@ -4029,7 +5060,7 @@
               <a:buNone/>
             </a:pPr>
             <a:r>
-              <a:rPr lang="en-US" sz="1200" dirty="0">
+              <a:rPr lang="en-US" sz="1100" dirty="0">
                 <a:solidFill>
                   <a:srgbClr val="1A1A2E"/>
                 </a:solidFill>
@@ -4037,9 +5068,9 @@
                 <a:ea typeface="Calibri" pitchFamily="34" charset="-122"/>
                 <a:cs typeface="Calibri" pitchFamily="34" charset="-120"/>
               </a:rPr>
-              <a:t>⬭ Ovale : Début / Fin du processus</a:t>
-            </a:r>
-            <a:endParaRPr lang="en-US" sz="1200" dirty="0"/>
+              <a:t>Representation visuelle de la sequence d'etapes et decisions</a:t>
+            </a:r>
+            <a:endParaRPr lang="en-US" sz="1100" dirty="0"/>
           </a:p>
         </p:txBody>
       </p:sp>
@@ -4051,8 +5082,8 @@
         </p:nvSpPr>
         <p:spPr>
           <a:xfrm>
-            <a:off x="457200" y="1463040"/>
-            <a:ext cx="8229600" cy="521208"/>
+            <a:off x="457200" y="1371600"/>
+            <a:ext cx="8229600" cy="475488"/>
           </a:xfrm>
           <a:prstGeom prst="rect">
             <a:avLst/>
@@ -4061,13 +5092,6 @@
             <a:srgbClr val="F3E5F5"/>
           </a:solidFill>
           <a:ln/>
-          <a:effectLst>
-            <a:outerShdw sx="100000" sy="100000" kx="0" ky="0" algn="bl" rotWithShape="0" blurRad="50800" dist="25400" dir="8100000">
-              <a:srgbClr val="000000">
-                <a:alpha val="12000"/>
-              </a:srgbClr>
-            </a:outerShdw>
-          </a:effectLst>
         </p:spPr>
       </p:sp>
       <p:sp>
@@ -4078,8 +5102,8 @@
         </p:nvSpPr>
         <p:spPr>
           <a:xfrm>
-            <a:off x="457200" y="1463040"/>
-            <a:ext cx="45720" cy="521208"/>
+            <a:off x="457200" y="1371600"/>
+            <a:ext cx="45720" cy="475488"/>
           </a:xfrm>
           <a:prstGeom prst="rect">
             <a:avLst/>
@@ -4098,8 +5122,8 @@
         </p:nvSpPr>
         <p:spPr>
           <a:xfrm>
-            <a:off x="685800" y="1463040"/>
-            <a:ext cx="7818120" cy="521208"/>
+            <a:off x="640080" y="1371600"/>
+            <a:ext cx="7863840" cy="475488"/>
           </a:xfrm>
           <a:prstGeom prst="rect">
             <a:avLst/>
@@ -4115,7 +5139,7 @@
               <a:buNone/>
             </a:pPr>
             <a:r>
-              <a:rPr lang="en-US" sz="1200" dirty="0">
+              <a:rPr lang="en-US" sz="1100" dirty="0">
                 <a:solidFill>
                   <a:srgbClr val="1A1A2E"/>
                 </a:solidFill>
@@ -4123,9 +5147,9 @@
                 <a:ea typeface="Calibri" pitchFamily="34" charset="-122"/>
                 <a:cs typeface="Calibri" pitchFamily="34" charset="-120"/>
               </a:rPr>
-              <a:t>▭ Rectangle : Action / Processus (ex: 'Vérifier disponibilité salle')</a:t>
-            </a:r>
-            <a:endParaRPr lang="en-US" sz="1200" dirty="0"/>
+              <a:t>Ovale : Debut / Fin du processus</a:t>
+            </a:r>
+            <a:endParaRPr lang="en-US" sz="1100" dirty="0"/>
           </a:p>
         </p:txBody>
       </p:sp>
@@ -4137,8 +5161,8 @@
         </p:nvSpPr>
         <p:spPr>
           <a:xfrm>
-            <a:off x="457200" y="2011680"/>
-            <a:ext cx="8229600" cy="521208"/>
+            <a:off x="457200" y="1874520"/>
+            <a:ext cx="8229600" cy="475488"/>
           </a:xfrm>
           <a:prstGeom prst="rect">
             <a:avLst/>
@@ -4147,13 +5171,6 @@
             <a:srgbClr val="FFFFFF"/>
           </a:solidFill>
           <a:ln/>
-          <a:effectLst>
-            <a:outerShdw sx="100000" sy="100000" kx="0" ky="0" algn="bl" rotWithShape="0" blurRad="50800" dist="25400" dir="8100000">
-              <a:srgbClr val="000000">
-                <a:alpha val="12000"/>
-              </a:srgbClr>
-            </a:outerShdw>
-          </a:effectLst>
         </p:spPr>
       </p:sp>
       <p:sp>
@@ -4164,8 +5181,8 @@
         </p:nvSpPr>
         <p:spPr>
           <a:xfrm>
-            <a:off x="457200" y="2011680"/>
-            <a:ext cx="45720" cy="521208"/>
+            <a:off x="457200" y="1874520"/>
+            <a:ext cx="45720" cy="475488"/>
           </a:xfrm>
           <a:prstGeom prst="rect">
             <a:avLst/>
@@ -4184,8 +5201,8 @@
         </p:nvSpPr>
         <p:spPr>
           <a:xfrm>
-            <a:off x="685800" y="2011680"/>
-            <a:ext cx="7818120" cy="521208"/>
+            <a:off x="640080" y="1874520"/>
+            <a:ext cx="7863840" cy="475488"/>
           </a:xfrm>
           <a:prstGeom prst="rect">
             <a:avLst/>
@@ -4201,7 +5218,7 @@
               <a:buNone/>
             </a:pPr>
             <a:r>
-              <a:rPr lang="en-US" sz="1200" dirty="0">
+              <a:rPr lang="en-US" sz="1100" dirty="0">
                 <a:solidFill>
                   <a:srgbClr val="1A1A2E"/>
                 </a:solidFill>
@@ -4209,9 +5226,9 @@
                 <a:ea typeface="Calibri" pitchFamily="34" charset="-122"/>
                 <a:cs typeface="Calibri" pitchFamily="34" charset="-120"/>
               </a:rPr>
-              <a:t>◇ Losange : Décision (oui/non, vrai/faux)</a:t>
-            </a:r>
-            <a:endParaRPr lang="en-US" sz="1200" dirty="0"/>
+              <a:t>Rectangle : Action / Processus (ex: Verifier disponibilite salle)</a:t>
+            </a:r>
+            <a:endParaRPr lang="en-US" sz="1100" dirty="0"/>
           </a:p>
         </p:txBody>
       </p:sp>
@@ -4223,8 +5240,8 @@
         </p:nvSpPr>
         <p:spPr>
           <a:xfrm>
-            <a:off x="457200" y="2560320"/>
-            <a:ext cx="8229600" cy="521208"/>
+            <a:off x="457200" y="2377440"/>
+            <a:ext cx="8229600" cy="475488"/>
           </a:xfrm>
           <a:prstGeom prst="rect">
             <a:avLst/>
@@ -4233,13 +5250,6 @@
             <a:srgbClr val="F3E5F5"/>
           </a:solidFill>
           <a:ln/>
-          <a:effectLst>
-            <a:outerShdw sx="100000" sy="100000" kx="0" ky="0" algn="bl" rotWithShape="0" blurRad="50800" dist="25400" dir="8100000">
-              <a:srgbClr val="000000">
-                <a:alpha val="12000"/>
-              </a:srgbClr>
-            </a:outerShdw>
-          </a:effectLst>
         </p:spPr>
       </p:sp>
       <p:sp>
@@ -4250,8 +5260,8 @@
         </p:nvSpPr>
         <p:spPr>
           <a:xfrm>
-            <a:off x="457200" y="2560320"/>
-            <a:ext cx="45720" cy="521208"/>
+            <a:off x="457200" y="2377440"/>
+            <a:ext cx="45720" cy="475488"/>
           </a:xfrm>
           <a:prstGeom prst="rect">
             <a:avLst/>
@@ -4270,8 +5280,8 @@
         </p:nvSpPr>
         <p:spPr>
           <a:xfrm>
-            <a:off x="685800" y="2560320"/>
-            <a:ext cx="7818120" cy="521208"/>
+            <a:off x="640080" y="2377440"/>
+            <a:ext cx="7863840" cy="475488"/>
           </a:xfrm>
           <a:prstGeom prst="rect">
             <a:avLst/>
@@ -4287,7 +5297,7 @@
               <a:buNone/>
             </a:pPr>
             <a:r>
-              <a:rPr lang="en-US" sz="1200" dirty="0">
+              <a:rPr lang="en-US" sz="1100" dirty="0">
                 <a:solidFill>
                   <a:srgbClr val="1A1A2E"/>
                 </a:solidFill>
@@ -4295,9 +5305,9 @@
                 <a:ea typeface="Calibri" pitchFamily="34" charset="-122"/>
                 <a:cs typeface="Calibri" pitchFamily="34" charset="-120"/>
               </a:rPr>
-              <a:t>▱ Parallélogramme : Entrée / Sortie (ex: 'Afficher confirmation')</a:t>
-            </a:r>
-            <a:endParaRPr lang="en-US" sz="1200" dirty="0"/>
+              <a:t>Losange : Decision (oui/non, vrai/faux)</a:t>
+            </a:r>
+            <a:endParaRPr lang="en-US" sz="1100" dirty="0"/>
           </a:p>
         </p:txBody>
       </p:sp>
@@ -4309,8 +5319,8 @@
         </p:nvSpPr>
         <p:spPr>
           <a:xfrm>
-            <a:off x="457200" y="3108960"/>
-            <a:ext cx="8229600" cy="521208"/>
+            <a:off x="457200" y="2880360"/>
+            <a:ext cx="8229600" cy="475488"/>
           </a:xfrm>
           <a:prstGeom prst="rect">
             <a:avLst/>
@@ -4319,13 +5329,6 @@
             <a:srgbClr val="FFFFFF"/>
           </a:solidFill>
           <a:ln/>
-          <a:effectLst>
-            <a:outerShdw sx="100000" sy="100000" kx="0" ky="0" algn="bl" rotWithShape="0" blurRad="50800" dist="25400" dir="8100000">
-              <a:srgbClr val="000000">
-                <a:alpha val="12000"/>
-              </a:srgbClr>
-            </a:outerShdw>
-          </a:effectLst>
         </p:spPr>
       </p:sp>
       <p:sp>
@@ -4336,8 +5339,8 @@
         </p:nvSpPr>
         <p:spPr>
           <a:xfrm>
-            <a:off x="457200" y="3108960"/>
-            <a:ext cx="45720" cy="521208"/>
+            <a:off x="457200" y="2880360"/>
+            <a:ext cx="45720" cy="475488"/>
           </a:xfrm>
           <a:prstGeom prst="rect">
             <a:avLst/>
@@ -4356,8 +5359,8 @@
         </p:nvSpPr>
         <p:spPr>
           <a:xfrm>
-            <a:off x="685800" y="3108960"/>
-            <a:ext cx="7818120" cy="521208"/>
+            <a:off x="640080" y="2880360"/>
+            <a:ext cx="7863840" cy="475488"/>
           </a:xfrm>
           <a:prstGeom prst="rect">
             <a:avLst/>
@@ -4373,7 +5376,7 @@
               <a:buNone/>
             </a:pPr>
             <a:r>
-              <a:rPr lang="en-US" sz="1200" dirty="0">
+              <a:rPr lang="en-US" sz="1100" dirty="0">
                 <a:solidFill>
                   <a:srgbClr val="1A1A2E"/>
                 </a:solidFill>
@@ -4381,9 +5384,9 @@
                 <a:ea typeface="Calibri" pitchFamily="34" charset="-122"/>
                 <a:cs typeface="Calibri" pitchFamily="34" charset="-120"/>
               </a:rPr>
-              <a:t>Flèches : direction du flux logique</a:t>
-            </a:r>
-            <a:endParaRPr lang="en-US" sz="1200" dirty="0"/>
+              <a:t>Parallelogramme : Entree / Sortie</a:t>
+            </a:r>
+            <a:endParaRPr lang="en-US" sz="1100" dirty="0"/>
           </a:p>
         </p:txBody>
       </p:sp>
@@ -4395,8 +5398,8 @@
         </p:nvSpPr>
         <p:spPr>
           <a:xfrm>
-            <a:off x="457200" y="3657600"/>
-            <a:ext cx="8229600" cy="521208"/>
+            <a:off x="457200" y="3383280"/>
+            <a:ext cx="8229600" cy="475488"/>
           </a:xfrm>
           <a:prstGeom prst="rect">
             <a:avLst/>
@@ -4405,13 +5408,6 @@
             <a:srgbClr val="F3E5F5"/>
           </a:solidFill>
           <a:ln/>
-          <a:effectLst>
-            <a:outerShdw sx="100000" sy="100000" kx="0" ky="0" algn="bl" rotWithShape="0" blurRad="50800" dist="25400" dir="8100000">
-              <a:srgbClr val="000000">
-                <a:alpha val="12000"/>
-              </a:srgbClr>
-            </a:outerShdw>
-          </a:effectLst>
         </p:spPr>
       </p:sp>
       <p:sp>
@@ -4422,8 +5418,8 @@
         </p:nvSpPr>
         <p:spPr>
           <a:xfrm>
-            <a:off x="457200" y="3657600"/>
-            <a:ext cx="45720" cy="521208"/>
+            <a:off x="457200" y="3383280"/>
+            <a:ext cx="45720" cy="475488"/>
           </a:xfrm>
           <a:prstGeom prst="rect">
             <a:avLst/>
@@ -4442,8 +5438,8 @@
         </p:nvSpPr>
         <p:spPr>
           <a:xfrm>
-            <a:off x="685800" y="3657600"/>
-            <a:ext cx="7818120" cy="521208"/>
+            <a:off x="640080" y="3383280"/>
+            <a:ext cx="7863840" cy="475488"/>
           </a:xfrm>
           <a:prstGeom prst="rect">
             <a:avLst/>
@@ -4459,7 +5455,7 @@
               <a:buNone/>
             </a:pPr>
             <a:r>
-              <a:rPr lang="en-US" sz="1200" dirty="0">
+              <a:rPr lang="en-US" sz="1100" dirty="0">
                 <a:solidFill>
                   <a:srgbClr val="1A1A2E"/>
                 </a:solidFill>
@@ -4467,9 +5463,9 @@
                 <a:ea typeface="Calibri" pitchFamily="34" charset="-122"/>
                 <a:cs typeface="Calibri" pitchFamily="34" charset="-120"/>
               </a:rPr>
-              <a:t>Exemple : flowchart 'Réserver une session'</a:t>
-            </a:r>
-            <a:endParaRPr lang="en-US" sz="1200" dirty="0"/>
+              <a:t>Fleches : direction du flux logique</a:t>
+            </a:r>
+            <a:endParaRPr lang="en-US" sz="1100" dirty="0"/>
           </a:p>
         </p:txBody>
       </p:sp>
@@ -4481,8 +5477,8 @@
         </p:nvSpPr>
         <p:spPr>
           <a:xfrm>
-            <a:off x="457200" y="4206240"/>
-            <a:ext cx="8229600" cy="521208"/>
+            <a:off x="457200" y="3886200"/>
+            <a:ext cx="8229600" cy="475488"/>
           </a:xfrm>
           <a:prstGeom prst="rect">
             <a:avLst/>
@@ -4491,13 +5487,6 @@
             <a:srgbClr val="FFFFFF"/>
           </a:solidFill>
           <a:ln/>
-          <a:effectLst>
-            <a:outerShdw sx="100000" sy="100000" kx="0" ky="0" algn="bl" rotWithShape="0" blurRad="50800" dist="25400" dir="8100000">
-              <a:srgbClr val="000000">
-                <a:alpha val="12000"/>
-              </a:srgbClr>
-            </a:outerShdw>
-          </a:effectLst>
         </p:spPr>
       </p:sp>
       <p:sp>
@@ -4508,8 +5497,8 @@
         </p:nvSpPr>
         <p:spPr>
           <a:xfrm>
-            <a:off x="457200" y="4206240"/>
-            <a:ext cx="45720" cy="521208"/>
+            <a:off x="457200" y="3886200"/>
+            <a:ext cx="45720" cy="475488"/>
           </a:xfrm>
           <a:prstGeom prst="rect">
             <a:avLst/>
@@ -4528,8 +5517,8 @@
         </p:nvSpPr>
         <p:spPr>
           <a:xfrm>
-            <a:off x="685800" y="4206240"/>
-            <a:ext cx="7818120" cy="521208"/>
+            <a:off x="640080" y="3886200"/>
+            <a:ext cx="7863840" cy="475488"/>
           </a:xfrm>
           <a:prstGeom prst="rect">
             <a:avLst/>
@@ -4545,7 +5534,7 @@
               <a:buNone/>
             </a:pPr>
             <a:r>
-              <a:rPr lang="en-US" sz="1200" dirty="0">
+              <a:rPr lang="en-US" sz="1100" dirty="0">
                 <a:solidFill>
                   <a:srgbClr val="1A1A2E"/>
                 </a:solidFill>
@@ -4553,9 +5542,9 @@
                 <a:ea typeface="Calibri" pitchFamily="34" charset="-122"/>
                 <a:cs typeface="Calibri" pitchFamily="34" charset="-120"/>
               </a:rPr>
-              <a:t>Inclure les cas d'erreur : salle indisponible, ingénieur occupé</a:t>
-            </a:r>
-            <a:endParaRPr lang="en-US" sz="1200" dirty="0"/>
+              <a:t>Inclure les cas d'erreur : salle indisponible, ingenieur occupe</a:t>
+            </a:r>
+            <a:endParaRPr lang="en-US" sz="1100" dirty="0"/>
           </a:p>
         </p:txBody>
       </p:sp>
@@ -4620,7 +5609,7 @@
         <p:spPr>
           <a:xfrm>
             <a:off x="457200" y="182880"/>
-            <a:ext cx="8229600" cy="594360"/>
+            <a:ext cx="8229600" cy="548640"/>
           </a:xfrm>
           <a:prstGeom prst="rect">
             <a:avLst/>
@@ -4636,7 +5625,7 @@
               <a:buNone/>
             </a:pPr>
             <a:r>
-              <a:rPr lang="en-US" sz="2400" b="1" dirty="0">
+              <a:rPr lang="en-US" sz="2200" b="1" dirty="0">
                 <a:solidFill>
                   <a:srgbClr val="4A0072"/>
                 </a:solidFill>
@@ -4644,9 +5633,9 @@
                 <a:ea typeface="Trebuchet MS" pitchFamily="34" charset="-122"/>
                 <a:cs typeface="Trebuchet MS" pitchFamily="34" charset="-120"/>
               </a:rPr>
-              <a:t>Dictionnaire de données technique</a:t>
-            </a:r>
-            <a:endParaRPr lang="en-US" sz="2400" dirty="0"/>
+              <a:t>Diagramme de cas d'utilisation UML (NOUVEAU)</a:t>
+            </a:r>
+            <a:endParaRPr lang="en-US" sz="2200" dirty="0"/>
           </a:p>
         </p:txBody>
       </p:sp>
@@ -4658,8 +5647,8 @@
         </p:nvSpPr>
         <p:spPr>
           <a:xfrm>
-            <a:off x="457200" y="914400"/>
-            <a:ext cx="8229600" cy="521208"/>
+            <a:off x="457200" y="868680"/>
+            <a:ext cx="8229600" cy="475488"/>
           </a:xfrm>
           <a:prstGeom prst="rect">
             <a:avLst/>
@@ -4668,13 +5657,6 @@
             <a:srgbClr val="FFFFFF"/>
           </a:solidFill>
           <a:ln/>
-          <a:effectLst>
-            <a:outerShdw sx="100000" sy="100000" kx="0" ky="0" algn="bl" rotWithShape="0" blurRad="50800" dist="25400" dir="8100000">
-              <a:srgbClr val="000000">
-                <a:alpha val="12000"/>
-              </a:srgbClr>
-            </a:outerShdw>
-          </a:effectLst>
         </p:spPr>
       </p:sp>
       <p:sp>
@@ -4685,8 +5667,8 @@
         </p:nvSpPr>
         <p:spPr>
           <a:xfrm>
-            <a:off x="457200" y="914400"/>
-            <a:ext cx="45720" cy="521208"/>
+            <a:off x="457200" y="868680"/>
+            <a:ext cx="45720" cy="475488"/>
           </a:xfrm>
           <a:prstGeom prst="rect">
             <a:avLst/>
@@ -4705,8 +5687,8 @@
         </p:nvSpPr>
         <p:spPr>
           <a:xfrm>
-            <a:off x="685800" y="914400"/>
-            <a:ext cx="7818120" cy="521208"/>
+            <a:off x="640080" y="868680"/>
+            <a:ext cx="7863840" cy="475488"/>
           </a:xfrm>
           <a:prstGeom prst="rect">
             <a:avLst/>
@@ -4722,7 +5704,7 @@
               <a:buNone/>
             </a:pPr>
             <a:r>
-              <a:rPr lang="en-US" sz="1200" dirty="0">
+              <a:rPr lang="en-US" sz="1100" dirty="0">
                 <a:solidFill>
                   <a:srgbClr val="1A1A2E"/>
                 </a:solidFill>
@@ -4730,9 +5712,9 @@
                 <a:ea typeface="Calibri" pitchFamily="34" charset="-122"/>
                 <a:cs typeface="Calibri" pitchFamily="34" charset="-120"/>
               </a:rPr>
-              <a:t>≠ DD de conception (Module 3) : ici c'est le doc FINAL</a:t>
-            </a:r>
-            <a:endParaRPr lang="en-US" sz="1200" dirty="0"/>
+              <a:t>Modele la FONCTIONNALITE du systeme vue de l'exterieur</a:t>
+            </a:r>
+            <a:endParaRPr lang="en-US" sz="1100" dirty="0"/>
           </a:p>
         </p:txBody>
       </p:sp>
@@ -4744,8 +5726,8 @@
         </p:nvSpPr>
         <p:spPr>
           <a:xfrm>
-            <a:off x="457200" y="1463040"/>
-            <a:ext cx="8229600" cy="521208"/>
+            <a:off x="457200" y="1371600"/>
+            <a:ext cx="8229600" cy="475488"/>
           </a:xfrm>
           <a:prstGeom prst="rect">
             <a:avLst/>
@@ -4754,13 +5736,6 @@
             <a:srgbClr val="F3E5F5"/>
           </a:solidFill>
           <a:ln/>
-          <a:effectLst>
-            <a:outerShdw sx="100000" sy="100000" kx="0" ky="0" algn="bl" rotWithShape="0" blurRad="50800" dist="25400" dir="8100000">
-              <a:srgbClr val="000000">
-                <a:alpha val="12000"/>
-              </a:srgbClr>
-            </a:outerShdw>
-          </a:effectLst>
         </p:spPr>
       </p:sp>
       <p:sp>
@@ -4771,8 +5746,8 @@
         </p:nvSpPr>
         <p:spPr>
           <a:xfrm>
-            <a:off x="457200" y="1463040"/>
-            <a:ext cx="45720" cy="521208"/>
+            <a:off x="457200" y="1371600"/>
+            <a:ext cx="45720" cy="475488"/>
           </a:xfrm>
           <a:prstGeom prst="rect">
             <a:avLst/>
@@ -4791,8 +5766,8 @@
         </p:nvSpPr>
         <p:spPr>
           <a:xfrm>
-            <a:off x="685800" y="1463040"/>
-            <a:ext cx="7818120" cy="521208"/>
+            <a:off x="640080" y="1371600"/>
+            <a:ext cx="7863840" cy="475488"/>
           </a:xfrm>
           <a:prstGeom prst="rect">
             <a:avLst/>
@@ -4808,7 +5783,7 @@
               <a:buNone/>
             </a:pPr>
             <a:r>
-              <a:rPr lang="en-US" sz="1200" dirty="0">
+              <a:rPr lang="en-US" sz="1100" dirty="0">
                 <a:solidFill>
                   <a:srgbClr val="1A1A2E"/>
                 </a:solidFill>
@@ -4816,9 +5791,9 @@
                 <a:ea typeface="Calibri" pitchFamily="34" charset="-122"/>
                 <a:cs typeface="Calibri" pitchFamily="34" charset="-120"/>
               </a:rPr>
-              <a:t>Pour chaque table : nom, description, nombre de colonnes</a:t>
-            </a:r>
-            <a:endParaRPr lang="en-US" sz="1200" dirty="0"/>
+              <a:t>ACTEURS : personnes/entites avec des roles (Artiste, Admin, Comptable)</a:t>
+            </a:r>
+            <a:endParaRPr lang="en-US" sz="1100" dirty="0"/>
           </a:p>
         </p:txBody>
       </p:sp>
@@ -4830,8 +5805,8 @@
         </p:nvSpPr>
         <p:spPr>
           <a:xfrm>
-            <a:off x="457200" y="2011680"/>
-            <a:ext cx="8229600" cy="521208"/>
+            <a:off x="457200" y="1874520"/>
+            <a:ext cx="8229600" cy="475488"/>
           </a:xfrm>
           <a:prstGeom prst="rect">
             <a:avLst/>
@@ -4840,13 +5815,6 @@
             <a:srgbClr val="FFFFFF"/>
           </a:solidFill>
           <a:ln/>
-          <a:effectLst>
-            <a:outerShdw sx="100000" sy="100000" kx="0" ky="0" algn="bl" rotWithShape="0" blurRad="50800" dist="25400" dir="8100000">
-              <a:srgbClr val="000000">
-                <a:alpha val="12000"/>
-              </a:srgbClr>
-            </a:outerShdw>
-          </a:effectLst>
         </p:spPr>
       </p:sp>
       <p:sp>
@@ -4857,8 +5825,8 @@
         </p:nvSpPr>
         <p:spPr>
           <a:xfrm>
-            <a:off x="457200" y="2011680"/>
-            <a:ext cx="45720" cy="521208"/>
+            <a:off x="457200" y="1874520"/>
+            <a:ext cx="45720" cy="475488"/>
           </a:xfrm>
           <a:prstGeom prst="rect">
             <a:avLst/>
@@ -4877,8 +5845,8 @@
         </p:nvSpPr>
         <p:spPr>
           <a:xfrm>
-            <a:off x="685800" y="2011680"/>
-            <a:ext cx="7818120" cy="521208"/>
+            <a:off x="640080" y="1874520"/>
+            <a:ext cx="7863840" cy="475488"/>
           </a:xfrm>
           <a:prstGeom prst="rect">
             <a:avLst/>
@@ -4894,7 +5862,7 @@
               <a:buNone/>
             </a:pPr>
             <a:r>
-              <a:rPr lang="en-US" sz="1200" dirty="0">
+              <a:rPr lang="en-US" sz="1100" dirty="0">
                 <a:solidFill>
                   <a:srgbClr val="1A1A2E"/>
                 </a:solidFill>
@@ -4902,9 +5870,9 @@
                 <a:ea typeface="Calibri" pitchFamily="34" charset="-122"/>
                 <a:cs typeface="Calibri" pitchFamily="34" charset="-120"/>
               </a:rPr>
-              <a:t>Pour chaque colonne : nom, type MySQL EXACT, contraintes, description</a:t>
-            </a:r>
-            <a:endParaRPr lang="en-US" sz="1200" dirty="0"/>
+              <a:t>CAS D'UTILISATION : ovales = actions du systeme (Reserver session, Generer facture)</a:t>
+            </a:r>
+            <a:endParaRPr lang="en-US" sz="1100" dirty="0"/>
           </a:p>
         </p:txBody>
       </p:sp>
@@ -4916,8 +5884,8 @@
         </p:nvSpPr>
         <p:spPr>
           <a:xfrm>
-            <a:off x="457200" y="2560320"/>
-            <a:ext cx="8229600" cy="521208"/>
+            <a:off x="457200" y="2377440"/>
+            <a:ext cx="8229600" cy="475488"/>
           </a:xfrm>
           <a:prstGeom prst="rect">
             <a:avLst/>
@@ -4926,13 +5894,6 @@
             <a:srgbClr val="F3E5F5"/>
           </a:solidFill>
           <a:ln/>
-          <a:effectLst>
-            <a:outerShdw sx="100000" sy="100000" kx="0" ky="0" algn="bl" rotWithShape="0" blurRad="50800" dist="25400" dir="8100000">
-              <a:srgbClr val="000000">
-                <a:alpha val="12000"/>
-              </a:srgbClr>
-            </a:outerShdw>
-          </a:effectLst>
         </p:spPr>
       </p:sp>
       <p:sp>
@@ -4943,8 +5904,8 @@
         </p:nvSpPr>
         <p:spPr>
           <a:xfrm>
-            <a:off x="457200" y="2560320"/>
-            <a:ext cx="45720" cy="521208"/>
+            <a:off x="457200" y="2377440"/>
+            <a:ext cx="45720" cy="475488"/>
           </a:xfrm>
           <a:prstGeom prst="rect">
             <a:avLst/>
@@ -4963,8 +5924,8 @@
         </p:nvSpPr>
         <p:spPr>
           <a:xfrm>
-            <a:off x="685800" y="2560320"/>
-            <a:ext cx="7818120" cy="521208"/>
+            <a:off x="640080" y="2377440"/>
+            <a:ext cx="7863840" cy="475488"/>
           </a:xfrm>
           <a:prstGeom prst="rect">
             <a:avLst/>
@@ -4980,7 +5941,7 @@
               <a:buNone/>
             </a:pPr>
             <a:r>
-              <a:rPr lang="en-US" sz="1200" dirty="0">
+              <a:rPr lang="en-US" sz="1100" dirty="0">
                 <a:solidFill>
                   <a:srgbClr val="1A1A2E"/>
                 </a:solidFill>
@@ -4988,9 +5949,9 @@
                 <a:ea typeface="Calibri" pitchFamily="34" charset="-122"/>
                 <a:cs typeface="Calibri" pitchFamily="34" charset="-120"/>
               </a:rPr>
-              <a:t>Inclure les FK avec la table référencée + comportement (CASCADE/RESTRICT)</a:t>
-            </a:r>
-            <a:endParaRPr lang="en-US" sz="1200" dirty="0"/>
+              <a:t>SYSTEME : rectangle = frontiere du systeme (SwissSound)</a:t>
+            </a:r>
+            <a:endParaRPr lang="en-US" sz="1100" dirty="0"/>
           </a:p>
         </p:txBody>
       </p:sp>
@@ -5002,8 +5963,8 @@
         </p:nvSpPr>
         <p:spPr>
           <a:xfrm>
-            <a:off x="457200" y="3108960"/>
-            <a:ext cx="8229600" cy="521208"/>
+            <a:off x="457200" y="2880360"/>
+            <a:ext cx="8229600" cy="475488"/>
           </a:xfrm>
           <a:prstGeom prst="rect">
             <a:avLst/>
@@ -5012,13 +5973,6 @@
             <a:srgbClr val="FFFFFF"/>
           </a:solidFill>
           <a:ln/>
-          <a:effectLst>
-            <a:outerShdw sx="100000" sy="100000" kx="0" ky="0" algn="bl" rotWithShape="0" blurRad="50800" dist="25400" dir="8100000">
-              <a:srgbClr val="000000">
-                <a:alpha val="12000"/>
-              </a:srgbClr>
-            </a:outerShdw>
-          </a:effectLst>
         </p:spPr>
       </p:sp>
       <p:sp>
@@ -5029,8 +5983,8 @@
         </p:nvSpPr>
         <p:spPr>
           <a:xfrm>
-            <a:off x="457200" y="3108960"/>
-            <a:ext cx="45720" cy="521208"/>
+            <a:off x="457200" y="2880360"/>
+            <a:ext cx="45720" cy="475488"/>
           </a:xfrm>
           <a:prstGeom prst="rect">
             <a:avLst/>
@@ -5049,8 +6003,8 @@
         </p:nvSpPr>
         <p:spPr>
           <a:xfrm>
-            <a:off x="685800" y="3108960"/>
-            <a:ext cx="7818120" cy="521208"/>
+            <a:off x="640080" y="2880360"/>
+            <a:ext cx="7863840" cy="475488"/>
           </a:xfrm>
           <a:prstGeom prst="rect">
             <a:avLst/>
@@ -5066,7 +6020,7 @@
               <a:buNone/>
             </a:pPr>
             <a:r>
-              <a:rPr lang="en-US" sz="1200" dirty="0">
+              <a:rPr lang="en-US" sz="1100" dirty="0">
                 <a:solidFill>
                   <a:srgbClr val="1A1A2E"/>
                 </a:solidFill>
@@ -5074,9 +6028,9 @@
                 <a:ea typeface="Calibri" pitchFamily="34" charset="-122"/>
                 <a:cs typeface="Calibri" pitchFamily="34" charset="-120"/>
               </a:rPr>
-              <a:t>Générer automatiquement : SHOW CREATE TABLE → copier-coller + annoter</a:t>
-            </a:r>
-            <a:endParaRPr lang="en-US" sz="1200" dirty="0"/>
+              <a:t>Relations : ligne simple = acteur utilise un cas</a:t>
+            </a:r>
+            <a:endParaRPr lang="en-US" sz="1100" dirty="0"/>
           </a:p>
         </p:txBody>
       </p:sp>
@@ -5088,8 +6042,8 @@
         </p:nvSpPr>
         <p:spPr>
           <a:xfrm>
-            <a:off x="457200" y="3657600"/>
-            <a:ext cx="8229600" cy="521208"/>
+            <a:off x="457200" y="3383280"/>
+            <a:ext cx="8229600" cy="475488"/>
           </a:xfrm>
           <a:prstGeom prst="rect">
             <a:avLst/>
@@ -5098,13 +6052,6 @@
             <a:srgbClr val="F3E5F5"/>
           </a:solidFill>
           <a:ln/>
-          <a:effectLst>
-            <a:outerShdw sx="100000" sy="100000" kx="0" ky="0" algn="bl" rotWithShape="0" blurRad="50800" dist="25400" dir="8100000">
-              <a:srgbClr val="000000">
-                <a:alpha val="12000"/>
-              </a:srgbClr>
-            </a:outerShdw>
-          </a:effectLst>
         </p:spPr>
       </p:sp>
       <p:sp>
@@ -5115,8 +6062,8 @@
         </p:nvSpPr>
         <p:spPr>
           <a:xfrm>
-            <a:off x="457200" y="3657600"/>
-            <a:ext cx="45720" cy="521208"/>
+            <a:off x="457200" y="3383280"/>
+            <a:ext cx="45720" cy="475488"/>
           </a:xfrm>
           <a:prstGeom prst="rect">
             <a:avLst/>
@@ -5135,8 +6082,8 @@
         </p:nvSpPr>
         <p:spPr>
           <a:xfrm>
-            <a:off x="685800" y="3657600"/>
-            <a:ext cx="7818120" cy="521208"/>
+            <a:off x="640080" y="3383280"/>
+            <a:ext cx="7863840" cy="475488"/>
           </a:xfrm>
           <a:prstGeom prst="rect">
             <a:avLst/>
@@ -5152,7 +6099,7 @@
               <a:buNone/>
             </a:pPr>
             <a:r>
-              <a:rPr lang="en-US" sz="1200" dirty="0">
+              <a:rPr lang="en-US" sz="1100" dirty="0">
                 <a:solidFill>
                   <a:srgbClr val="1A1A2E"/>
                 </a:solidFill>
@@ -5160,9 +6107,9 @@
                 <a:ea typeface="Calibri" pitchFamily="34" charset="-122"/>
                 <a:cs typeface="Calibri" pitchFamily="34" charset="-120"/>
               </a:rPr>
-              <a:t>Ajouter les index avec justification</a:t>
-            </a:r>
-            <a:endParaRPr lang="en-US" sz="1200" dirty="0"/>
+              <a:t>Include : un cas NECESSITE un autre (Facturer include Verifier session)</a:t>
+            </a:r>
+            <a:endParaRPr lang="en-US" sz="1100" dirty="0"/>
           </a:p>
         </p:txBody>
       </p:sp>
@@ -5174,8 +6121,8 @@
         </p:nvSpPr>
         <p:spPr>
           <a:xfrm>
-            <a:off x="457200" y="4206240"/>
-            <a:ext cx="8229600" cy="521208"/>
+            <a:off x="457200" y="3886200"/>
+            <a:ext cx="8229600" cy="475488"/>
           </a:xfrm>
           <a:prstGeom prst="rect">
             <a:avLst/>
@@ -5184,13 +6131,6 @@
             <a:srgbClr val="FFFFFF"/>
           </a:solidFill>
           <a:ln/>
-          <a:effectLst>
-            <a:outerShdw sx="100000" sy="100000" kx="0" ky="0" algn="bl" rotWithShape="0" blurRad="50800" dist="25400" dir="8100000">
-              <a:srgbClr val="000000">
-                <a:alpha val="12000"/>
-              </a:srgbClr>
-            </a:outerShdw>
-          </a:effectLst>
         </p:spPr>
       </p:sp>
       <p:sp>
@@ -5201,8 +6141,8 @@
         </p:nvSpPr>
         <p:spPr>
           <a:xfrm>
-            <a:off x="457200" y="4206240"/>
-            <a:ext cx="45720" cy="521208"/>
+            <a:off x="457200" y="3886200"/>
+            <a:ext cx="45720" cy="475488"/>
           </a:xfrm>
           <a:prstGeom prst="rect">
             <a:avLst/>
@@ -5221,8 +6161,8 @@
         </p:nvSpPr>
         <p:spPr>
           <a:xfrm>
-            <a:off x="685800" y="4206240"/>
-            <a:ext cx="7818120" cy="521208"/>
+            <a:off x="640080" y="3886200"/>
+            <a:ext cx="7863840" cy="475488"/>
           </a:xfrm>
           <a:prstGeom prst="rect">
             <a:avLst/>
@@ -5238,7 +6178,7 @@
               <a:buNone/>
             </a:pPr>
             <a:r>
-              <a:rPr lang="en-US" sz="1200" dirty="0">
+              <a:rPr lang="en-US" sz="1100" dirty="0">
                 <a:solidFill>
                   <a:srgbClr val="1A1A2E"/>
                 </a:solidFill>
@@ -5246,9 +6186,9 @@
                 <a:ea typeface="Calibri" pitchFamily="34" charset="-122"/>
                 <a:cs typeface="Calibri" pitchFamily="34" charset="-120"/>
               </a:rPr>
-              <a:t>Ce dictionnaire technique accompagne les DFD et flowcharts</a:t>
-            </a:r>
-            <a:endParaRPr lang="en-US" sz="1200" dirty="0"/>
+              <a:t>Extend : un cas est OPTIONNEL (Envoyer rappel extend Facturer)</a:t>
+            </a:r>
+            <a:endParaRPr lang="en-US" sz="1100" dirty="0"/>
           </a:p>
         </p:txBody>
       </p:sp>
@@ -5313,7 +6253,7 @@
         <p:spPr>
           <a:xfrm>
             <a:off x="457200" y="182880"/>
-            <a:ext cx="8229600" cy="594360"/>
+            <a:ext cx="8229600" cy="548640"/>
           </a:xfrm>
           <a:prstGeom prst="rect">
             <a:avLst/>
@@ -5329,7 +6269,7 @@
               <a:buNone/>
             </a:pPr>
             <a:r>
-              <a:rPr lang="en-US" sz="2400" b="1" dirty="0">
+              <a:rPr lang="en-US" sz="2200" b="1" dirty="0">
                 <a:solidFill>
                   <a:srgbClr val="4A0072"/>
                 </a:solidFill>
@@ -5337,9 +6277,9 @@
                 <a:ea typeface="Trebuchet MS" pitchFamily="34" charset="-122"/>
                 <a:cs typeface="Trebuchet MS" pitchFamily="34" charset="-120"/>
               </a:rPr>
-              <a:t>Exercice Module 19</a:t>
-            </a:r>
-            <a:endParaRPr lang="en-US" sz="2400" dirty="0"/>
+              <a:t>Cas d'utilisation SwissSound — exemple</a:t>
+            </a:r>
+            <a:endParaRPr lang="en-US" sz="2200" dirty="0"/>
           </a:p>
         </p:txBody>
       </p:sp>
@@ -5351,8 +6291,8 @@
         </p:nvSpPr>
         <p:spPr>
           <a:xfrm>
-            <a:off x="457200" y="914400"/>
-            <a:ext cx="8229600" cy="521208"/>
+            <a:off x="457200" y="868680"/>
+            <a:ext cx="8229600" cy="475488"/>
           </a:xfrm>
           <a:prstGeom prst="rect">
             <a:avLst/>
@@ -5361,13 +6301,6 @@
             <a:srgbClr val="FFFFFF"/>
           </a:solidFill>
           <a:ln/>
-          <a:effectLst>
-            <a:outerShdw sx="100000" sy="100000" kx="0" ky="0" algn="bl" rotWithShape="0" blurRad="50800" dist="25400" dir="8100000">
-              <a:srgbClr val="000000">
-                <a:alpha val="12000"/>
-              </a:srgbClr>
-            </a:outerShdw>
-          </a:effectLst>
         </p:spPr>
       </p:sp>
       <p:sp>
@@ -5378,8 +6311,8 @@
         </p:nvSpPr>
         <p:spPr>
           <a:xfrm>
-            <a:off x="457200" y="914400"/>
-            <a:ext cx="45720" cy="521208"/>
+            <a:off x="457200" y="868680"/>
+            <a:ext cx="45720" cy="475488"/>
           </a:xfrm>
           <a:prstGeom prst="rect">
             <a:avLst/>
@@ -5398,8 +6331,8 @@
         </p:nvSpPr>
         <p:spPr>
           <a:xfrm>
-            <a:off x="685800" y="914400"/>
-            <a:ext cx="7818120" cy="521208"/>
+            <a:off x="640080" y="868680"/>
+            <a:ext cx="7863840" cy="475488"/>
           </a:xfrm>
           <a:prstGeom prst="rect">
             <a:avLst/>
@@ -5415,7 +6348,7 @@
               <a:buNone/>
             </a:pPr>
             <a:r>
-              <a:rPr lang="en-US" sz="1200" dirty="0">
+              <a:rPr lang="en-US" sz="1100" dirty="0">
                 <a:solidFill>
                   <a:srgbClr val="1A1A2E"/>
                 </a:solidFill>
@@ -5423,9 +6356,9 @@
                 <a:ea typeface="Calibri" pitchFamily="34" charset="-122"/>
                 <a:cs typeface="Calibri" pitchFamily="34" charset="-120"/>
               </a:rPr>
-              <a:t>Créer le DFD niveau 0 de SwissSound (Draw.io)</a:t>
-            </a:r>
-            <a:endParaRPr lang="en-US" sz="1200" dirty="0"/>
+              <a:t>Acteurs : Artiste, Ingenieur, Reception, Comptable, Admin</a:t>
+            </a:r>
+            <a:endParaRPr lang="en-US" sz="1100" dirty="0"/>
           </a:p>
         </p:txBody>
       </p:sp>
@@ -5437,8 +6370,8 @@
         </p:nvSpPr>
         <p:spPr>
           <a:xfrm>
-            <a:off x="457200" y="1463040"/>
-            <a:ext cx="8229600" cy="521208"/>
+            <a:off x="457200" y="1371600"/>
+            <a:ext cx="8229600" cy="475488"/>
           </a:xfrm>
           <a:prstGeom prst="rect">
             <a:avLst/>
@@ -5447,13 +6380,6 @@
             <a:srgbClr val="F3E5F5"/>
           </a:solidFill>
           <a:ln/>
-          <a:effectLst>
-            <a:outerShdw sx="100000" sy="100000" kx="0" ky="0" algn="bl" rotWithShape="0" blurRad="50800" dist="25400" dir="8100000">
-              <a:srgbClr val="000000">
-                <a:alpha val="12000"/>
-              </a:srgbClr>
-            </a:outerShdw>
-          </a:effectLst>
         </p:spPr>
       </p:sp>
       <p:sp>
@@ -5464,8 +6390,8 @@
         </p:nvSpPr>
         <p:spPr>
           <a:xfrm>
-            <a:off x="457200" y="1463040"/>
-            <a:ext cx="45720" cy="521208"/>
+            <a:off x="457200" y="1371600"/>
+            <a:ext cx="45720" cy="475488"/>
           </a:xfrm>
           <a:prstGeom prst="rect">
             <a:avLst/>
@@ -5484,8 +6410,8 @@
         </p:nvSpPr>
         <p:spPr>
           <a:xfrm>
-            <a:off x="685800" y="1463040"/>
-            <a:ext cx="7818120" cy="521208"/>
+            <a:off x="640080" y="1371600"/>
+            <a:ext cx="7863840" cy="475488"/>
           </a:xfrm>
           <a:prstGeom prst="rect">
             <a:avLst/>
@@ -5501,7 +6427,7 @@
               <a:buNone/>
             </a:pPr>
             <a:r>
-              <a:rPr lang="en-US" sz="1200" dirty="0">
+              <a:rPr lang="en-US" sz="1100" dirty="0">
                 <a:solidFill>
                   <a:srgbClr val="1A1A2E"/>
                 </a:solidFill>
@@ -5509,9 +6435,9 @@
                 <a:ea typeface="Calibri" pitchFamily="34" charset="-122"/>
                 <a:cs typeface="Calibri" pitchFamily="34" charset="-120"/>
               </a:rPr>
-              <a:t>Créer le DFD niveau 1 (4-5 sous-processus)</a:t>
-            </a:r>
-            <a:endParaRPr lang="en-US" sz="1200" dirty="0"/>
+              <a:t>Cas d'utilisation du systeme SwissSound :</a:t>
+            </a:r>
+            <a:endParaRPr lang="en-US" sz="1100" dirty="0"/>
           </a:p>
         </p:txBody>
       </p:sp>
@@ -5523,8 +6449,8 @@
         </p:nvSpPr>
         <p:spPr>
           <a:xfrm>
-            <a:off x="457200" y="2011680"/>
-            <a:ext cx="8229600" cy="521208"/>
+            <a:off x="457200" y="1874520"/>
+            <a:ext cx="8229600" cy="475488"/>
           </a:xfrm>
           <a:prstGeom prst="rect">
             <a:avLst/>
@@ -5533,13 +6459,6 @@
             <a:srgbClr val="FFFFFF"/>
           </a:solidFill>
           <a:ln/>
-          <a:effectLst>
-            <a:outerShdw sx="100000" sy="100000" kx="0" ky="0" algn="bl" rotWithShape="0" blurRad="50800" dist="25400" dir="8100000">
-              <a:srgbClr val="000000">
-                <a:alpha val="12000"/>
-              </a:srgbClr>
-            </a:outerShdw>
-          </a:effectLst>
         </p:spPr>
       </p:sp>
       <p:sp>
@@ -5550,8 +6469,8 @@
         </p:nvSpPr>
         <p:spPr>
           <a:xfrm>
-            <a:off x="457200" y="2011680"/>
-            <a:ext cx="45720" cy="521208"/>
+            <a:off x="457200" y="1874520"/>
+            <a:ext cx="45720" cy="475488"/>
           </a:xfrm>
           <a:prstGeom prst="rect">
             <a:avLst/>
@@ -5570,8 +6489,8 @@
         </p:nvSpPr>
         <p:spPr>
           <a:xfrm>
-            <a:off x="685800" y="2011680"/>
-            <a:ext cx="7818120" cy="521208"/>
+            <a:off x="640080" y="1874520"/>
+            <a:ext cx="7863840" cy="475488"/>
           </a:xfrm>
           <a:prstGeom prst="rect">
             <a:avLst/>
@@ -5587,7 +6506,7 @@
               <a:buNone/>
             </a:pPr>
             <a:r>
-              <a:rPr lang="en-US" sz="1200" dirty="0">
+              <a:rPr lang="en-US" sz="1100" dirty="0">
                 <a:solidFill>
                   <a:srgbClr val="1A1A2E"/>
                 </a:solidFill>
@@ -5595,9 +6514,9 @@
                 <a:ea typeface="Calibri" pitchFamily="34" charset="-122"/>
                 <a:cs typeface="Calibri" pitchFamily="34" charset="-120"/>
               </a:rPr>
-              <a:t>Créer le DFD niveau 2 pour le processus 'Facturation'</a:t>
-            </a:r>
-            <a:endParaRPr lang="en-US" sz="1200" dirty="0"/>
+              <a:t>  Artiste : Consulter planning, Voir factures</a:t>
+            </a:r>
+            <a:endParaRPr lang="en-US" sz="1100" dirty="0"/>
           </a:p>
         </p:txBody>
       </p:sp>
@@ -5609,8 +6528,8 @@
         </p:nvSpPr>
         <p:spPr>
           <a:xfrm>
-            <a:off x="457200" y="2560320"/>
-            <a:ext cx="8229600" cy="521208"/>
+            <a:off x="457200" y="2377440"/>
+            <a:ext cx="8229600" cy="475488"/>
           </a:xfrm>
           <a:prstGeom prst="rect">
             <a:avLst/>
@@ -5619,13 +6538,6 @@
             <a:srgbClr val="F3E5F5"/>
           </a:solidFill>
           <a:ln/>
-          <a:effectLst>
-            <a:outerShdw sx="100000" sy="100000" kx="0" ky="0" algn="bl" rotWithShape="0" blurRad="50800" dist="25400" dir="8100000">
-              <a:srgbClr val="000000">
-                <a:alpha val="12000"/>
-              </a:srgbClr>
-            </a:outerShdw>
-          </a:effectLst>
         </p:spPr>
       </p:sp>
       <p:sp>
@@ -5636,8 +6548,8 @@
         </p:nvSpPr>
         <p:spPr>
           <a:xfrm>
-            <a:off x="457200" y="2560320"/>
-            <a:ext cx="45720" cy="521208"/>
+            <a:off x="457200" y="2377440"/>
+            <a:ext cx="45720" cy="475488"/>
           </a:xfrm>
           <a:prstGeom prst="rect">
             <a:avLst/>
@@ -5656,8 +6568,8 @@
         </p:nvSpPr>
         <p:spPr>
           <a:xfrm>
-            <a:off x="685800" y="2560320"/>
-            <a:ext cx="7818120" cy="521208"/>
+            <a:off x="640080" y="2377440"/>
+            <a:ext cx="7863840" cy="475488"/>
           </a:xfrm>
           <a:prstGeom prst="rect">
             <a:avLst/>
@@ -5673,7 +6585,7 @@
               <a:buNone/>
             </a:pPr>
             <a:r>
-              <a:rPr lang="en-US" sz="1200" dirty="0">
+              <a:rPr lang="en-US" sz="1100" dirty="0">
                 <a:solidFill>
                   <a:srgbClr val="1A1A2E"/>
                 </a:solidFill>
@@ -5681,9 +6593,9 @@
                 <a:ea typeface="Calibri" pitchFamily="34" charset="-122"/>
                 <a:cs typeface="Calibri" pitchFamily="34" charset="-120"/>
               </a:rPr>
-              <a:t>Créer le flowchart 'Réserver une session' avec cas d'erreur</a:t>
-            </a:r>
-            <a:endParaRPr lang="en-US" sz="1200" dirty="0"/>
+              <a:t>  Reception : Ajouter artiste, Reserver session, Modifier session</a:t>
+            </a:r>
+            <a:endParaRPr lang="en-US" sz="1100" dirty="0"/>
           </a:p>
         </p:txBody>
       </p:sp>
@@ -5695,8 +6607,8 @@
         </p:nvSpPr>
         <p:spPr>
           <a:xfrm>
-            <a:off x="457200" y="3108960"/>
-            <a:ext cx="8229600" cy="521208"/>
+            <a:off x="457200" y="2880360"/>
+            <a:ext cx="8229600" cy="475488"/>
           </a:xfrm>
           <a:prstGeom prst="rect">
             <a:avLst/>
@@ -5705,13 +6617,6 @@
             <a:srgbClr val="FFFFFF"/>
           </a:solidFill>
           <a:ln/>
-          <a:effectLst>
-            <a:outerShdw sx="100000" sy="100000" kx="0" ky="0" algn="bl" rotWithShape="0" blurRad="50800" dist="25400" dir="8100000">
-              <a:srgbClr val="000000">
-                <a:alpha val="12000"/>
-              </a:srgbClr>
-            </a:outerShdw>
-          </a:effectLst>
         </p:spPr>
       </p:sp>
       <p:sp>
@@ -5722,8 +6627,8 @@
         </p:nvSpPr>
         <p:spPr>
           <a:xfrm>
-            <a:off x="457200" y="3108960"/>
-            <a:ext cx="45720" cy="521208"/>
+            <a:off x="457200" y="2880360"/>
+            <a:ext cx="45720" cy="475488"/>
           </a:xfrm>
           <a:prstGeom prst="rect">
             <a:avLst/>
@@ -5742,8 +6647,8 @@
         </p:nvSpPr>
         <p:spPr>
           <a:xfrm>
-            <a:off x="685800" y="3108960"/>
-            <a:ext cx="7818120" cy="521208"/>
+            <a:off x="640080" y="2880360"/>
+            <a:ext cx="7863840" cy="475488"/>
           </a:xfrm>
           <a:prstGeom prst="rect">
             <a:avLst/>
@@ -5759,7 +6664,7 @@
               <a:buNone/>
             </a:pPr>
             <a:r>
-              <a:rPr lang="en-US" sz="1200" dirty="0">
+              <a:rPr lang="en-US" sz="1100" dirty="0">
                 <a:solidFill>
                   <a:srgbClr val="1A1A2E"/>
                 </a:solidFill>
@@ -5767,9 +6672,9 @@
                 <a:ea typeface="Calibri" pitchFamily="34" charset="-122"/>
                 <a:cs typeface="Calibri" pitchFamily="34" charset="-120"/>
               </a:rPr>
-              <a:t>Rédiger le dictionnaire technique des 9 tables</a:t>
-            </a:r>
-            <a:endParaRPr lang="en-US" sz="1200" dirty="0"/>
+              <a:t>  Ingenieur : Consulter sessions, Marquer session terminee</a:t>
+            </a:r>
+            <a:endParaRPr lang="en-US" sz="1100" dirty="0"/>
           </a:p>
         </p:txBody>
       </p:sp>
@@ -5781,8 +6686,8 @@
         </p:nvSpPr>
         <p:spPr>
           <a:xfrm>
-            <a:off x="457200" y="3657600"/>
-            <a:ext cx="8229600" cy="521208"/>
+            <a:off x="457200" y="3383280"/>
+            <a:ext cx="8229600" cy="475488"/>
           </a:xfrm>
           <a:prstGeom prst="rect">
             <a:avLst/>
@@ -5791,13 +6696,6 @@
             <a:srgbClr val="F3E5F5"/>
           </a:solidFill>
           <a:ln/>
-          <a:effectLst>
-            <a:outerShdw sx="100000" sy="100000" kx="0" ky="0" algn="bl" rotWithShape="0" blurRad="50800" dist="25400" dir="8100000">
-              <a:srgbClr val="000000">
-                <a:alpha val="12000"/>
-              </a:srgbClr>
-            </a:outerShdw>
-          </a:effectLst>
         </p:spPr>
       </p:sp>
       <p:sp>
@@ -5808,8 +6706,8 @@
         </p:nvSpPr>
         <p:spPr>
           <a:xfrm>
-            <a:off x="457200" y="3657600"/>
-            <a:ext cx="45720" cy="521208"/>
+            <a:off x="457200" y="3383280"/>
+            <a:ext cx="45720" cy="475488"/>
           </a:xfrm>
           <a:prstGeom prst="rect">
             <a:avLst/>
@@ -5828,8 +6726,8 @@
         </p:nvSpPr>
         <p:spPr>
           <a:xfrm>
-            <a:off x="685800" y="3657600"/>
-            <a:ext cx="7818120" cy="521208"/>
+            <a:off x="640080" y="3383280"/>
+            <a:ext cx="7863840" cy="475488"/>
           </a:xfrm>
           <a:prstGeom prst="rect">
             <a:avLst/>
@@ -5845,7 +6743,7 @@
               <a:buNone/>
             </a:pPr>
             <a:r>
-              <a:rPr lang="en-US" sz="1200" dirty="0">
+              <a:rPr lang="en-US" sz="1100" dirty="0">
                 <a:solidFill>
                   <a:srgbClr val="1A1A2E"/>
                 </a:solidFill>
@@ -5853,9 +6751,88 @@
                 <a:ea typeface="Calibri" pitchFamily="34" charset="-122"/>
                 <a:cs typeface="Calibri" pitchFamily="34" charset="-120"/>
               </a:rPr>
-              <a:t>DÉFI : documenter l'architecture technique (serveur, clients, réseau, backup)</a:t>
-            </a:r>
-            <a:endParaRPr lang="en-US" sz="1200" dirty="0"/>
+              <a:t>  Comptable : Generer facture, Suivre paiements, Exporter CA</a:t>
+            </a:r>
+            <a:endParaRPr lang="en-US" sz="1100" dirty="0"/>
+          </a:p>
+        </p:txBody>
+      </p:sp>
+      <p:sp>
+        <p:nvSpPr>
+          <p:cNvPr id="22" name="Shape 20"/>
+          <p:cNvSpPr/>
+          <p:nvPr/>
+        </p:nvSpPr>
+        <p:spPr>
+          <a:xfrm>
+            <a:off x="457200" y="3886200"/>
+            <a:ext cx="8229600" cy="475488"/>
+          </a:xfrm>
+          <a:prstGeom prst="rect">
+            <a:avLst/>
+          </a:prstGeom>
+          <a:solidFill>
+            <a:srgbClr val="FFFFFF"/>
+          </a:solidFill>
+          <a:ln/>
+        </p:spPr>
+      </p:sp>
+      <p:sp>
+        <p:nvSpPr>
+          <p:cNvPr id="23" name="Shape 21"/>
+          <p:cNvSpPr/>
+          <p:nvPr/>
+        </p:nvSpPr>
+        <p:spPr>
+          <a:xfrm>
+            <a:off x="457200" y="3886200"/>
+            <a:ext cx="45720" cy="475488"/>
+          </a:xfrm>
+          <a:prstGeom prst="rect">
+            <a:avLst/>
+          </a:prstGeom>
+          <a:solidFill>
+            <a:srgbClr val="6A1B9A"/>
+          </a:solidFill>
+          <a:ln/>
+        </p:spPr>
+      </p:sp>
+      <p:sp>
+        <p:nvSpPr>
+          <p:cNvPr id="24" name="Text 22"/>
+          <p:cNvSpPr/>
+          <p:nvPr/>
+        </p:nvSpPr>
+        <p:spPr>
+          <a:xfrm>
+            <a:off x="640080" y="3886200"/>
+            <a:ext cx="7863840" cy="475488"/>
+          </a:xfrm>
+          <a:prstGeom prst="rect">
+            <a:avLst/>
+          </a:prstGeom>
+          <a:noFill/>
+          <a:ln/>
+        </p:spPr>
+        <p:txBody>
+          <a:bodyPr wrap="square" lIns="0" tIns="0" rIns="0" bIns="0" rtlCol="0" anchor="ctr"/>
+          <a:lstStyle/>
+          <a:p>
+            <a:pPr indent="0" marL="0">
+              <a:buNone/>
+            </a:pPr>
+            <a:r>
+              <a:rPr lang="en-US" sz="1100" dirty="0">
+                <a:solidFill>
+                  <a:srgbClr val="1A1A2E"/>
+                </a:solidFill>
+                <a:latin typeface="Calibri" pitchFamily="34" charset="0"/>
+                <a:ea typeface="Calibri" pitchFamily="34" charset="-122"/>
+                <a:cs typeface="Calibri" pitchFamily="34" charset="-120"/>
+              </a:rPr>
+              <a:t>  Admin : Gerer utilisateurs, Sauvegarder BDD, Configurer salles</a:t>
+            </a:r>
+            <a:endParaRPr lang="en-US" sz="1100" dirty="0"/>
           </a:p>
         </p:txBody>
       </p:sp>
@@ -5873,7 +6850,7 @@
     <p:bg>
       <p:bgPr>
         <a:solidFill>
-          <a:srgbClr val="4A0072"/>
+          <a:srgbClr val="F5F7FA"/>
         </a:solidFill>
       </p:bgPr>
     </p:bg>
@@ -5893,14 +6870,34 @@
       </p:grpSpPr>
       <p:sp>
         <p:nvSpPr>
-          <p:cNvPr id="2" name="Text 0"/>
-          <p:cNvSpPr/>
-          <p:nvPr/>
-        </p:nvSpPr>
-        <p:spPr>
-          <a:xfrm>
-            <a:off x="3840480" y="457200"/>
-            <a:ext cx="1463040" cy="1097280"/>
+          <p:cNvPr id="2" name="Shape 0"/>
+          <p:cNvSpPr/>
+          <p:nvPr/>
+        </p:nvSpPr>
+        <p:spPr>
+          <a:xfrm>
+            <a:off x="0" y="0"/>
+            <a:ext cx="9144000" cy="54864"/>
+          </a:xfrm>
+          <a:prstGeom prst="rect">
+            <a:avLst/>
+          </a:prstGeom>
+          <a:solidFill>
+            <a:srgbClr val="6A1B9A"/>
+          </a:solidFill>
+          <a:ln/>
+        </p:spPr>
+      </p:sp>
+      <p:sp>
+        <p:nvSpPr>
+          <p:cNvPr id="3" name="Text 1"/>
+          <p:cNvSpPr/>
+          <p:nvPr/>
+        </p:nvSpPr>
+        <p:spPr>
+          <a:xfrm>
+            <a:off x="457200" y="182880"/>
+            <a:ext cx="8229600" cy="548640"/>
           </a:xfrm>
           <a:prstGeom prst="rect">
             <a:avLst/>
@@ -5912,70 +6909,74 @@
           <a:bodyPr wrap="square" lIns="0" tIns="0" rIns="0" bIns="0" rtlCol="0" anchor="ctr"/>
           <a:lstStyle/>
           <a:p>
-            <a:pPr algn="ctr" indent="0" marL="0">
+            <a:pPr indent="0" marL="0">
               <a:buNone/>
             </a:pPr>
             <a:r>
-              <a:rPr lang="en-US" sz="6000" dirty="0">
+              <a:rPr lang="en-US" sz="2200" b="1" dirty="0">
                 <a:solidFill>
-                  <a:srgbClr val="000000"/>
-                </a:solidFill>
-              </a:rPr>
-              <a:t>🎮</a:t>
-            </a:r>
-            <a:endParaRPr lang="en-US" sz="6000" dirty="0"/>
-          </a:p>
-        </p:txBody>
-      </p:sp>
-      <p:sp>
-        <p:nvSpPr>
-          <p:cNvPr id="3" name="Text 1"/>
-          <p:cNvSpPr/>
-          <p:nvPr/>
-        </p:nvSpPr>
-        <p:spPr>
-          <a:xfrm>
-            <a:off x="457200" y="1645920"/>
-            <a:ext cx="8229600" cy="548640"/>
-          </a:xfrm>
-          <a:prstGeom prst="rect">
-            <a:avLst/>
-          </a:prstGeom>
-          <a:noFill/>
-          <a:ln/>
-        </p:spPr>
-        <p:txBody>
-          <a:bodyPr wrap="square" lIns="0" tIns="0" rIns="0" bIns="0" rtlCol="0" anchor="ctr"/>
-          <a:lstStyle/>
-          <a:p>
-            <a:pPr algn="ctr" indent="0" marL="0">
-              <a:buNone/>
-            </a:pPr>
-            <a:r>
-              <a:rPr lang="en-US" sz="2600" b="1" dirty="0">
-                <a:solidFill>
-                  <a:srgbClr val="FFFFFF"/>
+                  <a:srgbClr val="4A0072"/>
                 </a:solidFill>
                 <a:latin typeface="Trebuchet MS" pitchFamily="34" charset="0"/>
                 <a:ea typeface="Trebuchet MS" pitchFamily="34" charset="-122"/>
                 <a:cs typeface="Trebuchet MS" pitchFamily="34" charset="-120"/>
               </a:rPr>
-              <a:t>Mini-jeu : Le Cartographe</a:t>
-            </a:r>
-            <a:endParaRPr lang="en-US" sz="2600" dirty="0"/>
-          </a:p>
-        </p:txBody>
-      </p:sp>
-      <p:sp>
-        <p:nvSpPr>
-          <p:cNvPr id="4" name="Text 2"/>
-          <p:cNvSpPr/>
-          <p:nvPr/>
-        </p:nvSpPr>
-        <p:spPr>
-          <a:xfrm>
-            <a:off x="1371600" y="2286000"/>
-            <a:ext cx="6400800" cy="731520"/>
+              <a:t>Dictionnaire de donnees technique (final)</a:t>
+            </a:r>
+            <a:endParaRPr lang="en-US" sz="2200" dirty="0"/>
+          </a:p>
+        </p:txBody>
+      </p:sp>
+      <p:sp>
+        <p:nvSpPr>
+          <p:cNvPr id="4" name="Shape 2"/>
+          <p:cNvSpPr/>
+          <p:nvPr/>
+        </p:nvSpPr>
+        <p:spPr>
+          <a:xfrm>
+            <a:off x="457200" y="868680"/>
+            <a:ext cx="8229600" cy="475488"/>
+          </a:xfrm>
+          <a:prstGeom prst="rect">
+            <a:avLst/>
+          </a:prstGeom>
+          <a:solidFill>
+            <a:srgbClr val="FFFFFF"/>
+          </a:solidFill>
+          <a:ln/>
+        </p:spPr>
+      </p:sp>
+      <p:sp>
+        <p:nvSpPr>
+          <p:cNvPr id="5" name="Shape 3"/>
+          <p:cNvSpPr/>
+          <p:nvPr/>
+        </p:nvSpPr>
+        <p:spPr>
+          <a:xfrm>
+            <a:off x="457200" y="868680"/>
+            <a:ext cx="45720" cy="475488"/>
+          </a:xfrm>
+          <a:prstGeom prst="rect">
+            <a:avLst/>
+          </a:prstGeom>
+          <a:solidFill>
+            <a:srgbClr val="6A1B9A"/>
+          </a:solidFill>
+          <a:ln/>
+        </p:spPr>
+      </p:sp>
+      <p:sp>
+        <p:nvSpPr>
+          <p:cNvPr id="6" name="Text 4"/>
+          <p:cNvSpPr/>
+          <p:nvPr/>
+        </p:nvSpPr>
+        <p:spPr>
+          <a:xfrm>
+            <a:off x="640080" y="868680"/>
+            <a:ext cx="7863840" cy="475488"/>
           </a:xfrm>
           <a:prstGeom prst="rect">
             <a:avLst/>
@@ -5987,54 +6988,74 @@
           <a:bodyPr wrap="square" lIns="0" tIns="0" rIns="0" bIns="0" rtlCol="0" anchor="ctr"/>
           <a:lstStyle/>
           <a:p>
-            <a:pPr algn="ctr" indent="0" marL="0">
+            <a:pPr indent="0" marL="0">
               <a:buNone/>
             </a:pPr>
             <a:r>
-              <a:rPr lang="en-US" sz="1400" dirty="0">
+              <a:rPr lang="en-US" sz="1100" dirty="0">
                 <a:solidFill>
-                  <a:srgbClr val="CCCCCC"/>
+                  <a:srgbClr val="1A1A2E"/>
                 </a:solidFill>
                 <a:latin typeface="Calibri" pitchFamily="34" charset="0"/>
                 <a:ea typeface="Calibri" pitchFamily="34" charset="-122"/>
                 <a:cs typeface="Calibri" pitchFamily="34" charset="-120"/>
               </a:rPr>
-              <a:t>Placez les bons symboles DFD au bon endroit !</a:t>
-            </a:r>
-            <a:endParaRPr lang="en-US" sz="1400" dirty="0"/>
-          </a:p>
-        </p:txBody>
-      </p:sp>
-      <p:sp>
-        <p:nvSpPr>
-          <p:cNvPr id="5" name="Shape 3"/>
-          <p:cNvSpPr/>
-          <p:nvPr/>
-        </p:nvSpPr>
-        <p:spPr>
-          <a:xfrm>
-            <a:off x="2286000" y="3291840"/>
-            <a:ext cx="4572000" cy="548640"/>
-          </a:xfrm>
-          <a:prstGeom prst="rect">
-            <a:avLst/>
-          </a:prstGeom>
-          <a:solidFill>
-            <a:srgbClr val="FF6F00"/>
-          </a:solidFill>
-          <a:ln/>
-        </p:spPr>
-      </p:sp>
-      <p:sp>
-        <p:nvSpPr>
-          <p:cNvPr id="6" name="Text 4"/>
-          <p:cNvSpPr/>
-          <p:nvPr/>
-        </p:nvSpPr>
-        <p:spPr>
-          <a:xfrm>
-            <a:off x="2286000" y="3291840"/>
-            <a:ext cx="4572000" cy="548640"/>
+              <a:t>≠ DD de conception (Module 3) : ici c'est le doc FINAL</a:t>
+            </a:r>
+            <a:endParaRPr lang="en-US" sz="1100" dirty="0"/>
+          </a:p>
+        </p:txBody>
+      </p:sp>
+      <p:sp>
+        <p:nvSpPr>
+          <p:cNvPr id="7" name="Shape 5"/>
+          <p:cNvSpPr/>
+          <p:nvPr/>
+        </p:nvSpPr>
+        <p:spPr>
+          <a:xfrm>
+            <a:off x="457200" y="1371600"/>
+            <a:ext cx="8229600" cy="475488"/>
+          </a:xfrm>
+          <a:prstGeom prst="rect">
+            <a:avLst/>
+          </a:prstGeom>
+          <a:solidFill>
+            <a:srgbClr val="F3E5F5"/>
+          </a:solidFill>
+          <a:ln/>
+        </p:spPr>
+      </p:sp>
+      <p:sp>
+        <p:nvSpPr>
+          <p:cNvPr id="8" name="Shape 6"/>
+          <p:cNvSpPr/>
+          <p:nvPr/>
+        </p:nvSpPr>
+        <p:spPr>
+          <a:xfrm>
+            <a:off x="457200" y="1371600"/>
+            <a:ext cx="45720" cy="475488"/>
+          </a:xfrm>
+          <a:prstGeom prst="rect">
+            <a:avLst/>
+          </a:prstGeom>
+          <a:solidFill>
+            <a:srgbClr val="6A1B9A"/>
+          </a:solidFill>
+          <a:ln/>
+        </p:spPr>
+      </p:sp>
+      <p:sp>
+        <p:nvSpPr>
+          <p:cNvPr id="9" name="Text 7"/>
+          <p:cNvSpPr/>
+          <p:nvPr/>
+        </p:nvSpPr>
+        <p:spPr>
+          <a:xfrm>
+            <a:off x="640080" y="1371600"/>
+            <a:ext cx="7863840" cy="475488"/>
           </a:xfrm>
           <a:prstGeom prst="rect">
             <a:avLst/>
@@ -6046,21 +7067,416 @@
           <a:bodyPr wrap="square" lIns="0" tIns="0" rIns="0" bIns="0" rtlCol="0" anchor="ctr"/>
           <a:lstStyle/>
           <a:p>
-            <a:pPr algn="ctr" indent="0" marL="0">
+            <a:pPr indent="0" marL="0">
               <a:buNone/>
             </a:pPr>
             <a:r>
-              <a:rPr lang="en-US" sz="1800" b="1" dirty="0">
+              <a:rPr lang="en-US" sz="1100" dirty="0">
                 <a:solidFill>
-                  <a:srgbClr val="FFFFFF"/>
+                  <a:srgbClr val="1A1A2E"/>
                 </a:solidFill>
-                <a:latin typeface="Trebuchet MS" pitchFamily="34" charset="0"/>
-                <a:ea typeface="Trebuchet MS" pitchFamily="34" charset="-122"/>
-                <a:cs typeface="Trebuchet MS" pitchFamily="34" charset="-120"/>
+                <a:latin typeface="Calibri" pitchFamily="34" charset="0"/>
+                <a:ea typeface="Calibri" pitchFamily="34" charset="-122"/>
+                <a:cs typeface="Calibri" pitchFamily="34" charset="-120"/>
               </a:rPr>
-              <a:t>▶  Lancer le jeu</a:t>
-            </a:r>
-            <a:endParaRPr lang="en-US" sz="1800" dirty="0"/>
+              <a:t>Pour chaque table : nom, description, nombre de colonnes</a:t>
+            </a:r>
+            <a:endParaRPr lang="en-US" sz="1100" dirty="0"/>
+          </a:p>
+        </p:txBody>
+      </p:sp>
+      <p:sp>
+        <p:nvSpPr>
+          <p:cNvPr id="10" name="Shape 8"/>
+          <p:cNvSpPr/>
+          <p:nvPr/>
+        </p:nvSpPr>
+        <p:spPr>
+          <a:xfrm>
+            <a:off x="457200" y="1874520"/>
+            <a:ext cx="8229600" cy="475488"/>
+          </a:xfrm>
+          <a:prstGeom prst="rect">
+            <a:avLst/>
+          </a:prstGeom>
+          <a:solidFill>
+            <a:srgbClr val="FFFFFF"/>
+          </a:solidFill>
+          <a:ln/>
+        </p:spPr>
+      </p:sp>
+      <p:sp>
+        <p:nvSpPr>
+          <p:cNvPr id="11" name="Shape 9"/>
+          <p:cNvSpPr/>
+          <p:nvPr/>
+        </p:nvSpPr>
+        <p:spPr>
+          <a:xfrm>
+            <a:off x="457200" y="1874520"/>
+            <a:ext cx="45720" cy="475488"/>
+          </a:xfrm>
+          <a:prstGeom prst="rect">
+            <a:avLst/>
+          </a:prstGeom>
+          <a:solidFill>
+            <a:srgbClr val="6A1B9A"/>
+          </a:solidFill>
+          <a:ln/>
+        </p:spPr>
+      </p:sp>
+      <p:sp>
+        <p:nvSpPr>
+          <p:cNvPr id="12" name="Text 10"/>
+          <p:cNvSpPr/>
+          <p:nvPr/>
+        </p:nvSpPr>
+        <p:spPr>
+          <a:xfrm>
+            <a:off x="640080" y="1874520"/>
+            <a:ext cx="7863840" cy="475488"/>
+          </a:xfrm>
+          <a:prstGeom prst="rect">
+            <a:avLst/>
+          </a:prstGeom>
+          <a:noFill/>
+          <a:ln/>
+        </p:spPr>
+        <p:txBody>
+          <a:bodyPr wrap="square" lIns="0" tIns="0" rIns="0" bIns="0" rtlCol="0" anchor="ctr"/>
+          <a:lstStyle/>
+          <a:p>
+            <a:pPr indent="0" marL="0">
+              <a:buNone/>
+            </a:pPr>
+            <a:r>
+              <a:rPr lang="en-US" sz="1100" dirty="0">
+                <a:solidFill>
+                  <a:srgbClr val="1A1A2E"/>
+                </a:solidFill>
+                <a:latin typeface="Calibri" pitchFamily="34" charset="0"/>
+                <a:ea typeface="Calibri" pitchFamily="34" charset="-122"/>
+                <a:cs typeface="Calibri" pitchFamily="34" charset="-120"/>
+              </a:rPr>
+              <a:t>Pour chaque colonne : nom, type MySQL EXACT, contraintes, description</a:t>
+            </a:r>
+            <a:endParaRPr lang="en-US" sz="1100" dirty="0"/>
+          </a:p>
+        </p:txBody>
+      </p:sp>
+      <p:sp>
+        <p:nvSpPr>
+          <p:cNvPr id="13" name="Shape 11"/>
+          <p:cNvSpPr/>
+          <p:nvPr/>
+        </p:nvSpPr>
+        <p:spPr>
+          <a:xfrm>
+            <a:off x="457200" y="2377440"/>
+            <a:ext cx="8229600" cy="475488"/>
+          </a:xfrm>
+          <a:prstGeom prst="rect">
+            <a:avLst/>
+          </a:prstGeom>
+          <a:solidFill>
+            <a:srgbClr val="F3E5F5"/>
+          </a:solidFill>
+          <a:ln/>
+        </p:spPr>
+      </p:sp>
+      <p:sp>
+        <p:nvSpPr>
+          <p:cNvPr id="14" name="Shape 12"/>
+          <p:cNvSpPr/>
+          <p:nvPr/>
+        </p:nvSpPr>
+        <p:spPr>
+          <a:xfrm>
+            <a:off x="457200" y="2377440"/>
+            <a:ext cx="45720" cy="475488"/>
+          </a:xfrm>
+          <a:prstGeom prst="rect">
+            <a:avLst/>
+          </a:prstGeom>
+          <a:solidFill>
+            <a:srgbClr val="6A1B9A"/>
+          </a:solidFill>
+          <a:ln/>
+        </p:spPr>
+      </p:sp>
+      <p:sp>
+        <p:nvSpPr>
+          <p:cNvPr id="15" name="Text 13"/>
+          <p:cNvSpPr/>
+          <p:nvPr/>
+        </p:nvSpPr>
+        <p:spPr>
+          <a:xfrm>
+            <a:off x="640080" y="2377440"/>
+            <a:ext cx="7863840" cy="475488"/>
+          </a:xfrm>
+          <a:prstGeom prst="rect">
+            <a:avLst/>
+          </a:prstGeom>
+          <a:noFill/>
+          <a:ln/>
+        </p:spPr>
+        <p:txBody>
+          <a:bodyPr wrap="square" lIns="0" tIns="0" rIns="0" bIns="0" rtlCol="0" anchor="ctr"/>
+          <a:lstStyle/>
+          <a:p>
+            <a:pPr indent="0" marL="0">
+              <a:buNone/>
+            </a:pPr>
+            <a:r>
+              <a:rPr lang="en-US" sz="1100" dirty="0">
+                <a:solidFill>
+                  <a:srgbClr val="1A1A2E"/>
+                </a:solidFill>
+                <a:latin typeface="Calibri" pitchFamily="34" charset="0"/>
+                <a:ea typeface="Calibri" pitchFamily="34" charset="-122"/>
+                <a:cs typeface="Calibri" pitchFamily="34" charset="-120"/>
+              </a:rPr>
+              <a:t>Inclure les FK avec table referencee + comportement (CASCADE/RESTRICT)</a:t>
+            </a:r>
+            <a:endParaRPr lang="en-US" sz="1100" dirty="0"/>
+          </a:p>
+        </p:txBody>
+      </p:sp>
+      <p:sp>
+        <p:nvSpPr>
+          <p:cNvPr id="16" name="Shape 14"/>
+          <p:cNvSpPr/>
+          <p:nvPr/>
+        </p:nvSpPr>
+        <p:spPr>
+          <a:xfrm>
+            <a:off x="457200" y="2880360"/>
+            <a:ext cx="8229600" cy="475488"/>
+          </a:xfrm>
+          <a:prstGeom prst="rect">
+            <a:avLst/>
+          </a:prstGeom>
+          <a:solidFill>
+            <a:srgbClr val="FFFFFF"/>
+          </a:solidFill>
+          <a:ln/>
+        </p:spPr>
+      </p:sp>
+      <p:sp>
+        <p:nvSpPr>
+          <p:cNvPr id="17" name="Shape 15"/>
+          <p:cNvSpPr/>
+          <p:nvPr/>
+        </p:nvSpPr>
+        <p:spPr>
+          <a:xfrm>
+            <a:off x="457200" y="2880360"/>
+            <a:ext cx="45720" cy="475488"/>
+          </a:xfrm>
+          <a:prstGeom prst="rect">
+            <a:avLst/>
+          </a:prstGeom>
+          <a:solidFill>
+            <a:srgbClr val="6A1B9A"/>
+          </a:solidFill>
+          <a:ln/>
+        </p:spPr>
+      </p:sp>
+      <p:sp>
+        <p:nvSpPr>
+          <p:cNvPr id="18" name="Text 16"/>
+          <p:cNvSpPr/>
+          <p:nvPr/>
+        </p:nvSpPr>
+        <p:spPr>
+          <a:xfrm>
+            <a:off x="640080" y="2880360"/>
+            <a:ext cx="7863840" cy="475488"/>
+          </a:xfrm>
+          <a:prstGeom prst="rect">
+            <a:avLst/>
+          </a:prstGeom>
+          <a:noFill/>
+          <a:ln/>
+        </p:spPr>
+        <p:txBody>
+          <a:bodyPr wrap="square" lIns="0" tIns="0" rIns="0" bIns="0" rtlCol="0" anchor="ctr"/>
+          <a:lstStyle/>
+          <a:p>
+            <a:pPr indent="0" marL="0">
+              <a:buNone/>
+            </a:pPr>
+            <a:r>
+              <a:rPr lang="en-US" sz="1100" dirty="0">
+                <a:solidFill>
+                  <a:srgbClr val="1A1A2E"/>
+                </a:solidFill>
+                <a:latin typeface="Calibri" pitchFamily="34" charset="0"/>
+                <a:ea typeface="Calibri" pitchFamily="34" charset="-122"/>
+                <a:cs typeface="Calibri" pitchFamily="34" charset="-120"/>
+              </a:rPr>
+              <a:t>Generer automatiquement : SHOW CREATE TABLE → copier-coller + annoter</a:t>
+            </a:r>
+            <a:endParaRPr lang="en-US" sz="1100" dirty="0"/>
+          </a:p>
+        </p:txBody>
+      </p:sp>
+      <p:sp>
+        <p:nvSpPr>
+          <p:cNvPr id="19" name="Shape 17"/>
+          <p:cNvSpPr/>
+          <p:nvPr/>
+        </p:nvSpPr>
+        <p:spPr>
+          <a:xfrm>
+            <a:off x="457200" y="3383280"/>
+            <a:ext cx="8229600" cy="475488"/>
+          </a:xfrm>
+          <a:prstGeom prst="rect">
+            <a:avLst/>
+          </a:prstGeom>
+          <a:solidFill>
+            <a:srgbClr val="F3E5F5"/>
+          </a:solidFill>
+          <a:ln/>
+        </p:spPr>
+      </p:sp>
+      <p:sp>
+        <p:nvSpPr>
+          <p:cNvPr id="20" name="Shape 18"/>
+          <p:cNvSpPr/>
+          <p:nvPr/>
+        </p:nvSpPr>
+        <p:spPr>
+          <a:xfrm>
+            <a:off x="457200" y="3383280"/>
+            <a:ext cx="45720" cy="475488"/>
+          </a:xfrm>
+          <a:prstGeom prst="rect">
+            <a:avLst/>
+          </a:prstGeom>
+          <a:solidFill>
+            <a:srgbClr val="6A1B9A"/>
+          </a:solidFill>
+          <a:ln/>
+        </p:spPr>
+      </p:sp>
+      <p:sp>
+        <p:nvSpPr>
+          <p:cNvPr id="21" name="Text 19"/>
+          <p:cNvSpPr/>
+          <p:nvPr/>
+        </p:nvSpPr>
+        <p:spPr>
+          <a:xfrm>
+            <a:off x="640080" y="3383280"/>
+            <a:ext cx="7863840" cy="475488"/>
+          </a:xfrm>
+          <a:prstGeom prst="rect">
+            <a:avLst/>
+          </a:prstGeom>
+          <a:noFill/>
+          <a:ln/>
+        </p:spPr>
+        <p:txBody>
+          <a:bodyPr wrap="square" lIns="0" tIns="0" rIns="0" bIns="0" rtlCol="0" anchor="ctr"/>
+          <a:lstStyle/>
+          <a:p>
+            <a:pPr indent="0" marL="0">
+              <a:buNone/>
+            </a:pPr>
+            <a:r>
+              <a:rPr lang="en-US" sz="1100" dirty="0">
+                <a:solidFill>
+                  <a:srgbClr val="1A1A2E"/>
+                </a:solidFill>
+                <a:latin typeface="Calibri" pitchFamily="34" charset="0"/>
+                <a:ea typeface="Calibri" pitchFamily="34" charset="-122"/>
+                <a:cs typeface="Calibri" pitchFamily="34" charset="-120"/>
+              </a:rPr>
+              <a:t>Ajouter les index avec justification</a:t>
+            </a:r>
+            <a:endParaRPr lang="en-US" sz="1100" dirty="0"/>
+          </a:p>
+        </p:txBody>
+      </p:sp>
+      <p:sp>
+        <p:nvSpPr>
+          <p:cNvPr id="22" name="Shape 20"/>
+          <p:cNvSpPr/>
+          <p:nvPr/>
+        </p:nvSpPr>
+        <p:spPr>
+          <a:xfrm>
+            <a:off x="457200" y="3886200"/>
+            <a:ext cx="8229600" cy="475488"/>
+          </a:xfrm>
+          <a:prstGeom prst="rect">
+            <a:avLst/>
+          </a:prstGeom>
+          <a:solidFill>
+            <a:srgbClr val="FFFFFF"/>
+          </a:solidFill>
+          <a:ln/>
+        </p:spPr>
+      </p:sp>
+      <p:sp>
+        <p:nvSpPr>
+          <p:cNvPr id="23" name="Shape 21"/>
+          <p:cNvSpPr/>
+          <p:nvPr/>
+        </p:nvSpPr>
+        <p:spPr>
+          <a:xfrm>
+            <a:off x="457200" y="3886200"/>
+            <a:ext cx="45720" cy="475488"/>
+          </a:xfrm>
+          <a:prstGeom prst="rect">
+            <a:avLst/>
+          </a:prstGeom>
+          <a:solidFill>
+            <a:srgbClr val="6A1B9A"/>
+          </a:solidFill>
+          <a:ln/>
+        </p:spPr>
+      </p:sp>
+      <p:sp>
+        <p:nvSpPr>
+          <p:cNvPr id="24" name="Text 22"/>
+          <p:cNvSpPr/>
+          <p:nvPr/>
+        </p:nvSpPr>
+        <p:spPr>
+          <a:xfrm>
+            <a:off x="640080" y="3886200"/>
+            <a:ext cx="7863840" cy="475488"/>
+          </a:xfrm>
+          <a:prstGeom prst="rect">
+            <a:avLst/>
+          </a:prstGeom>
+          <a:noFill/>
+          <a:ln/>
+        </p:spPr>
+        <p:txBody>
+          <a:bodyPr wrap="square" lIns="0" tIns="0" rIns="0" bIns="0" rtlCol="0" anchor="ctr"/>
+          <a:lstStyle/>
+          <a:p>
+            <a:pPr indent="0" marL="0">
+              <a:buNone/>
+            </a:pPr>
+            <a:r>
+              <a:rPr lang="en-US" sz="1100" dirty="0">
+                <a:solidFill>
+                  <a:srgbClr val="1A1A2E"/>
+                </a:solidFill>
+                <a:latin typeface="Calibri" pitchFamily="34" charset="0"/>
+                <a:ea typeface="Calibri" pitchFamily="34" charset="-122"/>
+                <a:cs typeface="Calibri" pitchFamily="34" charset="-120"/>
+              </a:rPr>
+              <a:t>Ce dictionnaire accompagne les DFD, flowcharts et cas d'utilisation</a:t>
+            </a:r>
+            <a:endParaRPr lang="en-US" sz="1100" dirty="0"/>
           </a:p>
         </p:txBody>
       </p:sp>
@@ -6098,14 +7514,34 @@
       </p:grpSpPr>
       <p:sp>
         <p:nvSpPr>
-          <p:cNvPr id="2" name="Text 0"/>
-          <p:cNvSpPr/>
-          <p:nvPr/>
-        </p:nvSpPr>
-        <p:spPr>
-          <a:xfrm>
-            <a:off x="457200" y="137160"/>
-            <a:ext cx="5486400" cy="411480"/>
+          <p:cNvPr id="2" name="Shape 0"/>
+          <p:cNvSpPr/>
+          <p:nvPr/>
+        </p:nvSpPr>
+        <p:spPr>
+          <a:xfrm>
+            <a:off x="0" y="0"/>
+            <a:ext cx="9144000" cy="54864"/>
+          </a:xfrm>
+          <a:prstGeom prst="rect">
+            <a:avLst/>
+          </a:prstGeom>
+          <a:solidFill>
+            <a:srgbClr val="6A1B9A"/>
+          </a:solidFill>
+          <a:ln/>
+        </p:spPr>
+      </p:sp>
+      <p:sp>
+        <p:nvSpPr>
+          <p:cNvPr id="3" name="Text 1"/>
+          <p:cNvSpPr/>
+          <p:nvPr/>
+        </p:nvSpPr>
+        <p:spPr>
+          <a:xfrm>
+            <a:off x="457200" y="182880"/>
+            <a:ext cx="8229600" cy="548640"/>
           </a:xfrm>
           <a:prstGeom prst="rect">
             <a:avLst/>
@@ -6121,7 +7557,7 @@
               <a:buNone/>
             </a:pPr>
             <a:r>
-              <a:rPr lang="en-US" sz="1800" b="1" dirty="0">
+              <a:rPr lang="en-US" sz="2200" b="1" dirty="0">
                 <a:solidFill>
                   <a:srgbClr val="4A0072"/>
                 </a:solidFill>
@@ -6129,42 +7565,62 @@
                 <a:ea typeface="Trebuchet MS" pitchFamily="34" charset="-122"/>
                 <a:cs typeface="Trebuchet MS" pitchFamily="34" charset="-120"/>
               </a:rPr>
-              <a:t>📋 Mémo Module 19</a:t>
-            </a:r>
-            <a:endParaRPr lang="en-US" sz="1800" dirty="0"/>
-          </a:p>
-        </p:txBody>
-      </p:sp>
-      <p:sp>
-        <p:nvSpPr>
-          <p:cNvPr id="3" name="Shape 1"/>
-          <p:cNvSpPr/>
-          <p:nvPr/>
-        </p:nvSpPr>
-        <p:spPr>
-          <a:xfrm>
-            <a:off x="457200" y="548640"/>
-            <a:ext cx="8229600" cy="274320"/>
-          </a:xfrm>
-          <a:prstGeom prst="rect">
-            <a:avLst/>
-          </a:prstGeom>
-          <a:solidFill>
-            <a:srgbClr val="FFF3E0"/>
-          </a:solidFill>
-          <a:ln/>
-        </p:spPr>
-      </p:sp>
-      <p:sp>
-        <p:nvSpPr>
-          <p:cNvPr id="4" name="Text 2"/>
-          <p:cNvSpPr/>
-          <p:nvPr/>
-        </p:nvSpPr>
-        <p:spPr>
-          <a:xfrm>
-            <a:off x="640080" y="548640"/>
-            <a:ext cx="7772400" cy="274320"/>
+              <a:t>Exercice Module 19</a:t>
+            </a:r>
+            <a:endParaRPr lang="en-US" sz="2200" dirty="0"/>
+          </a:p>
+        </p:txBody>
+      </p:sp>
+      <p:sp>
+        <p:nvSpPr>
+          <p:cNvPr id="4" name="Shape 2"/>
+          <p:cNvSpPr/>
+          <p:nvPr/>
+        </p:nvSpPr>
+        <p:spPr>
+          <a:xfrm>
+            <a:off x="457200" y="868680"/>
+            <a:ext cx="8229600" cy="475488"/>
+          </a:xfrm>
+          <a:prstGeom prst="rect">
+            <a:avLst/>
+          </a:prstGeom>
+          <a:solidFill>
+            <a:srgbClr val="FFFFFF"/>
+          </a:solidFill>
+          <a:ln/>
+        </p:spPr>
+      </p:sp>
+      <p:sp>
+        <p:nvSpPr>
+          <p:cNvPr id="5" name="Shape 3"/>
+          <p:cNvSpPr/>
+          <p:nvPr/>
+        </p:nvSpPr>
+        <p:spPr>
+          <a:xfrm>
+            <a:off x="457200" y="868680"/>
+            <a:ext cx="45720" cy="475488"/>
+          </a:xfrm>
+          <a:prstGeom prst="rect">
+            <a:avLst/>
+          </a:prstGeom>
+          <a:solidFill>
+            <a:srgbClr val="6A1B9A"/>
+          </a:solidFill>
+          <a:ln/>
+        </p:spPr>
+      </p:sp>
+      <p:sp>
+        <p:nvSpPr>
+          <p:cNvPr id="6" name="Text 4"/>
+          <p:cNvSpPr/>
+          <p:nvPr/>
+        </p:nvSpPr>
+        <p:spPr>
+          <a:xfrm>
+            <a:off x="640080" y="868680"/>
+            <a:ext cx="7863840" cy="475488"/>
           </a:xfrm>
           <a:prstGeom prst="rect">
             <a:avLst/>
@@ -6180,30 +7636,30 @@
               <a:buNone/>
             </a:pPr>
             <a:r>
-              <a:rPr lang="en-US" sz="900" b="1" dirty="0">
+              <a:rPr lang="en-US" sz="1100" dirty="0">
                 <a:solidFill>
-                  <a:srgbClr val="E65100"/>
+                  <a:srgbClr val="1A1A2E"/>
                 </a:solidFill>
                 <a:latin typeface="Calibri" pitchFamily="34" charset="0"/>
                 <a:ea typeface="Calibri" pitchFamily="34" charset="-122"/>
                 <a:cs typeface="Calibri" pitchFamily="34" charset="-120"/>
               </a:rPr>
-              <a:t>🔒 Déblocable après complétion</a:t>
-            </a:r>
-            <a:endParaRPr lang="en-US" sz="900" dirty="0"/>
-          </a:p>
-        </p:txBody>
-      </p:sp>
-      <p:sp>
-        <p:nvSpPr>
-          <p:cNvPr id="5" name="Shape 3"/>
-          <p:cNvSpPr/>
-          <p:nvPr/>
-        </p:nvSpPr>
-        <p:spPr>
-          <a:xfrm>
-            <a:off x="457200" y="960120"/>
-            <a:ext cx="2286000" cy="475488"/>
+              <a:t>1. DFD niveau 0 de SwissSound (Draw.io)</a:t>
+            </a:r>
+            <a:endParaRPr lang="en-US" sz="1100" dirty="0"/>
+          </a:p>
+        </p:txBody>
+      </p:sp>
+      <p:sp>
+        <p:nvSpPr>
+          <p:cNvPr id="7" name="Shape 5"/>
+          <p:cNvSpPr/>
+          <p:nvPr/>
+        </p:nvSpPr>
+        <p:spPr>
+          <a:xfrm>
+            <a:off x="457200" y="1371600"/>
+            <a:ext cx="8229600" cy="475488"/>
           </a:xfrm>
           <a:prstGeom prst="rect">
             <a:avLst/>
@@ -6216,14 +7672,34 @@
       </p:sp>
       <p:sp>
         <p:nvSpPr>
-          <p:cNvPr id="6" name="Text 4"/>
-          <p:cNvSpPr/>
-          <p:nvPr/>
-        </p:nvSpPr>
-        <p:spPr>
-          <a:xfrm>
-            <a:off x="548640" y="960120"/>
-            <a:ext cx="2103120" cy="475488"/>
+          <p:cNvPr id="8" name="Shape 6"/>
+          <p:cNvSpPr/>
+          <p:nvPr/>
+        </p:nvSpPr>
+        <p:spPr>
+          <a:xfrm>
+            <a:off x="457200" y="1371600"/>
+            <a:ext cx="45720" cy="475488"/>
+          </a:xfrm>
+          <a:prstGeom prst="rect">
+            <a:avLst/>
+          </a:prstGeom>
+          <a:solidFill>
+            <a:srgbClr val="6A1B9A"/>
+          </a:solidFill>
+          <a:ln/>
+        </p:spPr>
+      </p:sp>
+      <p:sp>
+        <p:nvSpPr>
+          <p:cNvPr id="9" name="Text 7"/>
+          <p:cNvSpPr/>
+          <p:nvPr/>
+        </p:nvSpPr>
+        <p:spPr>
+          <a:xfrm>
+            <a:off x="640080" y="1371600"/>
+            <a:ext cx="7863840" cy="475488"/>
           </a:xfrm>
           <a:prstGeom prst="rect">
             <a:avLst/>
@@ -6239,109 +7715,70 @@
               <a:buNone/>
             </a:pPr>
             <a:r>
-              <a:rPr lang="en-US" sz="900" b="1" dirty="0">
+              <a:rPr lang="en-US" sz="1100" dirty="0">
                 <a:solidFill>
-                  <a:srgbClr val="4A0072"/>
-                </a:solidFill>
-                <a:latin typeface="Trebuchet MS" pitchFamily="34" charset="0"/>
-                <a:ea typeface="Trebuchet MS" pitchFamily="34" charset="-122"/>
-                <a:cs typeface="Trebuchet MS" pitchFamily="34" charset="-120"/>
-              </a:rPr>
-              <a:t>DFD</a:t>
-            </a:r>
-            <a:endParaRPr lang="en-US" sz="900" dirty="0"/>
-          </a:p>
-        </p:txBody>
-      </p:sp>
-      <p:sp>
-        <p:nvSpPr>
-          <p:cNvPr id="7" name="Shape 5"/>
-          <p:cNvSpPr/>
-          <p:nvPr/>
-        </p:nvSpPr>
-        <p:spPr>
-          <a:xfrm>
-            <a:off x="2743200" y="960120"/>
-            <a:ext cx="5943600" cy="475488"/>
-          </a:xfrm>
-          <a:prstGeom prst="rect">
-            <a:avLst/>
-          </a:prstGeom>
-          <a:solidFill>
-            <a:srgbClr val="F3E5F5"/>
-          </a:solidFill>
-          <a:ln/>
-        </p:spPr>
-      </p:sp>
-      <p:sp>
-        <p:nvSpPr>
-          <p:cNvPr id="8" name="Text 6"/>
-          <p:cNvSpPr/>
-          <p:nvPr/>
-        </p:nvSpPr>
-        <p:spPr>
-          <a:xfrm>
-            <a:off x="2834640" y="960120"/>
-            <a:ext cx="5760720" cy="475488"/>
-          </a:xfrm>
-          <a:prstGeom prst="rect">
-            <a:avLst/>
-          </a:prstGeom>
-          <a:noFill/>
-          <a:ln/>
-        </p:spPr>
-        <p:txBody>
-          <a:bodyPr wrap="square" lIns="0" tIns="0" rIns="0" bIns="0" rtlCol="0" anchor="ctr"/>
-          <a:lstStyle/>
-          <a:p>
-            <a:pPr indent="0" marL="0">
-              <a:buNone/>
-            </a:pPr>
-            <a:r>
-              <a:rPr lang="en-US" sz="900" dirty="0">
-                <a:solidFill>
-                  <a:srgbClr val="333333"/>
+                  <a:srgbClr val="1A1A2E"/>
                 </a:solidFill>
                 <a:latin typeface="Calibri" pitchFamily="34" charset="0"/>
                 <a:ea typeface="Calibri" pitchFamily="34" charset="-122"/>
                 <a:cs typeface="Calibri" pitchFamily="34" charset="-120"/>
               </a:rPr>
-              <a:t>Montre les flux de DONNÉES (pas la logique)</a:t>
-            </a:r>
-            <a:endParaRPr lang="en-US" sz="900" dirty="0"/>
-          </a:p>
-        </p:txBody>
-      </p:sp>
-      <p:sp>
-        <p:nvSpPr>
-          <p:cNvPr id="9" name="Shape 7"/>
-          <p:cNvSpPr/>
-          <p:nvPr/>
-        </p:nvSpPr>
-        <p:spPr>
-          <a:xfrm>
-            <a:off x="457200" y="1463040"/>
-            <a:ext cx="2286000" cy="475488"/>
-          </a:xfrm>
-          <a:prstGeom prst="rect">
-            <a:avLst/>
-          </a:prstGeom>
-          <a:solidFill>
-            <a:srgbClr val="F0F0F0"/>
-          </a:solidFill>
-          <a:ln/>
-        </p:spPr>
-      </p:sp>
-      <p:sp>
-        <p:nvSpPr>
-          <p:cNvPr id="10" name="Text 8"/>
-          <p:cNvSpPr/>
-          <p:nvPr/>
-        </p:nvSpPr>
-        <p:spPr>
-          <a:xfrm>
-            <a:off x="548640" y="1463040"/>
-            <a:ext cx="2103120" cy="475488"/>
+              <a:t>2. DFD niveau 1 (5 sous-processus)</a:t>
+            </a:r>
+            <a:endParaRPr lang="en-US" sz="1100" dirty="0"/>
+          </a:p>
+        </p:txBody>
+      </p:sp>
+      <p:sp>
+        <p:nvSpPr>
+          <p:cNvPr id="10" name="Shape 8"/>
+          <p:cNvSpPr/>
+          <p:nvPr/>
+        </p:nvSpPr>
+        <p:spPr>
+          <a:xfrm>
+            <a:off x="457200" y="1874520"/>
+            <a:ext cx="8229600" cy="475488"/>
+          </a:xfrm>
+          <a:prstGeom prst="rect">
+            <a:avLst/>
+          </a:prstGeom>
+          <a:solidFill>
+            <a:srgbClr val="FFFFFF"/>
+          </a:solidFill>
+          <a:ln/>
+        </p:spPr>
+      </p:sp>
+      <p:sp>
+        <p:nvSpPr>
+          <p:cNvPr id="11" name="Shape 9"/>
+          <p:cNvSpPr/>
+          <p:nvPr/>
+        </p:nvSpPr>
+        <p:spPr>
+          <a:xfrm>
+            <a:off x="457200" y="1874520"/>
+            <a:ext cx="45720" cy="475488"/>
+          </a:xfrm>
+          <a:prstGeom prst="rect">
+            <a:avLst/>
+          </a:prstGeom>
+          <a:solidFill>
+            <a:srgbClr val="6A1B9A"/>
+          </a:solidFill>
+          <a:ln/>
+        </p:spPr>
+      </p:sp>
+      <p:sp>
+        <p:nvSpPr>
+          <p:cNvPr id="12" name="Text 10"/>
+          <p:cNvSpPr/>
+          <p:nvPr/>
+        </p:nvSpPr>
+        <p:spPr>
+          <a:xfrm>
+            <a:off x="640080" y="1874520"/>
+            <a:ext cx="7863840" cy="475488"/>
           </a:xfrm>
           <a:prstGeom prst="rect">
             <a:avLst/>
@@ -6357,76 +7794,17 @@
               <a:buNone/>
             </a:pPr>
             <a:r>
-              <a:rPr lang="en-US" sz="900" b="1" dirty="0">
+              <a:rPr lang="en-US" sz="1100" dirty="0">
                 <a:solidFill>
-                  <a:srgbClr val="4A0072"/>
-                </a:solidFill>
-                <a:latin typeface="Trebuchet MS" pitchFamily="34" charset="0"/>
-                <a:ea typeface="Trebuchet MS" pitchFamily="34" charset="-122"/>
-                <a:cs typeface="Trebuchet MS" pitchFamily="34" charset="-120"/>
-              </a:rPr>
-              <a:t>Niveau 0</a:t>
-            </a:r>
-            <a:endParaRPr lang="en-US" sz="900" dirty="0"/>
-          </a:p>
-        </p:txBody>
-      </p:sp>
-      <p:sp>
-        <p:nvSpPr>
-          <p:cNvPr id="11" name="Shape 9"/>
-          <p:cNvSpPr/>
-          <p:nvPr/>
-        </p:nvSpPr>
-        <p:spPr>
-          <a:xfrm>
-            <a:off x="2743200" y="1463040"/>
-            <a:ext cx="5943600" cy="475488"/>
-          </a:xfrm>
-          <a:prstGeom prst="rect">
-            <a:avLst/>
-          </a:prstGeom>
-          <a:solidFill>
-            <a:srgbClr val="F0F0F0"/>
-          </a:solidFill>
-          <a:ln/>
-        </p:spPr>
-      </p:sp>
-      <p:sp>
-        <p:nvSpPr>
-          <p:cNvPr id="12" name="Text 10"/>
-          <p:cNvSpPr/>
-          <p:nvPr/>
-        </p:nvSpPr>
-        <p:spPr>
-          <a:xfrm>
-            <a:off x="2834640" y="1463040"/>
-            <a:ext cx="5760720" cy="475488"/>
-          </a:xfrm>
-          <a:prstGeom prst="rect">
-            <a:avLst/>
-          </a:prstGeom>
-          <a:noFill/>
-          <a:ln/>
-        </p:spPr>
-        <p:txBody>
-          <a:bodyPr wrap="square" lIns="0" tIns="0" rIns="0" bIns="0" rtlCol="0" anchor="ctr"/>
-          <a:lstStyle/>
-          <a:p>
-            <a:pPr indent="0" marL="0">
-              <a:buNone/>
-            </a:pPr>
-            <a:r>
-              <a:rPr lang="en-US" sz="900" dirty="0">
-                <a:solidFill>
-                  <a:srgbClr val="333333"/>
+                  <a:srgbClr val="1A1A2E"/>
                 </a:solidFill>
                 <a:latin typeface="Calibri" pitchFamily="34" charset="0"/>
                 <a:ea typeface="Calibri" pitchFamily="34" charset="-122"/>
                 <a:cs typeface="Calibri" pitchFamily="34" charset="-120"/>
               </a:rPr>
-              <a:t>Contexte : système = 1 processus, entités externes autour</a:t>
-            </a:r>
-            <a:endParaRPr lang="en-US" sz="900" dirty="0"/>
+              <a:t>3. DFD niveau 2 pour le processus 'Facturation'</a:t>
+            </a:r>
+            <a:endParaRPr lang="en-US" sz="1100" dirty="0"/>
           </a:p>
         </p:txBody>
       </p:sp>
@@ -6438,8 +7816,8 @@
         </p:nvSpPr>
         <p:spPr>
           <a:xfrm>
-            <a:off x="457200" y="1965960"/>
-            <a:ext cx="2286000" cy="475488"/>
+            <a:off x="457200" y="2377440"/>
+            <a:ext cx="8229600" cy="475488"/>
           </a:xfrm>
           <a:prstGeom prst="rect">
             <a:avLst/>
@@ -6452,14 +7830,34 @@
       </p:sp>
       <p:sp>
         <p:nvSpPr>
-          <p:cNvPr id="14" name="Text 12"/>
-          <p:cNvSpPr/>
-          <p:nvPr/>
-        </p:nvSpPr>
-        <p:spPr>
-          <a:xfrm>
-            <a:off x="548640" y="1965960"/>
-            <a:ext cx="2103120" cy="475488"/>
+          <p:cNvPr id="14" name="Shape 12"/>
+          <p:cNvSpPr/>
+          <p:nvPr/>
+        </p:nvSpPr>
+        <p:spPr>
+          <a:xfrm>
+            <a:off x="457200" y="2377440"/>
+            <a:ext cx="45720" cy="475488"/>
+          </a:xfrm>
+          <a:prstGeom prst="rect">
+            <a:avLst/>
+          </a:prstGeom>
+          <a:solidFill>
+            <a:srgbClr val="6A1B9A"/>
+          </a:solidFill>
+          <a:ln/>
+        </p:spPr>
+      </p:sp>
+      <p:sp>
+        <p:nvSpPr>
+          <p:cNvPr id="15" name="Text 13"/>
+          <p:cNvSpPr/>
+          <p:nvPr/>
+        </p:nvSpPr>
+        <p:spPr>
+          <a:xfrm>
+            <a:off x="640080" y="2377440"/>
+            <a:ext cx="7863840" cy="475488"/>
           </a:xfrm>
           <a:prstGeom prst="rect">
             <a:avLst/>
@@ -6475,78 +7873,39 @@
               <a:buNone/>
             </a:pPr>
             <a:r>
-              <a:rPr lang="en-US" sz="900" b="1" dirty="0">
+              <a:rPr lang="en-US" sz="1100" dirty="0">
                 <a:solidFill>
-                  <a:srgbClr val="4A0072"/>
-                </a:solidFill>
-                <a:latin typeface="Trebuchet MS" pitchFamily="34" charset="0"/>
-                <a:ea typeface="Trebuchet MS" pitchFamily="34" charset="-122"/>
-                <a:cs typeface="Trebuchet MS" pitchFamily="34" charset="-120"/>
-              </a:rPr>
-              <a:t>Niveau 1</a:t>
-            </a:r>
-            <a:endParaRPr lang="en-US" sz="900" dirty="0"/>
-          </a:p>
-        </p:txBody>
-      </p:sp>
-      <p:sp>
-        <p:nvSpPr>
-          <p:cNvPr id="15" name="Shape 13"/>
-          <p:cNvSpPr/>
-          <p:nvPr/>
-        </p:nvSpPr>
-        <p:spPr>
-          <a:xfrm>
-            <a:off x="2743200" y="1965960"/>
-            <a:ext cx="5943600" cy="475488"/>
-          </a:xfrm>
-          <a:prstGeom prst="rect">
-            <a:avLst/>
-          </a:prstGeom>
-          <a:solidFill>
-            <a:srgbClr val="F3E5F5"/>
-          </a:solidFill>
-          <a:ln/>
-        </p:spPr>
-      </p:sp>
-      <p:sp>
-        <p:nvSpPr>
-          <p:cNvPr id="16" name="Text 14"/>
-          <p:cNvSpPr/>
-          <p:nvPr/>
-        </p:nvSpPr>
-        <p:spPr>
-          <a:xfrm>
-            <a:off x="2834640" y="1965960"/>
-            <a:ext cx="5760720" cy="475488"/>
-          </a:xfrm>
-          <a:prstGeom prst="rect">
-            <a:avLst/>
-          </a:prstGeom>
-          <a:noFill/>
-          <a:ln/>
-        </p:spPr>
-        <p:txBody>
-          <a:bodyPr wrap="square" lIns="0" tIns="0" rIns="0" bIns="0" rtlCol="0" anchor="ctr"/>
-          <a:lstStyle/>
-          <a:p>
-            <a:pPr indent="0" marL="0">
-              <a:buNone/>
-            </a:pPr>
-            <a:r>
-              <a:rPr lang="en-US" sz="900" dirty="0">
-                <a:solidFill>
-                  <a:srgbClr val="333333"/>
+                  <a:srgbClr val="1A1A2E"/>
                 </a:solidFill>
                 <a:latin typeface="Calibri" pitchFamily="34" charset="0"/>
                 <a:ea typeface="Calibri" pitchFamily="34" charset="-122"/>
                 <a:cs typeface="Calibri" pitchFamily="34" charset="-120"/>
               </a:rPr>
-              <a:t>Décomposition en sous-processus</a:t>
-            </a:r>
-            <a:endParaRPr lang="en-US" sz="900" dirty="0"/>
-          </a:p>
-        </p:txBody>
+              <a:t>4. Flowchart 'Reserver une session' avec cas d'erreur</a:t>
+            </a:r>
+            <a:endParaRPr lang="en-US" sz="1100" dirty="0"/>
+          </a:p>
+        </p:txBody>
+      </p:sp>
+      <p:sp>
+        <p:nvSpPr>
+          <p:cNvPr id="16" name="Shape 14"/>
+          <p:cNvSpPr/>
+          <p:nvPr/>
+        </p:nvSpPr>
+        <p:spPr>
+          <a:xfrm>
+            <a:off x="457200" y="2880360"/>
+            <a:ext cx="8229600" cy="475488"/>
+          </a:xfrm>
+          <a:prstGeom prst="rect">
+            <a:avLst/>
+          </a:prstGeom>
+          <a:solidFill>
+            <a:srgbClr val="FFFFFF"/>
+          </a:solidFill>
+          <a:ln/>
+        </p:spPr>
       </p:sp>
       <p:sp>
         <p:nvSpPr>
@@ -6556,14 +7915,14 @@
         </p:nvSpPr>
         <p:spPr>
           <a:xfrm>
-            <a:off x="457200" y="2468880"/>
-            <a:ext cx="2286000" cy="475488"/>
-          </a:xfrm>
-          <a:prstGeom prst="rect">
-            <a:avLst/>
-          </a:prstGeom>
-          <a:solidFill>
-            <a:srgbClr val="F0F0F0"/>
+            <a:off x="457200" y="2880360"/>
+            <a:ext cx="45720" cy="475488"/>
+          </a:xfrm>
+          <a:prstGeom prst="rect">
+            <a:avLst/>
+          </a:prstGeom>
+          <a:solidFill>
+            <a:srgbClr val="6A1B9A"/>
           </a:solidFill>
           <a:ln/>
         </p:spPr>
@@ -6576,8 +7935,8 @@
         </p:nvSpPr>
         <p:spPr>
           <a:xfrm>
-            <a:off x="548640" y="2468880"/>
-            <a:ext cx="2103120" cy="475488"/>
+            <a:off x="640080" y="2880360"/>
+            <a:ext cx="7863840" cy="475488"/>
           </a:xfrm>
           <a:prstGeom prst="rect">
             <a:avLst/>
@@ -6593,89 +7952,30 @@
               <a:buNone/>
             </a:pPr>
             <a:r>
-              <a:rPr lang="en-US" sz="900" b="1" dirty="0">
+              <a:rPr lang="en-US" sz="1100" dirty="0">
                 <a:solidFill>
-                  <a:srgbClr val="4A0072"/>
-                </a:solidFill>
-                <a:latin typeface="Trebuchet MS" pitchFamily="34" charset="0"/>
-                <a:ea typeface="Trebuchet MS" pitchFamily="34" charset="-122"/>
-                <a:cs typeface="Trebuchet MS" pitchFamily="34" charset="-120"/>
-              </a:rPr>
-              <a:t>Niveau 2</a:t>
-            </a:r>
-            <a:endParaRPr lang="en-US" sz="900" dirty="0"/>
-          </a:p>
-        </p:txBody>
-      </p:sp>
-      <p:sp>
-        <p:nvSpPr>
-          <p:cNvPr id="19" name="Shape 17"/>
-          <p:cNvSpPr/>
-          <p:nvPr/>
-        </p:nvSpPr>
-        <p:spPr>
-          <a:xfrm>
-            <a:off x="2743200" y="2468880"/>
-            <a:ext cx="5943600" cy="475488"/>
-          </a:xfrm>
-          <a:prstGeom prst="rect">
-            <a:avLst/>
-          </a:prstGeom>
-          <a:solidFill>
-            <a:srgbClr val="F0F0F0"/>
-          </a:solidFill>
-          <a:ln/>
-        </p:spPr>
-      </p:sp>
-      <p:sp>
-        <p:nvSpPr>
-          <p:cNvPr id="20" name="Text 18"/>
-          <p:cNvSpPr/>
-          <p:nvPr/>
-        </p:nvSpPr>
-        <p:spPr>
-          <a:xfrm>
-            <a:off x="2834640" y="2468880"/>
-            <a:ext cx="5760720" cy="475488"/>
-          </a:xfrm>
-          <a:prstGeom prst="rect">
-            <a:avLst/>
-          </a:prstGeom>
-          <a:noFill/>
-          <a:ln/>
-        </p:spPr>
-        <p:txBody>
-          <a:bodyPr wrap="square" lIns="0" tIns="0" rIns="0" bIns="0" rtlCol="0" anchor="ctr"/>
-          <a:lstStyle/>
-          <a:p>
-            <a:pPr indent="0" marL="0">
-              <a:buNone/>
-            </a:pPr>
-            <a:r>
-              <a:rPr lang="en-US" sz="900" dirty="0">
-                <a:solidFill>
-                  <a:srgbClr val="333333"/>
+                  <a:srgbClr val="1A1A2E"/>
                 </a:solidFill>
                 <a:latin typeface="Calibri" pitchFamily="34" charset="0"/>
                 <a:ea typeface="Calibri" pitchFamily="34" charset="-122"/>
                 <a:cs typeface="Calibri" pitchFamily="34" charset="-120"/>
               </a:rPr>
-              <a:t>Détail d'un processus du niveau 1</a:t>
-            </a:r>
-            <a:endParaRPr lang="en-US" sz="900" dirty="0"/>
-          </a:p>
-        </p:txBody>
-      </p:sp>
-      <p:sp>
-        <p:nvSpPr>
-          <p:cNvPr id="21" name="Shape 19"/>
-          <p:cNvSpPr/>
-          <p:nvPr/>
-        </p:nvSpPr>
-        <p:spPr>
-          <a:xfrm>
-            <a:off x="457200" y="2971800"/>
-            <a:ext cx="2286000" cy="475488"/>
+              <a:t>5. Diagramme de cas d'utilisation UML (5 acteurs)</a:t>
+            </a:r>
+            <a:endParaRPr lang="en-US" sz="1100" dirty="0"/>
+          </a:p>
+        </p:txBody>
+      </p:sp>
+      <p:sp>
+        <p:nvSpPr>
+          <p:cNvPr id="19" name="Shape 17"/>
+          <p:cNvSpPr/>
+          <p:nvPr/>
+        </p:nvSpPr>
+        <p:spPr>
+          <a:xfrm>
+            <a:off x="457200" y="3383280"/>
+            <a:ext cx="8229600" cy="475488"/>
           </a:xfrm>
           <a:prstGeom prst="rect">
             <a:avLst/>
@@ -6688,14 +7988,34 @@
       </p:sp>
       <p:sp>
         <p:nvSpPr>
-          <p:cNvPr id="22" name="Text 20"/>
-          <p:cNvSpPr/>
-          <p:nvPr/>
-        </p:nvSpPr>
-        <p:spPr>
-          <a:xfrm>
-            <a:off x="548640" y="2971800"/>
-            <a:ext cx="2103120" cy="475488"/>
+          <p:cNvPr id="20" name="Shape 18"/>
+          <p:cNvSpPr/>
+          <p:nvPr/>
+        </p:nvSpPr>
+        <p:spPr>
+          <a:xfrm>
+            <a:off x="457200" y="3383280"/>
+            <a:ext cx="45720" cy="475488"/>
+          </a:xfrm>
+          <a:prstGeom prst="rect">
+            <a:avLst/>
+          </a:prstGeom>
+          <a:solidFill>
+            <a:srgbClr val="6A1B9A"/>
+          </a:solidFill>
+          <a:ln/>
+        </p:spPr>
+      </p:sp>
+      <p:sp>
+        <p:nvSpPr>
+          <p:cNvPr id="21" name="Text 19"/>
+          <p:cNvSpPr/>
+          <p:nvPr/>
+        </p:nvSpPr>
+        <p:spPr>
+          <a:xfrm>
+            <a:off x="640080" y="3383280"/>
+            <a:ext cx="7863840" cy="475488"/>
           </a:xfrm>
           <a:prstGeom prst="rect">
             <a:avLst/>
@@ -6711,109 +8031,70 @@
               <a:buNone/>
             </a:pPr>
             <a:r>
-              <a:rPr lang="en-US" sz="900" b="1" dirty="0">
+              <a:rPr lang="en-US" sz="1100" dirty="0">
                 <a:solidFill>
-                  <a:srgbClr val="4A0072"/>
-                </a:solidFill>
-                <a:latin typeface="Trebuchet MS" pitchFamily="34" charset="0"/>
-                <a:ea typeface="Trebuchet MS" pitchFamily="34" charset="-122"/>
-                <a:cs typeface="Trebuchet MS" pitchFamily="34" charset="-120"/>
-              </a:rPr>
-              <a:t>Flowchart</a:t>
-            </a:r>
-            <a:endParaRPr lang="en-US" sz="900" dirty="0"/>
-          </a:p>
-        </p:txBody>
-      </p:sp>
-      <p:sp>
-        <p:nvSpPr>
-          <p:cNvPr id="23" name="Shape 21"/>
-          <p:cNvSpPr/>
-          <p:nvPr/>
-        </p:nvSpPr>
-        <p:spPr>
-          <a:xfrm>
-            <a:off x="2743200" y="2971800"/>
-            <a:ext cx="5943600" cy="475488"/>
-          </a:xfrm>
-          <a:prstGeom prst="rect">
-            <a:avLst/>
-          </a:prstGeom>
-          <a:solidFill>
-            <a:srgbClr val="F3E5F5"/>
-          </a:solidFill>
-          <a:ln/>
-        </p:spPr>
-      </p:sp>
-      <p:sp>
-        <p:nvSpPr>
-          <p:cNvPr id="24" name="Text 22"/>
-          <p:cNvSpPr/>
-          <p:nvPr/>
-        </p:nvSpPr>
-        <p:spPr>
-          <a:xfrm>
-            <a:off x="2834640" y="2971800"/>
-            <a:ext cx="5760720" cy="475488"/>
-          </a:xfrm>
-          <a:prstGeom prst="rect">
-            <a:avLst/>
-          </a:prstGeom>
-          <a:noFill/>
-          <a:ln/>
-        </p:spPr>
-        <p:txBody>
-          <a:bodyPr wrap="square" lIns="0" tIns="0" rIns="0" bIns="0" rtlCol="0" anchor="ctr"/>
-          <a:lstStyle/>
-          <a:p>
-            <a:pPr indent="0" marL="0">
-              <a:buNone/>
-            </a:pPr>
-            <a:r>
-              <a:rPr lang="en-US" sz="900" dirty="0">
-                <a:solidFill>
-                  <a:srgbClr val="333333"/>
+                  <a:srgbClr val="1A1A2E"/>
                 </a:solidFill>
                 <a:latin typeface="Calibri" pitchFamily="34" charset="0"/>
                 <a:ea typeface="Calibri" pitchFamily="34" charset="-122"/>
                 <a:cs typeface="Calibri" pitchFamily="34" charset="-120"/>
               </a:rPr>
-              <a:t>Montre la LOGIQUE : actions + décisions + flux</a:t>
-            </a:r>
-            <a:endParaRPr lang="en-US" sz="900" dirty="0"/>
-          </a:p>
-        </p:txBody>
-      </p:sp>
-      <p:sp>
-        <p:nvSpPr>
-          <p:cNvPr id="25" name="Shape 23"/>
-          <p:cNvSpPr/>
-          <p:nvPr/>
-        </p:nvSpPr>
-        <p:spPr>
-          <a:xfrm>
-            <a:off x="457200" y="3474720"/>
-            <a:ext cx="2286000" cy="475488"/>
-          </a:xfrm>
-          <a:prstGeom prst="rect">
-            <a:avLst/>
-          </a:prstGeom>
-          <a:solidFill>
-            <a:srgbClr val="F0F0F0"/>
-          </a:solidFill>
-          <a:ln/>
-        </p:spPr>
-      </p:sp>
-      <p:sp>
-        <p:nvSpPr>
-          <p:cNvPr id="26" name="Text 24"/>
-          <p:cNvSpPr/>
-          <p:nvPr/>
-        </p:nvSpPr>
-        <p:spPr>
-          <a:xfrm>
-            <a:off x="548640" y="3474720"/>
-            <a:ext cx="2103120" cy="475488"/>
+              <a:t>6. Dictionnaire technique des 9 tables</a:t>
+            </a:r>
+            <a:endParaRPr lang="en-US" sz="1100" dirty="0"/>
+          </a:p>
+        </p:txBody>
+      </p:sp>
+      <p:sp>
+        <p:nvSpPr>
+          <p:cNvPr id="22" name="Shape 20"/>
+          <p:cNvSpPr/>
+          <p:nvPr/>
+        </p:nvSpPr>
+        <p:spPr>
+          <a:xfrm>
+            <a:off x="457200" y="3886200"/>
+            <a:ext cx="8229600" cy="475488"/>
+          </a:xfrm>
+          <a:prstGeom prst="rect">
+            <a:avLst/>
+          </a:prstGeom>
+          <a:solidFill>
+            <a:srgbClr val="FFFFFF"/>
+          </a:solidFill>
+          <a:ln/>
+        </p:spPr>
+      </p:sp>
+      <p:sp>
+        <p:nvSpPr>
+          <p:cNvPr id="23" name="Shape 21"/>
+          <p:cNvSpPr/>
+          <p:nvPr/>
+        </p:nvSpPr>
+        <p:spPr>
+          <a:xfrm>
+            <a:off x="457200" y="3886200"/>
+            <a:ext cx="45720" cy="475488"/>
+          </a:xfrm>
+          <a:prstGeom prst="rect">
+            <a:avLst/>
+          </a:prstGeom>
+          <a:solidFill>
+            <a:srgbClr val="6A1B9A"/>
+          </a:solidFill>
+          <a:ln/>
+        </p:spPr>
+      </p:sp>
+      <p:sp>
+        <p:nvSpPr>
+          <p:cNvPr id="24" name="Text 22"/>
+          <p:cNvSpPr/>
+          <p:nvPr/>
+        </p:nvSpPr>
+        <p:spPr>
+          <a:xfrm>
+            <a:off x="640080" y="3886200"/>
+            <a:ext cx="7863840" cy="475488"/>
           </a:xfrm>
           <a:prstGeom prst="rect">
             <a:avLst/>
@@ -6829,194 +8110,17 @@
               <a:buNone/>
             </a:pPr>
             <a:r>
-              <a:rPr lang="en-US" sz="900" b="1" dirty="0">
+              <a:rPr lang="en-US" sz="1100" dirty="0">
                 <a:solidFill>
-                  <a:srgbClr val="4A0072"/>
-                </a:solidFill>
-                <a:latin typeface="Trebuchet MS" pitchFamily="34" charset="0"/>
-                <a:ea typeface="Trebuchet MS" pitchFamily="34" charset="-122"/>
-                <a:cs typeface="Trebuchet MS" pitchFamily="34" charset="-120"/>
-              </a:rPr>
-              <a:t>Symboles DFD</a:t>
-            </a:r>
-            <a:endParaRPr lang="en-US" sz="900" dirty="0"/>
-          </a:p>
-        </p:txBody>
-      </p:sp>
-      <p:sp>
-        <p:nvSpPr>
-          <p:cNvPr id="27" name="Shape 25"/>
-          <p:cNvSpPr/>
-          <p:nvPr/>
-        </p:nvSpPr>
-        <p:spPr>
-          <a:xfrm>
-            <a:off x="2743200" y="3474720"/>
-            <a:ext cx="5943600" cy="475488"/>
-          </a:xfrm>
-          <a:prstGeom prst="rect">
-            <a:avLst/>
-          </a:prstGeom>
-          <a:solidFill>
-            <a:srgbClr val="F0F0F0"/>
-          </a:solidFill>
-          <a:ln/>
-        </p:spPr>
-      </p:sp>
-      <p:sp>
-        <p:nvSpPr>
-          <p:cNvPr id="28" name="Text 26"/>
-          <p:cNvSpPr/>
-          <p:nvPr/>
-        </p:nvSpPr>
-        <p:spPr>
-          <a:xfrm>
-            <a:off x="2834640" y="3474720"/>
-            <a:ext cx="5760720" cy="475488"/>
-          </a:xfrm>
-          <a:prstGeom prst="rect">
-            <a:avLst/>
-          </a:prstGeom>
-          <a:noFill/>
-          <a:ln/>
-        </p:spPr>
-        <p:txBody>
-          <a:bodyPr wrap="square" lIns="0" tIns="0" rIns="0" bIns="0" rtlCol="0" anchor="ctr"/>
-          <a:lstStyle/>
-          <a:p>
-            <a:pPr indent="0" marL="0">
-              <a:buNone/>
-            </a:pPr>
-            <a:r>
-              <a:rPr lang="en-US" sz="900" dirty="0">
-                <a:solidFill>
-                  <a:srgbClr val="333333"/>
+                  <a:srgbClr val="1A1A2E"/>
                 </a:solidFill>
                 <a:latin typeface="Calibri" pitchFamily="34" charset="0"/>
                 <a:ea typeface="Calibri" pitchFamily="34" charset="-122"/>
                 <a:cs typeface="Calibri" pitchFamily="34" charset="-120"/>
               </a:rPr>
-              <a:t>Cercle=processus, rectangle ouvert=stockage, fermé=externe, flèche=flux</a:t>
-            </a:r>
-            <a:endParaRPr lang="en-US" sz="900" dirty="0"/>
-          </a:p>
-        </p:txBody>
-      </p:sp>
-      <p:sp>
-        <p:nvSpPr>
-          <p:cNvPr id="29" name="Shape 27"/>
-          <p:cNvSpPr/>
-          <p:nvPr/>
-        </p:nvSpPr>
-        <p:spPr>
-          <a:xfrm>
-            <a:off x="457200" y="3977640"/>
-            <a:ext cx="2286000" cy="475488"/>
-          </a:xfrm>
-          <a:prstGeom prst="rect">
-            <a:avLst/>
-          </a:prstGeom>
-          <a:solidFill>
-            <a:srgbClr val="F3E5F5"/>
-          </a:solidFill>
-          <a:ln/>
-        </p:spPr>
-      </p:sp>
-      <p:sp>
-        <p:nvSpPr>
-          <p:cNvPr id="30" name="Text 28"/>
-          <p:cNvSpPr/>
-          <p:nvPr/>
-        </p:nvSpPr>
-        <p:spPr>
-          <a:xfrm>
-            <a:off x="548640" y="3977640"/>
-            <a:ext cx="2103120" cy="475488"/>
-          </a:xfrm>
-          <a:prstGeom prst="rect">
-            <a:avLst/>
-          </a:prstGeom>
-          <a:noFill/>
-          <a:ln/>
-        </p:spPr>
-        <p:txBody>
-          <a:bodyPr wrap="square" lIns="0" tIns="0" rIns="0" bIns="0" rtlCol="0" anchor="ctr"/>
-          <a:lstStyle/>
-          <a:p>
-            <a:pPr indent="0" marL="0">
-              <a:buNone/>
-            </a:pPr>
-            <a:r>
-              <a:rPr lang="en-US" sz="900" b="1" dirty="0">
-                <a:solidFill>
-                  <a:srgbClr val="4A0072"/>
-                </a:solidFill>
-                <a:latin typeface="Trebuchet MS" pitchFamily="34" charset="0"/>
-                <a:ea typeface="Trebuchet MS" pitchFamily="34" charset="-122"/>
-                <a:cs typeface="Trebuchet MS" pitchFamily="34" charset="-120"/>
-              </a:rPr>
-              <a:t>Dict. technique</a:t>
-            </a:r>
-            <a:endParaRPr lang="en-US" sz="900" dirty="0"/>
-          </a:p>
-        </p:txBody>
-      </p:sp>
-      <p:sp>
-        <p:nvSpPr>
-          <p:cNvPr id="31" name="Shape 29"/>
-          <p:cNvSpPr/>
-          <p:nvPr/>
-        </p:nvSpPr>
-        <p:spPr>
-          <a:xfrm>
-            <a:off x="2743200" y="3977640"/>
-            <a:ext cx="5943600" cy="475488"/>
-          </a:xfrm>
-          <a:prstGeom prst="rect">
-            <a:avLst/>
-          </a:prstGeom>
-          <a:solidFill>
-            <a:srgbClr val="F3E5F5"/>
-          </a:solidFill>
-          <a:ln/>
-        </p:spPr>
-      </p:sp>
-      <p:sp>
-        <p:nvSpPr>
-          <p:cNvPr id="32" name="Text 30"/>
-          <p:cNvSpPr/>
-          <p:nvPr/>
-        </p:nvSpPr>
-        <p:spPr>
-          <a:xfrm>
-            <a:off x="2834640" y="3977640"/>
-            <a:ext cx="5760720" cy="475488"/>
-          </a:xfrm>
-          <a:prstGeom prst="rect">
-            <a:avLst/>
-          </a:prstGeom>
-          <a:noFill/>
-          <a:ln/>
-        </p:spPr>
-        <p:txBody>
-          <a:bodyPr wrap="square" lIns="0" tIns="0" rIns="0" bIns="0" rtlCol="0" anchor="ctr"/>
-          <a:lstStyle/>
-          <a:p>
-            <a:pPr indent="0" marL="0">
-              <a:buNone/>
-            </a:pPr>
-            <a:r>
-              <a:rPr lang="en-US" sz="900" dirty="0">
-                <a:solidFill>
-                  <a:srgbClr val="333333"/>
-                </a:solidFill>
-                <a:latin typeface="Calibri" pitchFamily="34" charset="0"/>
-                <a:ea typeface="Calibri" pitchFamily="34" charset="-122"/>
-                <a:cs typeface="Calibri" pitchFamily="34" charset="-120"/>
-              </a:rPr>
-              <a:t>Table par table : colonne, type, contraintes, FK, description</a:t>
-            </a:r>
-            <a:endParaRPr lang="en-US" sz="900" dirty="0"/>
+              <a:t>DEFI : documenter l'architecture (serveur, clients, reseau, backup)</a:t>
+            </a:r>
+            <a:endParaRPr lang="en-US" sz="1100" dirty="0"/>
           </a:p>
         </p:txBody>
       </p:sp>
